--- a/output/SINAM.pptx
+++ b/output/SINAM.pptx
@@ -11,7 +11,7 @@
     <p:handoutMasterId r:id="rId4"/>
   </p:handoutMasterIdLst>
   <p:sldIdLst>
-    <p:sldId id="267" r:id="rId2"/>
+    <p:sldId id="268" r:id="rId2"/>
   </p:sldIdLst>
   <p:sldSz cx="12192000" cy="6858000"/>
   <p:notesSz cx="6858000" cy="9144000"/>
@@ -115,11 +115,8 @@
       <p14:sectionLst xmlns:p14="http://schemas.microsoft.com/office/powerpoint/2010/main">
         <p14:section name="기본 구역" id="{F3FE6A5C-59B2-4692-9664-566D95B7BE3A}">
           <p14:sldIdLst>
-            <p14:sldId id="267"/>
+            <p14:sldId id="268"/>
           </p14:sldIdLst>
-        </p14:section>
-        <p14:section name="삭제" id="{09B5B7D5-40DF-498B-B0A9-EB12FF129D4C}">
-          <p14:sldIdLst/>
         </p14:section>
       </p14:sectionLst>
     </p:ext>
@@ -169,878 +166,671 @@
 <file path=ppt/revisionInfo.xml><?xml version="1.0" encoding="utf-8"?>
 <p1510:revInfo xmlns:a="http://schemas.openxmlformats.org/drawingml/2006/main" xmlns:r="http://schemas.openxmlformats.org/officeDocument/2006/relationships" xmlns:p1510="http://schemas.microsoft.com/office/powerpoint/2015/10/main">
   <p1510:revLst>
-    <p1510:client id="{D0CCF49E-208F-4D3D-8C17-5BFCDAC3890C}" v="1" dt="2026-07-09T01:06:34.806"/>
+    <p1510:client id="{6C4A0B7B-7532-452B-BDA1-E7D84C1B5AF4}" v="78" dt="2026-07-21T02:07:26.418"/>
   </p1510:revLst>
 </p1510:revInfo>
 </file>
 
-<file path=ppt/changesInfos/changesInfo1.xml><?xml version="1.0" encoding="utf-8"?>
-<pc:chgInfo xmlns:a="http://schemas.openxmlformats.org/drawingml/2006/main" xmlns:r="http://schemas.openxmlformats.org/officeDocument/2006/relationships" xmlns:ac="http://schemas.microsoft.com/office/drawing/2013/main/command" xmlns:pc="http://schemas.microsoft.com/office/powerpoint/2013/main/command">
-  <pc:docChgLst>
-    <pc:chgData name="김용일(Kim, Yongil) / 건축·주택마케팅팀(yikim2@gsenc.com)" userId="ec9d7f48-810d-4a84-b2c9-e69fe597daf0" providerId="ADAL" clId="{19EE22C1-D5AF-411B-8525-92EB131707F2}"/>
-    <pc:docChg chg="undo custSel addSld modSld addSection modSection">
-      <pc:chgData name="김용일(Kim, Yongil) / 건축·주택마케팅팀(yikim2@gsenc.com)" userId="ec9d7f48-810d-4a84-b2c9-e69fe597daf0" providerId="ADAL" clId="{19EE22C1-D5AF-411B-8525-92EB131707F2}" dt="2026-07-06T02:03:07.603" v="4664" actId="1037"/>
-      <pc:docMkLst>
-        <pc:docMk/>
-      </pc:docMkLst>
-      <pc:sldChg chg="addSp delSp modSp mod">
-        <pc:chgData name="김용일(Kim, Yongil) / 건축·주택마케팅팀(yikim2@gsenc.com)" userId="ec9d7f48-810d-4a84-b2c9-e69fe597daf0" providerId="ADAL" clId="{19EE22C1-D5AF-411B-8525-92EB131707F2}" dt="2026-07-01T04:11:09.896" v="1569" actId="478"/>
-        <pc:sldMkLst>
-          <pc:docMk/>
-          <pc:sldMk cId="1863897233" sldId="266"/>
-        </pc:sldMkLst>
-        <pc:spChg chg="add mod">
-          <ac:chgData name="김용일(Kim, Yongil) / 건축·주택마케팅팀(yikim2@gsenc.com)" userId="ec9d7f48-810d-4a84-b2c9-e69fe597daf0" providerId="ADAL" clId="{19EE22C1-D5AF-411B-8525-92EB131707F2}" dt="2026-07-01T04:11:07.825" v="1568" actId="571"/>
-          <ac:spMkLst>
-            <pc:docMk/>
-            <pc:sldMk cId="1863897233" sldId="266"/>
-            <ac:spMk id="5" creationId="{BDC980DE-F7BA-C109-7B0E-327FEB58624A}"/>
-          </ac:spMkLst>
-        </pc:spChg>
-        <pc:spChg chg="add mod">
-          <ac:chgData name="김용일(Kim, Yongil) / 건축·주택마케팅팀(yikim2@gsenc.com)" userId="ec9d7f48-810d-4a84-b2c9-e69fe597daf0" providerId="ADAL" clId="{19EE22C1-D5AF-411B-8525-92EB131707F2}" dt="2026-07-01T04:11:07.825" v="1568" actId="571"/>
-          <ac:spMkLst>
-            <pc:docMk/>
-            <pc:sldMk cId="1863897233" sldId="266"/>
-            <ac:spMk id="67" creationId="{387F4D9D-D447-6886-5894-4C9CEF823AF5}"/>
-          </ac:spMkLst>
-        </pc:spChg>
-      </pc:sldChg>
-      <pc:sldChg chg="addSp delSp modSp mod">
-        <pc:chgData name="김용일(Kim, Yongil) / 건축·주택마케팅팀(yikim2@gsenc.com)" userId="ec9d7f48-810d-4a84-b2c9-e69fe597daf0" providerId="ADAL" clId="{19EE22C1-D5AF-411B-8525-92EB131707F2}" dt="2026-07-06T02:03:07.603" v="4664" actId="1037"/>
-        <pc:sldMkLst>
-          <pc:docMk/>
-          <pc:sldMk cId="3177191812" sldId="267"/>
-        </pc:sldMkLst>
-        <pc:spChg chg="mod">
-          <ac:chgData name="김용일(Kim, Yongil) / 건축·주택마케팅팀(yikim2@gsenc.com)" userId="ec9d7f48-810d-4a84-b2c9-e69fe597daf0" providerId="ADAL" clId="{19EE22C1-D5AF-411B-8525-92EB131707F2}" dt="2026-07-01T05:18:21.105" v="2716" actId="1076"/>
-          <ac:spMkLst>
-            <pc:docMk/>
-            <pc:sldMk cId="3177191812" sldId="267"/>
-            <ac:spMk id="2" creationId="{E59F1DD0-6AC6-4BA6-1E0A-7836CA5BE981}"/>
-          </ac:spMkLst>
-        </pc:spChg>
-        <pc:spChg chg="mod">
-          <ac:chgData name="김용일(Kim, Yongil) / 건축·주택마케팅팀(yikim2@gsenc.com)" userId="ec9d7f48-810d-4a84-b2c9-e69fe597daf0" providerId="ADAL" clId="{19EE22C1-D5AF-411B-8525-92EB131707F2}" dt="2026-07-01T05:18:21.105" v="2716" actId="1076"/>
-          <ac:spMkLst>
-            <pc:docMk/>
-            <pc:sldMk cId="3177191812" sldId="267"/>
-            <ac:spMk id="3" creationId="{5C180B39-CE07-AFCD-77F0-238020095264}"/>
-          </ac:spMkLst>
-        </pc:spChg>
-        <pc:spChg chg="add mod">
-          <ac:chgData name="김용일(Kim, Yongil) / 건축·주택마케팅팀(yikim2@gsenc.com)" userId="ec9d7f48-810d-4a84-b2c9-e69fe597daf0" providerId="ADAL" clId="{19EE22C1-D5AF-411B-8525-92EB131707F2}" dt="2026-07-03T01:33:38.427" v="4369" actId="20577"/>
-          <ac:spMkLst>
-            <pc:docMk/>
-            <pc:sldMk cId="3177191812" sldId="267"/>
-            <ac:spMk id="6" creationId="{2BDA89C4-DAF3-4D73-1853-EDFA8801E55B}"/>
-          </ac:spMkLst>
-        </pc:spChg>
-        <pc:spChg chg="del mod">
-          <ac:chgData name="김용일(Kim, Yongil) / 건축·주택마케팅팀(yikim2@gsenc.com)" userId="ec9d7f48-810d-4a84-b2c9-e69fe597daf0" providerId="ADAL" clId="{19EE22C1-D5AF-411B-8525-92EB131707F2}" dt="2026-07-06T01:44:25.099" v="4479" actId="478"/>
-          <ac:spMkLst>
-            <pc:docMk/>
-            <pc:sldMk cId="3177191812" sldId="267"/>
-            <ac:spMk id="7" creationId="{3ABB7260-3AE7-BBEE-AA98-89B15147EFA3}"/>
-          </ac:spMkLst>
-        </pc:spChg>
-        <pc:spChg chg="add mod">
-          <ac:chgData name="김용일(Kim, Yongil) / 건축·주택마케팅팀(yikim2@gsenc.com)" userId="ec9d7f48-810d-4a84-b2c9-e69fe597daf0" providerId="ADAL" clId="{19EE22C1-D5AF-411B-8525-92EB131707F2}" dt="2026-07-06T01:45:37.397" v="4494" actId="14100"/>
-          <ac:spMkLst>
-            <pc:docMk/>
-            <pc:sldMk cId="3177191812" sldId="267"/>
-            <ac:spMk id="8" creationId="{C3576BEE-1212-CF88-4151-9377221C792D}"/>
-          </ac:spMkLst>
-        </pc:spChg>
-        <pc:spChg chg="mod ord">
-          <ac:chgData name="김용일(Kim, Yongil) / 건축·주택마케팅팀(yikim2@gsenc.com)" userId="ec9d7f48-810d-4a84-b2c9-e69fe597daf0" providerId="ADAL" clId="{19EE22C1-D5AF-411B-8525-92EB131707F2}" dt="2026-07-06T01:42:29.200" v="4464" actId="14100"/>
-          <ac:spMkLst>
-            <pc:docMk/>
-            <pc:sldMk cId="3177191812" sldId="267"/>
-            <ac:spMk id="10" creationId="{01DA7BEF-30D7-53AE-5176-39FFE1A89199}"/>
-          </ac:spMkLst>
-        </pc:spChg>
-        <pc:spChg chg="mod">
-          <ac:chgData name="김용일(Kim, Yongil) / 건축·주택마케팅팀(yikim2@gsenc.com)" userId="ec9d7f48-810d-4a84-b2c9-e69fe597daf0" providerId="ADAL" clId="{19EE22C1-D5AF-411B-8525-92EB131707F2}" dt="2026-07-06T01:41:29.384" v="4456" actId="207"/>
-          <ac:spMkLst>
-            <pc:docMk/>
-            <pc:sldMk cId="3177191812" sldId="267"/>
-            <ac:spMk id="12" creationId="{0597C3F8-8124-354F-0B9E-F8E5F1C3697B}"/>
-          </ac:spMkLst>
-        </pc:spChg>
-        <pc:spChg chg="mod">
-          <ac:chgData name="김용일(Kim, Yongil) / 건축·주택마케팅팀(yikim2@gsenc.com)" userId="ec9d7f48-810d-4a84-b2c9-e69fe597daf0" providerId="ADAL" clId="{19EE22C1-D5AF-411B-8525-92EB131707F2}" dt="2026-07-01T06:59:52.278" v="2950" actId="20577"/>
-          <ac:spMkLst>
-            <pc:docMk/>
-            <pc:sldMk cId="3177191812" sldId="267"/>
-            <ac:spMk id="15" creationId="{C47D4CD6-3295-6A3B-2AD8-54D7FC37A7DF}"/>
-          </ac:spMkLst>
-        </pc:spChg>
-        <pc:spChg chg="mod">
-          <ac:chgData name="김용일(Kim, Yongil) / 건축·주택마케팅팀(yikim2@gsenc.com)" userId="ec9d7f48-810d-4a84-b2c9-e69fe597daf0" providerId="ADAL" clId="{19EE22C1-D5AF-411B-8525-92EB131707F2}" dt="2026-07-03T01:33:01.718" v="4337" actId="20577"/>
-          <ac:spMkLst>
-            <pc:docMk/>
-            <pc:sldMk cId="3177191812" sldId="267"/>
-            <ac:spMk id="20" creationId="{78AF0ED8-715E-A7AC-EDB2-7BAFAA3949AA}"/>
-          </ac:spMkLst>
-        </pc:spChg>
-        <pc:spChg chg="mod">
-          <ac:chgData name="김용일(Kim, Yongil) / 건축·주택마케팅팀(yikim2@gsenc.com)" userId="ec9d7f48-810d-4a84-b2c9-e69fe597daf0" providerId="ADAL" clId="{19EE22C1-D5AF-411B-8525-92EB131707F2}" dt="2026-07-01T05:18:28.120" v="2717" actId="1076"/>
-          <ac:spMkLst>
-            <pc:docMk/>
-            <pc:sldMk cId="3177191812" sldId="267"/>
-            <ac:spMk id="21" creationId="{53DEF213-F8BA-1A66-350F-45247B9426C4}"/>
-          </ac:spMkLst>
-        </pc:spChg>
-        <pc:spChg chg="mod">
-          <ac:chgData name="김용일(Kim, Yongil) / 건축·주택마케팅팀(yikim2@gsenc.com)" userId="ec9d7f48-810d-4a84-b2c9-e69fe597daf0" providerId="ADAL" clId="{19EE22C1-D5AF-411B-8525-92EB131707F2}" dt="2026-07-01T05:18:28.120" v="2717" actId="1076"/>
-          <ac:spMkLst>
-            <pc:docMk/>
-            <pc:sldMk cId="3177191812" sldId="267"/>
-            <ac:spMk id="22" creationId="{C9ACE0F6-03CD-1A43-8F85-6DB6BF17A887}"/>
-          </ac:spMkLst>
-        </pc:spChg>
-        <pc:spChg chg="add mod">
-          <ac:chgData name="김용일(Kim, Yongil) / 건축·주택마케팅팀(yikim2@gsenc.com)" userId="ec9d7f48-810d-4a84-b2c9-e69fe597daf0" providerId="ADAL" clId="{19EE22C1-D5AF-411B-8525-92EB131707F2}" dt="2026-07-06T01:45:37.397" v="4494" actId="14100"/>
-          <ac:spMkLst>
-            <pc:docMk/>
-            <pc:sldMk cId="3177191812" sldId="267"/>
-            <ac:spMk id="24" creationId="{E5BC4A06-2CE4-BCA9-4E15-00C93CCC4228}"/>
-          </ac:spMkLst>
-        </pc:spChg>
-        <pc:spChg chg="add del mod">
-          <ac:chgData name="김용일(Kim, Yongil) / 건축·주택마케팅팀(yikim2@gsenc.com)" userId="ec9d7f48-810d-4a84-b2c9-e69fe597daf0" providerId="ADAL" clId="{19EE22C1-D5AF-411B-8525-92EB131707F2}" dt="2026-07-01T05:21:03.946" v="2743" actId="1076"/>
-          <ac:spMkLst>
-            <pc:docMk/>
-            <pc:sldMk cId="3177191812" sldId="267"/>
-            <ac:spMk id="25" creationId="{3481BC6F-8525-D5E4-E998-D451D8E5EFB6}"/>
-          </ac:spMkLst>
-        </pc:spChg>
-        <pc:spChg chg="mod">
-          <ac:chgData name="김용일(Kim, Yongil) / 건축·주택마케팅팀(yikim2@gsenc.com)" userId="ec9d7f48-810d-4a84-b2c9-e69fe597daf0" providerId="ADAL" clId="{19EE22C1-D5AF-411B-8525-92EB131707F2}" dt="2026-07-06T01:57:15.073" v="4621" actId="1076"/>
-          <ac:spMkLst>
-            <pc:docMk/>
-            <pc:sldMk cId="3177191812" sldId="267"/>
-            <ac:spMk id="27" creationId="{FD16CC78-5F6B-DEAA-FE2B-53246F92CD9F}"/>
-          </ac:spMkLst>
-        </pc:spChg>
-        <pc:spChg chg="add del mod">
-          <ac:chgData name="김용일(Kim, Yongil) / 건축·주택마케팅팀(yikim2@gsenc.com)" userId="ec9d7f48-810d-4a84-b2c9-e69fe597daf0" providerId="ADAL" clId="{19EE22C1-D5AF-411B-8525-92EB131707F2}" dt="2026-07-06T01:46:31.739" v="4501" actId="478"/>
-          <ac:spMkLst>
-            <pc:docMk/>
-            <pc:sldMk cId="3177191812" sldId="267"/>
-            <ac:spMk id="31" creationId="{A51F91A8-C1AF-7135-6BF1-CD93D63B50AF}"/>
-          </ac:spMkLst>
-        </pc:spChg>
-        <pc:spChg chg="add mod">
-          <ac:chgData name="김용일(Kim, Yongil) / 건축·주택마케팅팀(yikim2@gsenc.com)" userId="ec9d7f48-810d-4a84-b2c9-e69fe597daf0" providerId="ADAL" clId="{19EE22C1-D5AF-411B-8525-92EB131707F2}" dt="2026-07-01T07:01:50.044" v="2972" actId="1076"/>
-          <ac:spMkLst>
-            <pc:docMk/>
-            <pc:sldMk cId="3177191812" sldId="267"/>
-            <ac:spMk id="32" creationId="{1B893BED-29B2-1D21-79FF-5A7DB7D67447}"/>
-          </ac:spMkLst>
-        </pc:spChg>
-        <pc:spChg chg="add mod">
-          <ac:chgData name="김용일(Kim, Yongil) / 건축·주택마케팅팀(yikim2@gsenc.com)" userId="ec9d7f48-810d-4a84-b2c9-e69fe597daf0" providerId="ADAL" clId="{19EE22C1-D5AF-411B-8525-92EB131707F2}" dt="2026-07-01T07:01:50.044" v="2972" actId="1076"/>
-          <ac:spMkLst>
-            <pc:docMk/>
-            <pc:sldMk cId="3177191812" sldId="267"/>
-            <ac:spMk id="33" creationId="{68566514-F999-EFF2-A65A-6128A052C452}"/>
-          </ac:spMkLst>
-        </pc:spChg>
-        <pc:spChg chg="mod">
-          <ac:chgData name="김용일(Kim, Yongil) / 건축·주택마케팅팀(yikim2@gsenc.com)" userId="ec9d7f48-810d-4a84-b2c9-e69fe597daf0" providerId="ADAL" clId="{19EE22C1-D5AF-411B-8525-92EB131707F2}" dt="2026-07-03T01:33:25.547" v="4359" actId="14100"/>
-          <ac:spMkLst>
-            <pc:docMk/>
-            <pc:sldMk cId="3177191812" sldId="267"/>
-            <ac:spMk id="37" creationId="{A943D884-5D41-5A3B-48D1-D25B106E381D}"/>
-          </ac:spMkLst>
-        </pc:spChg>
-        <pc:spChg chg="add mod">
-          <ac:chgData name="김용일(Kim, Yongil) / 건축·주택마케팅팀(yikim2@gsenc.com)" userId="ec9d7f48-810d-4a84-b2c9-e69fe597daf0" providerId="ADAL" clId="{19EE22C1-D5AF-411B-8525-92EB131707F2}" dt="2026-07-01T05:01:20.299" v="2629" actId="20577"/>
-          <ac:spMkLst>
-            <pc:docMk/>
-            <pc:sldMk cId="3177191812" sldId="267"/>
-            <ac:spMk id="46" creationId="{5278AB17-DC0B-193B-85B7-0C9A02818C71}"/>
-          </ac:spMkLst>
-        </pc:spChg>
-        <pc:spChg chg="mod">
-          <ac:chgData name="김용일(Kim, Yongil) / 건축·주택마케팅팀(yikim2@gsenc.com)" userId="ec9d7f48-810d-4a84-b2c9-e69fe597daf0" providerId="ADAL" clId="{19EE22C1-D5AF-411B-8525-92EB131707F2}" dt="2026-07-06T01:43:43.038" v="4468" actId="1076"/>
-          <ac:spMkLst>
-            <pc:docMk/>
-            <pc:sldMk cId="3177191812" sldId="267"/>
-            <ac:spMk id="50" creationId="{3682D7C8-E9DA-596D-0F1D-13F9F8809EE9}"/>
-          </ac:spMkLst>
-        </pc:spChg>
-        <pc:spChg chg="mod">
-          <ac:chgData name="김용일(Kim, Yongil) / 건축·주택마케팅팀(yikim2@gsenc.com)" userId="ec9d7f48-810d-4a84-b2c9-e69fe597daf0" providerId="ADAL" clId="{19EE22C1-D5AF-411B-8525-92EB131707F2}" dt="2026-07-06T01:43:43.038" v="4468" actId="1076"/>
-          <ac:spMkLst>
-            <pc:docMk/>
-            <pc:sldMk cId="3177191812" sldId="267"/>
-            <ac:spMk id="51" creationId="{DA4E52E1-ECC2-433D-2356-FD974E3F98A2}"/>
-          </ac:spMkLst>
-        </pc:spChg>
-        <pc:spChg chg="mod">
-          <ac:chgData name="김용일(Kim, Yongil) / 건축·주택마케팅팀(yikim2@gsenc.com)" userId="ec9d7f48-810d-4a84-b2c9-e69fe597daf0" providerId="ADAL" clId="{19EE22C1-D5AF-411B-8525-92EB131707F2}" dt="2026-07-01T05:05:55.300" v="2651"/>
-          <ac:spMkLst>
-            <pc:docMk/>
-            <pc:sldMk cId="3177191812" sldId="267"/>
-            <ac:spMk id="52" creationId="{07B53FFF-F5E8-0BCA-F433-1EA590C16577}"/>
-          </ac:spMkLst>
-        </pc:spChg>
-        <pc:spChg chg="mod">
-          <ac:chgData name="김용일(Kim, Yongil) / 건축·주택마케팅팀(yikim2@gsenc.com)" userId="ec9d7f48-810d-4a84-b2c9-e69fe597daf0" providerId="ADAL" clId="{19EE22C1-D5AF-411B-8525-92EB131707F2}" dt="2026-07-01T05:05:55.300" v="2651"/>
-          <ac:spMkLst>
-            <pc:docMk/>
-            <pc:sldMk cId="3177191812" sldId="267"/>
-            <ac:spMk id="54" creationId="{2A13C267-FF7D-7951-EC57-32EB496B79B4}"/>
-          </ac:spMkLst>
-        </pc:spChg>
-        <pc:spChg chg="mod">
-          <ac:chgData name="김용일(Kim, Yongil) / 건축·주택마케팅팀(yikim2@gsenc.com)" userId="ec9d7f48-810d-4a84-b2c9-e69fe597daf0" providerId="ADAL" clId="{19EE22C1-D5AF-411B-8525-92EB131707F2}" dt="2026-07-01T05:05:55.300" v="2651"/>
-          <ac:spMkLst>
-            <pc:docMk/>
-            <pc:sldMk cId="3177191812" sldId="267"/>
-            <ac:spMk id="55" creationId="{88BC0F27-C0C6-6C77-C11D-9A860B25A895}"/>
-          </ac:spMkLst>
-        </pc:spChg>
-        <pc:spChg chg="mod">
-          <ac:chgData name="김용일(Kim, Yongil) / 건축·주택마케팅팀(yikim2@gsenc.com)" userId="ec9d7f48-810d-4a84-b2c9-e69fe597daf0" providerId="ADAL" clId="{19EE22C1-D5AF-411B-8525-92EB131707F2}" dt="2026-07-01T05:05:55.300" v="2651"/>
-          <ac:spMkLst>
-            <pc:docMk/>
-            <pc:sldMk cId="3177191812" sldId="267"/>
-            <ac:spMk id="56" creationId="{7529C4B5-CB75-884D-7A3A-F0F00A370F06}"/>
-          </ac:spMkLst>
-        </pc:spChg>
-        <pc:spChg chg="mod">
-          <ac:chgData name="김용일(Kim, Yongil) / 건축·주택마케팅팀(yikim2@gsenc.com)" userId="ec9d7f48-810d-4a84-b2c9-e69fe597daf0" providerId="ADAL" clId="{19EE22C1-D5AF-411B-8525-92EB131707F2}" dt="2026-07-01T05:05:55.300" v="2651"/>
-          <ac:spMkLst>
-            <pc:docMk/>
-            <pc:sldMk cId="3177191812" sldId="267"/>
-            <ac:spMk id="57" creationId="{925977BB-B470-DAEE-C8DE-2652FF00DF23}"/>
-          </ac:spMkLst>
-        </pc:spChg>
-        <pc:spChg chg="mod">
-          <ac:chgData name="김용일(Kim, Yongil) / 건축·주택마케팅팀(yikim2@gsenc.com)" userId="ec9d7f48-810d-4a84-b2c9-e69fe597daf0" providerId="ADAL" clId="{19EE22C1-D5AF-411B-8525-92EB131707F2}" dt="2026-07-01T05:05:55.300" v="2651"/>
-          <ac:spMkLst>
-            <pc:docMk/>
-            <pc:sldMk cId="3177191812" sldId="267"/>
-            <ac:spMk id="58" creationId="{D8A85053-3E0E-42F8-0CB9-ECC9454DB48C}"/>
-          </ac:spMkLst>
-        </pc:spChg>
-        <pc:spChg chg="add mod">
-          <ac:chgData name="김용일(Kim, Yongil) / 건축·주택마케팅팀(yikim2@gsenc.com)" userId="ec9d7f48-810d-4a84-b2c9-e69fe597daf0" providerId="ADAL" clId="{19EE22C1-D5AF-411B-8525-92EB131707F2}" dt="2026-07-01T07:01:50.044" v="2972" actId="1076"/>
-          <ac:spMkLst>
-            <pc:docMk/>
-            <pc:sldMk cId="3177191812" sldId="267"/>
-            <ac:spMk id="61" creationId="{2BE48DD5-F9D9-6F27-B971-45B3D7F6D3D8}"/>
-          </ac:spMkLst>
-        </pc:spChg>
-        <pc:spChg chg="add mod">
-          <ac:chgData name="김용일(Kim, Yongil) / 건축·주택마케팅팀(yikim2@gsenc.com)" userId="ec9d7f48-810d-4a84-b2c9-e69fe597daf0" providerId="ADAL" clId="{19EE22C1-D5AF-411B-8525-92EB131707F2}" dt="2026-07-01T07:01:50.044" v="2972" actId="1076"/>
-          <ac:spMkLst>
-            <pc:docMk/>
-            <pc:sldMk cId="3177191812" sldId="267"/>
-            <ac:spMk id="62" creationId="{41F227E8-9B0D-569B-AE25-50C619CE93D6}"/>
-          </ac:spMkLst>
-        </pc:spChg>
-        <pc:spChg chg="mod">
-          <ac:chgData name="김용일(Kim, Yongil) / 건축·주택마케팅팀(yikim2@gsenc.com)" userId="ec9d7f48-810d-4a84-b2c9-e69fe597daf0" providerId="ADAL" clId="{19EE22C1-D5AF-411B-8525-92EB131707F2}" dt="2026-07-01T05:18:08.099" v="2715" actId="14100"/>
-          <ac:spMkLst>
-            <pc:docMk/>
-            <pc:sldMk cId="3177191812" sldId="267"/>
-            <ac:spMk id="63" creationId="{D00CE9DC-14EB-BC07-8777-904BED94EB6B}"/>
-          </ac:spMkLst>
-        </pc:spChg>
-        <pc:spChg chg="mod">
-          <ac:chgData name="김용일(Kim, Yongil) / 건축·주택마케팅팀(yikim2@gsenc.com)" userId="ec9d7f48-810d-4a84-b2c9-e69fe597daf0" providerId="ADAL" clId="{19EE22C1-D5AF-411B-8525-92EB131707F2}" dt="2026-07-06T01:44:04.492" v="4476" actId="404"/>
-          <ac:spMkLst>
-            <pc:docMk/>
-            <pc:sldMk cId="3177191812" sldId="267"/>
-            <ac:spMk id="64" creationId="{264D0922-4F4B-5DDF-DECC-99449FC5B2B4}"/>
-          </ac:spMkLst>
-        </pc:spChg>
-        <pc:spChg chg="mod">
-          <ac:chgData name="김용일(Kim, Yongil) / 건축·주택마케팅팀(yikim2@gsenc.com)" userId="ec9d7f48-810d-4a84-b2c9-e69fe597daf0" providerId="ADAL" clId="{19EE22C1-D5AF-411B-8525-92EB131707F2}" dt="2026-07-01T05:18:28.120" v="2717" actId="1076"/>
-          <ac:spMkLst>
-            <pc:docMk/>
-            <pc:sldMk cId="3177191812" sldId="267"/>
-            <ac:spMk id="67" creationId="{BCBEE71E-162E-4FE6-1955-BAF8CD3FBC3B}"/>
-          </ac:spMkLst>
-        </pc:spChg>
-        <pc:spChg chg="mod">
-          <ac:chgData name="김용일(Kim, Yongil) / 건축·주택마케팅팀(yikim2@gsenc.com)" userId="ec9d7f48-810d-4a84-b2c9-e69fe597daf0" providerId="ADAL" clId="{19EE22C1-D5AF-411B-8525-92EB131707F2}" dt="2026-06-30T06:44:56.929" v="1362" actId="6549"/>
-          <ac:spMkLst>
-            <pc:docMk/>
-            <pc:sldMk cId="3177191812" sldId="267"/>
-            <ac:spMk id="70" creationId="{BC00FFF9-80A1-C81D-380C-B90FAD27477A}"/>
-          </ac:spMkLst>
-        </pc:spChg>
-        <pc:spChg chg="mod topLvl">
-          <ac:chgData name="김용일(Kim, Yongil) / 건축·주택마케팅팀(yikim2@gsenc.com)" userId="ec9d7f48-810d-4a84-b2c9-e69fe597daf0" providerId="ADAL" clId="{19EE22C1-D5AF-411B-8525-92EB131707F2}" dt="2026-07-06T02:03:07.603" v="4664" actId="1037"/>
-          <ac:spMkLst>
-            <pc:docMk/>
-            <pc:sldMk cId="3177191812" sldId="267"/>
-            <ac:spMk id="72" creationId="{A6884D7D-5B88-2736-D684-FF815A3A5979}"/>
-          </ac:spMkLst>
-        </pc:spChg>
-        <pc:spChg chg="add mod">
-          <ac:chgData name="김용일(Kim, Yongil) / 건축·주택마케팅팀(yikim2@gsenc.com)" userId="ec9d7f48-810d-4a84-b2c9-e69fe597daf0" providerId="ADAL" clId="{19EE22C1-D5AF-411B-8525-92EB131707F2}" dt="2026-07-06T01:44:32.762" v="4480" actId="1076"/>
-          <ac:spMkLst>
-            <pc:docMk/>
-            <pc:sldMk cId="3177191812" sldId="267"/>
-            <ac:spMk id="73" creationId="{B2616656-2AAB-CDC0-E93E-45FB802936E1}"/>
-          </ac:spMkLst>
-        </pc:spChg>
-        <pc:spChg chg="add mod">
-          <ac:chgData name="김용일(Kim, Yongil) / 건축·주택마케팅팀(yikim2@gsenc.com)" userId="ec9d7f48-810d-4a84-b2c9-e69fe597daf0" providerId="ADAL" clId="{19EE22C1-D5AF-411B-8525-92EB131707F2}" dt="2026-07-06T01:44:32.762" v="4480" actId="1076"/>
-          <ac:spMkLst>
-            <pc:docMk/>
-            <pc:sldMk cId="3177191812" sldId="267"/>
-            <ac:spMk id="74" creationId="{6E76A4D8-5237-A1CB-2262-DC136B51392B}"/>
-          </ac:spMkLst>
-        </pc:spChg>
-        <pc:spChg chg="add mod">
-          <ac:chgData name="김용일(Kim, Yongil) / 건축·주택마케팅팀(yikim2@gsenc.com)" userId="ec9d7f48-810d-4a84-b2c9-e69fe597daf0" providerId="ADAL" clId="{19EE22C1-D5AF-411B-8525-92EB131707F2}" dt="2026-07-06T01:44:32.762" v="4480" actId="1076"/>
-          <ac:spMkLst>
-            <pc:docMk/>
-            <pc:sldMk cId="3177191812" sldId="267"/>
-            <ac:spMk id="75" creationId="{FD1AD173-1213-F193-CB98-4D51B737478F}"/>
-          </ac:spMkLst>
-        </pc:spChg>
-        <pc:spChg chg="add mod">
-          <ac:chgData name="김용일(Kim, Yongil) / 건축·주택마케팅팀(yikim2@gsenc.com)" userId="ec9d7f48-810d-4a84-b2c9-e69fe597daf0" providerId="ADAL" clId="{19EE22C1-D5AF-411B-8525-92EB131707F2}" dt="2026-07-06T01:44:32.762" v="4480" actId="1076"/>
-          <ac:spMkLst>
-            <pc:docMk/>
-            <pc:sldMk cId="3177191812" sldId="267"/>
-            <ac:spMk id="78" creationId="{FE75EDB8-1C95-AB6C-E624-E37215AE070D}"/>
-          </ac:spMkLst>
-        </pc:spChg>
-        <pc:spChg chg="mod">
-          <ac:chgData name="김용일(Kim, Yongil) / 건축·주택마케팅팀(yikim2@gsenc.com)" userId="ec9d7f48-810d-4a84-b2c9-e69fe597daf0" providerId="ADAL" clId="{19EE22C1-D5AF-411B-8525-92EB131707F2}" dt="2026-07-03T01:39:37.708" v="4449" actId="113"/>
-          <ac:spMkLst>
-            <pc:docMk/>
-            <pc:sldMk cId="3177191812" sldId="267"/>
-            <ac:spMk id="90" creationId="{14C59B02-BB9D-E310-80DB-1E27194C9D06}"/>
-          </ac:spMkLst>
-        </pc:spChg>
-        <pc:spChg chg="mod">
-          <ac:chgData name="김용일(Kim, Yongil) / 건축·주택마케팅팀(yikim2@gsenc.com)" userId="ec9d7f48-810d-4a84-b2c9-e69fe597daf0" providerId="ADAL" clId="{19EE22C1-D5AF-411B-8525-92EB131707F2}" dt="2026-07-03T01:39:37.708" v="4449" actId="113"/>
-          <ac:spMkLst>
-            <pc:docMk/>
-            <pc:sldMk cId="3177191812" sldId="267"/>
-            <ac:spMk id="92" creationId="{8451A634-963A-A3A8-4428-AE822D3B8D3C}"/>
-          </ac:spMkLst>
-        </pc:spChg>
-        <pc:spChg chg="mod">
-          <ac:chgData name="김용일(Kim, Yongil) / 건축·주택마케팅팀(yikim2@gsenc.com)" userId="ec9d7f48-810d-4a84-b2c9-e69fe597daf0" providerId="ADAL" clId="{19EE22C1-D5AF-411B-8525-92EB131707F2}" dt="2026-07-03T01:39:37.708" v="4449" actId="113"/>
-          <ac:spMkLst>
-            <pc:docMk/>
-            <pc:sldMk cId="3177191812" sldId="267"/>
-            <ac:spMk id="94" creationId="{7BC7AC59-2288-B2A3-9AC2-C6A042CBA508}"/>
-          </ac:spMkLst>
-        </pc:spChg>
-        <pc:spChg chg="mod">
-          <ac:chgData name="김용일(Kim, Yongil) / 건축·주택마케팅팀(yikim2@gsenc.com)" userId="ec9d7f48-810d-4a84-b2c9-e69fe597daf0" providerId="ADAL" clId="{19EE22C1-D5AF-411B-8525-92EB131707F2}" dt="2026-07-01T05:18:03.753" v="2714" actId="1076"/>
-          <ac:spMkLst>
-            <pc:docMk/>
-            <pc:sldMk cId="3177191812" sldId="267"/>
-            <ac:spMk id="96" creationId="{AF5C5906-E3D1-4933-AFBF-0E290408B2FA}"/>
-          </ac:spMkLst>
-        </pc:spChg>
-        <pc:spChg chg="mod">
-          <ac:chgData name="김용일(Kim, Yongil) / 건축·주택마케팅팀(yikim2@gsenc.com)" userId="ec9d7f48-810d-4a84-b2c9-e69fe597daf0" providerId="ADAL" clId="{19EE22C1-D5AF-411B-8525-92EB131707F2}" dt="2026-07-01T05:05:08.755" v="2645" actId="1076"/>
-          <ac:spMkLst>
-            <pc:docMk/>
-            <pc:sldMk cId="3177191812" sldId="267"/>
-            <ac:spMk id="98" creationId="{DC18989C-390B-7F16-286A-DEC6297B3299}"/>
-          </ac:spMkLst>
-        </pc:spChg>
-        <pc:grpChg chg="add mod">
-          <ac:chgData name="김용일(Kim, Yongil) / 건축·주택마케팅팀(yikim2@gsenc.com)" userId="ec9d7f48-810d-4a84-b2c9-e69fe597daf0" providerId="ADAL" clId="{19EE22C1-D5AF-411B-8525-92EB131707F2}" dt="2026-07-01T06:59:56.975" v="2951" actId="1076"/>
-          <ac:grpSpMkLst>
-            <pc:docMk/>
-            <pc:sldMk cId="3177191812" sldId="267"/>
-            <ac:grpSpMk id="13" creationId="{13547824-B588-86A9-9660-B7C2D389FF4F}"/>
-          </ac:grpSpMkLst>
-        </pc:grpChg>
-        <pc:grpChg chg="add mod">
-          <ac:chgData name="김용일(Kim, Yongil) / 건축·주택마케팅팀(yikim2@gsenc.com)" userId="ec9d7f48-810d-4a84-b2c9-e69fe597daf0" providerId="ADAL" clId="{19EE22C1-D5AF-411B-8525-92EB131707F2}" dt="2026-07-01T07:00:00.132" v="2952" actId="1076"/>
-          <ac:grpSpMkLst>
-            <pc:docMk/>
-            <pc:sldMk cId="3177191812" sldId="267"/>
-            <ac:grpSpMk id="14" creationId="{3ED7F644-DAEF-70DC-99C1-454C78AF24BC}"/>
-          </ac:grpSpMkLst>
-        </pc:grpChg>
-        <pc:grpChg chg="add mod">
-          <ac:chgData name="김용일(Kim, Yongil) / 건축·주택마케팅팀(yikim2@gsenc.com)" userId="ec9d7f48-810d-4a84-b2c9-e69fe597daf0" providerId="ADAL" clId="{19EE22C1-D5AF-411B-8525-92EB131707F2}" dt="2026-07-01T07:00:18.707" v="2956" actId="1076"/>
-          <ac:grpSpMkLst>
-            <pc:docMk/>
-            <pc:sldMk cId="3177191812" sldId="267"/>
-            <ac:grpSpMk id="19" creationId="{D039D282-CFB0-2C6C-3116-74D357F25D93}"/>
-          </ac:grpSpMkLst>
-        </pc:grpChg>
-        <pc:grpChg chg="add mod">
-          <ac:chgData name="김용일(Kim, Yongil) / 건축·주택마케팅팀(yikim2@gsenc.com)" userId="ec9d7f48-810d-4a84-b2c9-e69fe597daf0" providerId="ADAL" clId="{19EE22C1-D5AF-411B-8525-92EB131707F2}" dt="2026-07-06T01:57:11.472" v="4619" actId="1076"/>
-          <ac:grpSpMkLst>
-            <pc:docMk/>
-            <pc:sldMk cId="3177191812" sldId="267"/>
-            <ac:grpSpMk id="26" creationId="{7640006D-2DF7-13CC-1BA2-99565E199ED1}"/>
-          </ac:grpSpMkLst>
-        </pc:grpChg>
-        <pc:grpChg chg="add mod">
-          <ac:chgData name="김용일(Kim, Yongil) / 건축·주택마케팅팀(yikim2@gsenc.com)" userId="ec9d7f48-810d-4a84-b2c9-e69fe597daf0" providerId="ADAL" clId="{19EE22C1-D5AF-411B-8525-92EB131707F2}" dt="2026-07-01T07:07:59.468" v="3383" actId="1076"/>
-          <ac:grpSpMkLst>
-            <pc:docMk/>
-            <pc:sldMk cId="3177191812" sldId="267"/>
-            <ac:grpSpMk id="36" creationId="{7D5F50B1-002C-9595-3FDB-E82CC96CEBD4}"/>
-          </ac:grpSpMkLst>
-        </pc:grpChg>
-        <pc:grpChg chg="add del mod">
-          <ac:chgData name="김용일(Kim, Yongil) / 건축·주택마케팅팀(yikim2@gsenc.com)" userId="ec9d7f48-810d-4a84-b2c9-e69fe597daf0" providerId="ADAL" clId="{19EE22C1-D5AF-411B-8525-92EB131707F2}" dt="2026-07-06T02:02:40.832" v="4646" actId="478"/>
-          <ac:grpSpMkLst>
-            <pc:docMk/>
-            <pc:sldMk cId="3177191812" sldId="267"/>
-            <ac:grpSpMk id="41" creationId="{3D6E7924-0BE9-7183-7F34-58A02A199E5D}"/>
-          </ac:grpSpMkLst>
-        </pc:grpChg>
-        <pc:grpChg chg="add mod">
-          <ac:chgData name="김용일(Kim, Yongil) / 건축·주택마케팅팀(yikim2@gsenc.com)" userId="ec9d7f48-810d-4a84-b2c9-e69fe597daf0" providerId="ADAL" clId="{19EE22C1-D5AF-411B-8525-92EB131707F2}" dt="2026-07-01T07:01:50.044" v="2972" actId="1076"/>
-          <ac:grpSpMkLst>
-            <pc:docMk/>
-            <pc:sldMk cId="3177191812" sldId="267"/>
-            <ac:grpSpMk id="49" creationId="{20482A45-41AD-0E64-0D11-12320F3C199A}"/>
-          </ac:grpSpMkLst>
-        </pc:grpChg>
-        <pc:grpChg chg="mod">
-          <ac:chgData name="김용일(Kim, Yongil) / 건축·주택마케팅팀(yikim2@gsenc.com)" userId="ec9d7f48-810d-4a84-b2c9-e69fe597daf0" providerId="ADAL" clId="{19EE22C1-D5AF-411B-8525-92EB131707F2}" dt="2026-07-01T05:04:40.562" v="2641" actId="14100"/>
-          <ac:grpSpMkLst>
-            <pc:docMk/>
-            <pc:sldMk cId="3177191812" sldId="267"/>
-            <ac:grpSpMk id="68" creationId="{6CEBC98C-2705-FFF3-3A7B-F23CAD46E013}"/>
-          </ac:grpSpMkLst>
-        </pc:grpChg>
-        <pc:graphicFrameChg chg="mod modGraphic">
-          <ac:chgData name="김용일(Kim, Yongil) / 건축·주택마케팅팀(yikim2@gsenc.com)" userId="ec9d7f48-810d-4a84-b2c9-e69fe597daf0" providerId="ADAL" clId="{19EE22C1-D5AF-411B-8525-92EB131707F2}" dt="2026-07-01T05:18:28.120" v="2717" actId="1076"/>
-          <ac:graphicFrameMkLst>
-            <pc:docMk/>
-            <pc:sldMk cId="3177191812" sldId="267"/>
-            <ac:graphicFrameMk id="5" creationId="{D7D873F2-D868-9137-7712-3ADF5E600F69}"/>
-          </ac:graphicFrameMkLst>
-        </pc:graphicFrameChg>
-        <pc:graphicFrameChg chg="mod">
-          <ac:chgData name="김용일(Kim, Yongil) / 건축·주택마케팅팀(yikim2@gsenc.com)" userId="ec9d7f48-810d-4a84-b2c9-e69fe597daf0" providerId="ADAL" clId="{19EE22C1-D5AF-411B-8525-92EB131707F2}" dt="2026-07-03T01:39:13.973" v="4433" actId="1076"/>
-          <ac:graphicFrameMkLst>
-            <pc:docMk/>
-            <pc:sldMk cId="3177191812" sldId="267"/>
-            <ac:graphicFrameMk id="11" creationId="{15666FB7-CA58-C874-9068-7AC3C6157A51}"/>
-          </ac:graphicFrameMkLst>
-        </pc:graphicFrameChg>
-        <pc:graphicFrameChg chg="add mod modGraphic">
-          <ac:chgData name="김용일(Kim, Yongil) / 건축·주택마케팅팀(yikim2@gsenc.com)" userId="ec9d7f48-810d-4a84-b2c9-e69fe597daf0" providerId="ADAL" clId="{19EE22C1-D5AF-411B-8525-92EB131707F2}" dt="2026-07-01T07:01:50.044" v="2972" actId="1076"/>
-          <ac:graphicFrameMkLst>
-            <pc:docMk/>
-            <pc:sldMk cId="3177191812" sldId="267"/>
-            <ac:graphicFrameMk id="48" creationId="{44588959-CDF4-AE04-E7DC-3233C63542F4}"/>
-          </ac:graphicFrameMkLst>
-        </pc:graphicFrameChg>
-        <pc:graphicFrameChg chg="mod">
-          <ac:chgData name="김용일(Kim, Yongil) / 건축·주택마케팅팀(yikim2@gsenc.com)" userId="ec9d7f48-810d-4a84-b2c9-e69fe597daf0" providerId="ADAL" clId="{19EE22C1-D5AF-411B-8525-92EB131707F2}" dt="2026-07-06T02:01:22.204" v="4625" actId="692"/>
-          <ac:graphicFrameMkLst>
-            <pc:docMk/>
-            <pc:sldMk cId="3177191812" sldId="267"/>
-            <ac:graphicFrameMk id="60" creationId="{C844CA87-2D4F-197A-13E4-3C024153E033}"/>
-          </ac:graphicFrameMkLst>
-        </pc:graphicFrameChg>
-        <pc:graphicFrameChg chg="mod">
-          <ac:chgData name="김용일(Kim, Yongil) / 건축·주택마케팅팀(yikim2@gsenc.com)" userId="ec9d7f48-810d-4a84-b2c9-e69fe597daf0" providerId="ADAL" clId="{19EE22C1-D5AF-411B-8525-92EB131707F2}" dt="2026-07-01T04:59:24.968" v="2073" actId="1076"/>
-          <ac:graphicFrameMkLst>
-            <pc:docMk/>
-            <pc:sldMk cId="3177191812" sldId="267"/>
-            <ac:graphicFrameMk id="77" creationId="{9402492F-87AD-E3C6-20DA-CBA800E56A09}"/>
-          </ac:graphicFrameMkLst>
-        </pc:graphicFrameChg>
-        <pc:cxnChg chg="add mod">
-          <ac:chgData name="김용일(Kim, Yongil) / 건축·주택마케팅팀(yikim2@gsenc.com)" userId="ec9d7f48-810d-4a84-b2c9-e69fe597daf0" providerId="ADAL" clId="{19EE22C1-D5AF-411B-8525-92EB131707F2}" dt="2026-07-01T06:59:30.661" v="2915" actId="164"/>
-          <ac:cxnSpMkLst>
-            <pc:docMk/>
-            <pc:sldMk cId="3177191812" sldId="267"/>
-            <ac:cxnSpMk id="9" creationId="{84208589-CEBC-D466-98F7-5944EC3B34CE}"/>
-          </ac:cxnSpMkLst>
-        </pc:cxnChg>
-        <pc:cxnChg chg="mod">
-          <ac:chgData name="김용일(Kim, Yongil) / 건축·주택마케팅팀(yikim2@gsenc.com)" userId="ec9d7f48-810d-4a84-b2c9-e69fe597daf0" providerId="ADAL" clId="{19EE22C1-D5AF-411B-8525-92EB131707F2}" dt="2026-07-01T06:59:47.100" v="2920" actId="14100"/>
-          <ac:cxnSpMkLst>
-            <pc:docMk/>
-            <pc:sldMk cId="3177191812" sldId="267"/>
-            <ac:cxnSpMk id="16" creationId="{9FEE44BA-E134-A1D7-90C2-C3403206DBE0}"/>
-          </ac:cxnSpMkLst>
-        </pc:cxnChg>
-        <pc:cxnChg chg="mod">
-          <ac:chgData name="김용일(Kim, Yongil) / 건축·주택마케팅팀(yikim2@gsenc.com)" userId="ec9d7f48-810d-4a84-b2c9-e69fe597daf0" providerId="ADAL" clId="{19EE22C1-D5AF-411B-8525-92EB131707F2}" dt="2026-07-03T01:32:42.683" v="4316" actId="14100"/>
-          <ac:cxnSpMkLst>
-            <pc:docMk/>
-            <pc:sldMk cId="3177191812" sldId="267"/>
-            <ac:cxnSpMk id="23" creationId="{6DE7527E-5C0C-D262-F749-04B67842518D}"/>
-          </ac:cxnSpMkLst>
-        </pc:cxnChg>
-        <pc:cxnChg chg="mod">
-          <ac:chgData name="김용일(Kim, Yongil) / 건축·주택마케팅팀(yikim2@gsenc.com)" userId="ec9d7f48-810d-4a84-b2c9-e69fe597daf0" providerId="ADAL" clId="{19EE22C1-D5AF-411B-8525-92EB131707F2}" dt="2026-07-06T01:57:15.073" v="4621" actId="1076"/>
-          <ac:cxnSpMkLst>
-            <pc:docMk/>
-            <pc:sldMk cId="3177191812" sldId="267"/>
-            <ac:cxnSpMk id="28" creationId="{E90EC539-9326-6100-D246-77006238BCEE}"/>
-          </ac:cxnSpMkLst>
-        </pc:cxnChg>
-        <pc:cxnChg chg="mod">
-          <ac:chgData name="김용일(Kim, Yongil) / 건축·주택마케팅팀(yikim2@gsenc.com)" userId="ec9d7f48-810d-4a84-b2c9-e69fe597daf0" providerId="ADAL" clId="{19EE22C1-D5AF-411B-8525-92EB131707F2}" dt="2026-07-03T01:33:25.547" v="4359" actId="14100"/>
-          <ac:cxnSpMkLst>
-            <pc:docMk/>
-            <pc:sldMk cId="3177191812" sldId="267"/>
-            <ac:cxnSpMk id="38" creationId="{66A8453B-8D9B-D156-668F-AAE5C89CB411}"/>
-          </ac:cxnSpMkLst>
-        </pc:cxnChg>
-        <pc:cxnChg chg="del mod topLvl">
-          <ac:chgData name="김용일(Kim, Yongil) / 건축·주택마케팅팀(yikim2@gsenc.com)" userId="ec9d7f48-810d-4a84-b2c9-e69fe597daf0" providerId="ADAL" clId="{19EE22C1-D5AF-411B-8525-92EB131707F2}" dt="2026-07-06T02:02:40.832" v="4646" actId="478"/>
-          <ac:cxnSpMkLst>
-            <pc:docMk/>
-            <pc:sldMk cId="3177191812" sldId="267"/>
-            <ac:cxnSpMk id="66" creationId="{9DCBB6C4-FF94-E728-A32D-F85388887F11}"/>
-          </ac:cxnSpMkLst>
-        </pc:cxnChg>
-        <pc:cxnChg chg="add mod">
-          <ac:chgData name="김용일(Kim, Yongil) / 건축·주택마케팅팀(yikim2@gsenc.com)" userId="ec9d7f48-810d-4a84-b2c9-e69fe597daf0" providerId="ADAL" clId="{19EE22C1-D5AF-411B-8525-92EB131707F2}" dt="2026-07-06T01:44:32.762" v="4480" actId="1076"/>
-          <ac:cxnSpMkLst>
-            <pc:docMk/>
-            <pc:sldMk cId="3177191812" sldId="267"/>
-            <ac:cxnSpMk id="76" creationId="{66060700-8D0A-6728-A44C-3E76B5872531}"/>
-          </ac:cxnSpMkLst>
-        </pc:cxnChg>
-      </pc:sldChg>
-      <pc:sldChg chg="addSp delSp modSp add mod">
-        <pc:chgData name="김용일(Kim, Yongil) / 건축·주택마케팅팀(yikim2@gsenc.com)" userId="ec9d7f48-810d-4a84-b2c9-e69fe597daf0" providerId="ADAL" clId="{19EE22C1-D5AF-411B-8525-92EB131707F2}" dt="2026-07-01T06:57:08.638" v="2769" actId="22"/>
-        <pc:sldMkLst>
-          <pc:docMk/>
-          <pc:sldMk cId="3494370982" sldId="268"/>
-        </pc:sldMkLst>
-        <pc:picChg chg="add">
-          <ac:chgData name="김용일(Kim, Yongil) / 건축·주택마케팅팀(yikim2@gsenc.com)" userId="ec9d7f48-810d-4a84-b2c9-e69fe597daf0" providerId="ADAL" clId="{19EE22C1-D5AF-411B-8525-92EB131707F2}" dt="2026-07-01T06:57:08.638" v="2769" actId="22"/>
-          <ac:picMkLst>
-            <pc:docMk/>
-            <pc:sldMk cId="3494370982" sldId="268"/>
-            <ac:picMk id="26" creationId="{1D3F6AAE-870B-41CD-4394-31A580142FEB}"/>
-          </ac:picMkLst>
-        </pc:picChg>
-        <pc:picChg chg="add">
-          <ac:chgData name="김용일(Kim, Yongil) / 건축·주택마케팅팀(yikim2@gsenc.com)" userId="ec9d7f48-810d-4a84-b2c9-e69fe597daf0" providerId="ADAL" clId="{19EE22C1-D5AF-411B-8525-92EB131707F2}" dt="2026-07-01T06:57:08.638" v="2769" actId="22"/>
-          <ac:picMkLst>
-            <pc:docMk/>
-            <pc:sldMk cId="3494370982" sldId="268"/>
-            <ac:picMk id="29" creationId="{94CF4AD1-CE57-52E5-352C-0DD0DB5BDF3F}"/>
-          </ac:picMkLst>
-        </pc:picChg>
-        <pc:picChg chg="add">
-          <ac:chgData name="김용일(Kim, Yongil) / 건축·주택마케팅팀(yikim2@gsenc.com)" userId="ec9d7f48-810d-4a84-b2c9-e69fe597daf0" providerId="ADAL" clId="{19EE22C1-D5AF-411B-8525-92EB131707F2}" dt="2026-07-01T06:57:08.638" v="2769" actId="22"/>
-          <ac:picMkLst>
-            <pc:docMk/>
-            <pc:sldMk cId="3494370982" sldId="268"/>
-            <ac:picMk id="37" creationId="{16BCCDF8-C6C8-5EE0-37CC-B0396F871A0E}"/>
-          </ac:picMkLst>
-        </pc:picChg>
-        <pc:picChg chg="mod">
-          <ac:chgData name="김용일(Kim, Yongil) / 건축·주택마케팅팀(yikim2@gsenc.com)" userId="ec9d7f48-810d-4a84-b2c9-e69fe597daf0" providerId="ADAL" clId="{19EE22C1-D5AF-411B-8525-92EB131707F2}" dt="2026-07-01T04:50:56.700" v="2068" actId="1076"/>
-          <ac:picMkLst>
-            <pc:docMk/>
-            <pc:sldMk cId="3494370982" sldId="268"/>
-            <ac:picMk id="44" creationId="{DF9E3C26-CE58-551B-EC18-6470C0E032C1}"/>
-          </ac:picMkLst>
-        </pc:picChg>
-      </pc:sldChg>
-    </pc:docChg>
-  </pc:docChgLst>
-  <pc:docChgLst>
-    <pc:chgData name="임성수(Lim, Seongsu) / 건축·주택마케팅팀(sslim02@gsenc.com)" userId="48633e66-9078-4fe9-aa26-5deefb875129" providerId="ADAL" clId="{82BB6C99-1B01-4B1B-B8FC-3873E4BCD586}"/>
-    <pc:docChg chg="modSld">
-      <pc:chgData name="임성수(Lim, Seongsu) / 건축·주택마케팅팀(sslim02@gsenc.com)" userId="48633e66-9078-4fe9-aa26-5deefb875129" providerId="ADAL" clId="{82BB6C99-1B01-4B1B-B8FC-3873E4BCD586}" dt="2026-07-09T01:09:23.856" v="7" actId="27918"/>
-      <pc:docMkLst>
-        <pc:docMk/>
-      </pc:docMkLst>
-      <pc:sldChg chg="mod">
-        <pc:chgData name="임성수(Lim, Seongsu) / 건축·주택마케팅팀(sslim02@gsenc.com)" userId="48633e66-9078-4fe9-aa26-5deefb875129" providerId="ADAL" clId="{82BB6C99-1B01-4B1B-B8FC-3873E4BCD586}" dt="2026-07-09T01:09:23.856" v="7" actId="27918"/>
-        <pc:sldMkLst>
-          <pc:docMk/>
-          <pc:sldMk cId="3177191812" sldId="267"/>
-        </pc:sldMkLst>
-      </pc:sldChg>
-    </pc:docChg>
-  </pc:docChgLst>
-  <pc:docChgLst>
-    <pc:chgData name="정주원(Jung, Joo-won) / 건축·주택마케팅팀(jwjung2@gsenc.com)" userId="e2087b30-db3f-45bb-9e1d-b876a236297f" providerId="ADAL" clId="{2D5AB722-2043-4B56-B259-123BC8B200B0}"/>
-    <pc:docChg chg="undo custSel modSld">
-      <pc:chgData name="정주원(Jung, Joo-won) / 건축·주택마케팅팀(jwjung2@gsenc.com)" userId="e2087b30-db3f-45bb-9e1d-b876a236297f" providerId="ADAL" clId="{2D5AB722-2043-4B56-B259-123BC8B200B0}" dt="2026-07-03T04:52:09.787" v="1713"/>
-      <pc:docMkLst>
-        <pc:docMk/>
-      </pc:docMkLst>
-      <pc:sldChg chg="addSp delSp modSp mod">
-        <pc:chgData name="정주원(Jung, Joo-won) / 건축·주택마케팅팀(jwjung2@gsenc.com)" userId="e2087b30-db3f-45bb-9e1d-b876a236297f" providerId="ADAL" clId="{2D5AB722-2043-4B56-B259-123BC8B200B0}" dt="2026-07-03T04:52:09.787" v="1713"/>
-        <pc:sldMkLst>
-          <pc:docMk/>
-          <pc:sldMk cId="3177191812" sldId="267"/>
-        </pc:sldMkLst>
-        <pc:spChg chg="add del mod">
-          <ac:chgData name="정주원(Jung, Joo-won) / 건축·주택마케팅팀(jwjung2@gsenc.com)" userId="e2087b30-db3f-45bb-9e1d-b876a236297f" providerId="ADAL" clId="{2D5AB722-2043-4B56-B259-123BC8B200B0}" dt="2026-07-03T04:04:29.502" v="526" actId="14100"/>
-          <ac:spMkLst>
-            <pc:docMk/>
-            <pc:sldMk cId="3177191812" sldId="267"/>
-            <ac:spMk id="10" creationId="{01DA7BEF-30D7-53AE-5176-39FFE1A89199}"/>
-          </ac:spMkLst>
-        </pc:spChg>
-        <pc:spChg chg="add mod">
-          <ac:chgData name="정주원(Jung, Joo-won) / 건축·주택마케팅팀(jwjung2@gsenc.com)" userId="e2087b30-db3f-45bb-9e1d-b876a236297f" providerId="ADAL" clId="{2D5AB722-2043-4B56-B259-123BC8B200B0}" dt="2026-07-03T04:41:44.222" v="1353" actId="1076"/>
-          <ac:spMkLst>
-            <pc:docMk/>
-            <pc:sldMk cId="3177191812" sldId="267"/>
-            <ac:spMk id="12" creationId="{0597C3F8-8124-354F-0B9E-F8E5F1C3697B}"/>
-          </ac:spMkLst>
-        </pc:spChg>
-        <pc:spChg chg="mod">
-          <ac:chgData name="정주원(Jung, Joo-won) / 건축·주택마케팅팀(jwjung2@gsenc.com)" userId="e2087b30-db3f-45bb-9e1d-b876a236297f" providerId="ADAL" clId="{2D5AB722-2043-4B56-B259-123BC8B200B0}" dt="2026-07-03T04:36:47.595" v="1338" actId="20577"/>
-          <ac:spMkLst>
-            <pc:docMk/>
-            <pc:sldMk cId="3177191812" sldId="267"/>
-            <ac:spMk id="15" creationId="{C47D4CD6-3295-6A3B-2AD8-54D7FC37A7DF}"/>
-          </ac:spMkLst>
-        </pc:spChg>
-        <pc:spChg chg="add mod">
-          <ac:chgData name="정주원(Jung, Joo-won) / 건축·주택마케팅팀(jwjung2@gsenc.com)" userId="e2087b30-db3f-45bb-9e1d-b876a236297f" providerId="ADAL" clId="{2D5AB722-2043-4B56-B259-123BC8B200B0}" dt="2026-07-03T04:41:44.222" v="1353" actId="1076"/>
-          <ac:spMkLst>
-            <pc:docMk/>
-            <pc:sldMk cId="3177191812" sldId="267"/>
-            <ac:spMk id="17" creationId="{3881E392-8B64-CA52-8701-B78FCF17B0E2}"/>
-          </ac:spMkLst>
-        </pc:spChg>
-        <pc:spChg chg="add mod">
-          <ac:chgData name="정주원(Jung, Joo-won) / 건축·주택마케팅팀(jwjung2@gsenc.com)" userId="e2087b30-db3f-45bb-9e1d-b876a236297f" providerId="ADAL" clId="{2D5AB722-2043-4B56-B259-123BC8B200B0}" dt="2026-07-03T04:25:06.581" v="1114" actId="1076"/>
-          <ac:spMkLst>
-            <pc:docMk/>
-            <pc:sldMk cId="3177191812" sldId="267"/>
-            <ac:spMk id="18" creationId="{79728871-FCC7-8CE2-362C-558F7E26A0B8}"/>
-          </ac:spMkLst>
-        </pc:spChg>
-        <pc:spChg chg="mod">
-          <ac:chgData name="정주원(Jung, Joo-won) / 건축·주택마케팅팀(jwjung2@gsenc.com)" userId="e2087b30-db3f-45bb-9e1d-b876a236297f" providerId="ADAL" clId="{2D5AB722-2043-4B56-B259-123BC8B200B0}" dt="2026-07-03T04:15:21.462" v="1049" actId="20577"/>
-          <ac:spMkLst>
-            <pc:docMk/>
-            <pc:sldMk cId="3177191812" sldId="267"/>
-            <ac:spMk id="22" creationId="{C9ACE0F6-03CD-1A43-8F85-6DB6BF17A887}"/>
-          </ac:spMkLst>
-        </pc:spChg>
-        <pc:spChg chg="mod">
-          <ac:chgData name="정주원(Jung, Joo-won) / 건축·주택마케팅팀(jwjung2@gsenc.com)" userId="e2087b30-db3f-45bb-9e1d-b876a236297f" providerId="ADAL" clId="{2D5AB722-2043-4B56-B259-123BC8B200B0}" dt="2026-07-03T04:49:08.725" v="1679" actId="1076"/>
-          <ac:spMkLst>
-            <pc:docMk/>
-            <pc:sldMk cId="3177191812" sldId="267"/>
-            <ac:spMk id="25" creationId="{3481BC6F-8525-D5E4-E998-D451D8E5EFB6}"/>
-          </ac:spMkLst>
-        </pc:spChg>
-        <pc:spChg chg="mod">
-          <ac:chgData name="정주원(Jung, Joo-won) / 건축·주택마케팅팀(jwjung2@gsenc.com)" userId="e2087b30-db3f-45bb-9e1d-b876a236297f" providerId="ADAL" clId="{2D5AB722-2043-4B56-B259-123BC8B200B0}" dt="2026-07-03T04:15:22.865" v="1050" actId="20577"/>
-          <ac:spMkLst>
-            <pc:docMk/>
-            <pc:sldMk cId="3177191812" sldId="267"/>
-            <ac:spMk id="51" creationId="{DA4E52E1-ECC2-433D-2356-FD974E3F98A2}"/>
-          </ac:spMkLst>
-        </pc:spChg>
-        <pc:spChg chg="add mod">
-          <ac:chgData name="정주원(Jung, Joo-won) / 건축·주택마케팅팀(jwjung2@gsenc.com)" userId="e2087b30-db3f-45bb-9e1d-b876a236297f" providerId="ADAL" clId="{2D5AB722-2043-4B56-B259-123BC8B200B0}" dt="2026-07-03T04:50:28.284" v="1702" actId="20577"/>
-          <ac:spMkLst>
-            <pc:docMk/>
-            <pc:sldMk cId="3177191812" sldId="267"/>
-            <ac:spMk id="64" creationId="{264D0922-4F4B-5DDF-DECC-99449FC5B2B4}"/>
-          </ac:spMkLst>
-        </pc:spChg>
-        <pc:spChg chg="add mod">
-          <ac:chgData name="정주원(Jung, Joo-won) / 건축·주택마케팅팀(jwjung2@gsenc.com)" userId="e2087b30-db3f-45bb-9e1d-b876a236297f" providerId="ADAL" clId="{2D5AB722-2043-4B56-B259-123BC8B200B0}" dt="2026-07-03T04:51:34.598" v="1708" actId="20577"/>
-          <ac:spMkLst>
-            <pc:docMk/>
-            <pc:sldMk cId="3177191812" sldId="267"/>
-            <ac:spMk id="72" creationId="{A6884D7D-5B88-2736-D684-FF815A3A5979}"/>
-          </ac:spMkLst>
-        </pc:spChg>
-        <pc:spChg chg="add mod">
-          <ac:chgData name="정주원(Jung, Joo-won) / 건축·주택마케팅팀(jwjung2@gsenc.com)" userId="e2087b30-db3f-45bb-9e1d-b876a236297f" providerId="ADAL" clId="{2D5AB722-2043-4B56-B259-123BC8B200B0}" dt="2026-07-03T04:49:24.495" v="1682" actId="207"/>
-          <ac:spMkLst>
-            <pc:docMk/>
-            <pc:sldMk cId="3177191812" sldId="267"/>
-            <ac:spMk id="79" creationId="{3859B269-9D2F-8D9C-1D1D-8BE041BC29A9}"/>
-          </ac:spMkLst>
-        </pc:spChg>
-        <pc:spChg chg="add mod">
-          <ac:chgData name="정주원(Jung, Joo-won) / 건축·주택마케팅팀(jwjung2@gsenc.com)" userId="e2087b30-db3f-45bb-9e1d-b876a236297f" providerId="ADAL" clId="{2D5AB722-2043-4B56-B259-123BC8B200B0}" dt="2026-07-03T04:49:26.769" v="1683" actId="207"/>
-          <ac:spMkLst>
-            <pc:docMk/>
-            <pc:sldMk cId="3177191812" sldId="267"/>
-            <ac:spMk id="80" creationId="{49B044D2-A45D-1CC9-3571-C72546E45796}"/>
-          </ac:spMkLst>
-        </pc:spChg>
-        <pc:spChg chg="add mod">
-          <ac:chgData name="정주원(Jung, Joo-won) / 건축·주택마케팅팀(jwjung2@gsenc.com)" userId="e2087b30-db3f-45bb-9e1d-b876a236297f" providerId="ADAL" clId="{2D5AB722-2043-4B56-B259-123BC8B200B0}" dt="2026-07-03T04:49:28.887" v="1684" actId="207"/>
-          <ac:spMkLst>
-            <pc:docMk/>
-            <pc:sldMk cId="3177191812" sldId="267"/>
-            <ac:spMk id="81" creationId="{5D174578-0886-1C7B-FD76-C8BB990A1C73}"/>
-          </ac:spMkLst>
-        </pc:spChg>
-        <pc:spChg chg="add mod">
-          <ac:chgData name="정주원(Jung, Joo-won) / 건축·주택마케팅팀(jwjung2@gsenc.com)" userId="e2087b30-db3f-45bb-9e1d-b876a236297f" providerId="ADAL" clId="{2D5AB722-2043-4B56-B259-123BC8B200B0}" dt="2026-07-03T04:49:30.922" v="1685" actId="207"/>
-          <ac:spMkLst>
-            <pc:docMk/>
-            <pc:sldMk cId="3177191812" sldId="267"/>
-            <ac:spMk id="82" creationId="{D7C261A1-5C0F-FBC1-6542-BD370D532AB9}"/>
-          </ac:spMkLst>
-        </pc:spChg>
-        <pc:spChg chg="add mod">
-          <ac:chgData name="정주원(Jung, Joo-won) / 건축·주택마케팅팀(jwjung2@gsenc.com)" userId="e2087b30-db3f-45bb-9e1d-b876a236297f" providerId="ADAL" clId="{2D5AB722-2043-4B56-B259-123BC8B200B0}" dt="2026-07-03T04:49:32.817" v="1686" actId="207"/>
-          <ac:spMkLst>
-            <pc:docMk/>
-            <pc:sldMk cId="3177191812" sldId="267"/>
-            <ac:spMk id="83" creationId="{2F9EC756-754D-BA02-5DCA-0A0A409D2F55}"/>
-          </ac:spMkLst>
-        </pc:spChg>
-        <pc:graphicFrameChg chg="mod">
-          <ac:chgData name="정주원(Jung, Joo-won) / 건축·주택마케팅팀(jwjung2@gsenc.com)" userId="e2087b30-db3f-45bb-9e1d-b876a236297f" providerId="ADAL" clId="{2D5AB722-2043-4B56-B259-123BC8B200B0}" dt="2026-07-03T04:41:02.049" v="1343" actId="14100"/>
-          <ac:graphicFrameMkLst>
-            <pc:docMk/>
-            <pc:sldMk cId="3177191812" sldId="267"/>
-            <ac:graphicFrameMk id="11" creationId="{15666FB7-CA58-C874-9068-7AC3C6157A51}"/>
-          </ac:graphicFrameMkLst>
-        </pc:graphicFrameChg>
-        <pc:graphicFrameChg chg="add mod">
-          <ac:chgData name="정주원(Jung, Joo-won) / 건축·주택마케팅팀(jwjung2@gsenc.com)" userId="e2087b30-db3f-45bb-9e1d-b876a236297f" providerId="ADAL" clId="{2D5AB722-2043-4B56-B259-123BC8B200B0}" dt="2026-07-03T04:52:09.787" v="1713"/>
-          <ac:graphicFrameMkLst>
-            <pc:docMk/>
-            <pc:sldMk cId="3177191812" sldId="267"/>
-            <ac:graphicFrameMk id="60" creationId="{C844CA87-2D4F-197A-13E4-3C024153E033}"/>
-          </ac:graphicFrameMkLst>
-        </pc:graphicFrameChg>
-        <pc:cxnChg chg="add mod ord">
-          <ac:chgData name="정주원(Jung, Joo-won) / 건축·주택마케팅팀(jwjung2@gsenc.com)" userId="e2087b30-db3f-45bb-9e1d-b876a236297f" providerId="ADAL" clId="{2D5AB722-2043-4B56-B259-123BC8B200B0}" dt="2026-07-03T04:13:41.436" v="1030" actId="692"/>
-          <ac:cxnSpMkLst>
-            <pc:docMk/>
-            <pc:sldMk cId="3177191812" sldId="267"/>
-            <ac:cxnSpMk id="66" creationId="{9DCBB6C4-FF94-E728-A32D-F85388887F11}"/>
-          </ac:cxnSpMkLst>
-        </pc:cxnChg>
-      </pc:sldChg>
-    </pc:docChg>
-  </pc:docChgLst>
-  <pc:docChgLst>
-    <pc:chgData name="남윤석(Nam, Yoon-suk) / 건축·주택마케팅팀(ysnam@gsenc.com)" userId="ae2e94fa-422e-4f74-b9da-d6ff816b527e" providerId="ADAL" clId="{8AA6EF57-75F2-4111-8954-DF393CFAD2AE}"/>
-    <pc:docChg chg="custSel modSld">
-      <pc:chgData name="남윤석(Nam, Yoon-suk) / 건축·주택마케팅팀(ysnam@gsenc.com)" userId="ae2e94fa-422e-4f74-b9da-d6ff816b527e" providerId="ADAL" clId="{8AA6EF57-75F2-4111-8954-DF393CFAD2AE}" dt="2026-07-01T07:22:49.004" v="447" actId="20577"/>
-      <pc:docMkLst>
-        <pc:docMk/>
-      </pc:docMkLst>
-      <pc:sldChg chg="modSp mod">
-        <pc:chgData name="남윤석(Nam, Yoon-suk) / 건축·주택마케팅팀(ysnam@gsenc.com)" userId="ae2e94fa-422e-4f74-b9da-d6ff816b527e" providerId="ADAL" clId="{8AA6EF57-75F2-4111-8954-DF393CFAD2AE}" dt="2026-07-01T07:22:49.004" v="447" actId="20577"/>
-        <pc:sldMkLst>
-          <pc:docMk/>
-          <pc:sldMk cId="3177191812" sldId="267"/>
-        </pc:sldMkLst>
-        <pc:spChg chg="mod">
-          <ac:chgData name="남윤석(Nam, Yoon-suk) / 건축·주택마케팅팀(ysnam@gsenc.com)" userId="ae2e94fa-422e-4f74-b9da-d6ff816b527e" providerId="ADAL" clId="{8AA6EF57-75F2-4111-8954-DF393CFAD2AE}" dt="2026-07-01T06:08:28.021" v="69" actId="20577"/>
-          <ac:spMkLst>
-            <pc:docMk/>
-            <pc:sldMk cId="3177191812" sldId="267"/>
-            <ac:spMk id="4" creationId="{B9A1AE17-CB5D-7622-FE88-D0150B996055}"/>
-          </ac:spMkLst>
-        </pc:spChg>
-        <pc:spChg chg="mod">
-          <ac:chgData name="남윤석(Nam, Yoon-suk) / 건축·주택마케팅팀(ysnam@gsenc.com)" userId="ae2e94fa-422e-4f74-b9da-d6ff816b527e" providerId="ADAL" clId="{8AA6EF57-75F2-4111-8954-DF393CFAD2AE}" dt="2026-07-01T07:22:49.004" v="447" actId="20577"/>
-          <ac:spMkLst>
-            <pc:docMk/>
-            <pc:sldMk cId="3177191812" sldId="267"/>
-            <ac:spMk id="20" creationId="{78AF0ED8-715E-A7AC-EDB2-7BAFAA3949AA}"/>
-          </ac:spMkLst>
-        </pc:spChg>
-        <pc:spChg chg="mod">
-          <ac:chgData name="남윤석(Nam, Yoon-suk) / 건축·주택마케팅팀(ysnam@gsenc.com)" userId="ae2e94fa-422e-4f74-b9da-d6ff816b527e" providerId="ADAL" clId="{8AA6EF57-75F2-4111-8954-DF393CFAD2AE}" dt="2026-07-01T06:08:06.475" v="58" actId="113"/>
-          <ac:spMkLst>
-            <pc:docMk/>
-            <pc:sldMk cId="3177191812" sldId="267"/>
-            <ac:spMk id="90" creationId="{14C59B02-BB9D-E310-80DB-1E27194C9D06}"/>
-          </ac:spMkLst>
-        </pc:spChg>
-        <pc:spChg chg="mod">
-          <ac:chgData name="남윤석(Nam, Yoon-suk) / 건축·주택마케팅팀(ysnam@gsenc.com)" userId="ae2e94fa-422e-4f74-b9da-d6ff816b527e" providerId="ADAL" clId="{8AA6EF57-75F2-4111-8954-DF393CFAD2AE}" dt="2026-07-01T06:08:09.638" v="59" actId="113"/>
-          <ac:spMkLst>
-            <pc:docMk/>
-            <pc:sldMk cId="3177191812" sldId="267"/>
-            <ac:spMk id="92" creationId="{8451A634-963A-A3A8-4428-AE822D3B8D3C}"/>
-          </ac:spMkLst>
-        </pc:spChg>
-        <pc:spChg chg="mod">
-          <ac:chgData name="남윤석(Nam, Yoon-suk) / 건축·주택마케팅팀(ysnam@gsenc.com)" userId="ae2e94fa-422e-4f74-b9da-d6ff816b527e" providerId="ADAL" clId="{8AA6EF57-75F2-4111-8954-DF393CFAD2AE}" dt="2026-07-01T06:08:10.861" v="60" actId="113"/>
-          <ac:spMkLst>
-            <pc:docMk/>
-            <pc:sldMk cId="3177191812" sldId="267"/>
-            <ac:spMk id="94" creationId="{7BC7AC59-2288-B2A3-9AC2-C6A042CBA508}"/>
-          </ac:spMkLst>
-        </pc:spChg>
-        <pc:spChg chg="mod">
-          <ac:chgData name="남윤석(Nam, Yoon-suk) / 건축·주택마케팅팀(ysnam@gsenc.com)" userId="ae2e94fa-422e-4f74-b9da-d6ff816b527e" providerId="ADAL" clId="{8AA6EF57-75F2-4111-8954-DF393CFAD2AE}" dt="2026-07-01T06:07:59.696" v="57"/>
-          <ac:spMkLst>
-            <pc:docMk/>
-            <pc:sldMk cId="3177191812" sldId="267"/>
-            <ac:spMk id="98" creationId="{DC18989C-390B-7F16-286A-DEC6297B3299}"/>
-          </ac:spMkLst>
-        </pc:spChg>
-        <pc:graphicFrameChg chg="mod">
-          <ac:chgData name="남윤석(Nam, Yoon-suk) / 건축·주택마케팅팀(ysnam@gsenc.com)" userId="ae2e94fa-422e-4f74-b9da-d6ff816b527e" providerId="ADAL" clId="{8AA6EF57-75F2-4111-8954-DF393CFAD2AE}" dt="2026-07-01T06:08:13.052" v="61" actId="113"/>
-          <ac:graphicFrameMkLst>
-            <pc:docMk/>
-            <pc:sldMk cId="3177191812" sldId="267"/>
-            <ac:graphicFrameMk id="11" creationId="{15666FB7-CA58-C874-9068-7AC3C6157A51}"/>
-          </ac:graphicFrameMkLst>
-        </pc:graphicFrameChg>
-        <pc:graphicFrameChg chg="mod">
-          <ac:chgData name="남윤석(Nam, Yoon-suk) / 건축·주택마케팅팀(ysnam@gsenc.com)" userId="ae2e94fa-422e-4f74-b9da-d6ff816b527e" providerId="ADAL" clId="{8AA6EF57-75F2-4111-8954-DF393CFAD2AE}" dt="2026-07-01T06:15:17.935" v="93" actId="692"/>
-          <ac:graphicFrameMkLst>
-            <pc:docMk/>
-            <pc:sldMk cId="3177191812" sldId="267"/>
-            <ac:graphicFrameMk id="77" creationId="{9402492F-87AD-E3C6-20DA-CBA800E56A09}"/>
-          </ac:graphicFrameMkLst>
-        </pc:graphicFrameChg>
-        <pc:cxnChg chg="mod">
-          <ac:chgData name="남윤석(Nam, Yoon-suk) / 건축·주택마케팅팀(ysnam@gsenc.com)" userId="ae2e94fa-422e-4f74-b9da-d6ff816b527e" providerId="ADAL" clId="{8AA6EF57-75F2-4111-8954-DF393CFAD2AE}" dt="2026-07-01T07:21:45.702" v="268" actId="14100"/>
-          <ac:cxnSpMkLst>
-            <pc:docMk/>
-            <pc:sldMk cId="3177191812" sldId="267"/>
-            <ac:cxnSpMk id="23" creationId="{6DE7527E-5C0C-D262-F749-04B67842518D}"/>
-          </ac:cxnSpMkLst>
-        </pc:cxnChg>
-      </pc:sldChg>
-      <pc:sldChg chg="modSp mod">
-        <pc:chgData name="남윤석(Nam, Yoon-suk) / 건축·주택마케팅팀(ysnam@gsenc.com)" userId="ae2e94fa-422e-4f74-b9da-d6ff816b527e" providerId="ADAL" clId="{8AA6EF57-75F2-4111-8954-DF393CFAD2AE}" dt="2026-07-01T06:15:43.780" v="96" actId="1076"/>
-        <pc:sldMkLst>
-          <pc:docMk/>
-          <pc:sldMk cId="3494370982" sldId="268"/>
-        </pc:sldMkLst>
-        <pc:picChg chg="mod">
-          <ac:chgData name="남윤석(Nam, Yoon-suk) / 건축·주택마케팅팀(ysnam@gsenc.com)" userId="ae2e94fa-422e-4f74-b9da-d6ff816b527e" providerId="ADAL" clId="{8AA6EF57-75F2-4111-8954-DF393CFAD2AE}" dt="2026-07-01T06:15:43.780" v="96" actId="1076"/>
-          <ac:picMkLst>
-            <pc:docMk/>
-            <pc:sldMk cId="3494370982" sldId="268"/>
-            <ac:picMk id="44" creationId="{DF9E3C26-CE58-551B-EC18-6470C0E032C1}"/>
-          </ac:picMkLst>
-        </pc:picChg>
-      </pc:sldChg>
-    </pc:docChg>
-  </pc:docChgLst>
-</pc:chgInfo>
+<file path=ppt/charts/chart1.xml><?xml version="1.0" encoding="utf-8"?>
+<c:chartSpace xmlns:c="http://schemas.openxmlformats.org/drawingml/2006/chart" xmlns:a="http://schemas.openxmlformats.org/drawingml/2006/main" xmlns:r="http://schemas.openxmlformats.org/officeDocument/2006/relationships" xmlns:c16r2="http://schemas.microsoft.com/office/drawing/2015/06/chart">
+  <c:date1904 val="0"/>
+  <c:lang val="ko-KR"/>
+  <c:roundedCorners val="0"/>
+  <mc:AlternateContent xmlns:mc="http://schemas.openxmlformats.org/markup-compatibility/2006">
+    <mc:Choice xmlns:c14="http://schemas.microsoft.com/office/drawing/2007/8/2/chart" Requires="c14">
+      <c14:style val="102"/>
+    </mc:Choice>
+    <mc:Fallback>
+      <c:style val="2"/>
+    </mc:Fallback>
+  </mc:AlternateContent>
+  <c:chart>
+    <c:autoTitleDeleted val="1"/>
+    <c:plotArea>
+      <c:layout/>
+      <c:stockChart>
+        <c:ser>
+          <c:idx val="0"/>
+          <c:order val="0"/>
+          <c:tx>
+            <c:strRef>
+              <c:f>Sheet1!$B$1</c:f>
+              <c:strCache>
+                <c:ptCount val="1"/>
+                <c:pt idx="0">
+                  <c:v>고가</c:v>
+                </c:pt>
+              </c:strCache>
+            </c:strRef>
+          </c:tx>
+          <c:spPr>
+            <a:ln w="19050" cap="rnd">
+              <a:noFill/>
+              <a:round/>
+            </a:ln>
+            <a:effectLst/>
+          </c:spPr>
+          <c:marker>
+            <c:symbol val="circle"/>
+            <c:size val="5"/>
+            <c:spPr>
+              <a:solidFill>
+                <a:schemeClr val="bg1">
+                  <a:lumMod val="50000"/>
+                </a:schemeClr>
+              </a:solidFill>
+              <a:ln w="9525">
+                <a:noFill/>
+              </a:ln>
+              <a:effectLst/>
+            </c:spPr>
+          </c:marker>
+          <c:dLbls>
+            <c:spPr>
+              <a:noFill/>
+              <a:ln>
+                <a:noFill/>
+              </a:ln>
+              <a:effectLst/>
+            </c:spPr>
+            <c:txPr>
+              <a:bodyPr rot="0" spcFirstLastPara="1" vertOverflow="ellipsis" vert="horz" wrap="square" lIns="38100" tIns="19050" rIns="38100" bIns="19050" anchor="ctr" anchorCtr="1">
+                <a:spAutoFit/>
+              </a:bodyPr>
+              <a:lstStyle/>
+              <a:p>
+                <a:pPr>
+                  <a:defRPr sz="800" b="0" i="0" u="none" strike="noStrike" kern="1200" baseline="0">
+                    <a:solidFill>
+                      <a:schemeClr val="bg1">
+                        <a:lumMod val="50000"/>
+                      </a:schemeClr>
+                    </a:solidFill>
+                    <a:latin typeface="Noto Sans KR" panose="020B0200000000000000" pitchFamily="50" charset="-127"/>
+                    <a:ea typeface="Noto Sans KR" panose="020B0200000000000000" pitchFamily="50" charset="-127"/>
+                    <a:cs typeface="+mn-cs"/>
+                  </a:defRPr>
+                </a:pPr>
+                <a:endParaRPr lang="ko-KR"/>
+              </a:p>
+            </c:txPr>
+            <c:showLegendKey val="0"/>
+            <c:showVal val="1"/>
+            <c:showCatName val="0"/>
+            <c:showSerName val="0"/>
+            <c:showPercent val="0"/>
+            <c:showBubbleSize val="0"/>
+            <c:showLeaderLines val="0"/>
+            <c:extLst>
+              <c:ext xmlns:c15="http://schemas.microsoft.com/office/drawing/2012/chart" uri="{CE6537A1-D6FC-4f65-9D91-7224C49458BB}">
+                <c15:showLeaderLines val="1"/>
+                <c15:leaderLines>
+                  <c:spPr>
+                    <a:ln w="9525" cap="flat" cmpd="sng" algn="ctr">
+                      <a:solidFill>
+                        <a:schemeClr val="tx1">
+                          <a:lumMod val="35000"/>
+                          <a:lumOff val="65000"/>
+                        </a:schemeClr>
+                      </a:solidFill>
+                      <a:round/>
+                    </a:ln>
+                    <a:effectLst/>
+                  </c:spPr>
+                </c15:leaderLines>
+              </c:ext>
+            </c:extLst>
+          </c:dLbls>
+          <c:cat>
+            <c:strRef>
+              <c:f>Sheet1!$A$2:$A$5</c:f>
+              <c:strCache>
+                <c:ptCount val="4"/>
+                <c:pt idx="0">
+                  <c:v>신암동</c:v>
+                </c:pt>
+                <c:pt idx="1">
+                  <c:v>신천동</c:v>
+                </c:pt>
+                <c:pt idx="2">
+                  <c:v>효목동</c:v>
+                </c:pt>
+                <c:pt idx="3">
+                  <c:v>대현동</c:v>
+                </c:pt>
+              </c:strCache>
+            </c:strRef>
+          </c:cat>
+          <c:val>
+            <c:numRef>
+              <c:f>Sheet1!$B$2:$B$5</c:f>
+              <c:numCache>
+                <c:formatCode>##.0"억"</c:formatCode>
+                <c:ptCount val="4"/>
+                <c:pt idx="0">
+                  <c:v>8.1</c:v>
+                </c:pt>
+                <c:pt idx="1">
+                  <c:v>8.2</c:v>
+                </c:pt>
+                <c:pt idx="2">
+                  <c:v>6.2</c:v>
+                </c:pt>
+                <c:pt idx="3">
+                  <c:v>5.5</c:v>
+                </c:pt>
+              </c:numCache>
+            </c:numRef>
+          </c:val>
+          <c:smooth val="0"/>
+          <c:extLst>
+            <c:ext xmlns:c16="http://schemas.microsoft.com/office/drawing/2014/chart" uri="{C3380CC4-5D6E-409C-BE32-E72D297353CC}">
+              <c16:uniqueId val="{00000000-E85F-4867-A567-F7155FF26F4C}"/>
+            </c:ext>
+          </c:extLst>
+        </c:ser>
+        <c:ser>
+          <c:idx val="1"/>
+          <c:order val="1"/>
+          <c:tx>
+            <c:strRef>
+              <c:f>Sheet1!$C$1</c:f>
+              <c:strCache>
+                <c:ptCount val="1"/>
+                <c:pt idx="0">
+                  <c:v>저가</c:v>
+                </c:pt>
+              </c:strCache>
+            </c:strRef>
+          </c:tx>
+          <c:spPr>
+            <a:ln w="19050" cap="rnd">
+              <a:noFill/>
+              <a:round/>
+            </a:ln>
+            <a:effectLst/>
+          </c:spPr>
+          <c:marker>
+            <c:symbol val="circle"/>
+            <c:size val="5"/>
+            <c:spPr>
+              <a:solidFill>
+                <a:schemeClr val="bg1">
+                  <a:lumMod val="50000"/>
+                </a:schemeClr>
+              </a:solidFill>
+              <a:ln w="9525">
+                <a:noFill/>
+              </a:ln>
+              <a:effectLst/>
+            </c:spPr>
+          </c:marker>
+          <c:dLbls>
+            <c:spPr>
+              <a:noFill/>
+              <a:ln>
+                <a:noFill/>
+              </a:ln>
+              <a:effectLst/>
+            </c:spPr>
+            <c:txPr>
+              <a:bodyPr rot="0" spcFirstLastPara="1" vertOverflow="ellipsis" vert="horz" wrap="square" lIns="38100" tIns="19050" rIns="38100" bIns="19050" anchor="ctr" anchorCtr="1">
+                <a:spAutoFit/>
+              </a:bodyPr>
+              <a:lstStyle/>
+              <a:p>
+                <a:pPr>
+                  <a:defRPr sz="800" b="0" i="0" u="none" strike="noStrike" kern="1200" baseline="0">
+                    <a:solidFill>
+                      <a:schemeClr val="tx1">
+                        <a:lumMod val="75000"/>
+                        <a:lumOff val="25000"/>
+                      </a:schemeClr>
+                    </a:solidFill>
+                    <a:latin typeface="Noto Sans KR" panose="020B0200000000000000" pitchFamily="50" charset="-127"/>
+                    <a:ea typeface="Noto Sans KR" panose="020B0200000000000000" pitchFamily="50" charset="-127"/>
+                    <a:cs typeface="+mn-cs"/>
+                  </a:defRPr>
+                </a:pPr>
+                <a:endParaRPr lang="ko-KR"/>
+              </a:p>
+            </c:txPr>
+            <c:showLegendKey val="0"/>
+            <c:showVal val="1"/>
+            <c:showCatName val="0"/>
+            <c:showSerName val="0"/>
+            <c:showPercent val="0"/>
+            <c:showBubbleSize val="0"/>
+            <c:showLeaderLines val="0"/>
+            <c:extLst>
+              <c:ext xmlns:c15="http://schemas.microsoft.com/office/drawing/2012/chart" uri="{CE6537A1-D6FC-4f65-9D91-7224C49458BB}">
+                <c15:showLeaderLines val="1"/>
+                <c15:leaderLines>
+                  <c:spPr>
+                    <a:ln w="9525" cap="flat" cmpd="sng" algn="ctr">
+                      <a:solidFill>
+                        <a:schemeClr val="tx1">
+                          <a:lumMod val="35000"/>
+                          <a:lumOff val="65000"/>
+                        </a:schemeClr>
+                      </a:solidFill>
+                      <a:round/>
+                    </a:ln>
+                    <a:effectLst/>
+                  </c:spPr>
+                </c15:leaderLines>
+              </c:ext>
+            </c:extLst>
+          </c:dLbls>
+          <c:cat>
+            <c:strRef>
+              <c:f>Sheet1!$A$2:$A$5</c:f>
+              <c:strCache>
+                <c:ptCount val="4"/>
+                <c:pt idx="0">
+                  <c:v>신암동</c:v>
+                </c:pt>
+                <c:pt idx="1">
+                  <c:v>신천동</c:v>
+                </c:pt>
+                <c:pt idx="2">
+                  <c:v>효목동</c:v>
+                </c:pt>
+                <c:pt idx="3">
+                  <c:v>대현동</c:v>
+                </c:pt>
+              </c:strCache>
+            </c:strRef>
+          </c:cat>
+          <c:val>
+            <c:numRef>
+              <c:f>Sheet1!$C$2:$C$5</c:f>
+              <c:numCache>
+                <c:formatCode>##.0"억"</c:formatCode>
+                <c:ptCount val="4"/>
+                <c:pt idx="0">
+                  <c:v>5.5</c:v>
+                </c:pt>
+                <c:pt idx="1">
+                  <c:v>6.2</c:v>
+                </c:pt>
+                <c:pt idx="2">
+                  <c:v>5.1</c:v>
+                </c:pt>
+                <c:pt idx="3">
+                  <c:v>2.8</c:v>
+                </c:pt>
+              </c:numCache>
+            </c:numRef>
+          </c:val>
+          <c:smooth val="0"/>
+          <c:extLst>
+            <c:ext xmlns:c16="http://schemas.microsoft.com/office/drawing/2014/chart" uri="{C3380CC4-5D6E-409C-BE32-E72D297353CC}">
+              <c16:uniqueId val="{00000001-E85F-4867-A567-F7155FF26F4C}"/>
+            </c:ext>
+          </c:extLst>
+        </c:ser>
+        <c:ser>
+          <c:idx val="2"/>
+          <c:order val="2"/>
+          <c:tx>
+            <c:strRef>
+              <c:f>Sheet1!$D$1</c:f>
+              <c:strCache>
+                <c:ptCount val="1"/>
+                <c:pt idx="0">
+                  <c:v>평균가</c:v>
+                </c:pt>
+              </c:strCache>
+            </c:strRef>
+          </c:tx>
+          <c:spPr>
+            <a:ln w="19050" cap="rnd">
+              <a:noFill/>
+              <a:round/>
+            </a:ln>
+            <a:effectLst/>
+          </c:spPr>
+          <c:marker>
+            <c:symbol val="circle"/>
+            <c:size val="11"/>
+            <c:spPr>
+              <a:solidFill>
+                <a:srgbClr val="0070C0"/>
+              </a:solidFill>
+              <a:ln w="9525">
+                <a:noFill/>
+              </a:ln>
+              <a:effectLst/>
+            </c:spPr>
+          </c:marker>
+          <c:dLbls>
+            <c:dLbl>
+              <c:idx val="2"/>
+              <c:layout>
+                <c:manualLayout>
+                  <c:x val="-5.2765899102875848E-3"/>
+                  <c:y val="3.0914203451693034E-3"/>
+                </c:manualLayout>
+              </c:layout>
+              <c:showLegendKey val="0"/>
+              <c:showVal val="1"/>
+              <c:showCatName val="0"/>
+              <c:showSerName val="0"/>
+              <c:showPercent val="0"/>
+              <c:showBubbleSize val="0"/>
+              <c:extLst>
+                <c:ext xmlns:c15="http://schemas.microsoft.com/office/drawing/2012/chart" uri="{CE6537A1-D6FC-4f65-9D91-7224C49458BB}"/>
+                <c:ext xmlns:c16="http://schemas.microsoft.com/office/drawing/2014/chart" uri="{C3380CC4-5D6E-409C-BE32-E72D297353CC}">
+                  <c16:uniqueId val="{00000006-E85F-4867-A567-F7155FF26F4C}"/>
+                </c:ext>
+              </c:extLst>
+            </c:dLbl>
+            <c:dLbl>
+              <c:idx val="3"/>
+              <c:layout>
+                <c:manualLayout>
+                  <c:x val="-5.2765073266635302E-3"/>
+                  <c:y val="-8.6289450118279855E-3"/>
+                </c:manualLayout>
+              </c:layout>
+              <c:showLegendKey val="0"/>
+              <c:showVal val="1"/>
+              <c:showCatName val="0"/>
+              <c:showSerName val="0"/>
+              <c:showPercent val="0"/>
+              <c:showBubbleSize val="0"/>
+              <c:extLst>
+                <c:ext xmlns:c15="http://schemas.microsoft.com/office/drawing/2012/chart" uri="{CE6537A1-D6FC-4f65-9D91-7224C49458BB}"/>
+                <c:ext xmlns:c16="http://schemas.microsoft.com/office/drawing/2014/chart" uri="{C3380CC4-5D6E-409C-BE32-E72D297353CC}">
+                  <c16:uniqueId val="{00000007-E85F-4867-A567-F7155FF26F4C}"/>
+                </c:ext>
+              </c:extLst>
+            </c:dLbl>
+            <c:dLbl>
+              <c:idx val="4"/>
+              <c:layout>
+                <c:manualLayout>
+                  <c:x val="-5.0699120945903644E-3"/>
+                  <c:y val="-2.191313770250241E-2"/>
+                </c:manualLayout>
+              </c:layout>
+              <c:showLegendKey val="0"/>
+              <c:showVal val="1"/>
+              <c:showCatName val="0"/>
+              <c:showSerName val="0"/>
+              <c:showPercent val="0"/>
+              <c:showBubbleSize val="0"/>
+              <c:extLst>
+                <c:ext xmlns:c15="http://schemas.microsoft.com/office/drawing/2012/chart" uri="{CE6537A1-D6FC-4f65-9D91-7224C49458BB}"/>
+                <c:ext xmlns:c16="http://schemas.microsoft.com/office/drawing/2014/chart" uri="{C3380CC4-5D6E-409C-BE32-E72D297353CC}">
+                  <c16:uniqueId val="{00000008-E85F-4867-A567-F7155FF26F4C}"/>
+                </c:ext>
+              </c:extLst>
+            </c:dLbl>
+            <c:spPr>
+              <a:noFill/>
+              <a:ln>
+                <a:noFill/>
+              </a:ln>
+              <a:effectLst/>
+            </c:spPr>
+            <c:txPr>
+              <a:bodyPr rot="0" spcFirstLastPara="1" vertOverflow="ellipsis" vert="horz" wrap="square" lIns="38100" tIns="19050" rIns="38100" bIns="19050" anchor="ctr" anchorCtr="1">
+                <a:spAutoFit/>
+              </a:bodyPr>
+              <a:lstStyle/>
+              <a:p>
+                <a:pPr>
+                  <a:defRPr sz="900" b="1" i="0" u="none" strike="noStrike" kern="1200" baseline="0">
+                    <a:solidFill>
+                      <a:srgbClr val="0070C0"/>
+                    </a:solidFill>
+                    <a:latin typeface="Noto Sans KR" panose="020B0200000000000000" pitchFamily="50" charset="-127"/>
+                    <a:ea typeface="Noto Sans KR" panose="020B0200000000000000" pitchFamily="50" charset="-127"/>
+                    <a:cs typeface="+mn-cs"/>
+                  </a:defRPr>
+                </a:pPr>
+                <a:endParaRPr lang="ko-KR"/>
+              </a:p>
+            </c:txPr>
+            <c:showLegendKey val="0"/>
+            <c:showVal val="1"/>
+            <c:showCatName val="0"/>
+            <c:showSerName val="0"/>
+            <c:showPercent val="0"/>
+            <c:showBubbleSize val="0"/>
+            <c:showLeaderLines val="0"/>
+            <c:extLst>
+              <c:ext xmlns:c15="http://schemas.microsoft.com/office/drawing/2012/chart" uri="{CE6537A1-D6FC-4f65-9D91-7224C49458BB}">
+                <c15:showLeaderLines val="0"/>
+              </c:ext>
+            </c:extLst>
+          </c:dLbls>
+          <c:cat>
+            <c:strRef>
+              <c:f>Sheet1!$A$2:$A$5</c:f>
+              <c:strCache>
+                <c:ptCount val="4"/>
+                <c:pt idx="0">
+                  <c:v>신암동</c:v>
+                </c:pt>
+                <c:pt idx="1">
+                  <c:v>신천동</c:v>
+                </c:pt>
+                <c:pt idx="2">
+                  <c:v>효목동</c:v>
+                </c:pt>
+                <c:pt idx="3">
+                  <c:v>대현동</c:v>
+                </c:pt>
+              </c:strCache>
+            </c:strRef>
+          </c:cat>
+          <c:val>
+            <c:numRef>
+              <c:f>Sheet1!$D$2:$D$5</c:f>
+              <c:numCache>
+                <c:formatCode>##.0"억"</c:formatCode>
+                <c:ptCount val="4"/>
+                <c:pt idx="0">
+                  <c:v>6.9</c:v>
+                </c:pt>
+                <c:pt idx="1">
+                  <c:v>6.9</c:v>
+                </c:pt>
+                <c:pt idx="2">
+                  <c:v>5.3</c:v>
+                </c:pt>
+                <c:pt idx="3">
+                  <c:v>3.5</c:v>
+                </c:pt>
+              </c:numCache>
+            </c:numRef>
+          </c:val>
+          <c:smooth val="0"/>
+          <c:extLst>
+            <c:ext xmlns:c16="http://schemas.microsoft.com/office/drawing/2014/chart" uri="{C3380CC4-5D6E-409C-BE32-E72D297353CC}">
+              <c16:uniqueId val="{00000002-E85F-4867-A567-F7155FF26F4C}"/>
+            </c:ext>
+          </c:extLst>
+        </c:ser>
+        <c:dLbls>
+          <c:showLegendKey val="0"/>
+          <c:showVal val="0"/>
+          <c:showCatName val="0"/>
+          <c:showSerName val="0"/>
+          <c:showPercent val="0"/>
+          <c:showBubbleSize val="0"/>
+        </c:dLbls>
+        <c:hiLowLines>
+          <c:spPr>
+            <a:ln w="9525" cap="flat" cmpd="sng" algn="ctr">
+              <a:solidFill>
+                <a:schemeClr val="bg1">
+                  <a:lumMod val="50000"/>
+                </a:schemeClr>
+              </a:solidFill>
+              <a:round/>
+            </a:ln>
+            <a:effectLst/>
+          </c:spPr>
+        </c:hiLowLines>
+        <c:axId val="56828320"/>
+        <c:axId val="513862112"/>
+      </c:stockChart>
+      <c:catAx>
+        <c:axId val="56828320"/>
+        <c:scaling>
+          <c:orientation val="minMax"/>
+        </c:scaling>
+        <c:delete val="0"/>
+        <c:axPos val="b"/>
+        <c:numFmt formatCode="General" sourceLinked="1"/>
+        <c:majorTickMark val="out"/>
+        <c:minorTickMark val="none"/>
+        <c:tickLblPos val="nextTo"/>
+        <c:spPr>
+          <a:noFill/>
+          <a:ln w="9525" cap="flat" cmpd="sng" algn="ctr">
+            <a:solidFill>
+              <a:schemeClr val="tx1">
+                <a:lumMod val="15000"/>
+                <a:lumOff val="85000"/>
+              </a:schemeClr>
+            </a:solidFill>
+            <a:round/>
+          </a:ln>
+          <a:effectLst/>
+        </c:spPr>
+        <c:txPr>
+          <a:bodyPr rot="-60000000" spcFirstLastPara="1" vertOverflow="ellipsis" vert="horz" wrap="square" anchor="ctr" anchorCtr="1"/>
+          <a:lstStyle/>
+          <a:p>
+            <a:pPr>
+              <a:defRPr sz="900" b="0" i="0" u="none" strike="noStrike" kern="1200" baseline="0">
+                <a:solidFill>
+                  <a:schemeClr val="tx1">
+                    <a:lumMod val="65000"/>
+                    <a:lumOff val="35000"/>
+                  </a:schemeClr>
+                </a:solidFill>
+                <a:latin typeface="Noto Sans KR" panose="020B0200000000000000" pitchFamily="50" charset="-127"/>
+                <a:ea typeface="Noto Sans KR" panose="020B0200000000000000" pitchFamily="50" charset="-127"/>
+                <a:cs typeface="+mn-cs"/>
+              </a:defRPr>
+            </a:pPr>
+            <a:endParaRPr lang="ko-KR"/>
+          </a:p>
+        </c:txPr>
+        <c:crossAx val="513862112"/>
+        <c:crosses val="autoZero"/>
+        <c:auto val="1"/>
+        <c:lblAlgn val="ctr"/>
+        <c:lblOffset val="100"/>
+        <c:noMultiLvlLbl val="0"/>
+      </c:catAx>
+      <c:valAx>
+        <c:axId val="513862112"/>
+        <c:scaling>
+          <c:orientation val="minMax"/>
+          <c:max val="10"/>
+          <c:min val="1"/>
+        </c:scaling>
+        <c:delete val="0"/>
+        <c:axPos val="l"/>
+        <c:majorGridlines>
+          <c:spPr>
+            <a:ln w="6350" cap="flat" cmpd="sng" algn="ctr">
+              <a:solidFill>
+                <a:schemeClr val="bg1">
+                  <a:lumMod val="85000"/>
+                </a:schemeClr>
+              </a:solidFill>
+              <a:round/>
+            </a:ln>
+            <a:effectLst/>
+          </c:spPr>
+        </c:majorGridlines>
+        <c:numFmt formatCode="##&quot;억&quot;" sourceLinked="0"/>
+        <c:majorTickMark val="none"/>
+        <c:minorTickMark val="none"/>
+        <c:tickLblPos val="nextTo"/>
+        <c:spPr>
+          <a:noFill/>
+          <a:ln>
+            <a:noFill/>
+          </a:ln>
+          <a:effectLst/>
+        </c:spPr>
+        <c:txPr>
+          <a:bodyPr rot="-60000000" spcFirstLastPara="1" vertOverflow="ellipsis" vert="horz" wrap="square" anchor="ctr" anchorCtr="1"/>
+          <a:lstStyle/>
+          <a:p>
+            <a:pPr>
+              <a:defRPr sz="900" b="0" i="0" u="none" strike="noStrike" kern="1200" baseline="0">
+                <a:solidFill>
+                  <a:schemeClr val="tx1">
+                    <a:lumMod val="65000"/>
+                    <a:lumOff val="35000"/>
+                  </a:schemeClr>
+                </a:solidFill>
+                <a:latin typeface="Noto Sans KR" panose="020B0200000000000000" pitchFamily="50" charset="-127"/>
+                <a:ea typeface="Noto Sans KR" panose="020B0200000000000000" pitchFamily="50" charset="-127"/>
+                <a:cs typeface="+mn-cs"/>
+              </a:defRPr>
+            </a:pPr>
+            <a:endParaRPr lang="ko-KR"/>
+          </a:p>
+        </c:txPr>
+        <c:crossAx val="56828320"/>
+        <c:crosses val="autoZero"/>
+        <c:crossBetween val="between"/>
+        <c:majorUnit val="2"/>
+      </c:valAx>
+      <c:spPr>
+        <a:noFill/>
+        <a:ln>
+          <a:noFill/>
+        </a:ln>
+        <a:effectLst/>
+      </c:spPr>
+    </c:plotArea>
+    <c:plotVisOnly val="1"/>
+    <c:dispBlanksAs val="gap"/>
+    <c:showDLblsOverMax val="0"/>
+    <c:extLst>
+      <c:ext xmlns:c16r3="http://schemas.microsoft.com/office/drawing/2017/03/chart" uri="{56B9EC1D-385E-4148-901F-78D8002777C0}">
+        <c16r3:dataDisplayOptions16>
+          <c16r3:dispNaAsBlank val="1"/>
+        </c16r3:dataDisplayOptions16>
+      </c:ext>
+    </c:extLst>
+  </c:chart>
+  <c:spPr>
+    <a:noFill/>
+    <a:ln>
+      <a:noFill/>
+    </a:ln>
+    <a:effectLst/>
+  </c:spPr>
+  <c:txPr>
+    <a:bodyPr/>
+    <a:lstStyle/>
+    <a:p>
+      <a:pPr>
+        <a:defRPr/>
+      </a:pPr>
+      <a:endParaRPr lang="ko-KR"/>
+    </a:p>
+  </c:txPr>
+  <c:externalData r:id="rId3">
+    <c:autoUpdate val="0"/>
+  </c:externalData>
+</c:chartSpace>
 </file>
 
-<file path=ppt/charts/chart1.xml><?xml version="1.0" encoding="utf-8"?>
+<file path=ppt/charts/chart2.xml><?xml version="1.0" encoding="utf-8"?>
 <c:chartSpace xmlns:c="http://schemas.openxmlformats.org/drawingml/2006/chart" xmlns:a="http://schemas.openxmlformats.org/drawingml/2006/main" xmlns:r="http://schemas.openxmlformats.org/officeDocument/2006/relationships" xmlns:c16r2="http://schemas.microsoft.com/office/drawing/2015/06/chart">
   <c:date1904 val="0"/>
   <c:lang val="ko-KR"/>
@@ -1062,9 +852,9 @@
           <c:xMode val="edge"/>
           <c:yMode val="edge"/>
           <c:x val="5.4547687353034356E-2"/>
-          <c:y val="0.1045726996891346"/>
+          <c:y val="0.18470524666218494"/>
           <c:w val="0.87623858064253579"/>
-          <c:h val="0.66832919156382053"/>
+          <c:h val="0.5881965588210325"/>
         </c:manualLayout>
       </c:layout>
       <c:barChart>
@@ -1092,7 +882,9 @@
             <c:bubble3D val="0"/>
             <c:spPr>
               <a:solidFill>
-                <a:srgbClr val="F97316"/>
+                <a:schemeClr val="bg1">
+                  <a:lumMod val="50000"/>
+                </a:schemeClr>
               </a:solidFill>
             </c:spPr>
             <c:extLst>
@@ -1107,7 +899,7 @@
             <c:bubble3D val="0"/>
             <c:spPr>
               <a:solidFill>
-                <a:srgbClr val="16A34A"/>
+                <a:srgbClr val="D9D9D9"/>
               </a:solidFill>
             </c:spPr>
             <c:extLst>
@@ -1122,7 +914,7 @@
             <c:bubble3D val="0"/>
             <c:spPr>
               <a:solidFill>
-                <a:srgbClr val="002941"/>
+                <a:srgbClr val="0070C0"/>
               </a:solidFill>
             </c:spPr>
             <c:extLst>
@@ -1336,7 +1128,9 @@
             <a:pPr>
               <a:defRPr sz="600" b="0">
                 <a:solidFill>
-                  <a:srgbClr val="45515E"/>
+                  <a:schemeClr val="bg1">
+                    <a:lumMod val="50000"/>
+                  </a:schemeClr>
                 </a:solidFill>
                 <a:latin typeface="Noto Sans KR"/>
               </a:defRPr>
@@ -1387,7 +1181,7 @@
 </c:chartSpace>
 </file>
 
-<file path=ppt/charts/chart2.xml><?xml version="1.0" encoding="utf-8"?>
+<file path=ppt/charts/chart3.xml><?xml version="1.0" encoding="utf-8"?>
 <c:chartSpace xmlns:c="http://schemas.openxmlformats.org/drawingml/2006/chart" xmlns:a="http://schemas.openxmlformats.org/drawingml/2006/main" xmlns:r="http://schemas.openxmlformats.org/officeDocument/2006/relationships" xmlns:c16r2="http://schemas.microsoft.com/office/drawing/2015/06/chart">
   <c:date1904 val="0"/>
   <c:lang val="ko-KR"/>
@@ -1434,7 +1228,7 @@
           <c:spPr>
             <a:ln w="12700">
               <a:solidFill>
-                <a:srgbClr val="E67E22"/>
+                <a:srgbClr val="7F7F7F"/>
               </a:solidFill>
             </a:ln>
           </c:spPr>
@@ -1443,7 +1237,7 @@
             <c:size val="5"/>
             <c:spPr>
               <a:solidFill>
-                <a:srgbClr val="E67E22"/>
+                <a:srgbClr val="7F7F7F"/>
               </a:solidFill>
               <a:ln>
                 <a:solidFill>
@@ -1522,7 +1316,7 @@
           <c:spPr>
             <a:ln w="12700">
               <a:solidFill>
-                <a:srgbClr val="2E7D32"/>
+                <a:srgbClr val="D9D9D9"/>
               </a:solidFill>
             </a:ln>
           </c:spPr>
@@ -1531,7 +1325,7 @@
             <c:size val="5"/>
             <c:spPr>
               <a:solidFill>
-                <a:srgbClr val="2E7D32"/>
+                <a:srgbClr val="D9D9D9"/>
               </a:solidFill>
               <a:ln>
                 <a:solidFill>
@@ -1610,7 +1404,7 @@
           <c:spPr>
             <a:ln w="28575">
               <a:solidFill>
-                <a:srgbClr val="0E3B68"/>
+                <a:srgbClr val="0070C0"/>
               </a:solidFill>
             </a:ln>
           </c:spPr>
@@ -1619,11 +1413,11 @@
             <c:size val="8"/>
             <c:spPr>
               <a:solidFill>
-                <a:srgbClr val="0E3B68"/>
+                <a:srgbClr val="0070C0"/>
               </a:solidFill>
-              <a:ln>
-                <a:solidFill>
-                  <a:srgbClr val="FFFFFF"/>
+              <a:ln w="9525">
+                <a:solidFill>
+                  <a:srgbClr val="0070C0"/>
                 </a:solidFill>
               </a:ln>
             </c:spPr>
@@ -1711,7 +1505,9 @@
             <a:pPr>
               <a:defRPr sz="700">
                 <a:solidFill>
-                  <a:srgbClr val="333333"/>
+                  <a:schemeClr val="bg1">
+                    <a:lumMod val="50000"/>
+                  </a:schemeClr>
                 </a:solidFill>
                 <a:latin typeface="Malgun Gothic"/>
               </a:defRPr>
@@ -1735,7 +1531,17 @@
         </c:scaling>
         <c:delete val="0"/>
         <c:axPos val="l"/>
-        <c:majorGridlines/>
+        <c:majorGridlines>
+          <c:spPr>
+            <a:ln>
+              <a:solidFill>
+                <a:schemeClr val="bg1">
+                  <a:lumMod val="95000"/>
+                </a:schemeClr>
+              </a:solidFill>
+            </a:ln>
+          </c:spPr>
+        </c:majorGridlines>
         <c:numFmt formatCode="General" sourceLinked="1"/>
         <c:majorTickMark val="cross"/>
         <c:minorTickMark val="none"/>
@@ -1766,10 +1572,10 @@
         <c:manualLayout>
           <c:xMode val="edge"/>
           <c:yMode val="edge"/>
-          <c:x val="0.10574991173058493"/>
-          <c:y val="0.83565960035895337"/>
-          <c:w val="0.84304997449994679"/>
-          <c:h val="0.11958868357130441"/>
+          <c:x val="3.0125440646524428E-2"/>
+          <c:y val="0.84311821970391043"/>
+          <c:w val="0.91867444558400746"/>
+          <c:h val="0.11213006422634737"/>
         </c:manualLayout>
       </c:layout>
       <c:overlay val="0"/>
@@ -1778,7 +1584,12 @@
         <a:lstStyle/>
         <a:p>
           <a:pPr>
-            <a:defRPr sz="700">
+            <a:defRPr sz="600">
+              <a:solidFill>
+                <a:schemeClr val="bg1">
+                  <a:lumMod val="50000"/>
+                </a:schemeClr>
+              </a:solidFill>
               <a:latin typeface="Noto Sans KR" panose="020B0200000000000000" pitchFamily="50" charset="-127"/>
               <a:ea typeface="Noto Sans KR" panose="020B0200000000000000" pitchFamily="50" charset="-127"/>
             </a:defRPr>
@@ -1802,665 +1613,6 @@
     </a:p>
   </c:txPr>
   <c:externalData r:id="rId1">
-    <c:autoUpdate val="0"/>
-  </c:externalData>
-</c:chartSpace>
-</file>
-
-<file path=ppt/charts/chart3.xml><?xml version="1.0" encoding="utf-8"?>
-<c:chartSpace xmlns:c="http://schemas.openxmlformats.org/drawingml/2006/chart" xmlns:a="http://schemas.openxmlformats.org/drawingml/2006/main" xmlns:r="http://schemas.openxmlformats.org/officeDocument/2006/relationships" xmlns:c16r2="http://schemas.microsoft.com/office/drawing/2015/06/chart">
-  <c:date1904 val="0"/>
-  <c:lang val="ko-KR"/>
-  <c:roundedCorners val="0"/>
-  <mc:AlternateContent xmlns:mc="http://schemas.openxmlformats.org/markup-compatibility/2006">
-    <mc:Choice xmlns:c14="http://schemas.microsoft.com/office/drawing/2007/8/2/chart" Requires="c14">
-      <c14:style val="102"/>
-    </mc:Choice>
-    <mc:Fallback>
-      <c:style val="2"/>
-    </mc:Fallback>
-  </mc:AlternateContent>
-  <c:chart>
-    <c:autoTitleDeleted val="1"/>
-    <c:plotArea>
-      <c:layout/>
-      <c:stockChart>
-        <c:ser>
-          <c:idx val="0"/>
-          <c:order val="0"/>
-          <c:tx>
-            <c:strRef>
-              <c:f>Sheet1!$B$1</c:f>
-              <c:strCache>
-                <c:ptCount val="1"/>
-                <c:pt idx="0">
-                  <c:v>고가</c:v>
-                </c:pt>
-              </c:strCache>
-            </c:strRef>
-          </c:tx>
-          <c:spPr>
-            <a:ln w="19050" cap="rnd">
-              <a:noFill/>
-              <a:round/>
-            </a:ln>
-            <a:effectLst/>
-          </c:spPr>
-          <c:marker>
-            <c:symbol val="circle"/>
-            <c:size val="5"/>
-            <c:spPr>
-              <a:solidFill>
-                <a:schemeClr val="bg1">
-                  <a:lumMod val="50000"/>
-                </a:schemeClr>
-              </a:solidFill>
-              <a:ln w="9525">
-                <a:noFill/>
-              </a:ln>
-              <a:effectLst/>
-            </c:spPr>
-          </c:marker>
-          <c:dLbls>
-            <c:spPr>
-              <a:noFill/>
-              <a:ln>
-                <a:noFill/>
-              </a:ln>
-              <a:effectLst/>
-            </c:spPr>
-            <c:txPr>
-              <a:bodyPr rot="0" spcFirstLastPara="1" vertOverflow="ellipsis" vert="horz" wrap="square" lIns="38100" tIns="19050" rIns="38100" bIns="19050" anchor="ctr" anchorCtr="1">
-                <a:spAutoFit/>
-              </a:bodyPr>
-              <a:lstStyle/>
-              <a:p>
-                <a:pPr>
-                  <a:defRPr sz="800" b="0" i="0" u="none" strike="noStrike" kern="1200" baseline="0">
-                    <a:solidFill>
-                      <a:schemeClr val="bg1">
-                        <a:lumMod val="50000"/>
-                      </a:schemeClr>
-                    </a:solidFill>
-                    <a:latin typeface="Noto Sans KR" panose="020B0200000000000000" pitchFamily="50" charset="-127"/>
-                    <a:ea typeface="Noto Sans KR" panose="020B0200000000000000" pitchFamily="50" charset="-127"/>
-                    <a:cs typeface="+mn-cs"/>
-                  </a:defRPr>
-                </a:pPr>
-                <a:endParaRPr lang="ko-KR"/>
-              </a:p>
-            </c:txPr>
-            <c:showLegendKey val="0"/>
-            <c:showVal val="1"/>
-            <c:showCatName val="0"/>
-            <c:showSerName val="0"/>
-            <c:showPercent val="0"/>
-            <c:showBubbleSize val="0"/>
-            <c:showLeaderLines val="0"/>
-            <c:extLst>
-              <c:ext xmlns:c15="http://schemas.microsoft.com/office/drawing/2012/chart" uri="{CE6537A1-D6FC-4f65-9D91-7224C49458BB}">
-                <c15:showLeaderLines val="1"/>
-                <c15:leaderLines>
-                  <c:spPr>
-                    <a:ln w="9525" cap="flat" cmpd="sng" algn="ctr">
-                      <a:solidFill>
-                        <a:schemeClr val="tx1">
-                          <a:lumMod val="35000"/>
-                          <a:lumOff val="65000"/>
-                        </a:schemeClr>
-                      </a:solidFill>
-                      <a:round/>
-                    </a:ln>
-                    <a:effectLst/>
-                  </c:spPr>
-                </c15:leaderLines>
-              </c:ext>
-            </c:extLst>
-          </c:dLbls>
-          <c:cat>
-            <c:strRef>
-              <c:f>Sheet1!$A$2:$A$6</c:f>
-              <c:strCache>
-                <c:ptCount val="4"/>
-                <c:pt idx="0">
-                  <c:v>신암동</c:v>
-                </c:pt>
-                <c:pt idx="1">
-                  <c:v>신천동</c:v>
-                </c:pt>
-                <c:pt idx="2">
-                  <c:v>효목동</c:v>
-                </c:pt>
-                <c:pt idx="3">
-                  <c:v>대현동</c:v>
-                </c:pt>
-              </c:strCache>
-            </c:strRef>
-          </c:cat>
-          <c:val>
-            <c:numRef>
-              <c:f>Sheet1!$B$2:$B$6</c:f>
-              <c:numCache>
-                <c:formatCode>##.0"억"</c:formatCode>
-                <c:ptCount val="4"/>
-                <c:pt idx="0">
-                  <c:v>8.1</c:v>
-                </c:pt>
-                <c:pt idx="1">
-                  <c:v>8.2</c:v>
-                </c:pt>
-                <c:pt idx="2">
-                  <c:v>6.2</c:v>
-                </c:pt>
-                <c:pt idx="3">
-                  <c:v>5.5</c:v>
-                </c:pt>
-              </c:numCache>
-            </c:numRef>
-          </c:val>
-          <c:smooth val="0"/>
-          <c:extLst>
-            <c:ext xmlns:c16="http://schemas.microsoft.com/office/drawing/2014/chart" uri="{C3380CC4-5D6E-409C-BE32-E72D297353CC}">
-              <c16:uniqueId val="{00000000-E85F-4867-A567-F7155FF26F4C}"/>
-            </c:ext>
-          </c:extLst>
-        </c:ser>
-        <c:ser>
-          <c:idx val="1"/>
-          <c:order val="1"/>
-          <c:tx>
-            <c:strRef>
-              <c:f>Sheet1!$C$1</c:f>
-              <c:strCache>
-                <c:ptCount val="1"/>
-                <c:pt idx="0">
-                  <c:v>저가</c:v>
-                </c:pt>
-              </c:strCache>
-            </c:strRef>
-          </c:tx>
-          <c:spPr>
-            <a:ln w="19050" cap="rnd">
-              <a:noFill/>
-              <a:round/>
-            </a:ln>
-            <a:effectLst/>
-          </c:spPr>
-          <c:marker>
-            <c:symbol val="circle"/>
-            <c:size val="5"/>
-            <c:spPr>
-              <a:solidFill>
-                <a:schemeClr val="bg1">
-                  <a:lumMod val="50000"/>
-                </a:schemeClr>
-              </a:solidFill>
-              <a:ln w="9525">
-                <a:noFill/>
-              </a:ln>
-              <a:effectLst/>
-            </c:spPr>
-          </c:marker>
-          <c:dLbls>
-            <c:spPr>
-              <a:noFill/>
-              <a:ln>
-                <a:noFill/>
-              </a:ln>
-              <a:effectLst/>
-            </c:spPr>
-            <c:txPr>
-              <a:bodyPr rot="0" spcFirstLastPara="1" vertOverflow="ellipsis" vert="horz" wrap="square" lIns="38100" tIns="19050" rIns="38100" bIns="19050" anchor="ctr" anchorCtr="1">
-                <a:spAutoFit/>
-              </a:bodyPr>
-              <a:lstStyle/>
-              <a:p>
-                <a:pPr>
-                  <a:defRPr sz="800" b="0" i="0" u="none" strike="noStrike" kern="1200" baseline="0">
-                    <a:solidFill>
-                      <a:schemeClr val="tx1">
-                        <a:lumMod val="75000"/>
-                        <a:lumOff val="25000"/>
-                      </a:schemeClr>
-                    </a:solidFill>
-                    <a:latin typeface="Noto Sans KR" panose="020B0200000000000000" pitchFamily="50" charset="-127"/>
-                    <a:ea typeface="Noto Sans KR" panose="020B0200000000000000" pitchFamily="50" charset="-127"/>
-                    <a:cs typeface="+mn-cs"/>
-                  </a:defRPr>
-                </a:pPr>
-                <a:endParaRPr lang="ko-KR"/>
-              </a:p>
-            </c:txPr>
-            <c:showLegendKey val="0"/>
-            <c:showVal val="1"/>
-            <c:showCatName val="0"/>
-            <c:showSerName val="0"/>
-            <c:showPercent val="0"/>
-            <c:showBubbleSize val="0"/>
-            <c:showLeaderLines val="0"/>
-            <c:extLst>
-              <c:ext xmlns:c15="http://schemas.microsoft.com/office/drawing/2012/chart" uri="{CE6537A1-D6FC-4f65-9D91-7224C49458BB}">
-                <c15:showLeaderLines val="1"/>
-                <c15:leaderLines>
-                  <c:spPr>
-                    <a:ln w="9525" cap="flat" cmpd="sng" algn="ctr">
-                      <a:solidFill>
-                        <a:schemeClr val="tx1">
-                          <a:lumMod val="35000"/>
-                          <a:lumOff val="65000"/>
-                        </a:schemeClr>
-                      </a:solidFill>
-                      <a:round/>
-                    </a:ln>
-                    <a:effectLst/>
-                  </c:spPr>
-                </c15:leaderLines>
-              </c:ext>
-            </c:extLst>
-          </c:dLbls>
-          <c:cat>
-            <c:strRef>
-              <c:f>Sheet1!$A$2:$A$6</c:f>
-              <c:strCache>
-                <c:ptCount val="4"/>
-                <c:pt idx="0">
-                  <c:v>신암동</c:v>
-                </c:pt>
-                <c:pt idx="1">
-                  <c:v>신천동</c:v>
-                </c:pt>
-                <c:pt idx="2">
-                  <c:v>효목동</c:v>
-                </c:pt>
-                <c:pt idx="3">
-                  <c:v>대현동</c:v>
-                </c:pt>
-              </c:strCache>
-            </c:strRef>
-          </c:cat>
-          <c:val>
-            <c:numRef>
-              <c:f>Sheet1!$C$2:$C$6</c:f>
-              <c:numCache>
-                <c:formatCode>##.0"억"</c:formatCode>
-                <c:ptCount val="4"/>
-                <c:pt idx="0">
-                  <c:v>5.5</c:v>
-                </c:pt>
-                <c:pt idx="1">
-                  <c:v>6.2</c:v>
-                </c:pt>
-                <c:pt idx="2">
-                  <c:v>5.1</c:v>
-                </c:pt>
-                <c:pt idx="3">
-                  <c:v>2.8</c:v>
-                </c:pt>
-              </c:numCache>
-            </c:numRef>
-          </c:val>
-          <c:smooth val="0"/>
-          <c:extLst>
-            <c:ext xmlns:c16="http://schemas.microsoft.com/office/drawing/2014/chart" uri="{C3380CC4-5D6E-409C-BE32-E72D297353CC}">
-              <c16:uniqueId val="{00000001-E85F-4867-A567-F7155FF26F4C}"/>
-            </c:ext>
-          </c:extLst>
-        </c:ser>
-        <c:ser>
-          <c:idx val="2"/>
-          <c:order val="2"/>
-          <c:tx>
-            <c:strRef>
-              <c:f>Sheet1!$D$1</c:f>
-              <c:strCache>
-                <c:ptCount val="1"/>
-                <c:pt idx="0">
-                  <c:v>평균가</c:v>
-                </c:pt>
-              </c:strCache>
-            </c:strRef>
-          </c:tx>
-          <c:spPr>
-            <a:ln w="19050" cap="rnd">
-              <a:noFill/>
-              <a:round/>
-            </a:ln>
-            <a:effectLst/>
-          </c:spPr>
-          <c:marker>
-            <c:symbol val="circle"/>
-            <c:size val="11"/>
-            <c:spPr>
-              <a:solidFill>
-                <a:srgbClr val="0E3B68"/>
-              </a:solidFill>
-              <a:ln w="9525">
-                <a:noFill/>
-              </a:ln>
-              <a:effectLst/>
-            </c:spPr>
-          </c:marker>
-          <c:dLbls>
-            <c:dLbl>
-              <c:idx val="2"/>
-              <c:layout>
-                <c:manualLayout>
-                  <c:x val="-5.2765899102875848E-3"/>
-                  <c:y val="3.0914203451693034E-3"/>
-                </c:manualLayout>
-              </c:layout>
-              <c:showLegendKey val="0"/>
-              <c:showVal val="1"/>
-              <c:showCatName val="0"/>
-              <c:showSerName val="0"/>
-              <c:showPercent val="0"/>
-              <c:showBubbleSize val="0"/>
-              <c:extLst>
-                <c:ext xmlns:c15="http://schemas.microsoft.com/office/drawing/2012/chart" uri="{CE6537A1-D6FC-4f65-9D91-7224C49458BB}"/>
-                <c:ext xmlns:c16="http://schemas.microsoft.com/office/drawing/2014/chart" uri="{C3380CC4-5D6E-409C-BE32-E72D297353CC}">
-                  <c16:uniqueId val="{00000006-E85F-4867-A567-F7155FF26F4C}"/>
-                </c:ext>
-              </c:extLst>
-            </c:dLbl>
-            <c:dLbl>
-              <c:idx val="3"/>
-              <c:layout>
-                <c:manualLayout>
-                  <c:x val="-5.2765899102876811E-3"/>
-                  <c:y val="2.0588351316168384E-2"/>
-                </c:manualLayout>
-              </c:layout>
-              <c:showLegendKey val="0"/>
-              <c:showVal val="1"/>
-              <c:showCatName val="0"/>
-              <c:showSerName val="0"/>
-              <c:showPercent val="0"/>
-              <c:showBubbleSize val="0"/>
-              <c:extLst>
-                <c:ext xmlns:c15="http://schemas.microsoft.com/office/drawing/2012/chart" uri="{CE6537A1-D6FC-4f65-9D91-7224C49458BB}"/>
-                <c:ext xmlns:c16="http://schemas.microsoft.com/office/drawing/2014/chart" uri="{C3380CC4-5D6E-409C-BE32-E72D297353CC}">
-                  <c16:uniqueId val="{00000007-E85F-4867-A567-F7155FF26F4C}"/>
-                </c:ext>
-              </c:extLst>
-            </c:dLbl>
-            <c:dLbl>
-              <c:idx val="4"/>
-              <c:layout>
-                <c:manualLayout>
-                  <c:x val="-2.6382949551437924E-3"/>
-                  <c:y val="0"/>
-                </c:manualLayout>
-              </c:layout>
-              <c:showLegendKey val="0"/>
-              <c:showVal val="1"/>
-              <c:showCatName val="0"/>
-              <c:showSerName val="0"/>
-              <c:showPercent val="0"/>
-              <c:showBubbleSize val="0"/>
-              <c:extLst>
-                <c:ext xmlns:c15="http://schemas.microsoft.com/office/drawing/2012/chart" uri="{CE6537A1-D6FC-4f65-9D91-7224C49458BB}"/>
-                <c:ext xmlns:c16="http://schemas.microsoft.com/office/drawing/2014/chart" uri="{C3380CC4-5D6E-409C-BE32-E72D297353CC}">
-                  <c16:uniqueId val="{00000008-E85F-4867-A567-F7155FF26F4C}"/>
-                </c:ext>
-              </c:extLst>
-            </c:dLbl>
-            <c:spPr>
-              <a:noFill/>
-              <a:ln>
-                <a:noFill/>
-              </a:ln>
-              <a:effectLst/>
-            </c:spPr>
-            <c:txPr>
-              <a:bodyPr rot="0" spcFirstLastPara="1" vertOverflow="ellipsis" vert="horz" wrap="square" lIns="38100" tIns="19050" rIns="38100" bIns="19050" anchor="ctr" anchorCtr="1">
-                <a:spAutoFit/>
-              </a:bodyPr>
-              <a:lstStyle/>
-              <a:p>
-                <a:pPr>
-                  <a:defRPr sz="900" b="1" i="0" u="none" strike="noStrike" kern="1200" baseline="0">
-                    <a:solidFill>
-                      <a:srgbClr val="002941"/>
-                    </a:solidFill>
-                    <a:latin typeface="Noto Sans KR" panose="020B0200000000000000" pitchFamily="50" charset="-127"/>
-                    <a:ea typeface="Noto Sans KR" panose="020B0200000000000000" pitchFamily="50" charset="-127"/>
-                    <a:cs typeface="+mn-cs"/>
-                  </a:defRPr>
-                </a:pPr>
-                <a:endParaRPr lang="ko-KR"/>
-              </a:p>
-            </c:txPr>
-            <c:showLegendKey val="0"/>
-            <c:showVal val="1"/>
-            <c:showCatName val="0"/>
-            <c:showSerName val="0"/>
-            <c:showPercent val="0"/>
-            <c:showBubbleSize val="0"/>
-            <c:showLeaderLines val="0"/>
-            <c:extLst>
-              <c:ext xmlns:c15="http://schemas.microsoft.com/office/drawing/2012/chart" uri="{CE6537A1-D6FC-4f65-9D91-7224C49458BB}">
-                <c15:showLeaderLines val="0"/>
-              </c:ext>
-            </c:extLst>
-          </c:dLbls>
-          <c:cat>
-            <c:strRef>
-              <c:f>Sheet1!$A$2:$A$6</c:f>
-              <c:strCache>
-                <c:ptCount val="4"/>
-                <c:pt idx="0">
-                  <c:v>신암동</c:v>
-                </c:pt>
-                <c:pt idx="1">
-                  <c:v>신천동</c:v>
-                </c:pt>
-                <c:pt idx="2">
-                  <c:v>효목동</c:v>
-                </c:pt>
-                <c:pt idx="3">
-                  <c:v>대현동</c:v>
-                </c:pt>
-              </c:strCache>
-            </c:strRef>
-          </c:cat>
-          <c:val>
-            <c:numRef>
-              <c:f>Sheet1!$D$2:$D$6</c:f>
-              <c:numCache>
-                <c:formatCode>##.0"억"</c:formatCode>
-                <c:ptCount val="4"/>
-                <c:pt idx="0">
-                  <c:v>6.9</c:v>
-                </c:pt>
-                <c:pt idx="1">
-                  <c:v>6.9</c:v>
-                </c:pt>
-                <c:pt idx="2">
-                  <c:v>5.3</c:v>
-                </c:pt>
-                <c:pt idx="3">
-                  <c:v>3.5</c:v>
-                </c:pt>
-              </c:numCache>
-            </c:numRef>
-          </c:val>
-          <c:smooth val="0"/>
-          <c:extLst>
-            <c:ext xmlns:c16="http://schemas.microsoft.com/office/drawing/2014/chart" uri="{C3380CC4-5D6E-409C-BE32-E72D297353CC}">
-              <c16:uniqueId val="{00000002-E85F-4867-A567-F7155FF26F4C}"/>
-            </c:ext>
-          </c:extLst>
-        </c:ser>
-        <c:dLbls>
-          <c:showLegendKey val="0"/>
-          <c:showVal val="0"/>
-          <c:showCatName val="0"/>
-          <c:showSerName val="0"/>
-          <c:showPercent val="0"/>
-          <c:showBubbleSize val="0"/>
-        </c:dLbls>
-        <c:hiLowLines>
-          <c:spPr>
-            <a:ln w="9525" cap="flat" cmpd="sng" algn="ctr">
-              <a:solidFill>
-                <a:schemeClr val="bg1">
-                  <a:lumMod val="50000"/>
-                </a:schemeClr>
-              </a:solidFill>
-              <a:round/>
-            </a:ln>
-            <a:effectLst/>
-          </c:spPr>
-        </c:hiLowLines>
-        <c:axId val="56828320"/>
-        <c:axId val="513862112"/>
-      </c:stockChart>
-      <c:catAx>
-        <c:axId val="56828320"/>
-        <c:scaling>
-          <c:orientation val="minMax"/>
-        </c:scaling>
-        <c:delete val="0"/>
-        <c:axPos val="b"/>
-        <c:numFmt formatCode="General" sourceLinked="1"/>
-        <c:majorTickMark val="out"/>
-        <c:minorTickMark val="none"/>
-        <c:tickLblPos val="nextTo"/>
-        <c:spPr>
-          <a:noFill/>
-          <a:ln w="9525" cap="flat" cmpd="sng" algn="ctr">
-            <a:solidFill>
-              <a:schemeClr val="tx1">
-                <a:lumMod val="15000"/>
-                <a:lumOff val="85000"/>
-              </a:schemeClr>
-            </a:solidFill>
-            <a:round/>
-          </a:ln>
-          <a:effectLst/>
-        </c:spPr>
-        <c:txPr>
-          <a:bodyPr rot="-60000000" spcFirstLastPara="1" vertOverflow="ellipsis" vert="horz" wrap="square" anchor="ctr" anchorCtr="1"/>
-          <a:lstStyle/>
-          <a:p>
-            <a:pPr>
-              <a:defRPr sz="900" b="0" i="0" u="none" strike="noStrike" kern="1200" baseline="0">
-                <a:solidFill>
-                  <a:schemeClr val="tx1">
-                    <a:lumMod val="65000"/>
-                    <a:lumOff val="35000"/>
-                  </a:schemeClr>
-                </a:solidFill>
-                <a:latin typeface="Noto Sans KR" panose="020B0200000000000000" pitchFamily="50" charset="-127"/>
-                <a:ea typeface="Noto Sans KR" panose="020B0200000000000000" pitchFamily="50" charset="-127"/>
-                <a:cs typeface="+mn-cs"/>
-              </a:defRPr>
-            </a:pPr>
-            <a:endParaRPr lang="ko-KR"/>
-          </a:p>
-        </c:txPr>
-        <c:crossAx val="513862112"/>
-        <c:crosses val="autoZero"/>
-        <c:auto val="1"/>
-        <c:lblAlgn val="ctr"/>
-        <c:lblOffset val="100"/>
-        <c:noMultiLvlLbl val="0"/>
-      </c:catAx>
-      <c:valAx>
-        <c:axId val="513862112"/>
-        <c:scaling>
-          <c:orientation val="minMax"/>
-          <c:max val="19"/>
-          <c:min val="5"/>
-        </c:scaling>
-        <c:delete val="0"/>
-        <c:axPos val="l"/>
-        <c:majorGridlines>
-          <c:spPr>
-            <a:ln w="6350" cap="flat" cmpd="sng" algn="ctr">
-              <a:solidFill>
-                <a:schemeClr val="bg1">
-                  <a:lumMod val="85000"/>
-                </a:schemeClr>
-              </a:solidFill>
-              <a:round/>
-            </a:ln>
-            <a:effectLst/>
-          </c:spPr>
-        </c:majorGridlines>
-        <c:numFmt formatCode="##&quot;억&quot;" sourceLinked="0"/>
-        <c:majorTickMark val="none"/>
-        <c:minorTickMark val="none"/>
-        <c:tickLblPos val="nextTo"/>
-        <c:spPr>
-          <a:noFill/>
-          <a:ln>
-            <a:noFill/>
-          </a:ln>
-          <a:effectLst/>
-        </c:spPr>
-        <c:txPr>
-          <a:bodyPr rot="-60000000" spcFirstLastPara="1" vertOverflow="ellipsis" vert="horz" wrap="square" anchor="ctr" anchorCtr="1"/>
-          <a:lstStyle/>
-          <a:p>
-            <a:pPr>
-              <a:defRPr sz="900" b="0" i="0" u="none" strike="noStrike" kern="1200" baseline="0">
-                <a:solidFill>
-                  <a:schemeClr val="tx1">
-                    <a:lumMod val="65000"/>
-                    <a:lumOff val="35000"/>
-                  </a:schemeClr>
-                </a:solidFill>
-                <a:latin typeface="Noto Sans KR" panose="020B0200000000000000" pitchFamily="50" charset="-127"/>
-                <a:ea typeface="Noto Sans KR" panose="020B0200000000000000" pitchFamily="50" charset="-127"/>
-                <a:cs typeface="+mn-cs"/>
-              </a:defRPr>
-            </a:pPr>
-            <a:endParaRPr lang="ko-KR"/>
-          </a:p>
-        </c:txPr>
-        <c:crossAx val="56828320"/>
-        <c:crosses val="autoZero"/>
-        <c:crossBetween val="between"/>
-        <c:majorUnit val="3"/>
-      </c:valAx>
-      <c:spPr>
-        <a:noFill/>
-        <a:ln>
-          <a:noFill/>
-        </a:ln>
-        <a:effectLst/>
-      </c:spPr>
-    </c:plotArea>
-    <c:plotVisOnly val="1"/>
-    <c:dispBlanksAs val="gap"/>
-    <c:showDLblsOverMax val="0"/>
-    <c:extLst>
-      <c:ext xmlns:c16r3="http://schemas.microsoft.com/office/drawing/2017/03/chart" uri="{56B9EC1D-385E-4148-901F-78D8002777C0}">
-        <c16r3:dataDisplayOptions16>
-          <c16r3:dispNaAsBlank val="1"/>
-        </c16r3:dataDisplayOptions16>
-      </c:ext>
-    </c:extLst>
-  </c:chart>
-  <c:spPr>
-    <a:noFill/>
-    <a:ln>
-      <a:noFill/>
-    </a:ln>
-    <a:effectLst/>
-  </c:spPr>
-  <c:txPr>
-    <a:bodyPr/>
-    <a:lstStyle/>
-    <a:p>
-      <a:pPr>
-        <a:defRPr/>
-      </a:pPr>
-      <a:endParaRPr lang="ko-KR"/>
-    </a:p>
-  </c:txPr>
-  <c:externalData r:id="rId3">
     <c:autoUpdate val="0"/>
   </c:externalData>
 </c:chartSpace>
@@ -3116,7 +2268,7 @@
           <a:p>
             <a:fld id="{5538AA42-F437-4551-9DC4-B6AE43CA235B}" type="datetimeFigureOut">
               <a:rPr lang="ko-KR" altLang="en-US" smtClean="0"/>
-              <a:t>2026-08-07</a:t>
+              <a:t>2026-08-10</a:t>
             </a:fld>
             <a:endParaRPr lang="ko-KR" altLang="en-US"/>
           </a:p>
@@ -3309,7 +2461,7 @@
           <a:p>
             <a:fld id="{57F3730F-E94E-471A-B925-DECDBFD540D2}" type="datetimeFigureOut">
               <a:rPr lang="ko-KR" altLang="en-US" smtClean="0"/>
-              <a:t>2026-08-07</a:t>
+              <a:t>2026-08-10</a:t>
             </a:fld>
             <a:endParaRPr lang="ko-KR" altLang="en-US"/>
           </a:p>
@@ -3627,7 +2779,7 @@
           <a:bodyPr/>
           <a:lstStyle/>
           <a:p>
-            <a:endParaRPr lang="ko-KR" altLang="en-US" dirty="0"/>
+            <a:endParaRPr lang="ko-KR" altLang="en-US"/>
           </a:p>
         </p:txBody>
       </p:sp>
@@ -5998,7 +5150,7 @@
           <a:p>
             <a:fld id="{77C1361C-916F-494B-9340-D474A64F2834}" type="datetimeFigureOut">
               <a:rPr lang="ko-KR" altLang="en-US" smtClean="0"/>
-              <a:t>2026-08-07</a:t>
+              <a:t>2026-08-10</a:t>
             </a:fld>
             <a:endParaRPr lang="ko-KR" altLang="en-US"/>
           </a:p>
@@ -6426,10 +5578,10 @@
       </p:grpSpPr>
       <p:sp>
         <p:nvSpPr>
-          <p:cNvPr id="10" name="직사각형 9">
+          <p:cNvPr id="53" name="Rectangle 57">
             <a:extLst>
               <a:ext uri="{FF2B5EF4-FFF2-40B4-BE49-F238E27FC236}">
-                <a16:creationId xmlns:a16="http://schemas.microsoft.com/office/drawing/2014/main" id="{01DA7BEF-30D7-53AE-5176-39FFE1A89199}"/>
+                <a16:creationId xmlns:a16="http://schemas.microsoft.com/office/drawing/2014/main" id="{FD2BF451-D273-EADB-8CD4-2E77A9672723}"/>
               </a:ext>
             </a:extLst>
           </p:cNvPr>
@@ -6438,31 +5590,29 @@
         </p:nvSpPr>
         <p:spPr>
           <a:xfrm>
-            <a:off x="4400562" y="4804513"/>
-            <a:ext cx="781038" cy="1707412"/>
+            <a:off x="511209" y="4264623"/>
+            <a:ext cx="5222773" cy="304225"/>
           </a:xfrm>
-          <a:prstGeom prst="rect">
-            <a:avLst/>
+          <a:prstGeom prst="roundRect">
+            <a:avLst>
+              <a:gd name="adj" fmla="val 752"/>
+            </a:avLst>
           </a:prstGeom>
           <a:solidFill>
-            <a:srgbClr val="0E3B68">
-              <a:alpha val="16000"/>
-            </a:srgbClr>
+            <a:srgbClr val="F6F5F2"/>
           </a:solidFill>
-          <a:ln w="12700">
+          <a:ln>
             <a:noFill/>
           </a:ln>
         </p:spPr>
         <p:style>
-          <a:lnRef idx="2">
-            <a:schemeClr val="accent1">
-              <a:shade val="15000"/>
-            </a:schemeClr>
+          <a:lnRef idx="1">
+            <a:schemeClr val="accent1"/>
           </a:lnRef>
-          <a:fillRef idx="1">
+          <a:fillRef idx="3">
             <a:schemeClr val="accent1"/>
           </a:fillRef>
-          <a:effectRef idx="0">
+          <a:effectRef idx="2">
             <a:schemeClr val="accent1"/>
           </a:effectRef>
           <a:fontRef idx="minor">
@@ -6474,7 +5624,93 @@
           <a:lstStyle/>
           <a:p>
             <a:pPr algn="ctr"/>
-            <a:endParaRPr lang="ko-KR" altLang="en-US"/>
+            <a:endParaRPr>
+              <a:latin typeface="Noto Sans KR" panose="020B0200000000000000" pitchFamily="50" charset="-127"/>
+              <a:ea typeface="Noto Sans KR" panose="020B0200000000000000" pitchFamily="50" charset="-127"/>
+            </a:endParaRPr>
+          </a:p>
+        </p:txBody>
+      </p:sp>
+      <p:graphicFrame>
+        <p:nvGraphicFramePr>
+          <p:cNvPr id="60" name="차트 59">
+            <a:extLst>
+              <a:ext uri="{FF2B5EF4-FFF2-40B4-BE49-F238E27FC236}">
+                <a16:creationId xmlns:a16="http://schemas.microsoft.com/office/drawing/2014/main" id="{C844CA87-2D4F-197A-13E4-3C024153E033}"/>
+              </a:ext>
+            </a:extLst>
+          </p:cNvPr>
+          <p:cNvGraphicFramePr/>
+          <p:nvPr>
+            <p:extLst>
+              <p:ext uri="{D42A27DB-BD31-4B8C-83A1-F6EECF244321}">
+                <p14:modId xmlns:p14="http://schemas.microsoft.com/office/powerpoint/2010/main" val="2803662354"/>
+              </p:ext>
+            </p:extLst>
+          </p:nvPr>
+        </p:nvGraphicFramePr>
+        <p:xfrm>
+          <a:off x="475294" y="4836742"/>
+          <a:ext cx="5222773" cy="1738683"/>
+        </p:xfrm>
+        <a:graphic>
+          <a:graphicData uri="http://schemas.openxmlformats.org/drawingml/2006/chart">
+            <c:chart xmlns:c="http://schemas.openxmlformats.org/drawingml/2006/chart" xmlns:r="http://schemas.openxmlformats.org/officeDocument/2006/relationships" r:id="rId3"/>
+          </a:graphicData>
+        </a:graphic>
+      </p:graphicFrame>
+      <p:sp>
+        <p:nvSpPr>
+          <p:cNvPr id="73" name="Rectangle 57">
+            <a:extLst>
+              <a:ext uri="{FF2B5EF4-FFF2-40B4-BE49-F238E27FC236}">
+                <a16:creationId xmlns:a16="http://schemas.microsoft.com/office/drawing/2014/main" id="{B2616656-2AAB-CDC0-E93E-45FB802936E1}"/>
+              </a:ext>
+            </a:extLst>
+          </p:cNvPr>
+          <p:cNvSpPr/>
+          <p:nvPr/>
+        </p:nvSpPr>
+        <p:spPr>
+          <a:xfrm>
+            <a:off x="6135567" y="5436432"/>
+            <a:ext cx="5596982" cy="1094845"/>
+          </a:xfrm>
+          <a:prstGeom prst="roundRect">
+            <a:avLst>
+              <a:gd name="adj" fmla="val 752"/>
+            </a:avLst>
+          </a:prstGeom>
+          <a:solidFill>
+            <a:srgbClr val="F6F5F2"/>
+          </a:solidFill>
+          <a:ln>
+            <a:noFill/>
+          </a:ln>
+        </p:spPr>
+        <p:style>
+          <a:lnRef idx="1">
+            <a:schemeClr val="accent1"/>
+          </a:lnRef>
+          <a:fillRef idx="3">
+            <a:schemeClr val="accent1"/>
+          </a:fillRef>
+          <a:effectRef idx="2">
+            <a:schemeClr val="accent1"/>
+          </a:effectRef>
+          <a:fontRef idx="minor">
+            <a:schemeClr val="lt1"/>
+          </a:fontRef>
+        </p:style>
+        <p:txBody>
+          <a:bodyPr rtlCol="0" anchor="ctr"/>
+          <a:lstStyle/>
+          <a:p>
+            <a:pPr algn="ctr"/>
+            <a:endParaRPr>
+              <a:latin typeface="Noto Sans KR" panose="020B0200000000000000" pitchFamily="50" charset="-127"/>
+              <a:ea typeface="Noto Sans KR" panose="020B0200000000000000" pitchFamily="50" charset="-127"/>
+            </a:endParaRPr>
           </a:p>
         </p:txBody>
       </p:sp>
@@ -6499,7 +5735,7 @@
             <a:avLst/>
           </a:prstGeom>
           <a:solidFill>
-            <a:srgbClr val="0E3B68"/>
+            <a:schemeClr val="tx1"/>
           </a:solidFill>
           <a:ln>
             <a:noFill/>
@@ -6526,6 +5762,9 @@
           <a:p>
             <a:pPr algn="ctr"/>
             <a:endParaRPr>
+              <a:solidFill>
+                <a:schemeClr val="tx1"/>
+              </a:solidFill>
               <a:latin typeface="Noto Sans KR" panose="020B0200000000000000" pitchFamily="50" charset="-127"/>
               <a:ea typeface="Noto Sans KR" panose="020B0200000000000000" pitchFamily="50" charset="-127"/>
             </a:endParaRPr>
@@ -6566,40 +5805,35 @@
               </a:lnSpc>
             </a:pPr>
             <a:r>
+              <a:rPr lang="ko-KR" altLang="en-US" sz="2000" b="1" dirty="0" err="1">
+                <a:latin typeface="Noto Sans KR" panose="020B0200000000000000" pitchFamily="50" charset="-127"/>
+                <a:ea typeface="Noto Sans KR" panose="020B0200000000000000" pitchFamily="50" charset="-127"/>
+              </a:rPr>
+              <a:t>신암4구역 시장조사 보고서</a:t>
+            </a:r>
+            <a:r>
               <a:rPr lang="ko-KR" altLang="en-US" sz="2000" b="1" dirty="0">
-                <a:solidFill>
-                  <a:srgbClr val="0E3B68"/>
-                </a:solidFill>
-                <a:latin typeface="Noto Sans KR" panose="020B0200000000000000" pitchFamily="50" charset="-127"/>
-                <a:ea typeface="Noto Sans KR" panose="020B0200000000000000" pitchFamily="50" charset="-127"/>
-              </a:rPr>
-              <a:t>신암4구역 시장조사 보고서</a:t>
-            </a:r>
-            <a:r>
-              <a:rPr lang="en-US" altLang="ko-KR" sz="2000" b="1" dirty="0">
-                <a:solidFill>
-                  <a:srgbClr val="0E3B68"/>
-                </a:solidFill>
                 <a:latin typeface="Noto Sans KR" panose="020B0200000000000000" pitchFamily="50" charset="-127"/>
                 <a:ea typeface="Noto Sans KR" panose="020B0200000000000000" pitchFamily="50" charset="-127"/>
               </a:rPr>
               <a:t/>
             </a:r>
             <a:r>
+              <a:rPr lang="ko-KR" altLang="en-US" sz="2000" b="1" dirty="0" err="1">
+                <a:latin typeface="Noto Sans KR" panose="020B0200000000000000" pitchFamily="50" charset="-127"/>
+                <a:ea typeface="Noto Sans KR" panose="020B0200000000000000" pitchFamily="50" charset="-127"/>
+              </a:rPr>
+              <a:t/>
+            </a:r>
+            <a:r>
               <a:rPr lang="ko-KR" altLang="en-US" sz="2000" b="1" dirty="0">
-                <a:solidFill>
-                  <a:srgbClr val="0E3B68"/>
-                </a:solidFill>
                 <a:latin typeface="Noto Sans KR" panose="020B0200000000000000" pitchFamily="50" charset="-127"/>
                 <a:ea typeface="Noto Sans KR" panose="020B0200000000000000" pitchFamily="50" charset="-127"/>
               </a:rPr>
               <a:t/>
             </a:r>
             <a:r>
-              <a:rPr lang="en-US" altLang="ko-KR" sz="2000" b="1" dirty="0">
-                <a:solidFill>
-                  <a:srgbClr val="0E3B68"/>
-                </a:solidFill>
+              <a:rPr sz="2000" b="1" dirty="0">
                 <a:latin typeface="Noto Sans KR" panose="020B0200000000000000" pitchFamily="50" charset="-127"/>
                 <a:ea typeface="Noto Sans KR" panose="020B0200000000000000" pitchFamily="50" charset="-127"/>
               </a:rPr>
@@ -6607,38 +5841,12 @@
             </a:r>
             <a:r>
               <a:rPr lang="ko-KR" altLang="en-US" sz="2000" b="1" dirty="0">
-                <a:solidFill>
-                  <a:srgbClr val="0E3B68"/>
-                </a:solidFill>
                 <a:latin typeface="Noto Sans KR" panose="020B0200000000000000" pitchFamily="50" charset="-127"/>
                 <a:ea typeface="Noto Sans KR" panose="020B0200000000000000" pitchFamily="50" charset="-127"/>
               </a:rPr>
               <a:t/>
             </a:r>
-            <a:r>
-              <a:rPr sz="2000" b="1" dirty="0">
-                <a:solidFill>
-                  <a:srgbClr val="0E3B68"/>
-                </a:solidFill>
-                <a:latin typeface="Noto Sans KR" panose="020B0200000000000000" pitchFamily="50" charset="-127"/>
-                <a:ea typeface="Noto Sans KR" panose="020B0200000000000000" pitchFamily="50" charset="-127"/>
-              </a:rPr>
-              <a:t/>
-            </a:r>
-            <a:r>
-              <a:rPr lang="ko-KR" altLang="en-US" sz="2000" b="1" dirty="0">
-                <a:solidFill>
-                  <a:srgbClr val="0E3B68"/>
-                </a:solidFill>
-                <a:latin typeface="Noto Sans KR" panose="020B0200000000000000" pitchFamily="50" charset="-127"/>
-                <a:ea typeface="Noto Sans KR" panose="020B0200000000000000" pitchFamily="50" charset="-127"/>
-              </a:rPr>
-              <a:t/>
-            </a:r>
             <a:endParaRPr sz="2000" b="1" dirty="0">
-              <a:solidFill>
-                <a:srgbClr val="0E3B68"/>
-              </a:solidFill>
               <a:latin typeface="Noto Sans KR" panose="020B0200000000000000" pitchFamily="50" charset="-127"/>
               <a:ea typeface="Noto Sans KR" panose="020B0200000000000000" pitchFamily="50" charset="-127"/>
             </a:endParaRPr>
@@ -6689,7 +5897,7 @@
               <a:t>’26.08.09  ㅣ  건축·주택마케팅팀</a:t>
             </a:r>
             <a:r>
-              <a:rPr sz="900" b="0" dirty="0">
+              <a:rPr sz="900" b="0">
                 <a:solidFill>
                   <a:srgbClr val="666666"/>
                 </a:solidFill>
@@ -6699,7 +5907,7 @@
               <a:t/>
             </a:r>
             <a:r>
-              <a:rPr lang="en-US" altLang="ko-KR" sz="900" b="0" dirty="0">
+              <a:rPr lang="en-US" sz="900" b="0">
                 <a:solidFill>
                   <a:srgbClr val="666666"/>
                 </a:solidFill>
@@ -6709,7 +5917,7 @@
               <a:t/>
             </a:r>
             <a:r>
-              <a:rPr sz="900" b="0" dirty="0">
+              <a:rPr sz="900" b="0">
                 <a:solidFill>
                   <a:srgbClr val="666666"/>
                 </a:solidFill>
@@ -6719,7 +5927,7 @@
               <a:t/>
             </a:r>
             <a:r>
-              <a:rPr lang="en-US" sz="900" b="0" dirty="0">
+              <a:rPr lang="en-US" sz="900" b="0">
                 <a:solidFill>
                   <a:srgbClr val="666666"/>
                 </a:solidFill>
@@ -6729,7 +5937,7 @@
               <a:t/>
             </a:r>
             <a:r>
-              <a:rPr sz="900" b="0" dirty="0">
+              <a:rPr sz="900" b="0">
                 <a:solidFill>
                   <a:srgbClr val="666666"/>
                 </a:solidFill>
@@ -6762,7 +5970,7 @@
             <a:avLst/>
           </a:prstGeom>
           <a:solidFill>
-            <a:srgbClr val="0E3B68"/>
+            <a:srgbClr val="0070C0"/>
           </a:solidFill>
           <a:ln>
             <a:noFill/>
@@ -6829,18 +6037,38 @@
               </a:lnSpc>
             </a:pPr>
             <a:r>
-              <a:rPr lang="ko-KR" altLang="en-US" sz="1200" b="1">
-                <a:solidFill>
-                  <a:srgbClr val="0E3B68"/>
-                </a:solidFill>
-                <a:latin typeface="Noto Sans KR" panose="020B0200000000000000" pitchFamily="50" charset="-127"/>
-                <a:ea typeface="Noto Sans KR" panose="020B0200000000000000" pitchFamily="50" charset="-127"/>
-              </a:rPr>
-              <a:t>지역 등급</a:t>
-            </a:r>
-            <a:endParaRPr sz="1200" b="1">
+              <a:rPr sz="1200" b="1" dirty="0" err="1">
+                <a:solidFill>
+                  <a:srgbClr val="0070C0"/>
+                </a:solidFill>
+                <a:latin typeface="Noto Sans KR" panose="020B0200000000000000" pitchFamily="50" charset="-127"/>
+                <a:ea typeface="Noto Sans KR" panose="020B0200000000000000" pitchFamily="50" charset="-127"/>
+              </a:rPr>
+              <a:t>지역</a:t>
+            </a:r>
+            <a:r>
+              <a:rPr lang="en-US" sz="1200" b="1" dirty="0">
+                <a:solidFill>
+                  <a:srgbClr val="0070C0"/>
+                </a:solidFill>
+                <a:latin typeface="Noto Sans KR" panose="020B0200000000000000" pitchFamily="50" charset="-127"/>
+                <a:ea typeface="Noto Sans KR" panose="020B0200000000000000" pitchFamily="50" charset="-127"/>
+              </a:rPr>
+              <a:t> </a:t>
+            </a:r>
+            <a:r>
+              <a:rPr sz="1200" b="1" dirty="0" err="1">
+                <a:solidFill>
+                  <a:srgbClr val="0070C0"/>
+                </a:solidFill>
+                <a:latin typeface="Noto Sans KR" panose="020B0200000000000000" pitchFamily="50" charset="-127"/>
+                <a:ea typeface="Noto Sans KR" panose="020B0200000000000000" pitchFamily="50" charset="-127"/>
+              </a:rPr>
+              <a:t>등급</a:t>
+            </a:r>
+            <a:endParaRPr sz="1200" b="1" dirty="0">
               <a:solidFill>
-                <a:srgbClr val="0E3B68"/>
+                <a:srgbClr val="0070C0"/>
               </a:solidFill>
               <a:latin typeface="Noto Sans KR" panose="020B0200000000000000" pitchFamily="50" charset="-127"/>
               <a:ea typeface="Noto Sans KR" panose="020B0200000000000000" pitchFamily="50" charset="-127"/>
@@ -6869,7 +6097,7 @@
             <a:avLst/>
           </a:prstGeom>
           <a:solidFill>
-            <a:srgbClr val="0E3B68"/>
+            <a:srgbClr val="0070C0"/>
           </a:solidFill>
           <a:ln>
             <a:noFill/>
@@ -6936,9 +6164,9 @@
               </a:lnSpc>
             </a:pPr>
             <a:r>
-              <a:rPr lang="ko-KR" altLang="en-US" sz="1200" b="1" dirty="0" err="1">
-                <a:solidFill>
-                  <a:srgbClr val="0E3B68"/>
+              <a:rPr sz="1200" b="1" dirty="0" err="1">
+                <a:solidFill>
+                  <a:srgbClr val="0070C0"/>
                 </a:solidFill>
                 <a:latin typeface="Noto Sans KR" panose="020B0200000000000000" pitchFamily="50" charset="-127"/>
                 <a:ea typeface="Noto Sans KR" panose="020B0200000000000000" pitchFamily="50" charset="-127"/>
@@ -6946,9 +6174,9 @@
               <a:t>지역</a:t>
             </a:r>
             <a:r>
-              <a:rPr lang="ko-KR" altLang="en-US" sz="1200" b="1" dirty="0">
-                <a:solidFill>
-                  <a:srgbClr val="0E3B68"/>
+              <a:rPr lang="en-US" sz="1200" b="1" dirty="0">
+                <a:solidFill>
+                  <a:srgbClr val="0070C0"/>
                 </a:solidFill>
                 <a:latin typeface="Noto Sans KR" panose="020B0200000000000000" pitchFamily="50" charset="-127"/>
                 <a:ea typeface="Noto Sans KR" panose="020B0200000000000000" pitchFamily="50" charset="-127"/>
@@ -6956,18 +6184,18 @@
               <a:t> </a:t>
             </a:r>
             <a:r>
-              <a:rPr lang="ko-KR" altLang="en-US" sz="1200" b="1" dirty="0" err="1">
-                <a:solidFill>
-                  <a:srgbClr val="0E3B68"/>
+              <a:rPr sz="1200" b="1" dirty="0" err="1">
+                <a:solidFill>
+                  <a:srgbClr val="0070C0"/>
                 </a:solidFill>
                 <a:latin typeface="Noto Sans KR" panose="020B0200000000000000" pitchFamily="50" charset="-127"/>
                 <a:ea typeface="Noto Sans KR" panose="020B0200000000000000" pitchFamily="50" charset="-127"/>
               </a:rPr>
               <a:t>위계</a:t>
             </a:r>
-            <a:endParaRPr sz="1200" b="1">
+            <a:endParaRPr sz="1200" b="1" dirty="0">
               <a:solidFill>
-                <a:srgbClr val="0E3B68"/>
+                <a:srgbClr val="0070C0"/>
               </a:solidFill>
               <a:latin typeface="Noto Sans KR" panose="020B0200000000000000" pitchFamily="50" charset="-127"/>
               <a:ea typeface="Noto Sans KR" panose="020B0200000000000000" pitchFamily="50" charset="-127"/>
@@ -6989,14 +6217,14 @@
         </p:nvSpPr>
         <p:spPr>
           <a:xfrm>
-            <a:off x="5431630" y="1961544"/>
-            <a:ext cx="6300919" cy="305923"/>
+            <a:off x="6141544" y="2177575"/>
+            <a:ext cx="5591005" cy="285340"/>
           </a:xfrm>
           <a:prstGeom prst="roundRect">
             <a:avLst/>
           </a:prstGeom>
           <a:solidFill>
-            <a:srgbClr val="0E3B68"/>
+            <a:srgbClr val="0070C0"/>
           </a:solidFill>
           <a:ln>
             <a:noFill/>
@@ -7044,18 +6272,18 @@
           <p:nvPr>
             <p:extLst>
               <p:ext uri="{D42A27DB-BD31-4B8C-83A1-F6EECF244321}">
-                <p14:modId xmlns:p14="http://schemas.microsoft.com/office/powerpoint/2010/main" val="3677764692"/>
+                <p14:modId xmlns:p14="http://schemas.microsoft.com/office/powerpoint/2010/main" val="2049816512"/>
               </p:ext>
             </p:extLst>
           </p:nvPr>
         </p:nvGraphicFramePr>
         <p:xfrm>
-          <a:off x="5465484" y="2249078"/>
-          <a:ext cx="3516783" cy="1743356"/>
+          <a:off x="6141544" y="2492918"/>
+          <a:ext cx="3177233" cy="1743356"/>
         </p:xfrm>
         <a:graphic>
           <a:graphicData uri="http://schemas.openxmlformats.org/drawingml/2006/chart">
-            <c:chart xmlns:c="http://schemas.openxmlformats.org/drawingml/2006/chart" xmlns:r="http://schemas.openxmlformats.org/officeDocument/2006/relationships" r:id="rId3"/>
+            <c:chart xmlns:c="http://schemas.openxmlformats.org/drawingml/2006/chart" xmlns:r="http://schemas.openxmlformats.org/officeDocument/2006/relationships" r:id="rId4"/>
           </a:graphicData>
         </a:graphic>
       </p:graphicFrame>
@@ -7073,7 +6301,7 @@
         </p:nvSpPr>
         <p:spPr>
           <a:xfrm>
-            <a:off x="5893790" y="3396748"/>
+            <a:off x="6500215" y="3640588"/>
             <a:ext cx="531519" cy="101503"/>
           </a:xfrm>
           <a:prstGeom prst="rect">
@@ -7093,7 +6321,7 @@
               </a:lnSpc>
             </a:pPr>
             <a:r>
-              <a:rPr lang="en-US" sz="600" b="1">
+              <a:rPr lang="en-US" sz="600" b="1" dirty="0">
                 <a:solidFill>
                   <a:schemeClr val="bg1"/>
                 </a:solidFill>
@@ -7119,7 +6347,7 @@
         </p:nvSpPr>
         <p:spPr>
           <a:xfrm>
-            <a:off x="6918317" y="3396748"/>
+            <a:off x="7432667" y="3640588"/>
             <a:ext cx="531519" cy="101503"/>
           </a:xfrm>
           <a:prstGeom prst="rect">
@@ -7139,9 +6367,9 @@
               </a:lnSpc>
             </a:pPr>
             <a:r>
-              <a:rPr lang="en-US" sz="600" b="1">
-                <a:solidFill>
-                  <a:schemeClr val="bg1"/>
+              <a:rPr lang="en-US" sz="600" b="1" dirty="0">
+                <a:solidFill>
+                  <a:srgbClr val="002941"/>
                 </a:solidFill>
                 <a:latin typeface="Noto Sans KR" panose="020B0200000000000000" pitchFamily="50" charset="-127"/>
                 <a:ea typeface="Noto Sans KR" panose="020B0200000000000000" pitchFamily="50" charset="-127"/>
@@ -7165,7 +6393,7 @@
         </p:nvSpPr>
         <p:spPr>
           <a:xfrm>
-            <a:off x="7940920" y="3396748"/>
+            <a:off x="8366370" y="3640588"/>
             <a:ext cx="531519" cy="101503"/>
           </a:xfrm>
           <a:prstGeom prst="rect">
@@ -7185,7 +6413,7 @@
               </a:lnSpc>
             </a:pPr>
             <a:r>
-              <a:rPr lang="en-US" sz="600" b="1">
+              <a:rPr lang="en-US" sz="600" b="1" dirty="0">
                 <a:solidFill>
                   <a:schemeClr val="bg1"/>
                 </a:solidFill>
@@ -7211,8 +6439,8 @@
         </p:nvSpPr>
         <p:spPr>
           <a:xfrm>
-            <a:off x="5771036" y="2001396"/>
-            <a:ext cx="2651760" cy="202941"/>
+            <a:off x="6304436" y="2207136"/>
+            <a:ext cx="1751986" cy="202941"/>
           </a:xfrm>
           <a:prstGeom prst="rect">
             <a:avLst/>
@@ -7241,7 +6469,7 @@
               <a:t>6.4억  (@1890만원)</a:t>
             </a:r>
             <a:r>
-              <a:rPr sz="1200" b="1" dirty="0">
+              <a:rPr sz="1200" b="1">
                 <a:solidFill>
                   <a:srgbClr val="FFFFFF"/>
                 </a:solidFill>
@@ -7251,7 +6479,7 @@
               <a:t/>
             </a:r>
             <a:r>
-              <a:rPr kumimoji="0" lang="en-US" altLang="ko-KR" sz="1000" b="1" i="0" u="none" strike="noStrike" kern="1200" cap="none" spc="0" normalizeH="0" baseline="0" noProof="0" dirty="0">
+              <a:rPr kumimoji="0" lang="en-US" altLang="ko-KR" sz="1000" b="1" i="0" u="none" strike="noStrike" kern="1200" cap="none" spc="0" normalizeH="0" baseline="0" noProof="0">
                 <a:ln>
                   <a:noFill/>
                 </a:ln>
@@ -7267,7 +6495,7 @@
               <a:t/>
             </a:r>
             <a:r>
-              <a:rPr sz="1000" b="1" dirty="0">
+              <a:rPr sz="1000" b="1">
                 <a:solidFill>
                   <a:srgbClr val="FFFFFF"/>
                 </a:solidFill>
@@ -7287,7 +6515,7 @@
               <a:t/>
             </a:r>
             <a:r>
-              <a:rPr lang="ko-KR" altLang="en-US" sz="1000" b="1" dirty="0">
+              <a:rPr lang="ko-KR" altLang="en-US" sz="1000" b="1">
                 <a:solidFill>
                   <a:srgbClr val="FFFFFF"/>
                 </a:solidFill>
@@ -7297,7 +6525,7 @@
               <a:t/>
             </a:r>
             <a:r>
-              <a:rPr lang="en-US" altLang="ko-KR" sz="1000" b="1" dirty="0">
+              <a:rPr lang="en-US" altLang="ko-KR" sz="1000" b="1">
                 <a:solidFill>
                   <a:srgbClr val="FFFFFF"/>
                 </a:solidFill>
@@ -7306,7 +6534,7 @@
               </a:rPr>
               <a:t/>
             </a:r>
-            <a:endParaRPr sz="600" b="0" dirty="0">
+            <a:endParaRPr sz="600" b="0">
               <a:solidFill>
                 <a:srgbClr val="FFFFFF"/>
               </a:solidFill>
@@ -7330,7 +6558,7 @@
         </p:nvSpPr>
         <p:spPr>
           <a:xfrm>
-            <a:off x="9181591" y="2029962"/>
+            <a:off x="9181591" y="2235702"/>
             <a:ext cx="2340688" cy="169085"/>
           </a:xfrm>
           <a:prstGeom prst="rect">
@@ -7350,7 +6578,7 @@
               </a:lnSpc>
             </a:pPr>
             <a:r>
-              <a:rPr sz="1000" dirty="0">
+              <a:rPr sz="1000">
                 <a:solidFill>
                   <a:schemeClr val="bg1"/>
                 </a:solidFill>
@@ -7360,7 +6588,7 @@
               <a:t>84㎡ (34평)기준 (확장포함 · 이자후불제)</a:t>
             </a:r>
             <a:r>
-              <a:rPr lang="en-US" sz="1000" dirty="0">
+              <a:rPr lang="en-US" sz="1000">
                 <a:solidFill>
                   <a:schemeClr val="bg1"/>
                 </a:solidFill>
@@ -7370,7 +6598,7 @@
               <a:t/>
             </a:r>
             <a:r>
-              <a:rPr lang="en-US" sz="1000">
+              <a:rPr lang="ko-KR" altLang="en-US" sz="1000">
                 <a:solidFill>
                   <a:schemeClr val="bg1"/>
                 </a:solidFill>
@@ -7380,7 +6608,7 @@
               <a:t/>
             </a:r>
             <a:r>
-              <a:rPr lang="ko-KR" altLang="en-US" sz="1000" dirty="0">
+              <a:rPr lang="en-US" altLang="ko-KR" sz="1000">
                 <a:solidFill>
                   <a:schemeClr val="bg1"/>
                 </a:solidFill>
@@ -7390,7 +6618,7 @@
               <a:t/>
             </a:r>
             <a:r>
-              <a:rPr lang="en-US" altLang="ko-KR" sz="1000" dirty="0">
+              <a:rPr sz="1000" err="1">
                 <a:solidFill>
                   <a:schemeClr val="bg1"/>
                 </a:solidFill>
@@ -7400,7 +6628,7 @@
               <a:t/>
             </a:r>
             <a:r>
-              <a:rPr sz="1000" dirty="0" err="1">
+              <a:rPr sz="1000">
                 <a:solidFill>
                   <a:schemeClr val="bg1"/>
                 </a:solidFill>
@@ -7410,7 +6638,7 @@
               <a:t/>
             </a:r>
             <a:r>
-              <a:rPr sz="1000" dirty="0">
+              <a:rPr sz="1000" err="1">
                 <a:solidFill>
                   <a:schemeClr val="bg1"/>
                 </a:solidFill>
@@ -7420,7 +6648,7 @@
               <a:t/>
             </a:r>
             <a:r>
-              <a:rPr sz="1000" dirty="0" err="1">
+              <a:rPr sz="1000">
                 <a:solidFill>
                   <a:schemeClr val="bg1"/>
                 </a:solidFill>
@@ -7430,7 +6658,7 @@
               <a:t/>
             </a:r>
             <a:r>
-              <a:rPr sz="1000" dirty="0">
+              <a:rPr lang="ko-KR" altLang="en-US" sz="1000" err="1">
                 <a:solidFill>
                   <a:schemeClr val="bg1"/>
                 </a:solidFill>
@@ -7440,27 +6668,7 @@
               <a:t/>
             </a:r>
             <a:r>
-              <a:rPr lang="ko-KR" altLang="en-US" sz="1000" err="1">
-                <a:solidFill>
-                  <a:schemeClr val="bg1"/>
-                </a:solidFill>
-                <a:latin typeface="Noto Sans KR" panose="020B0200000000000000" pitchFamily="50" charset="-127"/>
-                <a:ea typeface="Noto Sans KR" panose="020B0200000000000000" pitchFamily="50" charset="-127"/>
-              </a:rPr>
-              <a:t/>
-            </a:r>
-            <a:r>
-              <a:rPr lang="ko-KR" altLang="en-US" sz="1000">
-                <a:solidFill>
-                  <a:schemeClr val="bg1"/>
-                </a:solidFill>
-                <a:latin typeface="Noto Sans KR" panose="020B0200000000000000" pitchFamily="50" charset="-127"/>
-                <a:ea typeface="Noto Sans KR" panose="020B0200000000000000" pitchFamily="50" charset="-127"/>
-              </a:rPr>
-              <a:t/>
-            </a:r>
-            <a:r>
-              <a:rPr sz="1000" dirty="0">
+              <a:rPr sz="1000">
                 <a:solidFill>
                   <a:schemeClr val="bg1"/>
                 </a:solidFill>
@@ -7487,14 +6695,14 @@
           <p:nvPr>
             <p:extLst>
               <p:ext uri="{D42A27DB-BD31-4B8C-83A1-F6EECF244321}">
-                <p14:modId xmlns:p14="http://schemas.microsoft.com/office/powerpoint/2010/main" val="1707137095"/>
+                <p14:modId xmlns:p14="http://schemas.microsoft.com/office/powerpoint/2010/main" val="1485986706"/>
               </p:ext>
             </p:extLst>
           </p:nvPr>
         </p:nvGraphicFramePr>
         <p:xfrm>
           <a:off x="1485029" y="2979272"/>
-          <a:ext cx="3598356" cy="726516"/>
+          <a:ext cx="4235625" cy="726516"/>
         </p:xfrm>
         <a:graphic>
           <a:graphicData uri="http://schemas.openxmlformats.org/drawingml/2006/table">
@@ -7503,42 +6711,42 @@
                 <a:tableStyleId>{5C22544A-7EE6-4342-B048-85BDC9FD1C3A}</a:tableStyleId>
               </a:tblPr>
               <a:tblGrid>
-                <a:gridCol w="599726">
+                <a:gridCol w="588030">
                   <a:extLst>
                     <a:ext uri="{9D8B030D-6E8A-4147-A177-3AD203B41FA5}">
                       <a16:colId xmlns:a16="http://schemas.microsoft.com/office/drawing/2014/main" val="1483610324"/>
                     </a:ext>
                   </a:extLst>
                 </a:gridCol>
-                <a:gridCol w="599726">
+                <a:gridCol w="729519">
                   <a:extLst>
                     <a:ext uri="{9D8B030D-6E8A-4147-A177-3AD203B41FA5}">
                       <a16:colId xmlns:a16="http://schemas.microsoft.com/office/drawing/2014/main" val="3659169962"/>
                     </a:ext>
                   </a:extLst>
                 </a:gridCol>
-                <a:gridCol w="599726">
+                <a:gridCol w="729519">
                   <a:extLst>
                     <a:ext uri="{9D8B030D-6E8A-4147-A177-3AD203B41FA5}">
                       <a16:colId xmlns:a16="http://schemas.microsoft.com/office/drawing/2014/main" val="2021771382"/>
                     </a:ext>
                   </a:extLst>
                 </a:gridCol>
-                <a:gridCol w="599726">
+                <a:gridCol w="729519">
                   <a:extLst>
                     <a:ext uri="{9D8B030D-6E8A-4147-A177-3AD203B41FA5}">
                       <a16:colId xmlns:a16="http://schemas.microsoft.com/office/drawing/2014/main" val="3330070868"/>
                     </a:ext>
                   </a:extLst>
                 </a:gridCol>
-                <a:gridCol w="599726">
+                <a:gridCol w="729519">
                   <a:extLst>
                     <a:ext uri="{9D8B030D-6E8A-4147-A177-3AD203B41FA5}">
                       <a16:colId xmlns:a16="http://schemas.microsoft.com/office/drawing/2014/main" val="2063125282"/>
                     </a:ext>
                   </a:extLst>
                 </a:gridCol>
-                <a:gridCol w="599726">
+                <a:gridCol w="729519">
                   <a:extLst>
                     <a:ext uri="{9D8B030D-6E8A-4147-A177-3AD203B41FA5}">
                       <a16:colId xmlns:a16="http://schemas.microsoft.com/office/drawing/2014/main" val="1914549856"/>
@@ -7554,14 +6762,14 @@
                     <a:p>
                       <a:pPr algn="ctr" latinLnBrk="1"/>
                       <a:r>
-                        <a:rPr lang="ko-KR" altLang="en-US" sz="1000">
+                        <a:rPr lang="ko-KR" altLang="en-US" sz="1000" dirty="0">
                           <a:solidFill>
                             <a:schemeClr val="bg1"/>
                           </a:solidFill>
                           <a:latin typeface="Noto Sans KR" panose="020B0200000000000000" pitchFamily="50" charset="-127"/>
                           <a:ea typeface="Noto Sans KR" panose="020B0200000000000000" pitchFamily="50" charset="-127"/>
                         </a:rPr>
-                        <a:t>주택형</a:t>
+                        <a:t>구분</a:t>
                       </a:r>
                     </a:p>
                   </a:txBody>
@@ -7589,7 +6797,7 @@
                       <a:tailEnd type="none" w="med" len="med"/>
                     </a:lnB>
                     <a:solidFill>
-                      <a:srgbClr val="002941"/>
+                      <a:srgbClr val="0070C0"/>
                     </a:solidFill>
                   </a:tcPr>
                 </a:tc>
@@ -7646,7 +6854,7 @@
                       <a:tailEnd type="none" w="med" len="med"/>
                     </a:lnB>
                     <a:solidFill>
-                      <a:srgbClr val="002941"/>
+                      <a:srgbClr val="0070C0"/>
                     </a:solidFill>
                   </a:tcPr>
                 </a:tc>
@@ -7657,7 +6865,7 @@
                     <a:p>
                       <a:pPr algn="ctr" latinLnBrk="1"/>
                       <a:r>
-                        <a:rPr lang="ko-KR" altLang="en-US" sz="1000">
+                        <a:rPr lang="ko-KR" altLang="en-US" sz="1000" dirty="0">
                           <a:solidFill>
                             <a:schemeClr val="bg1"/>
                           </a:solidFill>
@@ -7703,7 +6911,7 @@
                       <a:tailEnd type="none" w="med" len="med"/>
                     </a:lnB>
                     <a:solidFill>
-                      <a:srgbClr val="002941"/>
+                      <a:srgbClr val="0070C0"/>
                     </a:solidFill>
                   </a:tcPr>
                 </a:tc>
@@ -7803,7 +7011,7 @@
                       <a:tailEnd type="none" w="med" len="med"/>
                     </a:lnB>
                     <a:solidFill>
-                      <a:srgbClr val="002941"/>
+                      <a:srgbClr val="0070C0"/>
                     </a:solidFill>
                   </a:tcPr>
                 </a:tc>
@@ -7871,7 +7079,7 @@
                           <a:latin typeface="Noto Sans KR" panose="020B0200000000000000" pitchFamily="50" charset="-127"/>
                           <a:ea typeface="Noto Sans KR" panose="020B0200000000000000" pitchFamily="50" charset="-127"/>
                         </a:rPr>
-                        <a:t>구분</a:t>
+                        <a:t>요소</a:t>
                       </a:r>
                       <a:endParaRPr lang="en-US" altLang="ko-KR" sz="1000">
                         <a:solidFill>
@@ -7924,9 +7132,9 @@
                     <a:bodyPr/>
                     <a:lstStyle/>
                     <a:p>
-                      <a:pPr algn="ctr" latinLnBrk="1"/>
+                      <a:pPr algn="l" latinLnBrk="1"/>
                       <a:r>
-                        <a:rPr lang="ko-KR" altLang="en-US" sz="1000" dirty="0">
+                        <a:rPr lang="ko-KR" altLang="en-US" sz="1000">
                           <a:solidFill>
                             <a:srgbClr val="4B4B4B"/>
                           </a:solidFill>
@@ -7990,9 +7198,9 @@
                     <a:bodyPr/>
                     <a:lstStyle/>
                     <a:p>
-                      <a:pPr algn="ctr" latinLnBrk="1"/>
+                      <a:pPr algn="l" latinLnBrk="1"/>
                       <a:r>
-                        <a:rPr lang="ko-KR" altLang="en-US" sz="1000" dirty="0">
+                        <a:rPr lang="ko-KR" altLang="en-US" sz="1000">
                           <a:solidFill>
                             <a:srgbClr val="4B4B4B"/>
                           </a:solidFill>
@@ -8056,9 +7264,9 @@
                     <a:bodyPr/>
                     <a:lstStyle/>
                     <a:p>
-                      <a:pPr algn="ctr" latinLnBrk="1"/>
+                      <a:pPr algn="l" latinLnBrk="1"/>
                       <a:r>
-                        <a:rPr lang="ko-KR" altLang="en-US" sz="1000" dirty="0">
+                        <a:rPr lang="ko-KR" altLang="en-US" sz="1000">
                           <a:solidFill>
                             <a:srgbClr val="4B4B4B"/>
                           </a:solidFill>
@@ -8122,9 +7330,9 @@
                     <a:bodyPr/>
                     <a:lstStyle/>
                     <a:p>
-                      <a:pPr algn="ctr" latinLnBrk="1"/>
+                      <a:pPr algn="l" latinLnBrk="1"/>
                       <a:r>
-                        <a:rPr lang="ko-KR" altLang="en-US" sz="1000" dirty="0">
+                        <a:rPr lang="ko-KR" altLang="en-US" sz="1000">
                           <a:solidFill>
                             <a:srgbClr val="4B4B4B"/>
                           </a:solidFill>
@@ -8188,9 +7396,9 @@
                     <a:bodyPr/>
                     <a:lstStyle/>
                     <a:p>
-                      <a:pPr algn="ctr" latinLnBrk="1"/>
+                      <a:pPr algn="l" latinLnBrk="1"/>
                       <a:r>
-                        <a:rPr lang="ko-KR" altLang="en-US" sz="1000" dirty="0">
+                        <a:rPr lang="ko-KR" altLang="en-US" sz="1000">
                           <a:solidFill>
                             <a:srgbClr val="4B4B4B"/>
                           </a:solidFill>
@@ -8252,7 +7460,7 @@
                     <a:p>
                       <a:pPr algn="ctr" latinLnBrk="1"/>
                       <a:r>
-                        <a:rPr lang="ko-KR" altLang="en-US" sz="1000" dirty="0">
+                        <a:rPr lang="ko-KR" altLang="en-US" sz="1000">
                           <a:solidFill>
                             <a:srgbClr val="4B4B4B"/>
                           </a:solidFill>
@@ -8261,7 +7469,7 @@
                         </a:rPr>
                         <a:t>등급</a:t>
                       </a:r>
-                      <a:endParaRPr lang="en-US" altLang="ko-KR" sz="1000" dirty="0">
+                      <a:endParaRPr lang="en-US" altLang="ko-KR" sz="1000">
                         <a:solidFill>
                           <a:srgbClr val="4B4B4B"/>
                         </a:solidFill>
@@ -8313,19 +7521,75 @@
                     <a:lstStyle/>
                     <a:p>
                       <a:pPr algn="ctr" latinLnBrk="1"/>
-                      <a:r>
-                        <a:rPr lang="en-US" altLang="ko-KR" sz="1000" b="1" dirty="0">
-                          <a:solidFill>
-                            <a:srgbClr val="0E3B68"/>
-                          </a:solidFill>
-                          <a:latin typeface="Noto Sans KR" panose="020B0200000000000000" pitchFamily="50" charset="-127"/>
-                          <a:ea typeface="Noto Sans KR" panose="020B0200000000000000" pitchFamily="50" charset="-127"/>
-                        </a:rPr>
-                        <a:t>C</a:t>
-                      </a:r>
+                      <a:endParaRPr lang="ko-KR" altLang="en-US" sz="1000" b="1" kern="1200" dirty="0">
+                        <a:solidFill>
+                          <a:schemeClr val="tx1"/>
+                        </a:solidFill>
+                        <a:latin typeface="Noto Sans KR" panose="020B0200000000000000" pitchFamily="50" charset="-127"/>
+                        <a:ea typeface="Noto Sans KR" panose="020B0200000000000000" pitchFamily="50" charset="-127"/>
+                        <a:cs typeface="+mn-cs"/>
+                      </a:endParaRPr>
+                    </a:p>
+                  </a:txBody>
+                  <a:tcPr marT="0" marB="0" anchor="ctr">
+                    <a:lnL w="9525" cap="flat" cmpd="sng" algn="ctr">
+                      <a:solidFill>
+                        <a:schemeClr val="bg1">
+                          <a:lumMod val="65000"/>
+                        </a:schemeClr>
+                      </a:solidFill>
+                      <a:prstDash val="solid"/>
+                      <a:round/>
+                      <a:headEnd type="none" w="med" len="med"/>
+                      <a:tailEnd type="none" w="med" len="med"/>
+                    </a:lnL>
+                    <a:lnR w="9525" cap="flat" cmpd="sng" algn="ctr">
+                      <a:solidFill>
+                        <a:schemeClr val="bg1">
+                          <a:lumMod val="65000"/>
+                        </a:schemeClr>
+                      </a:solidFill>
+                      <a:prstDash val="solid"/>
+                      <a:round/>
+                      <a:headEnd type="none" w="med" len="med"/>
+                      <a:tailEnd type="none" w="med" len="med"/>
+                    </a:lnR>
+                    <a:lnT w="9525" cap="flat" cmpd="sng" algn="ctr">
+                      <a:solidFill>
+                        <a:schemeClr val="bg1">
+                          <a:lumMod val="65000"/>
+                        </a:schemeClr>
+                      </a:solidFill>
+                      <a:prstDash val="solid"/>
+                      <a:round/>
+                      <a:headEnd type="none" w="med" len="med"/>
+                      <a:tailEnd type="none" w="med" len="med"/>
+                    </a:lnT>
+                    <a:lnB w="9525" cap="flat" cmpd="sng" algn="ctr">
+                      <a:solidFill>
+                        <a:schemeClr val="bg1">
+                          <a:lumMod val="65000"/>
+                        </a:schemeClr>
+                      </a:solidFill>
+                      <a:prstDash val="solid"/>
+                      <a:round/>
+                      <a:headEnd type="none" w="med" len="med"/>
+                      <a:tailEnd type="none" w="med" len="med"/>
+                    </a:lnB>
+                    <a:solidFill>
+                      <a:schemeClr val="bg1"/>
+                    </a:solidFill>
+                  </a:tcPr>
+                </a:tc>
+                <a:tc>
+                  <a:txBody>
+                    <a:bodyPr/>
+                    <a:lstStyle/>
+                    <a:p>
+                      <a:pPr algn="ctr" latinLnBrk="1"/>
                       <a:endParaRPr lang="ko-KR" altLang="en-US" sz="1000" b="1" dirty="0">
                         <a:solidFill>
-                          <a:srgbClr val="0E3B68"/>
+                          <a:schemeClr val="tx1"/>
                         </a:solidFill>
                         <a:latin typeface="Noto Sans KR" panose="020B0200000000000000" pitchFamily="50" charset="-127"/>
                         <a:ea typeface="Noto Sans KR" panose="020B0200000000000000" pitchFamily="50" charset="-127"/>
@@ -8377,7 +7641,9 @@
                       <a:headEnd type="none" w="med" len="med"/>
                       <a:tailEnd type="none" w="med" len="med"/>
                     </a:lnB>
-                    <a:noFill/>
+                    <a:solidFill>
+                      <a:schemeClr val="bg1"/>
+                    </a:solidFill>
                   </a:tcPr>
                 </a:tc>
                 <a:tc>
@@ -8385,23 +7651,14 @@
                     <a:bodyPr/>
                     <a:lstStyle/>
                     <a:p>
-                      <a:pPr algn="ctr" latinLnBrk="1"/>
-                      <a:r>
-                        <a:rPr lang="en-US" altLang="ko-KR" sz="1000" b="1" dirty="0">
-                          <a:solidFill>
-                            <a:srgbClr val="0E3B68"/>
-                          </a:solidFill>
-                          <a:latin typeface="Noto Sans KR" panose="020B0200000000000000" pitchFamily="50" charset="-127"/>
-                          <a:ea typeface="Noto Sans KR" panose="020B0200000000000000" pitchFamily="50" charset="-127"/>
-                        </a:rPr>
-                        <a:t>A</a:t>
-                      </a:r>
-                      <a:endParaRPr lang="ko-KR" altLang="en-US" sz="1000" b="1" dirty="0">
+                      <a:pPr marL="0" algn="ctr" defTabSz="914400" rtl="0" eaLnBrk="1" latinLnBrk="1" hangingPunct="1"/>
+                      <a:endParaRPr lang="ko-KR" altLang="en-US" sz="1000" b="1" kern="1200" dirty="0">
                         <a:solidFill>
-                          <a:srgbClr val="0E3B68"/>
+                          <a:schemeClr val="tx1"/>
                         </a:solidFill>
                         <a:latin typeface="Noto Sans KR" panose="020B0200000000000000" pitchFamily="50" charset="-127"/>
                         <a:ea typeface="Noto Sans KR" panose="020B0200000000000000" pitchFamily="50" charset="-127"/>
+                        <a:cs typeface="+mn-cs"/>
                       </a:endParaRPr>
                     </a:p>
                   </a:txBody>
@@ -8450,7 +7707,9 @@
                       <a:headEnd type="none" w="med" len="med"/>
                       <a:tailEnd type="none" w="med" len="med"/>
                     </a:lnB>
-                    <a:noFill/>
+                    <a:solidFill>
+                      <a:schemeClr val="bg1"/>
+                    </a:solidFill>
                   </a:tcPr>
                 </a:tc>
                 <a:tc>
@@ -8458,23 +7717,14 @@
                     <a:bodyPr/>
                     <a:lstStyle/>
                     <a:p>
-                      <a:pPr algn="ctr" latinLnBrk="1"/>
-                      <a:r>
-                        <a:rPr lang="en-US" altLang="ko-KR" sz="1000" b="1" dirty="0">
-                          <a:solidFill>
-                            <a:srgbClr val="0E3B68"/>
-                          </a:solidFill>
-                          <a:latin typeface="Noto Sans KR" panose="020B0200000000000000" pitchFamily="50" charset="-127"/>
-                          <a:ea typeface="Noto Sans KR" panose="020B0200000000000000" pitchFamily="50" charset="-127"/>
-                        </a:rPr>
-                        <a:t>B</a:t>
-                      </a:r>
-                      <a:endParaRPr lang="ko-KR" altLang="en-US" sz="1000" b="1" dirty="0">
+                      <a:pPr marL="0" algn="ctr" defTabSz="914400" rtl="0" eaLnBrk="1" latinLnBrk="1" hangingPunct="1"/>
+                      <a:endParaRPr lang="ko-KR" altLang="en-US" sz="1000" b="1" kern="1200" dirty="0">
                         <a:solidFill>
-                          <a:srgbClr val="0E3B68"/>
+                          <a:schemeClr val="tx1"/>
                         </a:solidFill>
                         <a:latin typeface="Noto Sans KR" panose="020B0200000000000000" pitchFamily="50" charset="-127"/>
                         <a:ea typeface="Noto Sans KR" panose="020B0200000000000000" pitchFamily="50" charset="-127"/>
+                        <a:cs typeface="+mn-cs"/>
                       </a:endParaRPr>
                     </a:p>
                   </a:txBody>
@@ -8523,7 +7773,9 @@
                       <a:headEnd type="none" w="med" len="med"/>
                       <a:tailEnd type="none" w="med" len="med"/>
                     </a:lnB>
-                    <a:noFill/>
+                    <a:solidFill>
+                      <a:schemeClr val="bg1"/>
+                    </a:solidFill>
                   </a:tcPr>
                 </a:tc>
                 <a:tc>
@@ -8531,96 +7783,14 @@
                     <a:bodyPr/>
                     <a:lstStyle/>
                     <a:p>
-                      <a:pPr algn="ctr" latinLnBrk="1"/>
-                      <a:r>
-                        <a:rPr lang="en-US" altLang="ko-KR" sz="1000" b="1" dirty="0">
-                          <a:solidFill>
-                            <a:srgbClr val="0E3B68"/>
-                          </a:solidFill>
-                          <a:latin typeface="Noto Sans KR" panose="020B0200000000000000" pitchFamily="50" charset="-127"/>
-                          <a:ea typeface="Noto Sans KR" panose="020B0200000000000000" pitchFamily="50" charset="-127"/>
-                        </a:rPr>
-                        <a:t>B</a:t>
-                      </a:r>
-                      <a:endParaRPr lang="ko-KR" altLang="en-US" sz="1000" b="1" dirty="0">
+                      <a:pPr marL="0" algn="ctr" defTabSz="914400" rtl="0" eaLnBrk="1" latinLnBrk="1" hangingPunct="1"/>
+                      <a:endParaRPr lang="ko-KR" altLang="en-US" sz="1000" b="1" kern="1200" dirty="0">
                         <a:solidFill>
-                          <a:srgbClr val="0E3B68"/>
+                          <a:schemeClr val="tx1"/>
                         </a:solidFill>
                         <a:latin typeface="Noto Sans KR" panose="020B0200000000000000" pitchFamily="50" charset="-127"/>
                         <a:ea typeface="Noto Sans KR" panose="020B0200000000000000" pitchFamily="50" charset="-127"/>
-                      </a:endParaRPr>
-                    </a:p>
-                  </a:txBody>
-                  <a:tcPr marT="0" marB="0" anchor="ctr">
-                    <a:lnL w="9525" cap="flat" cmpd="sng" algn="ctr">
-                      <a:solidFill>
-                        <a:schemeClr val="bg1">
-                          <a:lumMod val="65000"/>
-                        </a:schemeClr>
-                      </a:solidFill>
-                      <a:prstDash val="solid"/>
-                      <a:round/>
-                      <a:headEnd type="none" w="med" len="med"/>
-                      <a:tailEnd type="none" w="med" len="med"/>
-                    </a:lnL>
-                    <a:lnR w="9525" cap="flat" cmpd="sng" algn="ctr">
-                      <a:solidFill>
-                        <a:schemeClr val="bg1">
-                          <a:lumMod val="65000"/>
-                        </a:schemeClr>
-                      </a:solidFill>
-                      <a:prstDash val="solid"/>
-                      <a:round/>
-                      <a:headEnd type="none" w="med" len="med"/>
-                      <a:tailEnd type="none" w="med" len="med"/>
-                    </a:lnR>
-                    <a:lnT w="9525" cap="flat" cmpd="sng" algn="ctr">
-                      <a:solidFill>
-                        <a:schemeClr val="bg1">
-                          <a:lumMod val="65000"/>
-                        </a:schemeClr>
-                      </a:solidFill>
-                      <a:prstDash val="solid"/>
-                      <a:round/>
-                      <a:headEnd type="none" w="med" len="med"/>
-                      <a:tailEnd type="none" w="med" len="med"/>
-                    </a:lnT>
-                    <a:lnB w="9525" cap="flat" cmpd="sng" algn="ctr">
-                      <a:solidFill>
-                        <a:schemeClr val="bg1">
-                          <a:lumMod val="65000"/>
-                        </a:schemeClr>
-                      </a:solidFill>
-                      <a:prstDash val="solid"/>
-                      <a:round/>
-                      <a:headEnd type="none" w="med" len="med"/>
-                      <a:tailEnd type="none" w="med" len="med"/>
-                    </a:lnB>
-                    <a:noFill/>
-                  </a:tcPr>
-                </a:tc>
-                <a:tc>
-                  <a:txBody>
-                    <a:bodyPr/>
-                    <a:lstStyle/>
-                    <a:p>
-                      <a:pPr algn="ctr" latinLnBrk="1"/>
-                      <a:r>
-                        <a:rPr lang="en-US" altLang="ko-KR" sz="1000" b="1" dirty="0">
-                          <a:solidFill>
-                            <a:srgbClr val="0E3B68"/>
-                          </a:solidFill>
-                          <a:latin typeface="Noto Sans KR" panose="020B0200000000000000" pitchFamily="50" charset="-127"/>
-                          <a:ea typeface="Noto Sans KR" panose="020B0200000000000000" pitchFamily="50" charset="-127"/>
-                        </a:rPr>
-                        <a:t>A</a:t>
-                      </a:r>
-                      <a:endParaRPr lang="ko-KR" altLang="en-US" sz="1000" b="1" dirty="0">
-                        <a:solidFill>
-                          <a:srgbClr val="0E3B68"/>
-                        </a:solidFill>
-                        <a:latin typeface="Noto Sans KR" panose="020B0200000000000000" pitchFamily="50" charset="-127"/>
-                        <a:ea typeface="Noto Sans KR" panose="020B0200000000000000" pitchFamily="50" charset="-127"/>
+                        <a:cs typeface="+mn-cs"/>
                       </a:endParaRPr>
                     </a:p>
                   </a:txBody>
@@ -8658,7 +7828,9 @@
                       <a:headEnd type="none" w="med" len="med"/>
                       <a:tailEnd type="none" w="med" len="med"/>
                     </a:lnB>
-                    <a:noFill/>
+                    <a:solidFill>
+                      <a:schemeClr val="bg1"/>
+                    </a:solidFill>
                   </a:tcPr>
                 </a:tc>
                 <a:extLst>
@@ -8686,7 +7858,7 @@
         <p:spPr>
           <a:xfrm>
             <a:off x="1485029" y="2204355"/>
-            <a:ext cx="3401073" cy="694870"/>
+            <a:ext cx="4212057" cy="694870"/>
           </a:xfrm>
           <a:prstGeom prst="rect">
             <a:avLst/>
@@ -8713,25 +7885,25 @@
             <a:r>
               <a:rPr sz="1100" b="1" dirty="0" err="1">
                 <a:solidFill>
+                  <a:srgbClr val="0070C0"/>
+                </a:solidFill>
+                <a:latin typeface="Noto Sans KR" panose="020B0200000000000000" pitchFamily="50" charset="-127"/>
+                <a:ea typeface="Noto Sans KR" panose="020B0200000000000000" pitchFamily="50" charset="-127"/>
+              </a:rPr>
+              <a:t>교통	동대구역 인접 · 대구 4호선 개발등 철도인프라 有</a:t>
+            </a:r>
+            <a:r>
+              <a:rPr lang="en-US" sz="1100" b="1" dirty="0">
+                <a:solidFill>
                   <a:srgbClr val="002941"/>
                 </a:solidFill>
                 <a:latin typeface="Noto Sans KR" panose="020B0200000000000000" pitchFamily="50" charset="-127"/>
                 <a:ea typeface="Noto Sans KR" panose="020B0200000000000000" pitchFamily="50" charset="-127"/>
               </a:rPr>
-              <a:t>교통	동대구역 인접 · 대구 4호선 개발등 철도인프라 有</a:t>
-            </a:r>
-            <a:r>
-              <a:rPr lang="en-US" sz="1100" b="1" dirty="0">
-                <a:solidFill>
-                  <a:srgbClr val="002941"/>
-                </a:solidFill>
-                <a:latin typeface="Noto Sans KR" panose="020B0200000000000000" pitchFamily="50" charset="-127"/>
-                <a:ea typeface="Noto Sans KR" panose="020B0200000000000000" pitchFamily="50" charset="-127"/>
-              </a:rPr>
               <a:t/>
             </a:r>
             <a:r>
-              <a:rPr lang="ko-KR" altLang="en-US" sz="1100" b="0" dirty="0">
+              <a:rPr lang="ko-KR" altLang="en-US" sz="1100" dirty="0">
                 <a:solidFill>
                   <a:srgbClr val="4B4B4B"/>
                 </a:solidFill>
@@ -8741,7 +7913,7 @@
               <a:t/>
             </a:r>
             <a:r>
-              <a:rPr lang="en-US" altLang="ko-KR" sz="1100" b="0" dirty="0">
+              <a:rPr lang="en-US" altLang="ko-KR" sz="1100" dirty="0">
                 <a:solidFill>
                   <a:srgbClr val="4B4B4B"/>
                 </a:solidFill>
@@ -8751,9 +7923,39 @@
               <a:t/>
             </a:r>
             <a:r>
-              <a:rPr lang="ko-KR" altLang="en-US" sz="1100" b="0" dirty="0">
+              <a:rPr lang="ko-KR" altLang="en-US" sz="1100" dirty="0">
                 <a:solidFill>
                   <a:srgbClr val="4B4B4B"/>
+                </a:solidFill>
+                <a:latin typeface="Noto Sans KR" panose="020B0200000000000000" pitchFamily="50" charset="-127"/>
+                <a:ea typeface="Noto Sans KR" panose="020B0200000000000000" pitchFamily="50" charset="-127"/>
+              </a:rPr>
+              <a:t/>
+            </a:r>
+            <a:r>
+              <a:rPr lang="en-US" altLang="ko-KR" sz="1100" dirty="0">
+                <a:solidFill>
+                  <a:srgbClr val="4B4B4B"/>
+                </a:solidFill>
+                <a:latin typeface="Noto Sans KR" panose="020B0200000000000000" pitchFamily="50" charset="-127"/>
+                <a:ea typeface="Noto Sans KR" panose="020B0200000000000000" pitchFamily="50" charset="-127"/>
+              </a:rPr>
+              <a:t/>
+            </a:r>
+            <a:r>
+              <a:rPr lang="en-US" altLang="ko-KR" sz="1100" dirty="0">
+                <a:solidFill>
+                  <a:srgbClr val="222222"/>
+                </a:solidFill>
+                <a:latin typeface="Noto Sans KR" panose="020B0200000000000000" pitchFamily="50" charset="-127"/>
+                <a:ea typeface="Noto Sans KR" panose="020B0200000000000000" pitchFamily="50" charset="-127"/>
+              </a:rPr>
+              <a:t/>
+            </a:r>
+            <a:r>
+              <a:rPr lang="ko-KR" altLang="en-US" sz="1100" dirty="0">
+                <a:solidFill>
+                  <a:srgbClr val="222222"/>
                 </a:solidFill>
                 <a:latin typeface="Noto Sans KR" panose="020B0200000000000000" pitchFamily="50" charset="-127"/>
                 <a:ea typeface="Noto Sans KR" panose="020B0200000000000000" pitchFamily="50" charset="-127"/>
@@ -8812,7 +8014,7 @@
                   <a:noFill/>
                 </a:ln>
                 <a:solidFill>
-                  <a:srgbClr val="002941"/>
+                  <a:srgbClr val="0070C0"/>
                 </a:solidFill>
                 <a:effectLst/>
                 <a:uLnTx/>
@@ -8839,102 +8041,76 @@
               <a:t/>
             </a:r>
             <a:r>
-              <a:rPr kumimoji="0" lang="ko-KR" altLang="en-US" sz="1100" b="0" i="0" u="none" strike="noStrike" kern="1200" cap="none" spc="0" normalizeH="0" baseline="0" noProof="0" dirty="0">
-                <a:ln>
-                  <a:noFill/>
-                </a:ln>
+              <a:rPr lang="ko-KR" altLang="en-US" sz="1100" dirty="0" err="1">
                 <a:solidFill>
                   <a:srgbClr val="222222"/>
                 </a:solidFill>
-                <a:effectLst/>
-                <a:uLnTx/>
-                <a:uFillTx/>
                 <a:latin typeface="Noto Sans KR" panose="020B0200000000000000" pitchFamily="50" charset="-127"/>
                 <a:ea typeface="Noto Sans KR" panose="020B0200000000000000" pitchFamily="50" charset="-127"/>
               </a:rPr>
               <a:t/>
             </a:r>
             <a:r>
-              <a:rPr kumimoji="0" lang="en-US" altLang="ko-KR" sz="1100" b="0" i="0" u="none" strike="noStrike" kern="1200" cap="none" spc="0" normalizeH="0" baseline="0" noProof="0" dirty="0">
-                <a:ln>
-                  <a:noFill/>
-                </a:ln>
+              <a:rPr lang="en-US" altLang="ko-KR" sz="1100" dirty="0">
                 <a:solidFill>
                   <a:srgbClr val="222222"/>
                 </a:solidFill>
-                <a:effectLst/>
-                <a:uLnTx/>
-                <a:uFillTx/>
                 <a:latin typeface="Noto Sans KR" panose="020B0200000000000000" pitchFamily="50" charset="-127"/>
                 <a:ea typeface="Noto Sans KR" panose="020B0200000000000000" pitchFamily="50" charset="-127"/>
               </a:rPr>
               <a:t/>
             </a:r>
             <a:r>
-              <a:rPr kumimoji="0" lang="ko-KR" altLang="en-US" sz="1100" b="0" i="0" u="none" strike="noStrike" kern="1200" cap="none" spc="0" normalizeH="0" baseline="0" noProof="0" dirty="0">
-                <a:ln>
-                  <a:noFill/>
-                </a:ln>
+              <a:rPr lang="ko-KR" altLang="en-US" sz="1100" dirty="0">
                 <a:solidFill>
                   <a:srgbClr val="222222"/>
                 </a:solidFill>
-                <a:effectLst/>
-                <a:uLnTx/>
-                <a:uFillTx/>
                 <a:latin typeface="Noto Sans KR" panose="020B0200000000000000" pitchFamily="50" charset="-127"/>
                 <a:ea typeface="Noto Sans KR" panose="020B0200000000000000" pitchFamily="50" charset="-127"/>
               </a:rPr>
               <a:t/>
             </a:r>
             <a:r>
-              <a:rPr kumimoji="0" lang="en-US" altLang="ko-KR" sz="1100" b="0" i="0" u="none" strike="noStrike" kern="1200" cap="none" spc="0" normalizeH="0" baseline="0" noProof="0" dirty="0">
-                <a:ln>
-                  <a:noFill/>
-                </a:ln>
+              <a:rPr lang="en-US" altLang="ko-KR" sz="1100" dirty="0">
                 <a:solidFill>
                   <a:srgbClr val="222222"/>
                 </a:solidFill>
-                <a:effectLst/>
-                <a:uLnTx/>
-                <a:uFillTx/>
                 <a:latin typeface="Noto Sans KR" panose="020B0200000000000000" pitchFamily="50" charset="-127"/>
                 <a:ea typeface="Noto Sans KR" panose="020B0200000000000000" pitchFamily="50" charset="-127"/>
               </a:rPr>
               <a:t/>
             </a:r>
             <a:r>
-              <a:rPr kumimoji="0" lang="ko-KR" altLang="en-US" sz="1100" b="0" i="0" u="none" strike="noStrike" kern="1200" cap="none" spc="0" normalizeH="0" baseline="0" noProof="0" dirty="0">
-                <a:ln>
-                  <a:noFill/>
-                </a:ln>
+              <a:rPr lang="ko-KR" altLang="en-US" sz="1100" dirty="0">
                 <a:solidFill>
                   <a:srgbClr val="222222"/>
                 </a:solidFill>
-                <a:effectLst/>
-                <a:uLnTx/>
-                <a:uFillTx/>
                 <a:latin typeface="Noto Sans KR" panose="020B0200000000000000" pitchFamily="50" charset="-127"/>
                 <a:ea typeface="Noto Sans KR" panose="020B0200000000000000" pitchFamily="50" charset="-127"/>
               </a:rPr>
               <a:t/>
             </a:r>
             <a:r>
-              <a:rPr kumimoji="0" lang="en-US" altLang="ko-KR" sz="1100" b="0" i="0" u="none" strike="noStrike" kern="1200" cap="none" spc="0" normalizeH="0" baseline="0" noProof="0" dirty="0">
-                <a:ln>
-                  <a:noFill/>
-                </a:ln>
+              <a:rPr lang="en-US" altLang="ko-KR" sz="1100" dirty="0">
                 <a:solidFill>
                   <a:srgbClr val="222222"/>
                 </a:solidFill>
-                <a:effectLst/>
-                <a:uLnTx/>
-                <a:uFillTx/>
                 <a:latin typeface="Noto Sans KR" panose="020B0200000000000000" pitchFamily="50" charset="-127"/>
                 <a:ea typeface="Noto Sans KR" panose="020B0200000000000000" pitchFamily="50" charset="-127"/>
               </a:rPr>
               <a:t/>
             </a:r>
-            <a:endParaRPr kumimoji="0" lang="ko-KR" altLang="en-US" sz="1100" b="0" i="0" u="none" strike="noStrike" kern="1200" cap="none" spc="0" normalizeH="0" baseline="0" noProof="0" dirty="0">
+            <a:r>
+              <a:rPr lang="ko-KR" altLang="en-US" sz="1100" dirty="0">
+                <a:solidFill>
+                  <a:srgbClr val="222222"/>
+                </a:solidFill>
+                <a:latin typeface="Noto Sans KR" panose="020B0200000000000000" pitchFamily="50" charset="-127"/>
+                <a:ea typeface="Noto Sans KR" panose="020B0200000000000000" pitchFamily="50" charset="-127"/>
+              </a:rPr>
+              <a:t/>
+            </a:r>
+            <a:endParaRPr kumimoji="0" lang="en-US" altLang="ko-KR" sz="1100" b="0" i="0" u="none" strike="noStrike" kern="1200" cap="none" spc="0" normalizeH="0" baseline="0" noProof="0" dirty="0">
               <a:ln>
                 <a:noFill/>
               </a:ln>
@@ -8949,7 +8125,7 @@
             </a:endParaRPr>
           </a:p>
           <a:p>
-            <a:pPr>
+            <a:pPr marL="0" marR="0" lvl="0" indent="0" algn="l" defTabSz="457200" rtl="0" eaLnBrk="1" fontAlgn="auto" latinLnBrk="0" hangingPunct="1">
               <a:lnSpc>
                 <a:spcPct val="120000"/>
               </a:lnSpc>
@@ -8959,41 +8135,27 @@
               <a:spcAft>
                 <a:spcPts val="200"/>
               </a:spcAft>
+              <a:buClrTx/>
+              <a:buSzTx/>
+              <a:buFontTx/>
+              <a:buNone/>
+              <a:tabLst/>
+              <a:defRPr/>
             </a:pPr>
             <a:r>
               <a:rPr lang="ko-KR" altLang="en-US" sz="1100" b="1" dirty="0">
                 <a:solidFill>
+                  <a:srgbClr val="0070C0"/>
+                </a:solidFill>
+                <a:latin typeface="Noto Sans KR" panose="020B0200000000000000" pitchFamily="50" charset="-127"/>
+                <a:ea typeface="Noto Sans KR" panose="020B0200000000000000" pitchFamily="50" charset="-127"/>
+              </a:rPr>
+              <a:t>개발	사업지 일대 정비사업 추진으로 향후 인프라 개선 기대감 高</a:t>
+            </a:r>
+            <a:r>
+              <a:rPr lang="en-US" altLang="ko-KR" sz="1100" b="1" dirty="0">
+                <a:solidFill>
                   <a:srgbClr val="002941"/>
-                </a:solidFill>
-                <a:latin typeface="Noto Sans KR" panose="020B0200000000000000" pitchFamily="50" charset="-127"/>
-                <a:ea typeface="Noto Sans KR" panose="020B0200000000000000" pitchFamily="50" charset="-127"/>
-              </a:rPr>
-              <a:t>개발	사업지 일대 정비사업 추진으로 향후 인프라 개선 기대감 高</a:t>
-            </a:r>
-            <a:r>
-              <a:rPr lang="en-US" altLang="ko-KR" sz="1100" b="1" dirty="0">
-                <a:solidFill>
-                  <a:srgbClr val="002941"/>
-                </a:solidFill>
-                <a:latin typeface="Noto Sans KR" panose="020B0200000000000000" pitchFamily="50" charset="-127"/>
-                <a:ea typeface="Noto Sans KR" panose="020B0200000000000000" pitchFamily="50" charset="-127"/>
-              </a:rPr>
-              <a:t/>
-            </a:r>
-            <a:r>
-              <a:rPr lang="ko-KR" altLang="en-US" sz="1100" dirty="0">
-                <a:solidFill>
-                  <a:srgbClr val="222222"/>
-                </a:solidFill>
-                <a:latin typeface="Noto Sans KR" panose="020B0200000000000000" pitchFamily="50" charset="-127"/>
-                <a:ea typeface="Noto Sans KR" panose="020B0200000000000000" pitchFamily="50" charset="-127"/>
-              </a:rPr>
-              <a:t/>
-            </a:r>
-            <a:r>
-              <a:rPr lang="en-US" altLang="ko-KR" sz="1100" dirty="0">
-                <a:solidFill>
-                  <a:srgbClr val="222222"/>
                 </a:solidFill>
                 <a:latin typeface="Noto Sans KR" panose="020B0200000000000000" pitchFamily="50" charset="-127"/>
                 <a:ea typeface="Noto Sans KR" panose="020B0200000000000000" pitchFamily="50" charset="-127"/>
@@ -9056,7 +8218,7 @@
               </a:avLst>
             </a:prstGeom>
             <a:solidFill>
-              <a:srgbClr val="0E3B68"/>
+              <a:srgbClr val="0070C0"/>
             </a:solidFill>
             <a:ln>
               <a:noFill/>
@@ -9082,7 +8244,7 @@
             <a:lstStyle/>
             <a:p>
               <a:pPr algn="ctr"/>
-              <a:endParaRPr>
+              <a:endParaRPr dirty="0">
                 <a:latin typeface="Noto Sans KR" panose="020B0200000000000000" pitchFamily="50" charset="-127"/>
                 <a:ea typeface="Noto Sans KR" panose="020B0200000000000000" pitchFamily="50" charset="-127"/>
               </a:endParaRPr>
@@ -9158,156 +8320,21 @@
           <p:nvPr>
             <p:extLst>
               <p:ext uri="{D42A27DB-BD31-4B8C-83A1-F6EECF244321}">
-                <p14:modId xmlns:p14="http://schemas.microsoft.com/office/powerpoint/2010/main" val="513720394"/>
+                <p14:modId xmlns:p14="http://schemas.microsoft.com/office/powerpoint/2010/main" val="4206724798"/>
               </p:ext>
             </p:extLst>
           </p:nvPr>
         </p:nvGraphicFramePr>
         <p:xfrm>
-          <a:off x="8808096" y="2386963"/>
-          <a:ext cx="2854896" cy="1702728"/>
+          <a:off x="9399380" y="2630803"/>
+          <a:ext cx="2263612" cy="1558706"/>
         </p:xfrm>
         <a:graphic>
           <a:graphicData uri="http://schemas.openxmlformats.org/drawingml/2006/chart">
-            <c:chart xmlns:c="http://schemas.openxmlformats.org/drawingml/2006/chart" xmlns:r="http://schemas.openxmlformats.org/officeDocument/2006/relationships" r:id="rId4"/>
+            <c:chart xmlns:c="http://schemas.openxmlformats.org/drawingml/2006/chart" xmlns:r="http://schemas.openxmlformats.org/officeDocument/2006/relationships" r:id="rId5"/>
           </a:graphicData>
         </a:graphic>
       </p:graphicFrame>
-      <p:sp>
-        <p:nvSpPr>
-          <p:cNvPr id="25" name="TextBox 24">
-            <a:extLst>
-              <a:ext uri="{FF2B5EF4-FFF2-40B4-BE49-F238E27FC236}">
-                <a16:creationId xmlns:a16="http://schemas.microsoft.com/office/drawing/2014/main" id="{3481BC6F-8525-D5E4-E998-D451D8E5EFB6}"/>
-              </a:ext>
-            </a:extLst>
-          </p:cNvPr>
-          <p:cNvSpPr txBox="1"/>
-          <p:nvPr/>
-        </p:nvSpPr>
-        <p:spPr>
-          <a:xfrm>
-            <a:off x="3410965" y="4643962"/>
-            <a:ext cx="1749135" cy="130613"/>
-          </a:xfrm>
-          <a:prstGeom prst="rect">
-            <a:avLst/>
-          </a:prstGeom>
-          <a:solidFill>
-            <a:schemeClr val="bg1"/>
-          </a:solidFill>
-        </p:spPr>
-        <p:txBody>
-          <a:bodyPr wrap="square" lIns="0" tIns="0" rIns="0" bIns="0" anchor="t">
-            <a:spAutoFit/>
-          </a:bodyPr>
-          <a:lstStyle/>
-          <a:p>
-            <a:pPr algn="r">
-              <a:lnSpc>
-                <a:spcPct val="115000"/>
-              </a:lnSpc>
-            </a:pPr>
-            <a:r>
-              <a:rPr lang="en-US" altLang="ko-KR" sz="800">
-                <a:solidFill>
-                  <a:srgbClr val="666666"/>
-                </a:solidFill>
-                <a:latin typeface="Noto Sans KR" panose="020B0200000000000000" pitchFamily="50" charset="-127"/>
-                <a:ea typeface="Noto Sans KR" panose="020B0200000000000000" pitchFamily="50" charset="-127"/>
-              </a:rPr>
-              <a:t>[</a:t>
-            </a:r>
-            <a:r>
-              <a:rPr lang="ko-KR" altLang="en-US" sz="800">
-                <a:solidFill>
-                  <a:srgbClr val="666666"/>
-                </a:solidFill>
-                <a:latin typeface="Noto Sans KR" panose="020B0200000000000000" pitchFamily="50" charset="-127"/>
-                <a:ea typeface="Noto Sans KR" panose="020B0200000000000000" pitchFamily="50" charset="-127"/>
-              </a:rPr>
-              <a:t>부동산</a:t>
-            </a:r>
-            <a:r>
-              <a:rPr lang="en-US" altLang="ko-KR" sz="800">
-                <a:solidFill>
-                  <a:srgbClr val="666666"/>
-                </a:solidFill>
-                <a:latin typeface="Noto Sans KR" panose="020B0200000000000000" pitchFamily="50" charset="-127"/>
-                <a:ea typeface="Noto Sans KR" panose="020B0200000000000000" pitchFamily="50" charset="-127"/>
-              </a:rPr>
-              <a:t>114 </a:t>
-            </a:r>
-            <a:r>
-              <a:rPr lang="ko-KR" altLang="en-US" sz="800">
-                <a:solidFill>
-                  <a:srgbClr val="666666"/>
-                </a:solidFill>
-                <a:latin typeface="Noto Sans KR" panose="020B0200000000000000" pitchFamily="50" charset="-127"/>
-                <a:ea typeface="Noto Sans KR" panose="020B0200000000000000" pitchFamily="50" charset="-127"/>
-              </a:rPr>
-              <a:t>시세</a:t>
-            </a:r>
-            <a:r>
-              <a:rPr lang="en-US" altLang="ko-KR" sz="800">
-                <a:solidFill>
-                  <a:srgbClr val="666666"/>
-                </a:solidFill>
-                <a:latin typeface="Noto Sans KR" panose="020B0200000000000000" pitchFamily="50" charset="-127"/>
-                <a:ea typeface="Noto Sans KR" panose="020B0200000000000000" pitchFamily="50" charset="-127"/>
-              </a:rPr>
-              <a:t>,  </a:t>
-            </a:r>
-            <a:r>
-              <a:rPr lang="ko-KR" altLang="en-US" sz="800">
-                <a:solidFill>
-                  <a:srgbClr val="666666"/>
-                </a:solidFill>
-                <a:latin typeface="Noto Sans KR" panose="020B0200000000000000" pitchFamily="50" charset="-127"/>
-                <a:ea typeface="Noto Sans KR" panose="020B0200000000000000" pitchFamily="50" charset="-127"/>
-              </a:rPr>
-              <a:t>전용 </a:t>
-            </a:r>
-            <a:r>
-              <a:rPr lang="en-US" altLang="ko-KR" sz="800">
-                <a:solidFill>
-                  <a:srgbClr val="666666"/>
-                </a:solidFill>
-                <a:latin typeface="Noto Sans KR" panose="020B0200000000000000" pitchFamily="50" charset="-127"/>
-                <a:ea typeface="Noto Sans KR" panose="020B0200000000000000" pitchFamily="50" charset="-127"/>
-              </a:rPr>
-              <a:t>60~85</a:t>
-            </a:r>
-            <a:r>
-              <a:rPr lang="ko-KR" altLang="en-US" sz="800" b="0">
-                <a:solidFill>
-                  <a:srgbClr val="666666"/>
-                </a:solidFill>
-                <a:latin typeface="Noto Sans KR" panose="020B0200000000000000" pitchFamily="50" charset="-127"/>
-                <a:ea typeface="Noto Sans KR" panose="020B0200000000000000" pitchFamily="50" charset="-127"/>
-              </a:rPr>
-              <a:t>㎡ 기준</a:t>
-            </a:r>
-            <a:r>
-              <a:rPr lang="en-US" altLang="ko-KR" sz="800">
-                <a:solidFill>
-                  <a:srgbClr val="666666"/>
-                </a:solidFill>
-                <a:latin typeface="Noto Sans KR" panose="020B0200000000000000" pitchFamily="50" charset="-127"/>
-                <a:ea typeface="Noto Sans KR" panose="020B0200000000000000" pitchFamily="50" charset="-127"/>
-              </a:rPr>
-              <a:t>]</a:t>
-            </a:r>
-            <a:endParaRPr lang="ko-KR" altLang="en-US" sz="800" b="0">
-              <a:solidFill>
-                <a:srgbClr val="666666"/>
-              </a:solidFill>
-              <a:latin typeface="Noto Sans KR" panose="020B0200000000000000" pitchFamily="50" charset="-127"/>
-              <a:ea typeface="Noto Sans KR" panose="020B0200000000000000" pitchFamily="50" charset="-127"/>
-            </a:endParaRPr>
-          </a:p>
-        </p:txBody>
-      </p:sp>
       <p:sp>
         <p:nvSpPr>
           <p:cNvPr id="46" name="TextBox 45">
@@ -9411,26 +8438,6 @@
               </a:rPr>
               <a:t/>
             </a:r>
-            <a:r>
-              <a:rPr lang="en-US" altLang="ko-KR" sz="1400" b="1">
-                <a:solidFill>
-                  <a:srgbClr val="222222"/>
-                </a:solidFill>
-                <a:latin typeface="Noto Sans KR" panose="020B0200000000000000" pitchFamily="50" charset="-127"/>
-                <a:ea typeface="Noto Sans KR" panose="020B0200000000000000" pitchFamily="50" charset="-127"/>
-              </a:rPr>
-              <a:t/>
-            </a:r>
-            <a:r>
-              <a:rPr lang="ko-KR" altLang="en-US" sz="1400" b="1">
-                <a:solidFill>
-                  <a:srgbClr val="222222"/>
-                </a:solidFill>
-                <a:latin typeface="Noto Sans KR" panose="020B0200000000000000" pitchFamily="50" charset="-127"/>
-                <a:ea typeface="Noto Sans KR" panose="020B0200000000000000" pitchFamily="50" charset="-127"/>
-              </a:rPr>
-              <a:t/>
-            </a:r>
             <a:endParaRPr lang="en-US" altLang="ko-KR" sz="1400" b="1">
               <a:solidFill>
                 <a:srgbClr val="222222"/>
@@ -9457,6 +8464,66 @@
             </a:r>
             <a:r>
               <a:rPr lang="en-US" altLang="ko-KR" sz="1400" b="1">
+                <a:solidFill>
+                  <a:srgbClr val="222222"/>
+                </a:solidFill>
+                <a:latin typeface="Noto Sans KR" panose="020B0200000000000000" pitchFamily="50" charset="-127"/>
+                <a:ea typeface="Noto Sans KR" panose="020B0200000000000000" pitchFamily="50" charset="-127"/>
+              </a:rPr>
+              <a:t/>
+            </a:r>
+            <a:r>
+              <a:rPr lang="ko-KR" altLang="en-US" sz="1400" b="1">
+                <a:solidFill>
+                  <a:srgbClr val="222222"/>
+                </a:solidFill>
+                <a:latin typeface="Noto Sans KR" panose="020B0200000000000000" pitchFamily="50" charset="-127"/>
+                <a:ea typeface="Noto Sans KR" panose="020B0200000000000000" pitchFamily="50" charset="-127"/>
+              </a:rPr>
+              <a:t/>
+            </a:r>
+            <a:r>
+              <a:rPr lang="ko-KR" altLang="en-US" sz="1400" b="1" err="1">
+                <a:solidFill>
+                  <a:srgbClr val="222222"/>
+                </a:solidFill>
+                <a:latin typeface="Noto Sans KR" panose="020B0200000000000000" pitchFamily="50" charset="-127"/>
+                <a:ea typeface="Noto Sans KR" panose="020B0200000000000000" pitchFamily="50" charset="-127"/>
+              </a:rPr>
+              <a:t/>
+            </a:r>
+            <a:r>
+              <a:rPr lang="ko-KR" altLang="en-US" sz="1400" b="1">
+                <a:solidFill>
+                  <a:srgbClr val="222222"/>
+                </a:solidFill>
+                <a:latin typeface="Noto Sans KR" panose="020B0200000000000000" pitchFamily="50" charset="-127"/>
+                <a:ea typeface="Noto Sans KR" panose="020B0200000000000000" pitchFamily="50" charset="-127"/>
+              </a:rPr>
+              <a:t/>
+            </a:r>
+            <a:r>
+              <a:rPr lang="ko-KR" altLang="en-US" sz="1400" b="1" err="1">
+                <a:solidFill>
+                  <a:srgbClr val="222222"/>
+                </a:solidFill>
+                <a:latin typeface="Noto Sans KR" panose="020B0200000000000000" pitchFamily="50" charset="-127"/>
+                <a:ea typeface="Noto Sans KR" panose="020B0200000000000000" pitchFamily="50" charset="-127"/>
+              </a:rPr>
+              <a:t/>
+            </a:r>
+            <a:r>
+              <a:rPr lang="ko-KR" altLang="en-US" sz="1400" b="1">
+                <a:solidFill>
+                  <a:srgbClr val="222222"/>
+                </a:solidFill>
+                <a:latin typeface="Noto Sans KR" panose="020B0200000000000000" pitchFamily="50" charset="-127"/>
+                <a:ea typeface="Noto Sans KR" panose="020B0200000000000000" pitchFamily="50" charset="-127"/>
+              </a:rPr>
+              <a:t/>
+            </a:r>
+            <a:r>
+              <a:rPr lang="ko-KR" altLang="en-US" sz="1400" b="1" err="1">
                 <a:solidFill>
                   <a:srgbClr val="222222"/>
                 </a:solidFill>
@@ -9500,14 +8567,14 @@
           <p:nvPr>
             <p:extLst>
               <p:ext uri="{D42A27DB-BD31-4B8C-83A1-F6EECF244321}">
-                <p14:modId xmlns:p14="http://schemas.microsoft.com/office/powerpoint/2010/main" val="3315669466"/>
+                <p14:modId xmlns:p14="http://schemas.microsoft.com/office/powerpoint/2010/main" val="4089046802"/>
               </p:ext>
             </p:extLst>
           </p:nvPr>
         </p:nvGraphicFramePr>
         <p:xfrm>
-          <a:off x="5473025" y="4485213"/>
-          <a:ext cx="6259524" cy="541596"/>
+          <a:off x="6135566" y="4790981"/>
+          <a:ext cx="5596980" cy="541596"/>
         </p:xfrm>
         <a:graphic>
           <a:graphicData uri="http://schemas.openxmlformats.org/drawingml/2006/table">
@@ -9516,28 +8583,28 @@
                 <a:tableStyleId>{5C22544A-7EE6-4342-B048-85BDC9FD1C3A}</a:tableStyleId>
               </a:tblPr>
               <a:tblGrid>
-                <a:gridCol w="1564881">
+                <a:gridCol w="1399245">
                   <a:extLst>
                     <a:ext uri="{9D8B030D-6E8A-4147-A177-3AD203B41FA5}">
                       <a16:colId xmlns:a16="http://schemas.microsoft.com/office/drawing/2014/main" val="1483610324"/>
                     </a:ext>
                   </a:extLst>
                 </a:gridCol>
-                <a:gridCol w="1564881">
+                <a:gridCol w="1399245">
                   <a:extLst>
                     <a:ext uri="{9D8B030D-6E8A-4147-A177-3AD203B41FA5}">
                       <a16:colId xmlns:a16="http://schemas.microsoft.com/office/drawing/2014/main" val="3659169962"/>
                     </a:ext>
                   </a:extLst>
                 </a:gridCol>
-                <a:gridCol w="1564881">
+                <a:gridCol w="1399245">
                   <a:extLst>
                     <a:ext uri="{9D8B030D-6E8A-4147-A177-3AD203B41FA5}">
                       <a16:colId xmlns:a16="http://schemas.microsoft.com/office/drawing/2014/main" val="2021771382"/>
                     </a:ext>
                   </a:extLst>
                 </a:gridCol>
-                <a:gridCol w="1564881">
+                <a:gridCol w="1399245">
                   <a:extLst>
                     <a:ext uri="{9D8B030D-6E8A-4147-A177-3AD203B41FA5}">
                       <a16:colId xmlns:a16="http://schemas.microsoft.com/office/drawing/2014/main" val="3330070868"/>
@@ -9553,14 +8620,14 @@
                     <a:p>
                       <a:pPr algn="ctr" latinLnBrk="1"/>
                       <a:r>
-                        <a:rPr lang="ko-KR" altLang="en-US" sz="1000">
+                        <a:rPr lang="ko-KR" altLang="en-US" sz="1000" strike="noStrike" dirty="0">
                           <a:solidFill>
                             <a:schemeClr val="bg1"/>
                           </a:solidFill>
                           <a:latin typeface="Noto Sans KR" panose="020B0200000000000000" pitchFamily="50" charset="-127"/>
                           <a:ea typeface="Noto Sans KR" panose="020B0200000000000000" pitchFamily="50" charset="-127"/>
                         </a:rPr>
-                        <a:t>입지</a:t>
+                        <a:t>입지 및 시장환경</a:t>
                       </a:r>
                     </a:p>
                   </a:txBody>
@@ -9588,7 +8655,7 @@
                       <a:tailEnd type="none" w="med" len="med"/>
                     </a:lnB>
                     <a:solidFill>
-                      <a:srgbClr val="002941"/>
+                      <a:srgbClr val="0070C0"/>
                     </a:solidFill>
                   </a:tcPr>
                 </a:tc>
@@ -9599,14 +8666,14 @@
                     <a:p>
                       <a:pPr algn="ctr" latinLnBrk="1"/>
                       <a:r>
-                        <a:rPr lang="ko-KR" altLang="en-US" sz="1000">
+                        <a:rPr lang="ko-KR" altLang="en-US" sz="1000" strike="noStrike" dirty="0">
                           <a:solidFill>
                             <a:schemeClr val="bg1"/>
                           </a:solidFill>
                           <a:latin typeface="Noto Sans KR" panose="020B0200000000000000" pitchFamily="50" charset="-127"/>
                           <a:ea typeface="Noto Sans KR" panose="020B0200000000000000" pitchFamily="50" charset="-127"/>
                         </a:rPr>
-                        <a:t>수급</a:t>
+                        <a:t>상품</a:t>
                       </a:r>
                     </a:p>
                   </a:txBody>
@@ -9645,7 +8712,7 @@
                       <a:tailEnd type="none" w="med" len="med"/>
                     </a:lnB>
                     <a:solidFill>
-                      <a:srgbClr val="002941"/>
+                      <a:srgbClr val="0070C0"/>
                     </a:solidFill>
                   </a:tcPr>
                 </a:tc>
@@ -9656,14 +8723,14 @@
                     <a:p>
                       <a:pPr algn="ctr" latinLnBrk="1"/>
                       <a:r>
-                        <a:rPr lang="ko-KR" altLang="en-US" sz="1000">
+                        <a:rPr lang="ko-KR" altLang="en-US" sz="1000" strike="noStrike" dirty="0">
                           <a:solidFill>
                             <a:schemeClr val="bg1"/>
                           </a:solidFill>
                           <a:latin typeface="Noto Sans KR" panose="020B0200000000000000" pitchFamily="50" charset="-127"/>
                           <a:ea typeface="Noto Sans KR" panose="020B0200000000000000" pitchFamily="50" charset="-127"/>
                         </a:rPr>
-                        <a:t>브랜드</a:t>
+                        <a:t>브랜드 영향</a:t>
                       </a:r>
                     </a:p>
                   </a:txBody>
@@ -9702,7 +8769,7 @@
                       <a:tailEnd type="none" w="med" len="med"/>
                     </a:lnB>
                     <a:solidFill>
-                      <a:srgbClr val="002941"/>
+                      <a:srgbClr val="0070C0"/>
                     </a:solidFill>
                   </a:tcPr>
                 </a:tc>
@@ -9713,14 +8780,14 @@
                     <a:p>
                       <a:pPr algn="ctr" latinLnBrk="1"/>
                       <a:r>
-                        <a:rPr lang="ko-KR" altLang="en-US" sz="1000">
+                        <a:rPr lang="ko-KR" altLang="en-US" sz="1000" strike="noStrike" dirty="0">
                           <a:solidFill>
                             <a:schemeClr val="bg1"/>
                           </a:solidFill>
                           <a:latin typeface="Noto Sans KR" panose="020B0200000000000000" pitchFamily="50" charset="-127"/>
                           <a:ea typeface="Noto Sans KR" panose="020B0200000000000000" pitchFamily="50" charset="-127"/>
                         </a:rPr>
-                        <a:t>상품</a:t>
+                        <a:t>분양등급</a:t>
                       </a:r>
                     </a:p>
                   </a:txBody>
@@ -9755,7 +8822,7 @@
                       <a:tailEnd type="none" w="med" len="med"/>
                     </a:lnB>
                     <a:solidFill>
-                      <a:srgbClr val="002941"/>
+                      <a:srgbClr val="0070C0"/>
                     </a:solidFill>
                   </a:tcPr>
                 </a:tc>
@@ -9773,21 +8840,23 @@
                     <a:p>
                       <a:pPr algn="ctr" latinLnBrk="1"/>
                       <a:r>
-                        <a:rPr lang="ko-KR" altLang="en-US" sz="1000">
+                        <a:rPr lang="ko-KR" altLang="en-US" sz="1000" b="1" kern="1200" dirty="0">
                           <a:solidFill>
                             <a:srgbClr val="2E9E4F"/>
                           </a:solidFill>
                           <a:latin typeface="Noto Sans KR" panose="020B0200000000000000" pitchFamily="50" charset="-127"/>
                           <a:ea typeface="Noto Sans KR" panose="020B0200000000000000" pitchFamily="50" charset="-127"/>
+                          <a:cs typeface="+mn-cs"/>
                         </a:rPr>
-                        <a:t>신중</a:t>
+                        <a:t>● 신중</a:t>
                       </a:r>
-                      <a:endParaRPr lang="en-US" altLang="ko-KR" sz="1000">
+                      <a:endParaRPr lang="en-US" altLang="ko-KR" sz="1000" b="1" kern="1200" dirty="0">
                         <a:solidFill>
                           <a:srgbClr val="2E9E4F"/>
                         </a:solidFill>
                         <a:latin typeface="Noto Sans KR" panose="020B0200000000000000" pitchFamily="50" charset="-127"/>
                         <a:ea typeface="Noto Sans KR" panose="020B0200000000000000" pitchFamily="50" charset="-127"/>
+                        <a:cs typeface="+mn-cs"/>
                       </a:endParaRPr>
                     </a:p>
                   </a:txBody>
@@ -9837,15 +8906,14 @@
                     <a:p>
                       <a:pPr algn="ctr" latinLnBrk="1"/>
                       <a:r>
-                        <a:rPr lang="ko-KR" altLang="en-US" sz="1000" kern="1200">
+                        <a:rPr lang="ko-KR" altLang="en-US" sz="1000" b="1" dirty="0">
                           <a:solidFill>
-                            <a:srgbClr val="2E9E4F"/>
+                            <a:srgbClr val="E8A93B"/>
                           </a:solidFill>
                           <a:latin typeface="Noto Sans KR" panose="020B0200000000000000" pitchFamily="50" charset="-127"/>
                           <a:ea typeface="Noto Sans KR" panose="020B0200000000000000" pitchFamily="50" charset="-127"/>
-                          <a:cs typeface="+mn-cs"/>
                         </a:rPr>
-                        <a:t>보통</a:t>
+                        <a:t>● 보통</a:t>
                       </a:r>
                     </a:p>
                   </a:txBody>
@@ -9906,15 +8974,15 @@
                     <a:p>
                       <a:pPr algn="ctr" latinLnBrk="1"/>
                       <a:r>
-                        <a:rPr lang="ko-KR" altLang="en-US" sz="1000" b="1" kern="1200">
+                        <a:rPr lang="ko-KR" altLang="en-US" sz="1000" b="1" kern="1200" dirty="0">
                           <a:solidFill>
-                            <a:srgbClr val="C0392B"/>
+                            <a:srgbClr val="E8A93B"/>
                           </a:solidFill>
                           <a:latin typeface="Noto Sans KR" panose="020B0200000000000000" pitchFamily="50" charset="-127"/>
                           <a:ea typeface="Noto Sans KR" panose="020B0200000000000000" pitchFamily="50" charset="-127"/>
                           <a:cs typeface="+mn-cs"/>
                         </a:rPr>
-                        <a:t>보통</a:t>
+                        <a:t>● 보통</a:t>
                       </a:r>
                     </a:p>
                   </a:txBody>
@@ -9975,15 +9043,42 @@
                     <a:p>
                       <a:pPr algn="ctr" latinLnBrk="1"/>
                       <a:r>
-                        <a:rPr lang="ko-KR" altLang="en-US" sz="1000" b="1">
+                        <a:rPr lang="en-US" altLang="ko-KR" sz="1000" b="1" dirty="0">
                           <a:solidFill>
-                            <a:srgbClr val="C0392B"/>
+                            <a:srgbClr val="0070C0"/>
                           </a:solidFill>
                           <a:latin typeface="Noto Sans KR" panose="020B0200000000000000" pitchFamily="50" charset="-127"/>
                           <a:ea typeface="Noto Sans KR" panose="020B0200000000000000" pitchFamily="50" charset="-127"/>
                         </a:rPr>
-                        <a:t>보통</a:t>
+                        <a:t> 등급()</a:t>
                       </a:r>
+                      <a:r>
+                        <a:rPr lang="ko-KR" altLang="en-US" sz="1000" b="1" dirty="0">
+                          <a:solidFill>
+                            <a:srgbClr val="0070C0"/>
+                          </a:solidFill>
+                          <a:latin typeface="Noto Sans KR" panose="020B0200000000000000" pitchFamily="50" charset="-127"/>
+                          <a:ea typeface="Noto Sans KR" panose="020B0200000000000000" pitchFamily="50" charset="-127"/>
+                        </a:rPr>
+                        <a:t/>
+                      </a:r>
+                      <a:r>
+                        <a:rPr lang="en-US" altLang="ko-KR" sz="1000" b="1" dirty="0">
+                          <a:solidFill>
+                            <a:srgbClr val="0070C0"/>
+                          </a:solidFill>
+                          <a:latin typeface="Noto Sans KR" panose="020B0200000000000000" pitchFamily="50" charset="-127"/>
+                          <a:ea typeface="Noto Sans KR" panose="020B0200000000000000" pitchFamily="50" charset="-127"/>
+                        </a:rPr>
+                        <a:t/>
+                      </a:r>
+                      <a:endParaRPr lang="ko-KR" altLang="en-US" sz="1000" b="1" dirty="0">
+                        <a:solidFill>
+                          <a:srgbClr val="0070C0"/>
+                        </a:solidFill>
+                        <a:latin typeface="Noto Sans KR" panose="020B0200000000000000" pitchFamily="50" charset="-127"/>
+                        <a:ea typeface="Noto Sans KR" panose="020B0200000000000000" pitchFamily="50" charset="-127"/>
+                      </a:endParaRPr>
                     </a:p>
                   </a:txBody>
                   <a:tcPr marT="0" marB="0" anchor="ctr">
@@ -10056,7 +9151,7 @@
         </p:nvGrpSpPr>
         <p:grpSpPr>
           <a:xfrm>
-            <a:off x="10444870" y="4306118"/>
+            <a:off x="10444867" y="4611886"/>
             <a:ext cx="1287679" cy="146241"/>
             <a:chOff x="10199864" y="5361615"/>
             <a:chExt cx="1287679" cy="146241"/>
@@ -10384,7 +9479,7 @@
                 </a:lnSpc>
               </a:pPr>
               <a:r>
-                <a:rPr sz="850" b="0" err="1">
+                <a:rPr lang="ko-KR" altLang="en-US" sz="850" b="0" dirty="0">
                   <a:solidFill>
                     <a:schemeClr val="bg1">
                       <a:lumMod val="50000"/>
@@ -10393,9 +9488,9 @@
                   <a:latin typeface="Noto Sans KR" panose="020B0200000000000000" pitchFamily="50" charset="-127"/>
                   <a:ea typeface="Noto Sans KR" panose="020B0200000000000000" pitchFamily="50" charset="-127"/>
                 </a:rPr>
-                <a:t>신중</a:t>
+                <a:t>주의</a:t>
               </a:r>
-              <a:endParaRPr sz="850" b="0">
+              <a:endParaRPr sz="850" b="0" dirty="0">
                 <a:solidFill>
                   <a:schemeClr val="bg1">
                     <a:lumMod val="50000"/>
@@ -10408,285 +9503,6 @@
           </p:txBody>
         </p:sp>
       </p:grpSp>
-      <p:sp>
-        <p:nvSpPr>
-          <p:cNvPr id="61" name="Oval 64">
-            <a:extLst>
-              <a:ext uri="{FF2B5EF4-FFF2-40B4-BE49-F238E27FC236}">
-                <a16:creationId xmlns:a16="http://schemas.microsoft.com/office/drawing/2014/main" id="{2BE48DD5-F9D9-6F27-B971-45B3D7F6D3D8}"/>
-              </a:ext>
-            </a:extLst>
-          </p:cNvPr>
-          <p:cNvSpPr/>
-          <p:nvPr/>
-        </p:nvSpPr>
-        <p:spPr>
-          <a:xfrm>
-            <a:off x="10644682" y="4836742"/>
-            <a:ext cx="100584" cy="100584"/>
-          </a:xfrm>
-          <a:prstGeom prst="ellipse">
-            <a:avLst/>
-          </a:prstGeom>
-          <a:solidFill>
-            <a:srgbClr val="C0392B"/>
-          </a:solidFill>
-          <a:ln>
-            <a:noFill/>
-          </a:ln>
-        </p:spPr>
-        <p:style>
-          <a:lnRef idx="1">
-            <a:schemeClr val="accent1"/>
-          </a:lnRef>
-          <a:fillRef idx="3">
-            <a:schemeClr val="accent1"/>
-          </a:fillRef>
-          <a:effectRef idx="2">
-            <a:schemeClr val="accent1"/>
-          </a:effectRef>
-          <a:fontRef idx="minor">
-            <a:schemeClr val="lt1"/>
-          </a:fontRef>
-        </p:style>
-        <p:txBody>
-          <a:bodyPr rtlCol="0" anchor="ctr"/>
-          <a:lstStyle/>
-          <a:p>
-            <a:pPr algn="ctr"/>
-            <a:endParaRPr>
-              <a:solidFill>
-                <a:schemeClr val="bg1">
-                  <a:lumMod val="50000"/>
-                </a:schemeClr>
-              </a:solidFill>
-              <a:latin typeface="Noto Sans KR" panose="020B0200000000000000" pitchFamily="50" charset="-127"/>
-              <a:ea typeface="Noto Sans KR" panose="020B0200000000000000" pitchFamily="50" charset="-127"/>
-            </a:endParaRPr>
-          </a:p>
-        </p:txBody>
-      </p:sp>
-      <p:sp>
-        <p:nvSpPr>
-          <p:cNvPr id="62" name="Oval 64">
-            <a:extLst>
-              <a:ext uri="{FF2B5EF4-FFF2-40B4-BE49-F238E27FC236}">
-                <a16:creationId xmlns:a16="http://schemas.microsoft.com/office/drawing/2014/main" id="{41F227E8-9B0D-569B-AE25-50C619CE93D6}"/>
-              </a:ext>
-            </a:extLst>
-          </p:cNvPr>
-          <p:cNvSpPr/>
-          <p:nvPr/>
-        </p:nvSpPr>
-        <p:spPr>
-          <a:xfrm>
-            <a:off x="9117507" y="4836742"/>
-            <a:ext cx="100584" cy="100584"/>
-          </a:xfrm>
-          <a:prstGeom prst="ellipse">
-            <a:avLst/>
-          </a:prstGeom>
-          <a:solidFill>
-            <a:srgbClr val="C0392B"/>
-          </a:solidFill>
-          <a:ln>
-            <a:noFill/>
-          </a:ln>
-        </p:spPr>
-        <p:style>
-          <a:lnRef idx="1">
-            <a:schemeClr val="accent1"/>
-          </a:lnRef>
-          <a:fillRef idx="3">
-            <a:schemeClr val="accent1"/>
-          </a:fillRef>
-          <a:effectRef idx="2">
-            <a:schemeClr val="accent1"/>
-          </a:effectRef>
-          <a:fontRef idx="minor">
-            <a:schemeClr val="lt1"/>
-          </a:fontRef>
-        </p:style>
-        <p:txBody>
-          <a:bodyPr rtlCol="0" anchor="ctr"/>
-          <a:lstStyle/>
-          <a:p>
-            <a:pPr algn="ctr"/>
-            <a:endParaRPr>
-              <a:solidFill>
-                <a:schemeClr val="bg1">
-                  <a:lumMod val="50000"/>
-                </a:schemeClr>
-              </a:solidFill>
-              <a:latin typeface="Noto Sans KR" panose="020B0200000000000000" pitchFamily="50" charset="-127"/>
-              <a:ea typeface="Noto Sans KR" panose="020B0200000000000000" pitchFamily="50" charset="-127"/>
-            </a:endParaRPr>
-          </a:p>
-        </p:txBody>
-      </p:sp>
-      <p:sp>
-        <p:nvSpPr>
-          <p:cNvPr id="73" name="Rectangle 57">
-            <a:extLst>
-              <a:ext uri="{FF2B5EF4-FFF2-40B4-BE49-F238E27FC236}">
-                <a16:creationId xmlns:a16="http://schemas.microsoft.com/office/drawing/2014/main" id="{B2616656-2AAB-CDC0-E93E-45FB802936E1}"/>
-              </a:ext>
-            </a:extLst>
-          </p:cNvPr>
-          <p:cNvSpPr/>
-          <p:nvPr/>
-        </p:nvSpPr>
-        <p:spPr>
-          <a:xfrm>
-            <a:off x="5487660" y="5310658"/>
-            <a:ext cx="6244889" cy="1201267"/>
-          </a:xfrm>
-          <a:prstGeom prst="roundRect">
-            <a:avLst>
-              <a:gd name="adj" fmla="val 5882"/>
-            </a:avLst>
-          </a:prstGeom>
-          <a:solidFill>
-            <a:srgbClr val="F6F5F2"/>
-          </a:solidFill>
-          <a:ln>
-            <a:noFill/>
-          </a:ln>
-        </p:spPr>
-        <p:style>
-          <a:lnRef idx="1">
-            <a:schemeClr val="accent1"/>
-          </a:lnRef>
-          <a:fillRef idx="3">
-            <a:schemeClr val="accent1"/>
-          </a:fillRef>
-          <a:effectRef idx="2">
-            <a:schemeClr val="accent1"/>
-          </a:effectRef>
-          <a:fontRef idx="minor">
-            <a:schemeClr val="lt1"/>
-          </a:fontRef>
-        </p:style>
-        <p:txBody>
-          <a:bodyPr rtlCol="0" anchor="ctr"/>
-          <a:lstStyle/>
-          <a:p>
-            <a:pPr algn="ctr"/>
-            <a:endParaRPr>
-              <a:latin typeface="Noto Sans KR" panose="020B0200000000000000" pitchFamily="50" charset="-127"/>
-              <a:ea typeface="Noto Sans KR" panose="020B0200000000000000" pitchFamily="50" charset="-127"/>
-            </a:endParaRPr>
-          </a:p>
-        </p:txBody>
-      </p:sp>
-      <p:sp>
-        <p:nvSpPr>
-          <p:cNvPr id="74" name="Rectangle 58">
-            <a:extLst>
-              <a:ext uri="{FF2B5EF4-FFF2-40B4-BE49-F238E27FC236}">
-                <a16:creationId xmlns:a16="http://schemas.microsoft.com/office/drawing/2014/main" id="{6E76A4D8-5237-A1CB-2262-DC136B51392B}"/>
-              </a:ext>
-            </a:extLst>
-          </p:cNvPr>
-          <p:cNvSpPr/>
-          <p:nvPr/>
-        </p:nvSpPr>
-        <p:spPr>
-          <a:xfrm>
-            <a:off x="5490624" y="5309629"/>
-            <a:ext cx="45720" cy="1203323"/>
-          </a:xfrm>
-          <a:prstGeom prst="roundRect">
-            <a:avLst>
-              <a:gd name="adj" fmla="val 5882"/>
-            </a:avLst>
-          </a:prstGeom>
-          <a:solidFill>
-            <a:srgbClr val="002941"/>
-          </a:solidFill>
-          <a:ln>
-            <a:noFill/>
-          </a:ln>
-        </p:spPr>
-        <p:style>
-          <a:lnRef idx="1">
-            <a:schemeClr val="accent1"/>
-          </a:lnRef>
-          <a:fillRef idx="3">
-            <a:schemeClr val="accent1"/>
-          </a:fillRef>
-          <a:effectRef idx="2">
-            <a:schemeClr val="accent1"/>
-          </a:effectRef>
-          <a:fontRef idx="minor">
-            <a:schemeClr val="lt1"/>
-          </a:fontRef>
-        </p:style>
-        <p:txBody>
-          <a:bodyPr rtlCol="0" anchor="ctr"/>
-          <a:lstStyle/>
-          <a:p>
-            <a:pPr algn="ctr"/>
-            <a:endParaRPr>
-              <a:latin typeface="Noto Sans KR" panose="020B0200000000000000" pitchFamily="50" charset="-127"/>
-              <a:ea typeface="Noto Sans KR" panose="020B0200000000000000" pitchFamily="50" charset="-127"/>
-            </a:endParaRPr>
-          </a:p>
-        </p:txBody>
-      </p:sp>
-      <p:sp>
-        <p:nvSpPr>
-          <p:cNvPr id="75" name="TextBox 74">
-            <a:extLst>
-              <a:ext uri="{FF2B5EF4-FFF2-40B4-BE49-F238E27FC236}">
-                <a16:creationId xmlns:a16="http://schemas.microsoft.com/office/drawing/2014/main" id="{FD1AD173-1213-F193-CB98-4D51B737478F}"/>
-              </a:ext>
-            </a:extLst>
-          </p:cNvPr>
-          <p:cNvSpPr txBox="1"/>
-          <p:nvPr/>
-        </p:nvSpPr>
-        <p:spPr>
-          <a:xfrm>
-            <a:off x="5669525" y="5356857"/>
-            <a:ext cx="1097280" cy="202941"/>
-          </a:xfrm>
-          <a:prstGeom prst="rect">
-            <a:avLst/>
-          </a:prstGeom>
-          <a:noFill/>
-        </p:spPr>
-        <p:txBody>
-          <a:bodyPr wrap="square" lIns="0" tIns="0" rIns="0" bIns="0" anchor="ctr">
-            <a:spAutoFit/>
-          </a:bodyPr>
-          <a:lstStyle/>
-          <a:p>
-            <a:pPr>
-              <a:lnSpc>
-                <a:spcPct val="120000"/>
-              </a:lnSpc>
-            </a:pPr>
-            <a:r>
-              <a:rPr lang="ko-KR" altLang="en-US" sz="1200" b="1">
-                <a:solidFill>
-                  <a:srgbClr val="002941"/>
-                </a:solidFill>
-                <a:latin typeface="Noto Sans KR" panose="020B0200000000000000" pitchFamily="50" charset="-127"/>
-                <a:ea typeface="Noto Sans KR" panose="020B0200000000000000" pitchFamily="50" charset="-127"/>
-              </a:rPr>
-              <a:t>종합의견</a:t>
-            </a:r>
-            <a:endParaRPr sz="1200" b="1">
-              <a:solidFill>
-                <a:srgbClr val="002941"/>
-              </a:solidFill>
-              <a:latin typeface="Noto Sans KR" panose="020B0200000000000000" pitchFamily="50" charset="-127"/>
-              <a:ea typeface="Noto Sans KR" panose="020B0200000000000000" pitchFamily="50" charset="-127"/>
-            </a:endParaRPr>
-          </a:p>
-        </p:txBody>
-      </p:sp>
       <p:cxnSp>
         <p:nvCxnSpPr>
           <p:cNvPr id="76" name="Connector 69">
@@ -10703,8 +9519,8 @@
         </p:nvCxnSpPr>
         <p:spPr>
           <a:xfrm>
-            <a:off x="5579101" y="5618857"/>
-            <a:ext cx="5969432" cy="0"/>
+            <a:off x="6105216" y="7084316"/>
+            <a:ext cx="5341698" cy="0"/>
           </a:xfrm>
           <a:prstGeom prst="line">
             <a:avLst/>
@@ -10744,8 +9560,8 @@
         </p:nvSpPr>
         <p:spPr>
           <a:xfrm>
-            <a:off x="5639751" y="5694597"/>
-            <a:ext cx="5882527" cy="698653"/>
+            <a:off x="6287658" y="5503921"/>
+            <a:ext cx="5364096" cy="941027"/>
           </a:xfrm>
           <a:prstGeom prst="rect">
             <a:avLst/>
@@ -10758,7 +9574,7 @@
           </a:bodyPr>
           <a:lstStyle/>
           <a:p>
-            <a:pPr marL="171450" indent="-171450" algn="l">
+            <a:pPr marL="88900" indent="-88900" algn="l">
               <a:lnSpc>
                 <a:spcPct val="150000"/>
               </a:lnSpc>
@@ -10786,51 +9602,13 @@
               </a:rPr>
               <a:t/>
             </a:r>
-            <a:r>
-              <a:rPr lang="en-US" altLang="ko-KR" sz="1050" dirty="0">
-                <a:latin typeface="Noto Sans KR" panose="020B0200000000000000" pitchFamily="50" charset="-127"/>
-                <a:ea typeface="Noto Sans KR" panose="020B0200000000000000" pitchFamily="50" charset="-127"/>
-              </a:rPr>
-              <a:t/>
-            </a:r>
-            <a:r>
-              <a:rPr lang="ko-KR" altLang="en-US" sz="1050" dirty="0">
-                <a:latin typeface="Noto Sans KR" panose="020B0200000000000000" pitchFamily="50" charset="-127"/>
-                <a:ea typeface="Noto Sans KR" panose="020B0200000000000000" pitchFamily="50" charset="-127"/>
-              </a:rPr>
-              <a:t/>
-            </a:r>
-            <a:r>
-              <a:rPr lang="en-US" altLang="ko-KR" sz="1050" dirty="0">
-                <a:latin typeface="Noto Sans KR" panose="020B0200000000000000" pitchFamily="50" charset="-127"/>
-                <a:ea typeface="Noto Sans KR" panose="020B0200000000000000" pitchFamily="50" charset="-127"/>
-              </a:rPr>
-              <a:t/>
-            </a:r>
-            <a:r>
-              <a:rPr lang="ko-KR" altLang="en-US" sz="1050" dirty="0">
-                <a:latin typeface="Noto Sans KR" panose="020B0200000000000000" pitchFamily="50" charset="-127"/>
-                <a:ea typeface="Noto Sans KR" panose="020B0200000000000000" pitchFamily="50" charset="-127"/>
-              </a:rPr>
-              <a:t/>
-            </a:r>
-            <a:r>
-              <a:rPr lang="en-US" altLang="ko-KR" sz="1050" dirty="0">
-                <a:latin typeface="Noto Sans KR" panose="020B0200000000000000" pitchFamily="50" charset="-127"/>
-                <a:ea typeface="Noto Sans KR" panose="020B0200000000000000" pitchFamily="50" charset="-127"/>
-              </a:rPr>
-              <a:t/>
-            </a:r>
-            <a:r>
-              <a:rPr lang="ko-KR" altLang="en-US" sz="1050" dirty="0">
-                <a:latin typeface="Noto Sans KR" panose="020B0200000000000000" pitchFamily="50" charset="-127"/>
-                <a:ea typeface="Noto Sans KR" panose="020B0200000000000000" pitchFamily="50" charset="-127"/>
-              </a:rPr>
-              <a:t/>
-            </a:r>
+            <a:endParaRPr lang="en-US" altLang="ko-KR" sz="1050" dirty="0">
+              <a:latin typeface="Noto Sans KR" panose="020B0200000000000000" pitchFamily="50" charset="-127"/>
+              <a:ea typeface="Noto Sans KR" panose="020B0200000000000000" pitchFamily="50" charset="-127"/>
+            </a:endParaRPr>
           </a:p>
           <a:p>
-            <a:pPr marL="171450" indent="-171450">
+            <a:pPr marL="88900" indent="-88900" algn="l">
               <a:lnSpc>
                 <a:spcPct val="150000"/>
               </a:lnSpc>
@@ -10858,13 +9636,41 @@
               </a:rPr>
               <a:t/>
             </a:r>
+            <a:r>
+              <a:rPr lang="ko-KR" altLang="en-US" sz="1050" dirty="0" err="1">
+                <a:latin typeface="Noto Sans KR" panose="020B0200000000000000" pitchFamily="50" charset="-127"/>
+                <a:ea typeface="Noto Sans KR" panose="020B0200000000000000" pitchFamily="50" charset="-127"/>
+              </a:rPr>
+              <a:t/>
+            </a:r>
+            <a:r>
+              <a:rPr lang="ko-KR" altLang="en-US" sz="1050" dirty="0">
+                <a:latin typeface="Noto Sans KR" panose="020B0200000000000000" pitchFamily="50" charset="-127"/>
+                <a:ea typeface="Noto Sans KR" panose="020B0200000000000000" pitchFamily="50" charset="-127"/>
+              </a:rPr>
+              <a:t/>
+            </a:r>
+            <a:r>
+              <a:rPr lang="ko-KR" altLang="en-US" sz="1050" dirty="0" err="1">
+                <a:latin typeface="Noto Sans KR" panose="020B0200000000000000" pitchFamily="50" charset="-127"/>
+                <a:ea typeface="Noto Sans KR" panose="020B0200000000000000" pitchFamily="50" charset="-127"/>
+              </a:rPr>
+              <a:t/>
+            </a:r>
+            <a:r>
+              <a:rPr lang="ko-KR" altLang="en-US" sz="1050" dirty="0">
+                <a:latin typeface="Noto Sans KR" panose="020B0200000000000000" pitchFamily="50" charset="-127"/>
+                <a:ea typeface="Noto Sans KR" panose="020B0200000000000000" pitchFamily="50" charset="-127"/>
+              </a:rPr>
+              <a:t/>
+            </a:r>
             <a:endParaRPr lang="en-US" altLang="ko-KR" sz="1050" dirty="0">
               <a:latin typeface="Noto Sans KR" panose="020B0200000000000000" pitchFamily="50" charset="-127"/>
               <a:ea typeface="Noto Sans KR" panose="020B0200000000000000" pitchFamily="50" charset="-127"/>
             </a:endParaRPr>
           </a:p>
           <a:p>
-            <a:pPr marL="171450" indent="-171450">
+            <a:pPr marL="88900" indent="-88900">
               <a:lnSpc>
                 <a:spcPct val="150000"/>
               </a:lnSpc>
@@ -10878,857 +9684,165 @@
               </a:rPr>
               <a:t>주력평형 84㎡ 제외 적정 분양가 보수적 책정(소형 · 대형)으로 외형가 심리선 확보</a:t>
             </a:r>
+            <a:r>
+              <a:rPr lang="ko-KR" altLang="en-US" sz="1050" b="0" dirty="0" err="1">
+                <a:latin typeface="Noto Sans KR" panose="020B0200000000000000" pitchFamily="50" charset="-127"/>
+                <a:ea typeface="Noto Sans KR" panose="020B0200000000000000" pitchFamily="50" charset="-127"/>
+              </a:rPr>
+              <a:t/>
+            </a:r>
+            <a:r>
+              <a:rPr lang="ko-KR" altLang="en-US" sz="1050" b="0" dirty="0">
+                <a:latin typeface="Noto Sans KR" panose="020B0200000000000000" pitchFamily="50" charset="-127"/>
+                <a:ea typeface="Noto Sans KR" panose="020B0200000000000000" pitchFamily="50" charset="-127"/>
+              </a:rPr>
+              <a:t/>
+            </a:r>
+            <a:r>
+              <a:rPr lang="ko-KR" altLang="en-US" sz="1050" dirty="0">
+                <a:latin typeface="Noto Sans KR" panose="020B0200000000000000" pitchFamily="50" charset="-127"/>
+                <a:ea typeface="Noto Sans KR" panose="020B0200000000000000" pitchFamily="50" charset="-127"/>
+              </a:rPr>
+              <a:t/>
+            </a:r>
+            <a:r>
+              <a:rPr lang="ko-KR" altLang="en-US" sz="1050" b="0" dirty="0">
+                <a:latin typeface="Noto Sans KR" panose="020B0200000000000000" pitchFamily="50" charset="-127"/>
+                <a:ea typeface="Noto Sans KR" panose="020B0200000000000000" pitchFamily="50" charset="-127"/>
+              </a:rPr>
+              <a:t/>
+            </a:r>
+            <a:r>
+              <a:rPr lang="en-US" altLang="ko-KR" sz="1050" b="0" dirty="0">
+                <a:latin typeface="Noto Sans KR" panose="020B0200000000000000" pitchFamily="50" charset="-127"/>
+                <a:ea typeface="Noto Sans KR" panose="020B0200000000000000" pitchFamily="50" charset="-127"/>
+              </a:rPr>
+              <a:t/>
+            </a:r>
+            <a:br>
+              <a:rPr lang="en-US" altLang="ko-KR" sz="1050" b="0" dirty="0">
+                <a:latin typeface="Noto Sans KR" panose="020B0200000000000000" pitchFamily="50" charset="-127"/>
+                <a:ea typeface="Noto Sans KR" panose="020B0200000000000000" pitchFamily="50" charset="-127"/>
+              </a:rPr>
+            </a:br>
+            <a:r>
+              <a:rPr lang="ko-KR" altLang="en-US" sz="1050" b="0" dirty="0">
+                <a:latin typeface="Noto Sans KR" panose="020B0200000000000000" pitchFamily="50" charset="-127"/>
+                <a:ea typeface="Noto Sans KR" panose="020B0200000000000000" pitchFamily="50" charset="-127"/>
+              </a:rPr>
+              <a:t/>
+            </a:r>
+            <a:r>
+              <a:rPr lang="ko-KR" altLang="en-US" sz="1050" dirty="0">
+                <a:latin typeface="Noto Sans KR" panose="020B0200000000000000" pitchFamily="50" charset="-127"/>
+                <a:ea typeface="Noto Sans KR" panose="020B0200000000000000" pitchFamily="50" charset="-127"/>
+              </a:rPr>
+              <a:t/>
+            </a:r>
+            <a:r>
+              <a:rPr lang="ko-KR" altLang="en-US" sz="1050" b="0" dirty="0">
+                <a:latin typeface="Noto Sans KR" panose="020B0200000000000000" pitchFamily="50" charset="-127"/>
+                <a:ea typeface="Noto Sans KR" panose="020B0200000000000000" pitchFamily="50" charset="-127"/>
+              </a:rPr>
+              <a:t/>
+            </a:r>
+            <a:r>
+              <a:rPr lang="en-US" altLang="ko-KR" sz="1050" b="0" dirty="0">
+                <a:latin typeface="Noto Sans KR" panose="020B0200000000000000" pitchFamily="50" charset="-127"/>
+                <a:ea typeface="Noto Sans KR" panose="020B0200000000000000" pitchFamily="50" charset="-127"/>
+              </a:rPr>
+              <a:t/>
+            </a:r>
+            <a:r>
+              <a:rPr lang="ko-KR" altLang="en-US" sz="1050" dirty="0" err="1">
+                <a:latin typeface="Noto Sans KR" panose="020B0200000000000000" pitchFamily="50" charset="-127"/>
+                <a:ea typeface="Noto Sans KR" panose="020B0200000000000000" pitchFamily="50" charset="-127"/>
+              </a:rPr>
+              <a:t/>
+            </a:r>
+            <a:r>
+              <a:rPr lang="ko-KR" altLang="en-US" sz="1050" dirty="0">
+                <a:latin typeface="Noto Sans KR" panose="020B0200000000000000" pitchFamily="50" charset="-127"/>
+                <a:ea typeface="Noto Sans KR" panose="020B0200000000000000" pitchFamily="50" charset="-127"/>
+              </a:rPr>
+              <a:t/>
+            </a:r>
+            <a:r>
+              <a:rPr lang="en-US" altLang="ko-KR" sz="1050" b="0" dirty="0">
+                <a:latin typeface="Noto Sans KR" panose="020B0200000000000000" pitchFamily="50" charset="-127"/>
+                <a:ea typeface="Noto Sans KR" panose="020B0200000000000000" pitchFamily="50" charset="-127"/>
+              </a:rPr>
+              <a:t/>
+            </a:r>
+            <a:r>
+              <a:rPr lang="ko-KR" altLang="en-US" sz="1050" b="0" dirty="0">
+                <a:latin typeface="Noto Sans KR" panose="020B0200000000000000" pitchFamily="50" charset="-127"/>
+                <a:ea typeface="Noto Sans KR" panose="020B0200000000000000" pitchFamily="50" charset="-127"/>
+              </a:rPr>
+              <a:t/>
+            </a:r>
           </a:p>
         </p:txBody>
       </p:sp>
-      <p:grpSp>
-        <p:nvGrpSpPr>
-          <p:cNvPr id="13" name="그룹 12">
+      <p:sp>
+        <p:nvSpPr>
+          <p:cNvPr id="64" name="TextBox 63">
             <a:extLst>
               <a:ext uri="{FF2B5EF4-FFF2-40B4-BE49-F238E27FC236}">
-                <a16:creationId xmlns:a16="http://schemas.microsoft.com/office/drawing/2014/main" id="{13547824-B588-86A9-9660-B7C2D389FF4F}"/>
+                <a16:creationId xmlns:a16="http://schemas.microsoft.com/office/drawing/2014/main" id="{264D0922-4F4B-5DDF-DECC-99449FC5B2B4}"/>
               </a:ext>
             </a:extLst>
           </p:cNvPr>
-          <p:cNvGrpSpPr/>
+          <p:cNvSpPr txBox="1"/>
           <p:nvPr/>
-        </p:nvGrpSpPr>
-        <p:grpSpPr>
+        </p:nvSpPr>
+        <p:spPr>
           <a:xfrm>
-            <a:off x="-2500707" y="868935"/>
-            <a:ext cx="2836737" cy="1083061"/>
-            <a:chOff x="-2578100" y="1303902"/>
-            <a:chExt cx="2836737" cy="1083061"/>
+            <a:off x="591396" y="4312466"/>
+            <a:ext cx="4680469" cy="180627"/>
           </a:xfrm>
-        </p:grpSpPr>
-        <p:sp>
-          <p:nvSpPr>
-            <p:cNvPr id="6" name="직사각형 5">
-              <a:extLst>
-                <a:ext uri="{FF2B5EF4-FFF2-40B4-BE49-F238E27FC236}">
-                  <a16:creationId xmlns:a16="http://schemas.microsoft.com/office/drawing/2014/main" id="{2BDA89C4-DAF3-4D73-1853-EDFA8801E55B}"/>
-                </a:ext>
-              </a:extLst>
-            </p:cNvPr>
-            <p:cNvSpPr/>
-            <p:nvPr/>
-          </p:nvSpPr>
-          <p:spPr>
-            <a:xfrm>
-              <a:off x="-2578100" y="1303902"/>
-              <a:ext cx="2138382" cy="537164"/>
-            </a:xfrm>
-            <a:prstGeom prst="rect">
-              <a:avLst/>
-            </a:prstGeom>
-            <a:solidFill>
-              <a:schemeClr val="bg1"/>
-            </a:solidFill>
-            <a:ln w="9525">
+          <a:prstGeom prst="rect">
+            <a:avLst/>
+          </a:prstGeom>
+          <a:noFill/>
+        </p:spPr>
+        <p:txBody>
+          <a:bodyPr wrap="square" lIns="0" tIns="0" rIns="0" bIns="0" anchor="ctr">
+            <a:spAutoFit/>
+          </a:bodyPr>
+          <a:lstStyle/>
+          <a:p>
+            <a:pPr>
+              <a:lnSpc>
+                <a:spcPct val="130000"/>
+              </a:lnSpc>
+            </a:pPr>
+            <a:r>
+              <a:rPr lang="ko-KR" altLang="en-US" sz="1000" dirty="0">
+                <a:solidFill>
+                  <a:srgbClr val="222222"/>
+                </a:solidFill>
+                <a:latin typeface="Noto Sans KR" panose="020B0200000000000000" pitchFamily="50" charset="-127"/>
+                <a:ea typeface="Noto Sans KR" panose="020B0200000000000000" pitchFamily="50" charset="-127"/>
+              </a:rPr>
+              <a:t/>
+            </a:r>
+            <a:endParaRPr sz="1000" dirty="0">
               <a:solidFill>
-                <a:srgbClr val="C00000"/>
+                <a:srgbClr val="222222"/>
               </a:solidFill>
-            </a:ln>
-          </p:spPr>
-          <p:style>
-            <a:lnRef idx="2">
-              <a:schemeClr val="accent1">
-                <a:shade val="15000"/>
-              </a:schemeClr>
-            </a:lnRef>
-            <a:fillRef idx="1">
-              <a:schemeClr val="accent1"/>
-            </a:fillRef>
-            <a:effectRef idx="0">
-              <a:schemeClr val="accent1"/>
-            </a:effectRef>
-            <a:fontRef idx="minor">
-              <a:schemeClr val="lt1"/>
-            </a:fontRef>
-          </p:style>
-          <p:txBody>
-            <a:bodyPr lIns="36000" tIns="36000" rIns="36000" bIns="36000" rtlCol="0" anchor="ctr" anchorCtr="0"/>
-            <a:lstStyle/>
-            <a:p>
-              <a:r>
-                <a:rPr lang="ko-KR" altLang="en-US" sz="1000">
-                  <a:solidFill>
-                    <a:srgbClr val="C00000"/>
-                  </a:solidFill>
-                  <a:latin typeface="Noto Sans KR" panose="020B0200000000000000" pitchFamily="50" charset="-127"/>
-                  <a:ea typeface="Noto Sans KR" panose="020B0200000000000000" pitchFamily="50" charset="-127"/>
-                </a:rPr>
-                <a:t/>
-              </a:r>
-              <a:r>
-                <a:rPr lang="en-US" altLang="ko-KR" sz="1000">
-                  <a:solidFill>
-                    <a:srgbClr val="C00000"/>
-                  </a:solidFill>
-                  <a:latin typeface="Noto Sans KR" panose="020B0200000000000000" pitchFamily="50" charset="-127"/>
-                  <a:ea typeface="Noto Sans KR" panose="020B0200000000000000" pitchFamily="50" charset="-127"/>
-                </a:rPr>
-                <a:t/>
-              </a:r>
-              <a:r>
-                <a:rPr lang="ko-KR" altLang="en-US" sz="1000">
-                  <a:solidFill>
-                    <a:srgbClr val="C00000"/>
-                  </a:solidFill>
-                  <a:latin typeface="Noto Sans KR" panose="020B0200000000000000" pitchFamily="50" charset="-127"/>
-                  <a:ea typeface="Noto Sans KR" panose="020B0200000000000000" pitchFamily="50" charset="-127"/>
-                </a:rPr>
-                <a:t/>
-              </a:r>
-              <a:endParaRPr lang="en-US" altLang="ko-KR" sz="1000">
-                <a:solidFill>
-                  <a:srgbClr val="C00000"/>
-                </a:solidFill>
-                <a:latin typeface="Noto Sans KR" panose="020B0200000000000000" pitchFamily="50" charset="-127"/>
-                <a:ea typeface="Noto Sans KR" panose="020B0200000000000000" pitchFamily="50" charset="-127"/>
-              </a:endParaRPr>
-            </a:p>
-            <a:p>
-              <a:r>
-                <a:rPr lang="ko-KR" altLang="en-US" sz="1000">
-                  <a:solidFill>
-                    <a:srgbClr val="C00000"/>
-                  </a:solidFill>
-                  <a:latin typeface="Noto Sans KR" panose="020B0200000000000000" pitchFamily="50" charset="-127"/>
-                  <a:ea typeface="Noto Sans KR" panose="020B0200000000000000" pitchFamily="50" charset="-127"/>
-                </a:rPr>
-                <a:t/>
-              </a:r>
-              <a:r>
-                <a:rPr lang="en-US" altLang="ko-KR" sz="1000">
-                  <a:solidFill>
-                    <a:srgbClr val="C00000"/>
-                  </a:solidFill>
-                  <a:latin typeface="Noto Sans KR" panose="020B0200000000000000" pitchFamily="50" charset="-127"/>
-                  <a:ea typeface="Noto Sans KR" panose="020B0200000000000000" pitchFamily="50" charset="-127"/>
-                </a:rPr>
-                <a:t/>
-              </a:r>
-              <a:r>
-                <a:rPr lang="ko-KR" altLang="en-US" sz="1000">
-                  <a:solidFill>
-                    <a:srgbClr val="C00000"/>
-                  </a:solidFill>
-                  <a:latin typeface="Noto Sans KR" panose="020B0200000000000000" pitchFamily="50" charset="-127"/>
-                  <a:ea typeface="Noto Sans KR" panose="020B0200000000000000" pitchFamily="50" charset="-127"/>
-                </a:rPr>
-                <a:t/>
-              </a:r>
-            </a:p>
-          </p:txBody>
-        </p:sp>
-        <p:cxnSp>
-          <p:nvCxnSpPr>
-            <p:cNvPr id="9" name="연결선: 꺾임 8">
-              <a:extLst>
-                <a:ext uri="{FF2B5EF4-FFF2-40B4-BE49-F238E27FC236}">
-                  <a16:creationId xmlns:a16="http://schemas.microsoft.com/office/drawing/2014/main" id="{84208589-CEBC-D466-98F7-5944EC3B34CE}"/>
-                </a:ext>
-              </a:extLst>
-            </p:cNvPr>
-            <p:cNvCxnSpPr>
-              <a:cxnSpLocks/>
-              <a:stCxn id="6" idx="3"/>
-            </p:cNvCxnSpPr>
-            <p:nvPr/>
-          </p:nvCxnSpPr>
-          <p:spPr>
-            <a:xfrm>
-              <a:off x="-439718" y="1572484"/>
-              <a:ext cx="698355" cy="814479"/>
-            </a:xfrm>
-            <a:prstGeom prst="bentConnector2">
-              <a:avLst/>
-            </a:prstGeom>
-            <a:solidFill>
-              <a:schemeClr val="bg1"/>
-            </a:solidFill>
-            <a:ln w="9525">
-              <a:solidFill>
-                <a:srgbClr val="C00000"/>
-              </a:solidFill>
-              <a:tailEnd type="oval"/>
-            </a:ln>
-          </p:spPr>
-          <p:style>
-            <a:lnRef idx="2">
-              <a:schemeClr val="accent1">
-                <a:shade val="15000"/>
-              </a:schemeClr>
-            </a:lnRef>
-            <a:fillRef idx="1">
-              <a:schemeClr val="accent1"/>
-            </a:fillRef>
-            <a:effectRef idx="0">
-              <a:schemeClr val="accent1"/>
-            </a:effectRef>
-            <a:fontRef idx="minor">
-              <a:schemeClr val="lt1"/>
-            </a:fontRef>
-          </p:style>
-        </p:cxnSp>
-      </p:grpSp>
-      <p:grpSp>
-        <p:nvGrpSpPr>
-          <p:cNvPr id="14" name="그룹 13">
+              <a:latin typeface="Noto Sans KR" panose="020B0200000000000000" pitchFamily="50" charset="-127"/>
+              <a:ea typeface="Noto Sans KR" panose="020B0200000000000000" pitchFamily="50" charset="-127"/>
+            </a:endParaRPr>
+          </a:p>
+        </p:txBody>
+      </p:sp>
+      <p:sp>
+        <p:nvSpPr>
+          <p:cNvPr id="10" name="직사각형 9">
             <a:extLst>
               <a:ext uri="{FF2B5EF4-FFF2-40B4-BE49-F238E27FC236}">
-                <a16:creationId xmlns:a16="http://schemas.microsoft.com/office/drawing/2014/main" id="{3ED7F644-DAEF-70DC-99C1-454C78AF24BC}"/>
-              </a:ext>
-            </a:extLst>
-          </p:cNvPr>
-          <p:cNvGrpSpPr/>
-          <p:nvPr/>
-        </p:nvGrpSpPr>
-        <p:grpSpPr>
-          <a:xfrm>
-            <a:off x="-2424765" y="4280104"/>
-            <a:ext cx="2747415" cy="1241642"/>
-            <a:chOff x="-2578100" y="868845"/>
-            <a:chExt cx="2747415" cy="1241642"/>
-          </a:xfrm>
-        </p:grpSpPr>
-        <p:sp>
-          <p:nvSpPr>
-            <p:cNvPr id="15" name="직사각형 14">
-              <a:extLst>
-                <a:ext uri="{FF2B5EF4-FFF2-40B4-BE49-F238E27FC236}">
-                  <a16:creationId xmlns:a16="http://schemas.microsoft.com/office/drawing/2014/main" id="{C47D4CD6-3295-6A3B-2AD8-54D7FC37A7DF}"/>
-                </a:ext>
-              </a:extLst>
-            </p:cNvPr>
-            <p:cNvSpPr/>
-            <p:nvPr/>
-          </p:nvSpPr>
-          <p:spPr>
-            <a:xfrm>
-              <a:off x="-2578100" y="1034481"/>
-              <a:ext cx="2138382" cy="1076006"/>
-            </a:xfrm>
-            <a:prstGeom prst="rect">
-              <a:avLst/>
-            </a:prstGeom>
-            <a:solidFill>
-              <a:schemeClr val="bg1"/>
-            </a:solidFill>
-            <a:ln w="9525">
-              <a:solidFill>
-                <a:srgbClr val="C00000"/>
-              </a:solidFill>
-            </a:ln>
-          </p:spPr>
-          <p:style>
-            <a:lnRef idx="2">
-              <a:schemeClr val="accent1">
-                <a:shade val="15000"/>
-              </a:schemeClr>
-            </a:lnRef>
-            <a:fillRef idx="1">
-              <a:schemeClr val="accent1"/>
-            </a:fillRef>
-            <a:effectRef idx="0">
-              <a:schemeClr val="accent1"/>
-            </a:effectRef>
-            <a:fontRef idx="minor">
-              <a:schemeClr val="lt1"/>
-            </a:fontRef>
-          </p:style>
-          <p:txBody>
-            <a:bodyPr lIns="36000" tIns="36000" rIns="36000" bIns="36000" rtlCol="0" anchor="ctr" anchorCtr="0"/>
-            <a:lstStyle/>
-            <a:p>
-              <a:r>
-                <a:rPr lang="ko-KR" altLang="en-US" sz="1000">
-                  <a:solidFill>
-                    <a:srgbClr val="C00000"/>
-                  </a:solidFill>
-                  <a:latin typeface="Noto Sans KR" panose="020B0200000000000000" pitchFamily="50" charset="-127"/>
-                  <a:ea typeface="Noto Sans KR" panose="020B0200000000000000" pitchFamily="50" charset="-127"/>
-                </a:rPr>
-                <a:t/>
-              </a:r>
-              <a:br>
-                <a:rPr lang="en-US" altLang="ko-KR" sz="1000">
-                  <a:solidFill>
-                    <a:srgbClr val="C00000"/>
-                  </a:solidFill>
-                  <a:latin typeface="Noto Sans KR" panose="020B0200000000000000" pitchFamily="50" charset="-127"/>
-                  <a:ea typeface="Noto Sans KR" panose="020B0200000000000000" pitchFamily="50" charset="-127"/>
-                </a:rPr>
-              </a:br>
-              <a:r>
-                <a:rPr lang="ko-KR" altLang="en-US" sz="1000">
-                  <a:solidFill>
-                    <a:srgbClr val="C00000"/>
-                  </a:solidFill>
-                  <a:latin typeface="Noto Sans KR" panose="020B0200000000000000" pitchFamily="50" charset="-127"/>
-                  <a:ea typeface="Noto Sans KR" panose="020B0200000000000000" pitchFamily="50" charset="-127"/>
-                </a:rPr>
-                <a:t/>
-              </a:r>
-              <a:r>
-                <a:rPr lang="en-US" altLang="ko-KR" sz="1000">
-                  <a:solidFill>
-                    <a:srgbClr val="C00000"/>
-                  </a:solidFill>
-                  <a:latin typeface="Noto Sans KR" panose="020B0200000000000000" pitchFamily="50" charset="-127"/>
-                  <a:ea typeface="Noto Sans KR" panose="020B0200000000000000" pitchFamily="50" charset="-127"/>
-                </a:rPr>
-                <a:t/>
-              </a:r>
-              <a:r>
-                <a:rPr lang="ko-KR" altLang="en-US" sz="1000">
-                  <a:solidFill>
-                    <a:srgbClr val="C00000"/>
-                  </a:solidFill>
-                  <a:latin typeface="Noto Sans KR" panose="020B0200000000000000" pitchFamily="50" charset="-127"/>
-                  <a:ea typeface="Noto Sans KR" panose="020B0200000000000000" pitchFamily="50" charset="-127"/>
-                </a:rPr>
-                <a:t/>
-              </a:r>
-              <a:r>
-                <a:rPr lang="en-US" altLang="ko-KR" sz="1000">
-                  <a:solidFill>
-                    <a:srgbClr val="C00000"/>
-                  </a:solidFill>
-                  <a:latin typeface="Noto Sans KR" panose="020B0200000000000000" pitchFamily="50" charset="-127"/>
-                  <a:ea typeface="Noto Sans KR" panose="020B0200000000000000" pitchFamily="50" charset="-127"/>
-                </a:rPr>
-                <a:t/>
-              </a:r>
-              <a:r>
-                <a:rPr lang="ko-KR" altLang="en-US" sz="1000">
-                  <a:solidFill>
-                    <a:srgbClr val="C00000"/>
-                  </a:solidFill>
-                  <a:latin typeface="Noto Sans KR" panose="020B0200000000000000" pitchFamily="50" charset="-127"/>
-                  <a:ea typeface="Noto Sans KR" panose="020B0200000000000000" pitchFamily="50" charset="-127"/>
-                </a:rPr>
-                <a:t/>
-              </a:r>
-              <a:br>
-                <a:rPr lang="en-US" altLang="ko-KR" sz="1000">
-                  <a:solidFill>
-                    <a:srgbClr val="C00000"/>
-                  </a:solidFill>
-                  <a:latin typeface="Noto Sans KR" panose="020B0200000000000000" pitchFamily="50" charset="-127"/>
-                  <a:ea typeface="Noto Sans KR" panose="020B0200000000000000" pitchFamily="50" charset="-127"/>
-                </a:rPr>
-              </a:br>
-              <a:r>
-                <a:rPr lang="ko-KR" altLang="en-US" sz="1000">
-                  <a:solidFill>
-                    <a:srgbClr val="C00000"/>
-                  </a:solidFill>
-                  <a:latin typeface="Noto Sans KR" panose="020B0200000000000000" pitchFamily="50" charset="-127"/>
-                  <a:ea typeface="Noto Sans KR" panose="020B0200000000000000" pitchFamily="50" charset="-127"/>
-                </a:rPr>
-                <a:t/>
-              </a:r>
-              <a:r>
-                <a:rPr lang="en-US" altLang="ko-KR" sz="1000">
-                  <a:solidFill>
-                    <a:srgbClr val="C00000"/>
-                  </a:solidFill>
-                  <a:latin typeface="Noto Sans KR" panose="020B0200000000000000" pitchFamily="50" charset="-127"/>
-                  <a:ea typeface="Noto Sans KR" panose="020B0200000000000000" pitchFamily="50" charset="-127"/>
-                </a:rPr>
-                <a:t/>
-              </a:r>
-              <a:r>
-                <a:rPr lang="ko-KR" altLang="en-US" sz="1000">
-                  <a:solidFill>
-                    <a:srgbClr val="C00000"/>
-                  </a:solidFill>
-                  <a:latin typeface="Noto Sans KR" panose="020B0200000000000000" pitchFamily="50" charset="-127"/>
-                  <a:ea typeface="Noto Sans KR" panose="020B0200000000000000" pitchFamily="50" charset="-127"/>
-                </a:rPr>
-                <a:t/>
-              </a:r>
-              <a:r>
-                <a:rPr lang="en-US" altLang="ko-KR" sz="1000">
-                  <a:solidFill>
-                    <a:srgbClr val="C00000"/>
-                  </a:solidFill>
-                  <a:latin typeface="Noto Sans KR" panose="020B0200000000000000" pitchFamily="50" charset="-127"/>
-                  <a:ea typeface="Noto Sans KR" panose="020B0200000000000000" pitchFamily="50" charset="-127"/>
-                </a:rPr>
-                <a:t/>
-              </a:r>
-              <a:r>
-                <a:rPr lang="ko-KR" altLang="en-US" sz="1000">
-                  <a:solidFill>
-                    <a:srgbClr val="C00000"/>
-                  </a:solidFill>
-                  <a:latin typeface="Noto Sans KR" panose="020B0200000000000000" pitchFamily="50" charset="-127"/>
-                  <a:ea typeface="Noto Sans KR" panose="020B0200000000000000" pitchFamily="50" charset="-127"/>
-                </a:rPr>
-                <a:t/>
-              </a:r>
-              <a:r>
-                <a:rPr lang="en-US" altLang="ko-KR" sz="1000">
-                  <a:solidFill>
-                    <a:srgbClr val="C00000"/>
-                  </a:solidFill>
-                  <a:latin typeface="Noto Sans KR" panose="020B0200000000000000" pitchFamily="50" charset="-127"/>
-                  <a:ea typeface="Noto Sans KR" panose="020B0200000000000000" pitchFamily="50" charset="-127"/>
-                </a:rPr>
-                <a:t/>
-              </a:r>
-              <a:r>
-                <a:rPr lang="ko-KR" altLang="en-US" sz="1000">
-                  <a:solidFill>
-                    <a:srgbClr val="C00000"/>
-                  </a:solidFill>
-                  <a:latin typeface="Noto Sans KR" panose="020B0200000000000000" pitchFamily="50" charset="-127"/>
-                  <a:ea typeface="Noto Sans KR" panose="020B0200000000000000" pitchFamily="50" charset="-127"/>
-                </a:rPr>
-                <a:t/>
-              </a:r>
-            </a:p>
-          </p:txBody>
-        </p:sp>
-        <p:cxnSp>
-          <p:nvCxnSpPr>
-            <p:cNvPr id="16" name="연결선: 꺾임 15">
-              <a:extLst>
-                <a:ext uri="{FF2B5EF4-FFF2-40B4-BE49-F238E27FC236}">
-                  <a16:creationId xmlns:a16="http://schemas.microsoft.com/office/drawing/2014/main" id="{9FEE44BA-E134-A1D7-90C2-C3403206DBE0}"/>
-                </a:ext>
-              </a:extLst>
-            </p:cNvPr>
-            <p:cNvCxnSpPr>
-              <a:cxnSpLocks/>
-              <a:stCxn id="15" idx="3"/>
-            </p:cNvCxnSpPr>
-            <p:nvPr/>
-          </p:nvCxnSpPr>
-          <p:spPr>
-            <a:xfrm flipV="1">
-              <a:off x="-439718" y="868845"/>
-              <a:ext cx="609033" cy="703639"/>
-            </a:xfrm>
-            <a:prstGeom prst="bentConnector2">
-              <a:avLst/>
-            </a:prstGeom>
-            <a:solidFill>
-              <a:schemeClr val="bg1"/>
-            </a:solidFill>
-            <a:ln w="9525">
-              <a:solidFill>
-                <a:srgbClr val="C00000"/>
-              </a:solidFill>
-              <a:tailEnd type="oval"/>
-            </a:ln>
-          </p:spPr>
-          <p:style>
-            <a:lnRef idx="2">
-              <a:schemeClr val="accent1">
-                <a:shade val="15000"/>
-              </a:schemeClr>
-            </a:lnRef>
-            <a:fillRef idx="1">
-              <a:schemeClr val="accent1"/>
-            </a:fillRef>
-            <a:effectRef idx="0">
-              <a:schemeClr val="accent1"/>
-            </a:effectRef>
-            <a:fontRef idx="minor">
-              <a:schemeClr val="lt1"/>
-            </a:fontRef>
-          </p:style>
-        </p:cxnSp>
-      </p:grpSp>
-      <p:grpSp>
-        <p:nvGrpSpPr>
-          <p:cNvPr id="19" name="그룹 18">
-            <a:extLst>
-              <a:ext uri="{FF2B5EF4-FFF2-40B4-BE49-F238E27FC236}">
-                <a16:creationId xmlns:a16="http://schemas.microsoft.com/office/drawing/2014/main" id="{D039D282-CFB0-2C6C-3116-74D357F25D93}"/>
-              </a:ext>
-            </a:extLst>
-          </p:cNvPr>
-          <p:cNvGrpSpPr/>
-          <p:nvPr/>
-        </p:nvGrpSpPr>
-        <p:grpSpPr>
-          <a:xfrm>
-            <a:off x="11852922" y="772494"/>
-            <a:ext cx="3348978" cy="1280992"/>
-            <a:chOff x="-3202510" y="1253597"/>
-            <a:chExt cx="3348978" cy="1280992"/>
-          </a:xfrm>
-        </p:grpSpPr>
-        <p:sp>
-          <p:nvSpPr>
-            <p:cNvPr id="20" name="직사각형 19">
-              <a:extLst>
-                <a:ext uri="{FF2B5EF4-FFF2-40B4-BE49-F238E27FC236}">
-                  <a16:creationId xmlns:a16="http://schemas.microsoft.com/office/drawing/2014/main" id="{78AF0ED8-715E-A7AC-EDB2-7BAFAA3949AA}"/>
-                </a:ext>
-              </a:extLst>
-            </p:cNvPr>
-            <p:cNvSpPr/>
-            <p:nvPr/>
-          </p:nvSpPr>
-          <p:spPr>
-            <a:xfrm>
-              <a:off x="-2578100" y="1253597"/>
-              <a:ext cx="2724568" cy="1257468"/>
-            </a:xfrm>
-            <a:prstGeom prst="rect">
-              <a:avLst/>
-            </a:prstGeom>
-            <a:solidFill>
-              <a:schemeClr val="bg1"/>
-            </a:solidFill>
-            <a:ln w="9525">
-              <a:solidFill>
-                <a:srgbClr val="C00000"/>
-              </a:solidFill>
-            </a:ln>
-          </p:spPr>
-          <p:style>
-            <a:lnRef idx="2">
-              <a:schemeClr val="accent1">
-                <a:shade val="15000"/>
-              </a:schemeClr>
-            </a:lnRef>
-            <a:fillRef idx="1">
-              <a:schemeClr val="accent1"/>
-            </a:fillRef>
-            <a:effectRef idx="0">
-              <a:schemeClr val="accent1"/>
-            </a:effectRef>
-            <a:fontRef idx="minor">
-              <a:schemeClr val="lt1"/>
-            </a:fontRef>
-          </p:style>
-          <p:txBody>
-            <a:bodyPr lIns="36000" tIns="36000" rIns="36000" bIns="36000" rtlCol="0" anchor="ctr" anchorCtr="0"/>
-            <a:lstStyle/>
-            <a:p>
-              <a:r>
-                <a:rPr lang="ko-KR" altLang="en-US" sz="1000">
-                  <a:solidFill>
-                    <a:srgbClr val="C00000"/>
-                  </a:solidFill>
-                  <a:latin typeface="Noto Sans KR" panose="020B0200000000000000" pitchFamily="50" charset="-127"/>
-                  <a:ea typeface="Noto Sans KR" panose="020B0200000000000000" pitchFamily="50" charset="-127"/>
-                </a:rPr>
-                <a:t/>
-              </a:r>
-              <a:r>
-                <a:rPr lang="en-US" altLang="ko-KR" sz="1000">
-                  <a:solidFill>
-                    <a:srgbClr val="C00000"/>
-                  </a:solidFill>
-                  <a:latin typeface="Noto Sans KR" panose="020B0200000000000000" pitchFamily="50" charset="-127"/>
-                  <a:ea typeface="Noto Sans KR" panose="020B0200000000000000" pitchFamily="50" charset="-127"/>
-                </a:rPr>
-                <a:t/>
-              </a:r>
-              <a:r>
-                <a:rPr lang="ko-KR" altLang="en-US" sz="1000">
-                  <a:solidFill>
-                    <a:srgbClr val="C00000"/>
-                  </a:solidFill>
-                  <a:latin typeface="Noto Sans KR" panose="020B0200000000000000" pitchFamily="50" charset="-127"/>
-                  <a:ea typeface="Noto Sans KR" panose="020B0200000000000000" pitchFamily="50" charset="-127"/>
-                </a:rPr>
-                <a:t/>
-              </a:r>
-              <a:r>
-                <a:rPr lang="en-US" altLang="ko-KR" sz="1000">
-                  <a:solidFill>
-                    <a:srgbClr val="C00000"/>
-                  </a:solidFill>
-                  <a:latin typeface="Noto Sans KR" panose="020B0200000000000000" pitchFamily="50" charset="-127"/>
-                  <a:ea typeface="Noto Sans KR" panose="020B0200000000000000" pitchFamily="50" charset="-127"/>
-                </a:rPr>
-                <a:t/>
-              </a:r>
-              <a:r>
-                <a:rPr lang="ko-KR" altLang="en-US" sz="1000">
-                  <a:solidFill>
-                    <a:srgbClr val="C00000"/>
-                  </a:solidFill>
-                  <a:latin typeface="Noto Sans KR" panose="020B0200000000000000" pitchFamily="50" charset="-127"/>
-                  <a:ea typeface="Noto Sans KR" panose="020B0200000000000000" pitchFamily="50" charset="-127"/>
-                </a:rPr>
-                <a:t/>
-              </a:r>
-              <a:r>
-                <a:rPr lang="en-US" altLang="ko-KR" sz="1000">
-                  <a:solidFill>
-                    <a:srgbClr val="C00000"/>
-                  </a:solidFill>
-                  <a:latin typeface="Noto Sans KR" panose="020B0200000000000000" pitchFamily="50" charset="-127"/>
-                  <a:ea typeface="Noto Sans KR" panose="020B0200000000000000" pitchFamily="50" charset="-127"/>
-                </a:rPr>
-                <a:t/>
-              </a:r>
-              <a:r>
-                <a:rPr lang="ko-KR" altLang="en-US" sz="1000">
-                  <a:solidFill>
-                    <a:srgbClr val="C00000"/>
-                  </a:solidFill>
-                  <a:latin typeface="Noto Sans KR" panose="020B0200000000000000" pitchFamily="50" charset="-127"/>
-                  <a:ea typeface="Noto Sans KR" panose="020B0200000000000000" pitchFamily="50" charset="-127"/>
-                </a:rPr>
-                <a:t/>
-              </a:r>
-              <a:br>
-                <a:rPr lang="en-US" altLang="ko-KR" sz="1000">
-                  <a:solidFill>
-                    <a:srgbClr val="C00000"/>
-                  </a:solidFill>
-                  <a:latin typeface="Noto Sans KR" panose="020B0200000000000000" pitchFamily="50" charset="-127"/>
-                  <a:ea typeface="Noto Sans KR" panose="020B0200000000000000" pitchFamily="50" charset="-127"/>
-                </a:rPr>
-              </a:br>
-              <a:r>
-                <a:rPr lang="ko-KR" altLang="en-US" sz="1000">
-                  <a:solidFill>
-                    <a:srgbClr val="C00000"/>
-                  </a:solidFill>
-                  <a:latin typeface="Noto Sans KR" panose="020B0200000000000000" pitchFamily="50" charset="-127"/>
-                  <a:ea typeface="Noto Sans KR" panose="020B0200000000000000" pitchFamily="50" charset="-127"/>
-                </a:rPr>
-                <a:t/>
-              </a:r>
-              <a:r>
-                <a:rPr lang="en-US" altLang="ko-KR" sz="1000">
-                  <a:solidFill>
-                    <a:srgbClr val="C00000"/>
-                  </a:solidFill>
-                  <a:latin typeface="Noto Sans KR" panose="020B0200000000000000" pitchFamily="50" charset="-127"/>
-                  <a:ea typeface="Noto Sans KR" panose="020B0200000000000000" pitchFamily="50" charset="-127"/>
-                </a:rPr>
-                <a:t/>
-              </a:r>
-              <a:r>
-                <a:rPr lang="ko-KR" altLang="en-US" sz="1000">
-                  <a:solidFill>
-                    <a:srgbClr val="C00000"/>
-                  </a:solidFill>
-                  <a:latin typeface="Noto Sans KR" panose="020B0200000000000000" pitchFamily="50" charset="-127"/>
-                  <a:ea typeface="Noto Sans KR" panose="020B0200000000000000" pitchFamily="50" charset="-127"/>
-                </a:rPr>
-                <a:t/>
-              </a:r>
-              <a:r>
-                <a:rPr lang="ko-KR" altLang="en-US" sz="1000" err="1">
-                  <a:solidFill>
-                    <a:srgbClr val="C00000"/>
-                  </a:solidFill>
-                  <a:latin typeface="Noto Sans KR" panose="020B0200000000000000" pitchFamily="50" charset="-127"/>
-                  <a:ea typeface="Noto Sans KR" panose="020B0200000000000000" pitchFamily="50" charset="-127"/>
-                </a:rPr>
-                <a:t/>
-              </a:r>
-              <a:r>
-                <a:rPr lang="ko-KR" altLang="en-US" sz="1000">
-                  <a:solidFill>
-                    <a:srgbClr val="C00000"/>
-                  </a:solidFill>
-                  <a:latin typeface="Noto Sans KR" panose="020B0200000000000000" pitchFamily="50" charset="-127"/>
-                  <a:ea typeface="Noto Sans KR" panose="020B0200000000000000" pitchFamily="50" charset="-127"/>
-                </a:rPr>
-                <a:t/>
-              </a:r>
-              <a:br>
-                <a:rPr lang="en-US" altLang="ko-KR" sz="1000">
-                  <a:solidFill>
-                    <a:srgbClr val="C00000"/>
-                  </a:solidFill>
-                  <a:latin typeface="Noto Sans KR" panose="020B0200000000000000" pitchFamily="50" charset="-127"/>
-                  <a:ea typeface="Noto Sans KR" panose="020B0200000000000000" pitchFamily="50" charset="-127"/>
-                </a:rPr>
-              </a:br>
-              <a:r>
-                <a:rPr lang="en-US" altLang="ko-KR" sz="1000">
-                  <a:solidFill>
-                    <a:srgbClr val="C00000"/>
-                  </a:solidFill>
-                  <a:latin typeface="Noto Sans KR" panose="020B0200000000000000" pitchFamily="50" charset="-127"/>
-                  <a:ea typeface="Noto Sans KR" panose="020B0200000000000000" pitchFamily="50" charset="-127"/>
-                </a:rPr>
-                <a:t/>
-              </a:r>
-              <a:r>
-                <a:rPr lang="ko-KR" altLang="en-US" sz="1000">
-                  <a:solidFill>
-                    <a:srgbClr val="C00000"/>
-                  </a:solidFill>
-                  <a:latin typeface="Noto Sans KR" panose="020B0200000000000000" pitchFamily="50" charset="-127"/>
-                  <a:ea typeface="Noto Sans KR" panose="020B0200000000000000" pitchFamily="50" charset="-127"/>
-                </a:rPr>
-                <a:t/>
-              </a:r>
-              <a:r>
-                <a:rPr lang="en-US" altLang="ko-KR" sz="1000">
-                  <a:solidFill>
-                    <a:srgbClr val="C00000"/>
-                  </a:solidFill>
-                  <a:latin typeface="Noto Sans KR" panose="020B0200000000000000" pitchFamily="50" charset="-127"/>
-                  <a:ea typeface="Noto Sans KR" panose="020B0200000000000000" pitchFamily="50" charset="-127"/>
-                </a:rPr>
-                <a:t/>
-              </a:r>
-              <a:r>
-                <a:rPr lang="ko-KR" altLang="en-US" sz="1000">
-                  <a:solidFill>
-                    <a:srgbClr val="C00000"/>
-                  </a:solidFill>
-                  <a:latin typeface="Noto Sans KR" panose="020B0200000000000000" pitchFamily="50" charset="-127"/>
-                  <a:ea typeface="Noto Sans KR" panose="020B0200000000000000" pitchFamily="50" charset="-127"/>
-                </a:rPr>
-                <a:t/>
-              </a:r>
-              <a:r>
-                <a:rPr lang="ko-KR" altLang="en-US" sz="1000" err="1">
-                  <a:solidFill>
-                    <a:srgbClr val="C00000"/>
-                  </a:solidFill>
-                  <a:latin typeface="Noto Sans KR" panose="020B0200000000000000" pitchFamily="50" charset="-127"/>
-                  <a:ea typeface="Noto Sans KR" panose="020B0200000000000000" pitchFamily="50" charset="-127"/>
-                </a:rPr>
-                <a:t/>
-              </a:r>
-              <a:r>
-                <a:rPr lang="ko-KR" altLang="en-US" sz="1000">
-                  <a:solidFill>
-                    <a:srgbClr val="C00000"/>
-                  </a:solidFill>
-                  <a:latin typeface="Noto Sans KR" panose="020B0200000000000000" pitchFamily="50" charset="-127"/>
-                  <a:ea typeface="Noto Sans KR" panose="020B0200000000000000" pitchFamily="50" charset="-127"/>
-                </a:rPr>
-                <a:t/>
-              </a:r>
-              <a:br>
-                <a:rPr lang="en-US" altLang="ko-KR" sz="1000">
-                  <a:solidFill>
-                    <a:srgbClr val="C00000"/>
-                  </a:solidFill>
-                  <a:latin typeface="Noto Sans KR" panose="020B0200000000000000" pitchFamily="50" charset="-127"/>
-                  <a:ea typeface="Noto Sans KR" panose="020B0200000000000000" pitchFamily="50" charset="-127"/>
-                </a:rPr>
-              </a:br>
-              <a:endParaRPr lang="en-US" altLang="ko-KR" sz="1000">
-                <a:solidFill>
-                  <a:srgbClr val="C00000"/>
-                </a:solidFill>
-                <a:latin typeface="Noto Sans KR" panose="020B0200000000000000" pitchFamily="50" charset="-127"/>
-                <a:ea typeface="Noto Sans KR" panose="020B0200000000000000" pitchFamily="50" charset="-127"/>
-              </a:endParaRPr>
-            </a:p>
-            <a:p>
-              <a:r>
-                <a:rPr lang="en-US" altLang="ko-KR" sz="1000">
-                  <a:solidFill>
-                    <a:srgbClr val="C00000"/>
-                  </a:solidFill>
-                  <a:latin typeface="Noto Sans KR" panose="020B0200000000000000" pitchFamily="50" charset="-127"/>
-                  <a:ea typeface="Noto Sans KR" panose="020B0200000000000000" pitchFamily="50" charset="-127"/>
-                </a:rPr>
-                <a:t/>
-              </a:r>
-              <a:r>
-                <a:rPr lang="ko-KR" altLang="en-US" sz="1000" err="1">
-                  <a:solidFill>
-                    <a:srgbClr val="C00000"/>
-                  </a:solidFill>
-                  <a:latin typeface="Noto Sans KR" panose="020B0200000000000000" pitchFamily="50" charset="-127"/>
-                  <a:ea typeface="Noto Sans KR" panose="020B0200000000000000" pitchFamily="50" charset="-127"/>
-                </a:rPr>
-                <a:t/>
-              </a:r>
-              <a:r>
-                <a:rPr lang="ko-KR" altLang="en-US" sz="1000">
-                  <a:solidFill>
-                    <a:srgbClr val="C00000"/>
-                  </a:solidFill>
-                  <a:latin typeface="Noto Sans KR" panose="020B0200000000000000" pitchFamily="50" charset="-127"/>
-                  <a:ea typeface="Noto Sans KR" panose="020B0200000000000000" pitchFamily="50" charset="-127"/>
-                </a:rPr>
-                <a:t/>
-              </a:r>
-              <a:r>
-                <a:rPr lang="en-US" altLang="ko-KR" sz="1000">
-                  <a:solidFill>
-                    <a:srgbClr val="C00000"/>
-                  </a:solidFill>
-                  <a:latin typeface="Noto Sans KR" panose="020B0200000000000000" pitchFamily="50" charset="-127"/>
-                  <a:ea typeface="Noto Sans KR" panose="020B0200000000000000" pitchFamily="50" charset="-127"/>
-                </a:rPr>
-                <a:t/>
-              </a:r>
-            </a:p>
-          </p:txBody>
-        </p:sp>
-        <p:cxnSp>
-          <p:nvCxnSpPr>
-            <p:cNvPr id="23" name="연결선: 꺾임 22">
-              <a:extLst>
-                <a:ext uri="{FF2B5EF4-FFF2-40B4-BE49-F238E27FC236}">
-                  <a16:creationId xmlns:a16="http://schemas.microsoft.com/office/drawing/2014/main" id="{6DE7527E-5C0C-D262-F749-04B67842518D}"/>
-                </a:ext>
-              </a:extLst>
-            </p:cNvPr>
-            <p:cNvCxnSpPr>
-              <a:cxnSpLocks/>
-              <a:stCxn id="20" idx="1"/>
-            </p:cNvCxnSpPr>
-            <p:nvPr/>
-          </p:nvCxnSpPr>
-          <p:spPr>
-            <a:xfrm rot="10800000" flipV="1">
-              <a:off x="-3202510" y="1882331"/>
-              <a:ext cx="624410" cy="652258"/>
-            </a:xfrm>
-            <a:prstGeom prst="bentConnector2">
-              <a:avLst/>
-            </a:prstGeom>
-            <a:solidFill>
-              <a:schemeClr val="bg1"/>
-            </a:solidFill>
-            <a:ln w="9525">
-              <a:solidFill>
-                <a:srgbClr val="C00000"/>
-              </a:solidFill>
-              <a:tailEnd type="oval"/>
-            </a:ln>
-          </p:spPr>
-          <p:style>
-            <a:lnRef idx="2">
-              <a:schemeClr val="accent1">
-                <a:shade val="15000"/>
-              </a:schemeClr>
-            </a:lnRef>
-            <a:fillRef idx="1">
-              <a:schemeClr val="accent1"/>
-            </a:fillRef>
-            <a:effectRef idx="0">
-              <a:schemeClr val="accent1"/>
-            </a:effectRef>
-            <a:fontRef idx="minor">
-              <a:schemeClr val="lt1"/>
-            </a:fontRef>
-          </p:style>
-        </p:cxnSp>
-      </p:grpSp>
-      <p:sp>
-        <p:nvSpPr>
-          <p:cNvPr id="32" name="Oval 64">
-            <a:extLst>
-              <a:ext uri="{FF2B5EF4-FFF2-40B4-BE49-F238E27FC236}">
-                <a16:creationId xmlns:a16="http://schemas.microsoft.com/office/drawing/2014/main" id="{1B893BED-29B2-1D21-79FF-5A7DB7D67447}"/>
+                <a16:creationId xmlns:a16="http://schemas.microsoft.com/office/drawing/2014/main" id="{01DA7BEF-30D7-53AE-5176-39FFE1A89199}"/>
               </a:ext>
             </a:extLst>
           </p:cNvPr>
@@ -11737,27 +9851,31 @@
         </p:nvSpPr>
         <p:spPr>
           <a:xfrm>
-            <a:off x="7573187" y="4836742"/>
-            <a:ext cx="100584" cy="100584"/>
+            <a:off x="3736018" y="4836742"/>
+            <a:ext cx="847409" cy="1707412"/>
           </a:xfrm>
-          <a:prstGeom prst="ellipse">
+          <a:prstGeom prst="rect">
             <a:avLst/>
           </a:prstGeom>
           <a:solidFill>
-            <a:srgbClr val="2E9E4F"/>
+            <a:srgbClr val="0E3B68">
+              <a:alpha val="16000"/>
+            </a:srgbClr>
           </a:solidFill>
-          <a:ln>
+          <a:ln w="12700">
             <a:noFill/>
           </a:ln>
         </p:spPr>
         <p:style>
-          <a:lnRef idx="1">
-            <a:schemeClr val="accent1"/>
+          <a:lnRef idx="2">
+            <a:schemeClr val="accent1">
+              <a:shade val="15000"/>
+            </a:schemeClr>
           </a:lnRef>
-          <a:fillRef idx="3">
+          <a:fillRef idx="1">
             <a:schemeClr val="accent1"/>
           </a:fillRef>
-          <a:effectRef idx="2">
+          <a:effectRef idx="0">
             <a:schemeClr val="accent1"/>
           </a:effectRef>
           <a:fontRef idx="minor">
@@ -11769,11 +9887,138 @@
           <a:lstStyle/>
           <a:p>
             <a:pPr algn="ctr"/>
-            <a:endParaRPr>
+            <a:endParaRPr lang="ko-KR" altLang="en-US"/>
+          </a:p>
+        </p:txBody>
+      </p:sp>
+      <p:sp>
+        <p:nvSpPr>
+          <p:cNvPr id="25" name="TextBox 24">
+            <a:extLst>
+              <a:ext uri="{FF2B5EF4-FFF2-40B4-BE49-F238E27FC236}">
+                <a16:creationId xmlns:a16="http://schemas.microsoft.com/office/drawing/2014/main" id="{3481BC6F-8525-D5E4-E998-D451D8E5EFB6}"/>
+              </a:ext>
+            </a:extLst>
+          </p:cNvPr>
+          <p:cNvSpPr txBox="1"/>
+          <p:nvPr/>
+        </p:nvSpPr>
+        <p:spPr>
+          <a:xfrm>
+            <a:off x="3660431" y="4643962"/>
+            <a:ext cx="1897772" cy="130613"/>
+          </a:xfrm>
+          <a:prstGeom prst="rect">
+            <a:avLst/>
+          </a:prstGeom>
+          <a:solidFill>
+            <a:schemeClr val="bg1"/>
+          </a:solidFill>
+        </p:spPr>
+        <p:txBody>
+          <a:bodyPr wrap="square" lIns="0" tIns="0" rIns="0" bIns="0" anchor="t">
+            <a:spAutoFit/>
+          </a:bodyPr>
+          <a:lstStyle/>
+          <a:p>
+            <a:pPr algn="r">
+              <a:lnSpc>
+                <a:spcPct val="115000"/>
+              </a:lnSpc>
+            </a:pPr>
+            <a:r>
+              <a:rPr lang="en-US" altLang="ko-KR" sz="800">
+                <a:solidFill>
+                  <a:srgbClr val="666666"/>
+                </a:solidFill>
+                <a:latin typeface="Noto Sans KR" panose="020B0200000000000000" pitchFamily="50" charset="-127"/>
+                <a:ea typeface="Noto Sans KR" panose="020B0200000000000000" pitchFamily="50" charset="-127"/>
+              </a:rPr>
+              <a:t>[</a:t>
+            </a:r>
+            <a:r>
+              <a:rPr lang="ko-KR" altLang="en-US" sz="800">
+                <a:solidFill>
+                  <a:srgbClr val="666666"/>
+                </a:solidFill>
+                <a:latin typeface="Noto Sans KR" panose="020B0200000000000000" pitchFamily="50" charset="-127"/>
+                <a:ea typeface="Noto Sans KR" panose="020B0200000000000000" pitchFamily="50" charset="-127"/>
+              </a:rPr>
+              <a:t>최근</a:t>
+            </a:r>
+            <a:r>
+              <a:rPr lang="en-US" altLang="ko-KR" sz="800">
+                <a:solidFill>
+                  <a:srgbClr val="666666"/>
+                </a:solidFill>
+                <a:latin typeface="Noto Sans KR" panose="020B0200000000000000" pitchFamily="50" charset="-127"/>
+                <a:ea typeface="Noto Sans KR" panose="020B0200000000000000" pitchFamily="50" charset="-127"/>
+              </a:rPr>
+              <a:t>3</a:t>
+            </a:r>
+            <a:r>
+              <a:rPr lang="ko-KR" altLang="en-US" sz="800">
+                <a:solidFill>
+                  <a:srgbClr val="666666"/>
+                </a:solidFill>
+                <a:latin typeface="Noto Sans KR" panose="020B0200000000000000" pitchFamily="50" charset="-127"/>
+                <a:ea typeface="Noto Sans KR" panose="020B0200000000000000" pitchFamily="50" charset="-127"/>
+              </a:rPr>
+              <a:t>개월 </a:t>
+            </a:r>
+            <a:r>
+              <a:rPr lang="ko-KR" altLang="en-US" sz="800" err="1">
+                <a:solidFill>
+                  <a:srgbClr val="666666"/>
+                </a:solidFill>
+                <a:latin typeface="Noto Sans KR" panose="020B0200000000000000" pitchFamily="50" charset="-127"/>
+                <a:ea typeface="Noto Sans KR" panose="020B0200000000000000" pitchFamily="50" charset="-127"/>
+              </a:rPr>
+              <a:t>실거래가평균</a:t>
+            </a:r>
+            <a:r>
+              <a:rPr lang="en-US" altLang="ko-KR" sz="800">
+                <a:solidFill>
+                  <a:srgbClr val="666666"/>
+                </a:solidFill>
+                <a:latin typeface="Noto Sans KR" panose="020B0200000000000000" pitchFamily="50" charset="-127"/>
+                <a:ea typeface="Noto Sans KR" panose="020B0200000000000000" pitchFamily="50" charset="-127"/>
+              </a:rPr>
+              <a:t>, 84</a:t>
+            </a:r>
+            <a:r>
+              <a:rPr lang="en-US" altLang="ko-KR" sz="800" b="0">
+                <a:solidFill>
+                  <a:srgbClr val="666666"/>
+                </a:solidFill>
+                <a:latin typeface="Noto Sans KR" panose="020B0200000000000000" pitchFamily="50" charset="-127"/>
+                <a:ea typeface="Noto Sans KR" panose="020B0200000000000000" pitchFamily="50" charset="-127"/>
+              </a:rPr>
+              <a:t>㎡ </a:t>
+            </a:r>
+            <a:r>
+              <a:rPr lang="ko-KR" altLang="en-US" sz="800" b="0">
+                <a:solidFill>
+                  <a:srgbClr val="666666"/>
+                </a:solidFill>
+                <a:latin typeface="Noto Sans KR" panose="020B0200000000000000" pitchFamily="50" charset="-127"/>
+                <a:ea typeface="Noto Sans KR" panose="020B0200000000000000" pitchFamily="50" charset="-127"/>
+              </a:rPr>
+              <a:t>기준</a:t>
+            </a:r>
+            <a:r>
+              <a:rPr lang="en-US" altLang="ko-KR" sz="800">
+                <a:solidFill>
+                  <a:srgbClr val="666666"/>
+                </a:solidFill>
+                <a:latin typeface="Noto Sans KR" panose="020B0200000000000000" pitchFamily="50" charset="-127"/>
+                <a:ea typeface="Noto Sans KR" panose="020B0200000000000000" pitchFamily="50" charset="-127"/>
+              </a:rPr>
+              <a:t>]</a:t>
+            </a:r>
+            <a:endParaRPr sz="800" b="0">
               <a:solidFill>
-                <a:schemeClr val="bg1">
-                  <a:lumMod val="50000"/>
-                </a:schemeClr>
+                <a:srgbClr val="666666"/>
               </a:solidFill>
               <a:latin typeface="Noto Sans KR" panose="020B0200000000000000" pitchFamily="50" charset="-127"/>
               <a:ea typeface="Noto Sans KR" panose="020B0200000000000000" pitchFamily="50" charset="-127"/>
@@ -11781,745 +10026,6 @@
           </a:p>
         </p:txBody>
       </p:sp>
-      <p:sp>
-        <p:nvSpPr>
-          <p:cNvPr id="33" name="Oval 64">
-            <a:extLst>
-              <a:ext uri="{FF2B5EF4-FFF2-40B4-BE49-F238E27FC236}">
-                <a16:creationId xmlns:a16="http://schemas.microsoft.com/office/drawing/2014/main" id="{68566514-F999-EFF2-A65A-6128A052C452}"/>
-              </a:ext>
-            </a:extLst>
-          </p:cNvPr>
-          <p:cNvSpPr/>
-          <p:nvPr/>
-        </p:nvSpPr>
-        <p:spPr>
-          <a:xfrm>
-            <a:off x="5998387" y="4836742"/>
-            <a:ext cx="100584" cy="100584"/>
-          </a:xfrm>
-          <a:prstGeom prst="ellipse">
-            <a:avLst/>
-          </a:prstGeom>
-          <a:solidFill>
-            <a:srgbClr val="2E9E4F"/>
-          </a:solidFill>
-          <a:ln>
-            <a:noFill/>
-          </a:ln>
-        </p:spPr>
-        <p:style>
-          <a:lnRef idx="1">
-            <a:schemeClr val="accent1"/>
-          </a:lnRef>
-          <a:fillRef idx="3">
-            <a:schemeClr val="accent1"/>
-          </a:fillRef>
-          <a:effectRef idx="2">
-            <a:schemeClr val="accent1"/>
-          </a:effectRef>
-          <a:fontRef idx="minor">
-            <a:schemeClr val="lt1"/>
-          </a:fontRef>
-        </p:style>
-        <p:txBody>
-          <a:bodyPr rtlCol="0" anchor="ctr"/>
-          <a:lstStyle/>
-          <a:p>
-            <a:pPr algn="ctr"/>
-            <a:endParaRPr>
-              <a:solidFill>
-                <a:schemeClr val="bg1">
-                  <a:lumMod val="50000"/>
-                </a:schemeClr>
-              </a:solidFill>
-              <a:latin typeface="Noto Sans KR" panose="020B0200000000000000" pitchFamily="50" charset="-127"/>
-              <a:ea typeface="Noto Sans KR" panose="020B0200000000000000" pitchFamily="50" charset="-127"/>
-            </a:endParaRPr>
-          </a:p>
-        </p:txBody>
-      </p:sp>
-      <p:grpSp>
-        <p:nvGrpSpPr>
-          <p:cNvPr id="36" name="그룹 35">
-            <a:extLst>
-              <a:ext uri="{FF2B5EF4-FFF2-40B4-BE49-F238E27FC236}">
-                <a16:creationId xmlns:a16="http://schemas.microsoft.com/office/drawing/2014/main" id="{7D5F50B1-002C-9595-3FDB-E82CC96CEBD4}"/>
-              </a:ext>
-            </a:extLst>
-          </p:cNvPr>
-          <p:cNvGrpSpPr/>
-          <p:nvPr/>
-        </p:nvGrpSpPr>
-        <p:grpSpPr>
-          <a:xfrm>
-            <a:off x="11928435" y="4735756"/>
-            <a:ext cx="3679411" cy="2289157"/>
-            <a:chOff x="-3081549" y="2565437"/>
-            <a:chExt cx="3679411" cy="2289157"/>
-          </a:xfrm>
-        </p:grpSpPr>
-        <p:sp>
-          <p:nvSpPr>
-            <p:cNvPr id="37" name="직사각형 36">
-              <a:extLst>
-                <a:ext uri="{FF2B5EF4-FFF2-40B4-BE49-F238E27FC236}">
-                  <a16:creationId xmlns:a16="http://schemas.microsoft.com/office/drawing/2014/main" id="{A943D884-5D41-5A3B-48D1-D25B106E381D}"/>
-                </a:ext>
-              </a:extLst>
-            </p:cNvPr>
-            <p:cNvSpPr/>
-            <p:nvPr/>
-          </p:nvSpPr>
-          <p:spPr>
-            <a:xfrm>
-              <a:off x="-2578101" y="2609259"/>
-              <a:ext cx="3175963" cy="2245335"/>
-            </a:xfrm>
-            <a:prstGeom prst="rect">
-              <a:avLst/>
-            </a:prstGeom>
-            <a:solidFill>
-              <a:schemeClr val="bg1"/>
-            </a:solidFill>
-            <a:ln w="9525">
-              <a:solidFill>
-                <a:srgbClr val="C00000"/>
-              </a:solidFill>
-            </a:ln>
-          </p:spPr>
-          <p:style>
-            <a:lnRef idx="2">
-              <a:schemeClr val="accent1">
-                <a:shade val="15000"/>
-              </a:schemeClr>
-            </a:lnRef>
-            <a:fillRef idx="1">
-              <a:schemeClr val="accent1"/>
-            </a:fillRef>
-            <a:effectRef idx="0">
-              <a:schemeClr val="accent1"/>
-            </a:effectRef>
-            <a:fontRef idx="minor">
-              <a:schemeClr val="lt1"/>
-            </a:fontRef>
-          </p:style>
-          <p:txBody>
-            <a:bodyPr lIns="36000" tIns="36000" rIns="36000" bIns="36000" rtlCol="0" anchor="ctr" anchorCtr="0"/>
-            <a:lstStyle/>
-            <a:p>
-              <a:r>
-                <a:rPr lang="en-US" altLang="ko-KR" sz="1000">
-                  <a:solidFill>
-                    <a:srgbClr val="C00000"/>
-                  </a:solidFill>
-                  <a:latin typeface="Noto Sans KR" panose="020B0200000000000000" pitchFamily="50" charset="-127"/>
-                  <a:ea typeface="Noto Sans KR" panose="020B0200000000000000" pitchFamily="50" charset="-127"/>
-                </a:rPr>
-                <a:t> </a:t>
-              </a:r>
-              <a:r>
-                <a:rPr lang="ko-KR" altLang="en-US" sz="1000">
-                  <a:solidFill>
-                    <a:srgbClr val="C00000"/>
-                  </a:solidFill>
-                  <a:latin typeface="Noto Sans KR" panose="020B0200000000000000" pitchFamily="50" charset="-127"/>
-                  <a:ea typeface="Noto Sans KR" panose="020B0200000000000000" pitchFamily="50" charset="-127"/>
-                </a:rPr>
-                <a:t>카테고리별 요소</a:t>
-              </a:r>
-              <a:endParaRPr lang="en-US" altLang="ko-KR" sz="1000">
-                <a:solidFill>
-                  <a:srgbClr val="C00000"/>
-                </a:solidFill>
-                <a:latin typeface="Noto Sans KR" panose="020B0200000000000000" pitchFamily="50" charset="-127"/>
-                <a:ea typeface="Noto Sans KR" panose="020B0200000000000000" pitchFamily="50" charset="-127"/>
-              </a:endParaRPr>
-            </a:p>
-            <a:p>
-              <a:endParaRPr lang="en-US" altLang="ko-KR" sz="1000">
-                <a:solidFill>
-                  <a:srgbClr val="C00000"/>
-                </a:solidFill>
-                <a:latin typeface="Noto Sans KR" panose="020B0200000000000000" pitchFamily="50" charset="-127"/>
-                <a:ea typeface="Noto Sans KR" panose="020B0200000000000000" pitchFamily="50" charset="-127"/>
-              </a:endParaRPr>
-            </a:p>
-            <a:p>
-              <a:r>
-                <a:rPr lang="en-US" altLang="ko-KR" sz="1000">
-                  <a:solidFill>
-                    <a:srgbClr val="C00000"/>
-                  </a:solidFill>
-                  <a:latin typeface="Noto Sans KR" panose="020B0200000000000000" pitchFamily="50" charset="-127"/>
-                  <a:ea typeface="Noto Sans KR" panose="020B0200000000000000" pitchFamily="50" charset="-127"/>
-                </a:rPr>
-                <a:t> </a:t>
-              </a:r>
-              <a:r>
-                <a:rPr lang="ko-KR" altLang="en-US" sz="1000">
-                  <a:solidFill>
-                    <a:srgbClr val="C00000"/>
-                  </a:solidFill>
-                  <a:latin typeface="Noto Sans KR" panose="020B0200000000000000" pitchFamily="50" charset="-127"/>
-                  <a:ea typeface="Noto Sans KR" panose="020B0200000000000000" pitchFamily="50" charset="-127"/>
-                </a:rPr>
-                <a:t>①</a:t>
-              </a:r>
-              <a:r>
-                <a:rPr lang="en-US" altLang="ko-KR" sz="1000">
-                  <a:solidFill>
-                    <a:srgbClr val="C00000"/>
-                  </a:solidFill>
-                  <a:latin typeface="Noto Sans KR" panose="020B0200000000000000" pitchFamily="50" charset="-127"/>
-                  <a:ea typeface="Noto Sans KR" panose="020B0200000000000000" pitchFamily="50" charset="-127"/>
-                </a:rPr>
-                <a:t> </a:t>
-              </a:r>
-              <a:r>
-                <a:rPr lang="ko-KR" altLang="en-US" sz="1000">
-                  <a:solidFill>
-                    <a:srgbClr val="C00000"/>
-                  </a:solidFill>
-                  <a:latin typeface="Noto Sans KR" panose="020B0200000000000000" pitchFamily="50" charset="-127"/>
-                  <a:ea typeface="Noto Sans KR" panose="020B0200000000000000" pitchFamily="50" charset="-127"/>
-                </a:rPr>
-                <a:t>입지</a:t>
-              </a:r>
-              <a:br>
-                <a:rPr lang="en-US" altLang="ko-KR" sz="1000">
-                  <a:solidFill>
-                    <a:srgbClr val="C00000"/>
-                  </a:solidFill>
-                  <a:latin typeface="Noto Sans KR" panose="020B0200000000000000" pitchFamily="50" charset="-127"/>
-                  <a:ea typeface="Noto Sans KR" panose="020B0200000000000000" pitchFamily="50" charset="-127"/>
-                </a:rPr>
-              </a:br>
-              <a:r>
-                <a:rPr lang="en-US" altLang="ko-KR" sz="1000">
-                  <a:solidFill>
-                    <a:srgbClr val="C00000"/>
-                  </a:solidFill>
-                  <a:latin typeface="Noto Sans KR" panose="020B0200000000000000" pitchFamily="50" charset="-127"/>
-                  <a:ea typeface="Noto Sans KR" panose="020B0200000000000000" pitchFamily="50" charset="-127"/>
-                </a:rPr>
-                <a:t> - </a:t>
-              </a:r>
-              <a:r>
-                <a:rPr lang="ko-KR" altLang="en-US" sz="1000">
-                  <a:solidFill>
-                    <a:srgbClr val="C00000"/>
-                  </a:solidFill>
-                  <a:latin typeface="Noto Sans KR" panose="020B0200000000000000" pitchFamily="50" charset="-127"/>
-                  <a:ea typeface="Noto Sans KR" panose="020B0200000000000000" pitchFamily="50" charset="-127"/>
-                </a:rPr>
-                <a:t>교통</a:t>
-              </a:r>
-              <a:r>
-                <a:rPr lang="en-US" altLang="ko-KR" sz="1000">
-                  <a:solidFill>
-                    <a:srgbClr val="C00000"/>
-                  </a:solidFill>
-                  <a:latin typeface="Noto Sans KR" panose="020B0200000000000000" pitchFamily="50" charset="-127"/>
-                  <a:ea typeface="Noto Sans KR" panose="020B0200000000000000" pitchFamily="50" charset="-127"/>
-                </a:rPr>
-                <a:t>, </a:t>
-              </a:r>
-              <a:r>
-                <a:rPr lang="ko-KR" altLang="en-US" sz="1000">
-                  <a:solidFill>
-                    <a:srgbClr val="C00000"/>
-                  </a:solidFill>
-                  <a:latin typeface="Noto Sans KR" panose="020B0200000000000000" pitchFamily="50" charset="-127"/>
-                  <a:ea typeface="Noto Sans KR" panose="020B0200000000000000" pitchFamily="50" charset="-127"/>
-                </a:rPr>
-                <a:t>교육</a:t>
-              </a:r>
-              <a:r>
-                <a:rPr lang="en-US" altLang="ko-KR" sz="1000">
-                  <a:solidFill>
-                    <a:srgbClr val="C00000"/>
-                  </a:solidFill>
-                  <a:latin typeface="Noto Sans KR" panose="020B0200000000000000" pitchFamily="50" charset="-127"/>
-                  <a:ea typeface="Noto Sans KR" panose="020B0200000000000000" pitchFamily="50" charset="-127"/>
-                </a:rPr>
-                <a:t>, </a:t>
-              </a:r>
-              <a:r>
-                <a:rPr lang="ko-KR" altLang="en-US" sz="1000">
-                  <a:solidFill>
-                    <a:srgbClr val="C00000"/>
-                  </a:solidFill>
-                  <a:latin typeface="Noto Sans KR" panose="020B0200000000000000" pitchFamily="50" charset="-127"/>
-                  <a:ea typeface="Noto Sans KR" panose="020B0200000000000000" pitchFamily="50" charset="-127"/>
-                </a:rPr>
-                <a:t>인프라</a:t>
-              </a:r>
-              <a:r>
-                <a:rPr lang="en-US" altLang="ko-KR" sz="1000">
-                  <a:solidFill>
-                    <a:srgbClr val="C00000"/>
-                  </a:solidFill>
-                  <a:latin typeface="Noto Sans KR" panose="020B0200000000000000" pitchFamily="50" charset="-127"/>
-                  <a:ea typeface="Noto Sans KR" panose="020B0200000000000000" pitchFamily="50" charset="-127"/>
-                </a:rPr>
-                <a:t>, </a:t>
-              </a:r>
-              <a:r>
-                <a:rPr lang="ko-KR" altLang="en-US" sz="1000">
-                  <a:solidFill>
-                    <a:srgbClr val="C00000"/>
-                  </a:solidFill>
-                  <a:latin typeface="Noto Sans KR" panose="020B0200000000000000" pitchFamily="50" charset="-127"/>
-                  <a:ea typeface="Noto Sans KR" panose="020B0200000000000000" pitchFamily="50" charset="-127"/>
-                </a:rPr>
-                <a:t>인문환경</a:t>
-              </a:r>
-              <a:r>
-                <a:rPr lang="en-US" altLang="ko-KR" sz="1000">
-                  <a:solidFill>
-                    <a:srgbClr val="C00000"/>
-                  </a:solidFill>
-                  <a:latin typeface="Noto Sans KR" panose="020B0200000000000000" pitchFamily="50" charset="-127"/>
-                  <a:ea typeface="Noto Sans KR" panose="020B0200000000000000" pitchFamily="50" charset="-127"/>
-                </a:rPr>
-                <a:t>, </a:t>
-              </a:r>
-              <a:r>
-                <a:rPr lang="ko-KR" altLang="en-US" sz="1000">
-                  <a:solidFill>
-                    <a:srgbClr val="C00000"/>
-                  </a:solidFill>
-                  <a:latin typeface="Noto Sans KR" panose="020B0200000000000000" pitchFamily="50" charset="-127"/>
-                  <a:ea typeface="Noto Sans KR" panose="020B0200000000000000" pitchFamily="50" charset="-127"/>
-                </a:rPr>
-                <a:t>개발계획</a:t>
-              </a:r>
-              <a:r>
-                <a:rPr lang="en-US" altLang="ko-KR" sz="1000">
-                  <a:solidFill>
-                    <a:srgbClr val="C00000"/>
-                  </a:solidFill>
-                  <a:latin typeface="Noto Sans KR" panose="020B0200000000000000" pitchFamily="50" charset="-127"/>
-                  <a:ea typeface="Noto Sans KR" panose="020B0200000000000000" pitchFamily="50" charset="-127"/>
-                </a:rPr>
-                <a:t> </a:t>
-              </a:r>
-              <a:r>
-                <a:rPr lang="ko-KR" altLang="en-US" sz="1000">
-                  <a:solidFill>
-                    <a:srgbClr val="C00000"/>
-                  </a:solidFill>
-                  <a:latin typeface="Noto Sans KR" panose="020B0200000000000000" pitchFamily="50" charset="-127"/>
-                  <a:ea typeface="Noto Sans KR" panose="020B0200000000000000" pitchFamily="50" charset="-127"/>
-                </a:rPr>
-                <a:t>등</a:t>
-              </a:r>
-              <a:endParaRPr lang="en-US" altLang="ko-KR" sz="1000">
-                <a:solidFill>
-                  <a:srgbClr val="C00000"/>
-                </a:solidFill>
-                <a:latin typeface="Noto Sans KR" panose="020B0200000000000000" pitchFamily="50" charset="-127"/>
-                <a:ea typeface="Noto Sans KR" panose="020B0200000000000000" pitchFamily="50" charset="-127"/>
-              </a:endParaRPr>
-            </a:p>
-            <a:p>
-              <a:endParaRPr lang="en-US" altLang="ko-KR" sz="1000">
-                <a:solidFill>
-                  <a:srgbClr val="C00000"/>
-                </a:solidFill>
-                <a:latin typeface="Noto Sans KR" panose="020B0200000000000000" pitchFamily="50" charset="-127"/>
-                <a:ea typeface="Noto Sans KR" panose="020B0200000000000000" pitchFamily="50" charset="-127"/>
-              </a:endParaRPr>
-            </a:p>
-            <a:p>
-              <a:r>
-                <a:rPr lang="ko-KR" altLang="en-US" sz="1000">
-                  <a:solidFill>
-                    <a:srgbClr val="C00000"/>
-                  </a:solidFill>
-                  <a:latin typeface="Noto Sans KR" panose="020B0200000000000000" pitchFamily="50" charset="-127"/>
-                  <a:ea typeface="Noto Sans KR" panose="020B0200000000000000" pitchFamily="50" charset="-127"/>
-                </a:rPr>
-                <a:t>② 수급</a:t>
-              </a:r>
-              <a:br>
-                <a:rPr lang="en-US" altLang="ko-KR" sz="1000">
-                  <a:solidFill>
-                    <a:srgbClr val="C00000"/>
-                  </a:solidFill>
-                  <a:latin typeface="Noto Sans KR" panose="020B0200000000000000" pitchFamily="50" charset="-127"/>
-                  <a:ea typeface="Noto Sans KR" panose="020B0200000000000000" pitchFamily="50" charset="-127"/>
-                </a:rPr>
-              </a:br>
-              <a:r>
-                <a:rPr lang="en-US" altLang="ko-KR" sz="1000">
-                  <a:solidFill>
-                    <a:srgbClr val="C00000"/>
-                  </a:solidFill>
-                  <a:latin typeface="Noto Sans KR" panose="020B0200000000000000" pitchFamily="50" charset="-127"/>
-                  <a:ea typeface="Noto Sans KR" panose="020B0200000000000000" pitchFamily="50" charset="-127"/>
-                </a:rPr>
-                <a:t> - </a:t>
-              </a:r>
-              <a:r>
-                <a:rPr lang="ko-KR" altLang="en-US" sz="1000">
-                  <a:solidFill>
-                    <a:srgbClr val="C00000"/>
-                  </a:solidFill>
-                  <a:latin typeface="Noto Sans KR" panose="020B0200000000000000" pitchFamily="50" charset="-127"/>
-                  <a:ea typeface="Noto Sans KR" panose="020B0200000000000000" pitchFamily="50" charset="-127"/>
-                </a:rPr>
-                <a:t>공급계획</a:t>
-              </a:r>
-              <a:r>
-                <a:rPr lang="en-US" altLang="ko-KR" sz="1000">
-                  <a:solidFill>
-                    <a:srgbClr val="C00000"/>
-                  </a:solidFill>
-                  <a:latin typeface="Noto Sans KR" panose="020B0200000000000000" pitchFamily="50" charset="-127"/>
-                  <a:ea typeface="Noto Sans KR" panose="020B0200000000000000" pitchFamily="50" charset="-127"/>
-                </a:rPr>
-                <a:t>, </a:t>
-              </a:r>
-              <a:r>
-                <a:rPr lang="ko-KR" altLang="en-US" sz="1000">
-                  <a:solidFill>
-                    <a:srgbClr val="C00000"/>
-                  </a:solidFill>
-                  <a:latin typeface="Noto Sans KR" panose="020B0200000000000000" pitchFamily="50" charset="-127"/>
-                  <a:ea typeface="Noto Sans KR" panose="020B0200000000000000" pitchFamily="50" charset="-127"/>
-                </a:rPr>
-                <a:t>미분양</a:t>
-              </a:r>
-              <a:r>
-                <a:rPr lang="en-US" altLang="ko-KR" sz="1000">
-                  <a:solidFill>
-                    <a:srgbClr val="C00000"/>
-                  </a:solidFill>
-                  <a:latin typeface="Noto Sans KR" panose="020B0200000000000000" pitchFamily="50" charset="-127"/>
-                  <a:ea typeface="Noto Sans KR" panose="020B0200000000000000" pitchFamily="50" charset="-127"/>
-                </a:rPr>
-                <a:t>, </a:t>
-              </a:r>
-              <a:r>
-                <a:rPr lang="ko-KR" altLang="en-US" sz="1000">
-                  <a:solidFill>
-                    <a:srgbClr val="C00000"/>
-                  </a:solidFill>
-                  <a:latin typeface="Noto Sans KR" panose="020B0200000000000000" pitchFamily="50" charset="-127"/>
-                  <a:ea typeface="Noto Sans KR" panose="020B0200000000000000" pitchFamily="50" charset="-127"/>
-                </a:rPr>
-                <a:t>분양단지</a:t>
-              </a:r>
-              <a:r>
-                <a:rPr lang="en-US" altLang="ko-KR" sz="1000">
-                  <a:solidFill>
-                    <a:srgbClr val="C00000"/>
-                  </a:solidFill>
-                  <a:latin typeface="Noto Sans KR" panose="020B0200000000000000" pitchFamily="50" charset="-127"/>
-                  <a:ea typeface="Noto Sans KR" panose="020B0200000000000000" pitchFamily="50" charset="-127"/>
-                </a:rPr>
-                <a:t>, </a:t>
-              </a:r>
-              <a:r>
-                <a:rPr lang="ko-KR" altLang="en-US" sz="1000">
-                  <a:solidFill>
-                    <a:srgbClr val="C00000"/>
-                  </a:solidFill>
-                  <a:latin typeface="Noto Sans KR" panose="020B0200000000000000" pitchFamily="50" charset="-127"/>
-                  <a:ea typeface="Noto Sans KR" panose="020B0200000000000000" pitchFamily="50" charset="-127"/>
-                </a:rPr>
-                <a:t>거래동향</a:t>
-              </a:r>
-              <a:r>
-                <a:rPr lang="en-US" altLang="ko-KR" sz="1000">
-                  <a:solidFill>
-                    <a:srgbClr val="C00000"/>
-                  </a:solidFill>
-                  <a:latin typeface="Noto Sans KR" panose="020B0200000000000000" pitchFamily="50" charset="-127"/>
-                  <a:ea typeface="Noto Sans KR" panose="020B0200000000000000" pitchFamily="50" charset="-127"/>
-                </a:rPr>
-                <a:t>, </a:t>
-              </a:r>
-              <a:r>
-                <a:rPr lang="ko-KR" altLang="en-US" sz="1000">
-                  <a:solidFill>
-                    <a:srgbClr val="C00000"/>
-                  </a:solidFill>
-                  <a:latin typeface="Noto Sans KR" panose="020B0200000000000000" pitchFamily="50" charset="-127"/>
-                  <a:ea typeface="Noto Sans KR" panose="020B0200000000000000" pitchFamily="50" charset="-127"/>
-                </a:rPr>
-                <a:t>분양시점 등</a:t>
-              </a:r>
-              <a:endParaRPr lang="en-US" altLang="ko-KR" sz="1000">
-                <a:solidFill>
-                  <a:srgbClr val="C00000"/>
-                </a:solidFill>
-                <a:latin typeface="Noto Sans KR" panose="020B0200000000000000" pitchFamily="50" charset="-127"/>
-                <a:ea typeface="Noto Sans KR" panose="020B0200000000000000" pitchFamily="50" charset="-127"/>
-              </a:endParaRPr>
-            </a:p>
-            <a:p>
-              <a:endParaRPr lang="en-US" altLang="ko-KR" sz="1000">
-                <a:solidFill>
-                  <a:srgbClr val="C00000"/>
-                </a:solidFill>
-                <a:latin typeface="Noto Sans KR" panose="020B0200000000000000" pitchFamily="50" charset="-127"/>
-                <a:ea typeface="Noto Sans KR" panose="020B0200000000000000" pitchFamily="50" charset="-127"/>
-              </a:endParaRPr>
-            </a:p>
-            <a:p>
-              <a:r>
-                <a:rPr lang="ko-KR" altLang="en-US" sz="1000">
-                  <a:solidFill>
-                    <a:srgbClr val="C00000"/>
-                  </a:solidFill>
-                  <a:latin typeface="Noto Sans KR" panose="020B0200000000000000" pitchFamily="50" charset="-127"/>
-                  <a:ea typeface="Noto Sans KR" panose="020B0200000000000000" pitchFamily="50" charset="-127"/>
-                </a:rPr>
-                <a:t>③ 브랜드</a:t>
-              </a:r>
-              <a:br>
-                <a:rPr lang="en-US" altLang="ko-KR" sz="1000">
-                  <a:solidFill>
-                    <a:srgbClr val="C00000"/>
-                  </a:solidFill>
-                  <a:latin typeface="Noto Sans KR" panose="020B0200000000000000" pitchFamily="50" charset="-127"/>
-                  <a:ea typeface="Noto Sans KR" panose="020B0200000000000000" pitchFamily="50" charset="-127"/>
-                </a:rPr>
-              </a:br>
-              <a:r>
-                <a:rPr lang="en-US" altLang="ko-KR" sz="1000">
-                  <a:solidFill>
-                    <a:srgbClr val="C00000"/>
-                  </a:solidFill>
-                  <a:latin typeface="Noto Sans KR" panose="020B0200000000000000" pitchFamily="50" charset="-127"/>
-                  <a:ea typeface="Noto Sans KR" panose="020B0200000000000000" pitchFamily="50" charset="-127"/>
-                </a:rPr>
-                <a:t> - </a:t>
-              </a:r>
-              <a:r>
-                <a:rPr lang="ko-KR" altLang="en-US" sz="1000">
-                  <a:solidFill>
-                    <a:srgbClr val="C00000"/>
-                  </a:solidFill>
-                  <a:latin typeface="Noto Sans KR" panose="020B0200000000000000" pitchFamily="50" charset="-127"/>
-                  <a:ea typeface="Noto Sans KR" panose="020B0200000000000000" pitchFamily="50" charset="-127"/>
-                </a:rPr>
-                <a:t>분양에 따른 브랜드 긍정 또는 부정 효과 등</a:t>
-              </a:r>
-              <a:endParaRPr lang="en-US" altLang="ko-KR" sz="1000">
-                <a:solidFill>
-                  <a:srgbClr val="C00000"/>
-                </a:solidFill>
-                <a:latin typeface="Noto Sans KR" panose="020B0200000000000000" pitchFamily="50" charset="-127"/>
-                <a:ea typeface="Noto Sans KR" panose="020B0200000000000000" pitchFamily="50" charset="-127"/>
-              </a:endParaRPr>
-            </a:p>
-            <a:p>
-              <a:endParaRPr lang="en-US" altLang="ko-KR" sz="1000">
-                <a:solidFill>
-                  <a:srgbClr val="C00000"/>
-                </a:solidFill>
-                <a:latin typeface="Noto Sans KR" panose="020B0200000000000000" pitchFamily="50" charset="-127"/>
-                <a:ea typeface="Noto Sans KR" panose="020B0200000000000000" pitchFamily="50" charset="-127"/>
-              </a:endParaRPr>
-            </a:p>
-            <a:p>
-              <a:r>
-                <a:rPr lang="ko-KR" altLang="en-US" sz="1000">
-                  <a:solidFill>
-                    <a:srgbClr val="C00000"/>
-                  </a:solidFill>
-                  <a:latin typeface="Noto Sans KR" panose="020B0200000000000000" pitchFamily="50" charset="-127"/>
-                  <a:ea typeface="Noto Sans KR" panose="020B0200000000000000" pitchFamily="50" charset="-127"/>
-                </a:rPr>
-                <a:t>④ 상품</a:t>
-              </a:r>
-              <a:br>
-                <a:rPr lang="en-US" altLang="ko-KR" sz="1000">
-                  <a:solidFill>
-                    <a:srgbClr val="C00000"/>
-                  </a:solidFill>
-                  <a:latin typeface="Noto Sans KR" panose="020B0200000000000000" pitchFamily="50" charset="-127"/>
-                  <a:ea typeface="Noto Sans KR" panose="020B0200000000000000" pitchFamily="50" charset="-127"/>
-                </a:rPr>
-              </a:br>
-              <a:r>
-                <a:rPr lang="en-US" altLang="ko-KR" sz="1000">
-                  <a:solidFill>
-                    <a:srgbClr val="C00000"/>
-                  </a:solidFill>
-                  <a:latin typeface="Noto Sans KR" panose="020B0200000000000000" pitchFamily="50" charset="-127"/>
-                  <a:ea typeface="Noto Sans KR" panose="020B0200000000000000" pitchFamily="50" charset="-127"/>
-                </a:rPr>
-                <a:t> - </a:t>
-              </a:r>
-              <a:r>
-                <a:rPr lang="ko-KR" altLang="en-US" sz="1000">
-                  <a:solidFill>
-                    <a:srgbClr val="C00000"/>
-                  </a:solidFill>
-                  <a:latin typeface="Noto Sans KR" panose="020B0200000000000000" pitchFamily="50" charset="-127"/>
-                  <a:ea typeface="Noto Sans KR" panose="020B0200000000000000" pitchFamily="50" charset="-127"/>
-                </a:rPr>
-                <a:t>평형구성비</a:t>
-              </a:r>
-              <a:r>
-                <a:rPr lang="en-US" altLang="ko-KR" sz="1000">
-                  <a:solidFill>
-                    <a:srgbClr val="C00000"/>
-                  </a:solidFill>
-                  <a:latin typeface="Noto Sans KR" panose="020B0200000000000000" pitchFamily="50" charset="-127"/>
-                  <a:ea typeface="Noto Sans KR" panose="020B0200000000000000" pitchFamily="50" charset="-127"/>
-                </a:rPr>
-                <a:t>, </a:t>
-              </a:r>
-              <a:r>
-                <a:rPr lang="ko-KR" altLang="en-US" sz="1000">
-                  <a:solidFill>
-                    <a:srgbClr val="C00000"/>
-                  </a:solidFill>
-                  <a:latin typeface="Noto Sans KR" panose="020B0200000000000000" pitchFamily="50" charset="-127"/>
-                  <a:ea typeface="Noto Sans KR" panose="020B0200000000000000" pitchFamily="50" charset="-127"/>
-                </a:rPr>
-                <a:t>평면</a:t>
-              </a:r>
-              <a:r>
-                <a:rPr lang="en-US" altLang="ko-KR" sz="1000">
-                  <a:solidFill>
-                    <a:srgbClr val="C00000"/>
-                  </a:solidFill>
-                  <a:latin typeface="Noto Sans KR" panose="020B0200000000000000" pitchFamily="50" charset="-127"/>
-                  <a:ea typeface="Noto Sans KR" panose="020B0200000000000000" pitchFamily="50" charset="-127"/>
-                </a:rPr>
-                <a:t>, </a:t>
-              </a:r>
-              <a:r>
-                <a:rPr lang="ko-KR" altLang="en-US" sz="1000" err="1">
-                  <a:solidFill>
-                    <a:srgbClr val="C00000"/>
-                  </a:solidFill>
-                  <a:latin typeface="Noto Sans KR" panose="020B0200000000000000" pitchFamily="50" charset="-127"/>
-                  <a:ea typeface="Noto Sans KR" panose="020B0200000000000000" pitchFamily="50" charset="-127"/>
-                </a:rPr>
-                <a:t>동배치</a:t>
-              </a:r>
-              <a:r>
-                <a:rPr lang="en-US" altLang="ko-KR" sz="1000">
-                  <a:solidFill>
-                    <a:srgbClr val="C00000"/>
-                  </a:solidFill>
-                  <a:latin typeface="Noto Sans KR" panose="020B0200000000000000" pitchFamily="50" charset="-127"/>
-                  <a:ea typeface="Noto Sans KR" panose="020B0200000000000000" pitchFamily="50" charset="-127"/>
-                </a:rPr>
-                <a:t>, </a:t>
-              </a:r>
-              <a:r>
-                <a:rPr lang="ko-KR" altLang="en-US" sz="1000">
-                  <a:solidFill>
-                    <a:srgbClr val="C00000"/>
-                  </a:solidFill>
-                  <a:latin typeface="Noto Sans KR" panose="020B0200000000000000" pitchFamily="50" charset="-127"/>
-                  <a:ea typeface="Noto Sans KR" panose="020B0200000000000000" pitchFamily="50" charset="-127"/>
-                </a:rPr>
-                <a:t>조망</a:t>
-              </a:r>
-              <a:r>
-                <a:rPr lang="en-US" altLang="ko-KR" sz="1000">
-                  <a:solidFill>
-                    <a:srgbClr val="C00000"/>
-                  </a:solidFill>
-                  <a:latin typeface="Noto Sans KR" panose="020B0200000000000000" pitchFamily="50" charset="-127"/>
-                  <a:ea typeface="Noto Sans KR" panose="020B0200000000000000" pitchFamily="50" charset="-127"/>
-                </a:rPr>
-                <a:t>, </a:t>
-              </a:r>
-              <a:r>
-                <a:rPr lang="ko-KR" altLang="en-US" sz="1000">
-                  <a:solidFill>
-                    <a:srgbClr val="C00000"/>
-                  </a:solidFill>
-                  <a:latin typeface="Noto Sans KR" panose="020B0200000000000000" pitchFamily="50" charset="-127"/>
-                  <a:ea typeface="Noto Sans KR" panose="020B0200000000000000" pitchFamily="50" charset="-127"/>
-                </a:rPr>
-                <a:t>주차</a:t>
-              </a:r>
-              <a:r>
-                <a:rPr lang="en-US" altLang="ko-KR" sz="1000">
-                  <a:solidFill>
-                    <a:srgbClr val="C00000"/>
-                  </a:solidFill>
-                  <a:latin typeface="Noto Sans KR" panose="020B0200000000000000" pitchFamily="50" charset="-127"/>
-                  <a:ea typeface="Noto Sans KR" panose="020B0200000000000000" pitchFamily="50" charset="-127"/>
-                </a:rPr>
-                <a:t>, </a:t>
-              </a:r>
-              <a:r>
-                <a:rPr lang="ko-KR" altLang="en-US" sz="1000">
-                  <a:solidFill>
-                    <a:srgbClr val="C00000"/>
-                  </a:solidFill>
-                  <a:latin typeface="Noto Sans KR" panose="020B0200000000000000" pitchFamily="50" charset="-127"/>
-                  <a:ea typeface="Noto Sans KR" panose="020B0200000000000000" pitchFamily="50" charset="-127"/>
-                </a:rPr>
-                <a:t>커뮤니티 등</a:t>
-              </a:r>
-            </a:p>
-          </p:txBody>
-        </p:sp>
-        <p:cxnSp>
-          <p:nvCxnSpPr>
-            <p:cNvPr id="38" name="연결선: 꺾임 37">
-              <a:extLst>
-                <a:ext uri="{FF2B5EF4-FFF2-40B4-BE49-F238E27FC236}">
-                  <a16:creationId xmlns:a16="http://schemas.microsoft.com/office/drawing/2014/main" id="{66A8453B-8D9B-D156-668F-AAE5C89CB411}"/>
-                </a:ext>
-              </a:extLst>
-            </p:cNvPr>
-            <p:cNvCxnSpPr>
-              <a:cxnSpLocks/>
-              <a:stCxn id="37" idx="1"/>
-            </p:cNvCxnSpPr>
-            <p:nvPr/>
-          </p:nvCxnSpPr>
-          <p:spPr>
-            <a:xfrm rot="10800000">
-              <a:off x="-3081549" y="2565437"/>
-              <a:ext cx="503449" cy="1166491"/>
-            </a:xfrm>
-            <a:prstGeom prst="bentConnector2">
-              <a:avLst/>
-            </a:prstGeom>
-            <a:solidFill>
-              <a:schemeClr val="bg1"/>
-            </a:solidFill>
-            <a:ln w="9525">
-              <a:solidFill>
-                <a:srgbClr val="C00000"/>
-              </a:solidFill>
-              <a:tailEnd type="oval"/>
-            </a:ln>
-          </p:spPr>
-          <p:style>
-            <a:lnRef idx="2">
-              <a:schemeClr val="accent1">
-                <a:shade val="15000"/>
-              </a:schemeClr>
-            </a:lnRef>
-            <a:fillRef idx="1">
-              <a:schemeClr val="accent1"/>
-            </a:fillRef>
-            <a:effectRef idx="0">
-              <a:schemeClr val="accent1"/>
-            </a:effectRef>
-            <a:fontRef idx="minor">
-              <a:schemeClr val="lt1"/>
-            </a:fontRef>
-          </p:style>
-        </p:cxnSp>
-      </p:grpSp>
       <p:sp>
         <p:nvSpPr>
           <p:cNvPr id="12" name="TextBox 11">
@@ -12534,8 +10040,8 @@
         </p:nvSpPr>
         <p:spPr>
           <a:xfrm>
-            <a:off x="898390" y="5329961"/>
-            <a:ext cx="344814" cy="114327"/>
+            <a:off x="934344" y="5396636"/>
+            <a:ext cx="374115" cy="114327"/>
           </a:xfrm>
           <a:prstGeom prst="rect">
             <a:avLst/>
@@ -12587,8 +10093,8 @@
         </p:nvSpPr>
         <p:spPr>
           <a:xfrm>
-            <a:off x="898390" y="5175761"/>
-            <a:ext cx="344814" cy="114327"/>
+            <a:off x="934344" y="5153536"/>
+            <a:ext cx="374115" cy="114327"/>
           </a:xfrm>
           <a:prstGeom prst="rect">
             <a:avLst/>
@@ -12644,8 +10150,8 @@
         </p:nvSpPr>
         <p:spPr>
           <a:xfrm>
-            <a:off x="898390" y="5970931"/>
-            <a:ext cx="344814" cy="114327"/>
+            <a:off x="934344" y="5840756"/>
+            <a:ext cx="374115" cy="114327"/>
           </a:xfrm>
           <a:prstGeom prst="rect">
             <a:avLst/>
@@ -12692,209 +10198,6 @@
                 <a:schemeClr val="bg1">
                   <a:lumMod val="50000"/>
                 </a:schemeClr>
-              </a:solidFill>
-              <a:latin typeface="Noto Sans KR" panose="020B0200000000000000" pitchFamily="50" charset="-127"/>
-              <a:ea typeface="Noto Sans KR" panose="020B0200000000000000" pitchFamily="50" charset="-127"/>
-            </a:endParaRPr>
-          </a:p>
-        </p:txBody>
-      </p:sp>
-      <p:graphicFrame>
-        <p:nvGraphicFramePr>
-          <p:cNvPr id="60" name="차트 59">
-            <a:extLst>
-              <a:ext uri="{FF2B5EF4-FFF2-40B4-BE49-F238E27FC236}">
-                <a16:creationId xmlns:a16="http://schemas.microsoft.com/office/drawing/2014/main" id="{C844CA87-2D4F-197A-13E4-3C024153E033}"/>
-              </a:ext>
-            </a:extLst>
-          </p:cNvPr>
-          <p:cNvGraphicFramePr/>
-          <p:nvPr>
-            <p:extLst>
-              <p:ext uri="{D42A27DB-BD31-4B8C-83A1-F6EECF244321}">
-                <p14:modId xmlns:p14="http://schemas.microsoft.com/office/powerpoint/2010/main" val="84207766"/>
-              </p:ext>
-            </p:extLst>
-          </p:nvPr>
-        </p:nvGraphicFramePr>
-        <p:xfrm>
-          <a:off x="475294" y="4836742"/>
-          <a:ext cx="4813715" cy="1738683"/>
-        </p:xfrm>
-        <a:graphic>
-          <a:graphicData uri="http://schemas.openxmlformats.org/drawingml/2006/chart">
-            <c:chart xmlns:c="http://schemas.openxmlformats.org/drawingml/2006/chart" xmlns:r="http://schemas.openxmlformats.org/officeDocument/2006/relationships" r:id="rId5"/>
-          </a:graphicData>
-        </a:graphic>
-      </p:graphicFrame>
-      <p:sp>
-        <p:nvSpPr>
-          <p:cNvPr id="64" name="TextBox 63">
-            <a:extLst>
-              <a:ext uri="{FF2B5EF4-FFF2-40B4-BE49-F238E27FC236}">
-                <a16:creationId xmlns:a16="http://schemas.microsoft.com/office/drawing/2014/main" id="{264D0922-4F4B-5DDF-DECC-99449FC5B2B4}"/>
-              </a:ext>
-            </a:extLst>
-          </p:cNvPr>
-          <p:cNvSpPr txBox="1"/>
-          <p:nvPr/>
-        </p:nvSpPr>
-        <p:spPr>
-          <a:xfrm>
-            <a:off x="553296" y="4237839"/>
-            <a:ext cx="4680469" cy="380682"/>
-          </a:xfrm>
-          <a:prstGeom prst="rect">
-            <a:avLst/>
-          </a:prstGeom>
-          <a:noFill/>
-        </p:spPr>
-        <p:txBody>
-          <a:bodyPr wrap="square" lIns="0" tIns="0" rIns="0" bIns="0" anchor="ctr">
-            <a:spAutoFit/>
-          </a:bodyPr>
-          <a:lstStyle/>
-          <a:p>
-            <a:pPr>
-              <a:lnSpc>
-                <a:spcPct val="130000"/>
-              </a:lnSpc>
-            </a:pPr>
-            <a:r>
-              <a:rPr lang="ko-KR" altLang="en-US" sz="1000" dirty="0">
-                <a:solidFill>
-                  <a:srgbClr val="222222"/>
-                </a:solidFill>
-                <a:latin typeface="Noto Sans KR" panose="020B0200000000000000" pitchFamily="50" charset="-127"/>
-                <a:ea typeface="Noto Sans KR" panose="020B0200000000000000" pitchFamily="50" charset="-127"/>
-              </a:rPr>
-              <a:t/>
-            </a:r>
-            <a:r>
-              <a:rPr lang="en-US" altLang="ko-KR" sz="1000" dirty="0">
-                <a:solidFill>
-                  <a:srgbClr val="222222"/>
-                </a:solidFill>
-                <a:latin typeface="Noto Sans KR" panose="020B0200000000000000" pitchFamily="50" charset="-127"/>
-                <a:ea typeface="Noto Sans KR" panose="020B0200000000000000" pitchFamily="50" charset="-127"/>
-              </a:rPr>
-              <a:t/>
-            </a:r>
-            <a:br>
-              <a:rPr lang="en-US" altLang="ko-KR" sz="1000" dirty="0">
-                <a:solidFill>
-                  <a:srgbClr val="222222"/>
-                </a:solidFill>
-                <a:latin typeface="Noto Sans KR" panose="020B0200000000000000" pitchFamily="50" charset="-127"/>
-                <a:ea typeface="Noto Sans KR" panose="020B0200000000000000" pitchFamily="50" charset="-127"/>
-              </a:rPr>
-            </a:br>
-            <a:r>
-              <a:rPr lang="ko-KR" altLang="en-US" sz="1000" dirty="0">
-                <a:solidFill>
-                  <a:srgbClr val="222222"/>
-                </a:solidFill>
-                <a:latin typeface="Noto Sans KR" panose="020B0200000000000000" pitchFamily="50" charset="-127"/>
-                <a:ea typeface="Noto Sans KR" panose="020B0200000000000000" pitchFamily="50" charset="-127"/>
-              </a:rPr>
-              <a:t/>
-            </a:r>
-            <a:endParaRPr sz="1000" dirty="0">
-              <a:solidFill>
-                <a:srgbClr val="222222"/>
-              </a:solidFill>
-              <a:latin typeface="Noto Sans KR" panose="020B0200000000000000" pitchFamily="50" charset="-127"/>
-              <a:ea typeface="Noto Sans KR" panose="020B0200000000000000" pitchFamily="50" charset="-127"/>
-            </a:endParaRPr>
-          </a:p>
-        </p:txBody>
-      </p:sp>
-      <p:sp>
-        <p:nvSpPr>
-          <p:cNvPr id="72" name="TextBox 71">
-            <a:extLst>
-              <a:ext uri="{FF2B5EF4-FFF2-40B4-BE49-F238E27FC236}">
-                <a16:creationId xmlns:a16="http://schemas.microsoft.com/office/drawing/2014/main" id="{A6884D7D-5B88-2736-D684-FF815A3A5979}"/>
-              </a:ext>
-            </a:extLst>
-          </p:cNvPr>
-          <p:cNvSpPr txBox="1"/>
-          <p:nvPr/>
-        </p:nvSpPr>
-        <p:spPr>
-          <a:xfrm>
-            <a:off x="773808" y="5732005"/>
-            <a:ext cx="961071" cy="114327"/>
-          </a:xfrm>
-          <a:prstGeom prst="rect">
-            <a:avLst/>
-          </a:prstGeom>
-          <a:noFill/>
-        </p:spPr>
-        <p:txBody>
-          <a:bodyPr wrap="square" lIns="0" tIns="0" rIns="0" bIns="0" anchor="t">
-            <a:spAutoFit/>
-          </a:bodyPr>
-          <a:lstStyle/>
-          <a:p>
-            <a:pPr algn="ctr">
-              <a:lnSpc>
-                <a:spcPct val="115000"/>
-              </a:lnSpc>
-            </a:pPr>
-            <a:r>
-              <a:rPr lang="en-US" altLang="ko-KR" sz="700" dirty="0">
-                <a:solidFill>
-                  <a:srgbClr val="0070C0"/>
-                </a:solidFill>
-                <a:latin typeface="Noto Sans KR" panose="020B0200000000000000" pitchFamily="50" charset="-127"/>
-                <a:ea typeface="Noto Sans KR" panose="020B0200000000000000" pitchFamily="50" charset="-127"/>
-              </a:rPr>
-              <a:t>&lt; 평균  억&gt;</a:t>
-            </a:r>
-            <a:r>
-              <a:rPr lang="ko-KR" altLang="en-US" sz="700" dirty="0">
-                <a:solidFill>
-                  <a:srgbClr val="0070C0"/>
-                </a:solidFill>
-                <a:latin typeface="Noto Sans KR" panose="020B0200000000000000" pitchFamily="50" charset="-127"/>
-                <a:ea typeface="Noto Sans KR" panose="020B0200000000000000" pitchFamily="50" charset="-127"/>
-              </a:rPr>
-              <a:t/>
-            </a:r>
-            <a:r>
-              <a:rPr lang="en-US" altLang="ko-KR" sz="700" dirty="0">
-                <a:solidFill>
-                  <a:srgbClr val="0070C0"/>
-                </a:solidFill>
-                <a:latin typeface="Noto Sans KR" panose="020B0200000000000000" pitchFamily="50" charset="-127"/>
-                <a:ea typeface="Noto Sans KR" panose="020B0200000000000000" pitchFamily="50" charset="-127"/>
-              </a:rPr>
-              <a:t/>
-            </a:r>
-            <a:r>
-              <a:rPr lang="ko-KR" altLang="en-US" sz="700" dirty="0">
-                <a:solidFill>
-                  <a:srgbClr val="0070C0"/>
-                </a:solidFill>
-                <a:latin typeface="Noto Sans KR" panose="020B0200000000000000" pitchFamily="50" charset="-127"/>
-                <a:ea typeface="Noto Sans KR" panose="020B0200000000000000" pitchFamily="50" charset="-127"/>
-              </a:rPr>
-              <a:t/>
-            </a:r>
-            <a:r>
-              <a:rPr lang="en-US" altLang="ko-KR" sz="700" dirty="0">
-                <a:solidFill>
-                  <a:srgbClr val="0070C0"/>
-                </a:solidFill>
-                <a:latin typeface="Noto Sans KR" panose="020B0200000000000000" pitchFamily="50" charset="-127"/>
-                <a:ea typeface="Noto Sans KR" panose="020B0200000000000000" pitchFamily="50" charset="-127"/>
-              </a:rPr>
-              <a:t/>
-            </a:r>
-            <a:endParaRPr sz="700" dirty="0">
-              <a:solidFill>
-                <a:srgbClr val="0070C0"/>
               </a:solidFill>
               <a:latin typeface="Noto Sans KR" panose="020B0200000000000000" pitchFamily="50" charset="-127"/>
               <a:ea typeface="Noto Sans KR" panose="020B0200000000000000" pitchFamily="50" charset="-127"/>
@@ -12916,8 +10219,8 @@
         </p:nvSpPr>
         <p:spPr>
           <a:xfrm>
-            <a:off x="753872" y="4857208"/>
-            <a:ext cx="1178635" cy="221214"/>
+            <a:off x="745795" y="4857208"/>
+            <a:ext cx="1278793" cy="204223"/>
           </a:xfrm>
           <a:prstGeom prst="rect">
             <a:avLst/>
@@ -12938,61 +10241,118 @@
               </a:lnSpc>
             </a:pPr>
             <a:r>
-              <a:rPr lang="ko-KR" altLang="en-US" sz="650" b="0">
+              <a:rPr lang="ko-KR" altLang="en-US" sz="600" b="0" err="1">
+                <a:solidFill>
+                  <a:schemeClr val="bg1">
+                    <a:lumMod val="50000"/>
+                  </a:schemeClr>
+                </a:solidFill>
                 <a:latin typeface="Noto Sans KR" panose="020B0200000000000000" pitchFamily="50" charset="-127"/>
                 <a:ea typeface="Noto Sans KR" panose="020B0200000000000000" pitchFamily="50" charset="-127"/>
               </a:rPr>
               <a:t>동대구역화성파크드림 ['23.06, 1079세대]</a:t>
             </a:r>
+            <a:r>
+              <a:rPr lang="en-US" altLang="ko-KR" sz="600" b="0">
+                <a:solidFill>
+                  <a:schemeClr val="bg1">
+                    <a:lumMod val="50000"/>
+                  </a:schemeClr>
+                </a:solidFill>
+                <a:latin typeface="Noto Sans KR" panose="020B0200000000000000" pitchFamily="50" charset="-127"/>
+                <a:ea typeface="Noto Sans KR" panose="020B0200000000000000" pitchFamily="50" charset="-127"/>
+              </a:rPr>
+              <a:t/>
+            </a:r>
             <a:br>
-              <a:rPr lang="en-US" altLang="ko-KR" sz="650" b="0">
+              <a:rPr lang="en-US" altLang="ko-KR" sz="600" b="0">
+                <a:solidFill>
+                  <a:schemeClr val="bg1">
+                    <a:lumMod val="50000"/>
+                  </a:schemeClr>
+                </a:solidFill>
                 <a:latin typeface="Noto Sans KR" panose="020B0200000000000000" pitchFamily="50" charset="-127"/>
                 <a:ea typeface="Noto Sans KR" panose="020B0200000000000000" pitchFamily="50" charset="-127"/>
               </a:rPr>
             </a:br>
             <a:r>
-              <a:rPr lang="en-US" altLang="ko-KR" sz="650" b="0">
+              <a:rPr lang="en-US" altLang="ko-KR" sz="600" b="0">
+                <a:solidFill>
+                  <a:schemeClr val="bg1">
+                    <a:lumMod val="50000"/>
+                  </a:schemeClr>
+                </a:solidFill>
                 <a:latin typeface="Noto Sans KR" panose="020B0200000000000000" pitchFamily="50" charset="-127"/>
                 <a:ea typeface="Noto Sans KR" panose="020B0200000000000000" pitchFamily="50" charset="-127"/>
               </a:rPr>
               <a:t/>
             </a:r>
             <a:r>
-              <a:rPr lang="en-US" altLang="ko-KR" sz="650">
+              <a:rPr lang="en-US" altLang="ko-KR" sz="600">
+                <a:solidFill>
+                  <a:schemeClr val="bg1">
+                    <a:lumMod val="50000"/>
+                  </a:schemeClr>
+                </a:solidFill>
                 <a:latin typeface="Noto Sans KR" panose="020B0200000000000000" pitchFamily="50" charset="-127"/>
                 <a:ea typeface="Noto Sans KR" panose="020B0200000000000000" pitchFamily="50" charset="-127"/>
               </a:rPr>
               <a:t/>
             </a:r>
             <a:r>
-              <a:rPr lang="ko-KR" altLang="en-US" sz="650">
+              <a:rPr lang="ko-KR" altLang="en-US" sz="600">
+                <a:solidFill>
+                  <a:schemeClr val="bg1">
+                    <a:lumMod val="50000"/>
+                  </a:schemeClr>
+                </a:solidFill>
                 <a:latin typeface="Noto Sans KR" panose="020B0200000000000000" pitchFamily="50" charset="-127"/>
                 <a:ea typeface="Noto Sans KR" panose="020B0200000000000000" pitchFamily="50" charset="-127"/>
               </a:rPr>
               <a:t/>
             </a:r>
             <a:r>
-              <a:rPr lang="en-US" altLang="ko-KR" sz="650">
+              <a:rPr lang="en-US" altLang="ko-KR" sz="600">
+                <a:solidFill>
+                  <a:schemeClr val="bg1">
+                    <a:lumMod val="50000"/>
+                  </a:schemeClr>
+                </a:solidFill>
                 <a:latin typeface="Noto Sans KR" panose="020B0200000000000000" pitchFamily="50" charset="-127"/>
                 <a:ea typeface="Noto Sans KR" panose="020B0200000000000000" pitchFamily="50" charset="-127"/>
               </a:rPr>
               <a:t/>
             </a:r>
             <a:r>
-              <a:rPr lang="ko-KR" altLang="en-US" sz="650">
+              <a:rPr lang="ko-KR" altLang="en-US" sz="600">
+                <a:solidFill>
+                  <a:schemeClr val="bg1">
+                    <a:lumMod val="50000"/>
+                  </a:schemeClr>
+                </a:solidFill>
                 <a:latin typeface="Noto Sans KR" panose="020B0200000000000000" pitchFamily="50" charset="-127"/>
                 <a:ea typeface="Noto Sans KR" panose="020B0200000000000000" pitchFamily="50" charset="-127"/>
               </a:rPr>
               <a:t/>
             </a:r>
             <a:r>
-              <a:rPr lang="en-US" altLang="ko-KR" sz="650">
+              <a:rPr lang="en-US" altLang="ko-KR" sz="600">
+                <a:solidFill>
+                  <a:schemeClr val="bg1">
+                    <a:lumMod val="50000"/>
+                  </a:schemeClr>
+                </a:solidFill>
                 <a:latin typeface="Noto Sans KR" panose="020B0200000000000000" pitchFamily="50" charset="-127"/>
                 <a:ea typeface="Noto Sans KR" panose="020B0200000000000000" pitchFamily="50" charset="-127"/>
               </a:rPr>
               <a:t/>
             </a:r>
-            <a:endParaRPr sz="650" b="0">
+            <a:endParaRPr sz="600" b="0">
+              <a:solidFill>
+                <a:schemeClr val="bg1">
+                  <a:lumMod val="50000"/>
+                </a:schemeClr>
+              </a:solidFill>
               <a:latin typeface="Noto Sans KR" panose="020B0200000000000000" pitchFamily="50" charset="-127"/>
               <a:ea typeface="Noto Sans KR" panose="020B0200000000000000" pitchFamily="50" charset="-127"/>
             </a:endParaRPr>
@@ -13013,8 +10373,8 @@
         </p:nvSpPr>
         <p:spPr>
           <a:xfrm>
-            <a:off x="1876204" y="4857208"/>
-            <a:ext cx="895203" cy="221214"/>
+            <a:off x="1823800" y="4857208"/>
+            <a:ext cx="971275" cy="204223"/>
           </a:xfrm>
           <a:prstGeom prst="rect">
             <a:avLst/>
@@ -13033,68 +10393,106 @@
               </a:lnSpc>
             </a:pPr>
             <a:r>
-              <a:rPr lang="en-US" altLang="ko-KR" sz="650" b="0">
+              <a:rPr lang="ko-KR" altLang="en-US" sz="600" err="1">
+                <a:solidFill>
+                  <a:schemeClr val="bg1">
+                    <a:lumMod val="50000"/>
+                  </a:schemeClr>
+                </a:solidFill>
                 <a:latin typeface="Noto Sans KR" panose="020B0200000000000000" pitchFamily="50" charset="-127"/>
                 <a:ea typeface="Noto Sans KR" panose="020B0200000000000000" pitchFamily="50" charset="-127"/>
               </a:rPr>
               <a:t>더샵디어엘로 ['24.04, 1190세대]</a:t>
             </a:r>
-            <a:r>
-              <a:rPr lang="ko-KR" altLang="en-US" sz="650" b="0">
+            <a:br>
+              <a:rPr lang="en-US" altLang="ko-KR" sz="600" b="0">
+                <a:solidFill>
+                  <a:schemeClr val="bg1">
+                    <a:lumMod val="50000"/>
+                  </a:schemeClr>
+                </a:solidFill>
+                <a:latin typeface="Noto Sans KR" panose="020B0200000000000000" pitchFamily="50" charset="-127"/>
+                <a:ea typeface="Noto Sans KR" panose="020B0200000000000000" pitchFamily="50" charset="-127"/>
+              </a:rPr>
+            </a:br>
+            <a:r>
+              <a:rPr lang="en-US" altLang="ko-KR" sz="600" b="0">
+                <a:solidFill>
+                  <a:schemeClr val="bg1">
+                    <a:lumMod val="50000"/>
+                  </a:schemeClr>
+                </a:solidFill>
                 <a:latin typeface="Noto Sans KR" panose="020B0200000000000000" pitchFamily="50" charset="-127"/>
                 <a:ea typeface="Noto Sans KR" panose="020B0200000000000000" pitchFamily="50" charset="-127"/>
               </a:rPr>
               <a:t/>
             </a:r>
-            <a:br>
-              <a:rPr lang="en-US" altLang="ko-KR" sz="650" b="0">
-                <a:latin typeface="Noto Sans KR" panose="020B0200000000000000" pitchFamily="50" charset="-127"/>
-                <a:ea typeface="Noto Sans KR" panose="020B0200000000000000" pitchFamily="50" charset="-127"/>
-              </a:rPr>
-            </a:br>
-            <a:r>
-              <a:rPr lang="en-US" altLang="ko-KR" sz="650" b="0">
+            <a:r>
+              <a:rPr lang="en-US" altLang="ko-KR" sz="600">
+                <a:solidFill>
+                  <a:schemeClr val="bg1">
+                    <a:lumMod val="50000"/>
+                  </a:schemeClr>
+                </a:solidFill>
                 <a:latin typeface="Noto Sans KR" panose="020B0200000000000000" pitchFamily="50" charset="-127"/>
                 <a:ea typeface="Noto Sans KR" panose="020B0200000000000000" pitchFamily="50" charset="-127"/>
               </a:rPr>
               <a:t/>
             </a:r>
             <a:r>
-              <a:rPr lang="en-US" altLang="ko-KR" sz="650">
+              <a:rPr lang="ko-KR" altLang="en-US" sz="600">
+                <a:solidFill>
+                  <a:schemeClr val="bg1">
+                    <a:lumMod val="50000"/>
+                  </a:schemeClr>
+                </a:solidFill>
                 <a:latin typeface="Noto Sans KR" panose="020B0200000000000000" pitchFamily="50" charset="-127"/>
                 <a:ea typeface="Noto Sans KR" panose="020B0200000000000000" pitchFamily="50" charset="-127"/>
               </a:rPr>
               <a:t/>
             </a:r>
             <a:r>
-              <a:rPr lang="ko-KR" altLang="en-US" sz="650">
+              <a:rPr lang="en-US" altLang="ko-KR" sz="600">
+                <a:solidFill>
+                  <a:schemeClr val="bg1">
+                    <a:lumMod val="50000"/>
+                  </a:schemeClr>
+                </a:solidFill>
                 <a:latin typeface="Noto Sans KR" panose="020B0200000000000000" pitchFamily="50" charset="-127"/>
                 <a:ea typeface="Noto Sans KR" panose="020B0200000000000000" pitchFamily="50" charset="-127"/>
               </a:rPr>
               <a:t/>
             </a:r>
             <a:r>
-              <a:rPr lang="en-US" altLang="ko-KR" sz="650">
+              <a:rPr lang="ko-KR" altLang="en-US" sz="600">
+                <a:solidFill>
+                  <a:schemeClr val="bg1">
+                    <a:lumMod val="50000"/>
+                  </a:schemeClr>
+                </a:solidFill>
                 <a:latin typeface="Noto Sans KR" panose="020B0200000000000000" pitchFamily="50" charset="-127"/>
                 <a:ea typeface="Noto Sans KR" panose="020B0200000000000000" pitchFamily="50" charset="-127"/>
               </a:rPr>
               <a:t/>
             </a:r>
             <a:r>
-              <a:rPr lang="ko-KR" altLang="en-US" sz="650">
+              <a:rPr lang="en-US" altLang="ko-KR" sz="600">
+                <a:solidFill>
+                  <a:schemeClr val="bg1">
+                    <a:lumMod val="50000"/>
+                  </a:schemeClr>
+                </a:solidFill>
                 <a:latin typeface="Noto Sans KR" panose="020B0200000000000000" pitchFamily="50" charset="-127"/>
                 <a:ea typeface="Noto Sans KR" panose="020B0200000000000000" pitchFamily="50" charset="-127"/>
               </a:rPr>
               <a:t/>
             </a:r>
-            <a:r>
-              <a:rPr lang="en-US" altLang="ko-KR" sz="650">
-                <a:latin typeface="Noto Sans KR" panose="020B0200000000000000" pitchFamily="50" charset="-127"/>
-                <a:ea typeface="Noto Sans KR" panose="020B0200000000000000" pitchFamily="50" charset="-127"/>
-              </a:rPr>
-              <a:t/>
-            </a:r>
-            <a:endParaRPr sz="650" b="0">
+            <a:endParaRPr sz="600" b="0">
+              <a:solidFill>
+                <a:schemeClr val="bg1">
+                  <a:lumMod val="50000"/>
+                </a:schemeClr>
+              </a:solidFill>
               <a:latin typeface="Noto Sans KR" panose="020B0200000000000000" pitchFamily="50" charset="-127"/>
               <a:ea typeface="Noto Sans KR" panose="020B0200000000000000" pitchFamily="50" charset="-127"/>
             </a:endParaRPr>
@@ -13115,8 +10513,8 @@
         </p:nvSpPr>
         <p:spPr>
           <a:xfrm>
-            <a:off x="2715104" y="4857208"/>
-            <a:ext cx="895203" cy="221214"/>
+            <a:off x="2743513" y="4857208"/>
+            <a:ext cx="971275" cy="204223"/>
           </a:xfrm>
           <a:prstGeom prst="rect">
             <a:avLst/>
@@ -13135,61 +10533,106 @@
               </a:lnSpc>
             </a:pPr>
             <a:r>
-              <a:rPr lang="ko-KR" altLang="en-US" sz="650">
+              <a:rPr lang="ko-KR" altLang="en-US" sz="600" b="0" err="1">
+                <a:solidFill>
+                  <a:schemeClr val="bg1">
+                    <a:lumMod val="50000"/>
+                  </a:schemeClr>
+                </a:solidFill>
                 <a:latin typeface="Noto Sans KR" panose="020B0200000000000000" pitchFamily="50" charset="-127"/>
                 <a:ea typeface="Noto Sans KR" panose="020B0200000000000000" pitchFamily="50" charset="-127"/>
               </a:rPr>
               <a:t>동대구역푸르지오브리센트 ['24.07, 794세대]</a:t>
             </a:r>
             <a:br>
-              <a:rPr lang="en-US" altLang="ko-KR" sz="650" b="0">
+              <a:rPr lang="en-US" altLang="ko-KR" sz="600" b="0">
+                <a:solidFill>
+                  <a:schemeClr val="bg1">
+                    <a:lumMod val="50000"/>
+                  </a:schemeClr>
+                </a:solidFill>
                 <a:latin typeface="Noto Sans KR" panose="020B0200000000000000" pitchFamily="50" charset="-127"/>
                 <a:ea typeface="Noto Sans KR" panose="020B0200000000000000" pitchFamily="50" charset="-127"/>
               </a:rPr>
             </a:br>
             <a:r>
-              <a:rPr lang="en-US" altLang="ko-KR" sz="650" b="0">
+              <a:rPr lang="en-US" altLang="ko-KR" sz="600" b="0">
+                <a:solidFill>
+                  <a:schemeClr val="bg1">
+                    <a:lumMod val="50000"/>
+                  </a:schemeClr>
+                </a:solidFill>
                 <a:latin typeface="Noto Sans KR" panose="020B0200000000000000" pitchFamily="50" charset="-127"/>
                 <a:ea typeface="Noto Sans KR" panose="020B0200000000000000" pitchFamily="50" charset="-127"/>
               </a:rPr>
               <a:t/>
             </a:r>
             <a:r>
-              <a:rPr lang="en-US" altLang="ko-KR" sz="650">
+              <a:rPr lang="en-US" altLang="ko-KR" sz="600">
+                <a:solidFill>
+                  <a:schemeClr val="bg1">
+                    <a:lumMod val="50000"/>
+                  </a:schemeClr>
+                </a:solidFill>
                 <a:latin typeface="Noto Sans KR" panose="020B0200000000000000" pitchFamily="50" charset="-127"/>
                 <a:ea typeface="Noto Sans KR" panose="020B0200000000000000" pitchFamily="50" charset="-127"/>
               </a:rPr>
               <a:t/>
             </a:r>
             <a:r>
-              <a:rPr lang="ko-KR" altLang="en-US" sz="650">
+              <a:rPr lang="ko-KR" altLang="en-US" sz="600">
+                <a:solidFill>
+                  <a:schemeClr val="bg1">
+                    <a:lumMod val="50000"/>
+                  </a:schemeClr>
+                </a:solidFill>
                 <a:latin typeface="Noto Sans KR" panose="020B0200000000000000" pitchFamily="50" charset="-127"/>
                 <a:ea typeface="Noto Sans KR" panose="020B0200000000000000" pitchFamily="50" charset="-127"/>
               </a:rPr>
               <a:t/>
             </a:r>
             <a:r>
-              <a:rPr lang="en-US" altLang="ko-KR" sz="650">
+              <a:rPr lang="en-US" altLang="ko-KR" sz="600">
+                <a:solidFill>
+                  <a:schemeClr val="bg1">
+                    <a:lumMod val="50000"/>
+                  </a:schemeClr>
+                </a:solidFill>
                 <a:latin typeface="Noto Sans KR" panose="020B0200000000000000" pitchFamily="50" charset="-127"/>
                 <a:ea typeface="Noto Sans KR" panose="020B0200000000000000" pitchFamily="50" charset="-127"/>
               </a:rPr>
               <a:t/>
             </a:r>
             <a:r>
-              <a:rPr lang="ko-KR" altLang="en-US" sz="650">
+              <a:rPr lang="ko-KR" altLang="en-US" sz="600">
+                <a:solidFill>
+                  <a:schemeClr val="bg1">
+                    <a:lumMod val="50000"/>
+                  </a:schemeClr>
+                </a:solidFill>
                 <a:latin typeface="Noto Sans KR" panose="020B0200000000000000" pitchFamily="50" charset="-127"/>
                 <a:ea typeface="Noto Sans KR" panose="020B0200000000000000" pitchFamily="50" charset="-127"/>
               </a:rPr>
               <a:t/>
             </a:r>
             <a:r>
-              <a:rPr lang="en-US" altLang="ko-KR" sz="650">
+              <a:rPr lang="en-US" altLang="ko-KR" sz="600">
+                <a:solidFill>
+                  <a:schemeClr val="bg1">
+                    <a:lumMod val="50000"/>
+                  </a:schemeClr>
+                </a:solidFill>
                 <a:latin typeface="Noto Sans KR" panose="020B0200000000000000" pitchFamily="50" charset="-127"/>
                 <a:ea typeface="Noto Sans KR" panose="020B0200000000000000" pitchFamily="50" charset="-127"/>
               </a:rPr>
               <a:t/>
             </a:r>
-            <a:endParaRPr sz="650" b="0">
+            <a:endParaRPr sz="600" b="0">
+              <a:solidFill>
+                <a:schemeClr val="bg1">
+                  <a:lumMod val="50000"/>
+                </a:schemeClr>
+              </a:solidFill>
               <a:latin typeface="Noto Sans KR" panose="020B0200000000000000" pitchFamily="50" charset="-127"/>
               <a:ea typeface="Noto Sans KR" panose="020B0200000000000000" pitchFamily="50" charset="-127"/>
             </a:endParaRPr>
@@ -13210,8 +10653,8 @@
         </p:nvSpPr>
         <p:spPr>
           <a:xfrm>
-            <a:off x="3554004" y="4857208"/>
-            <a:ext cx="895203" cy="221214"/>
+            <a:off x="3669575" y="4857208"/>
+            <a:ext cx="971275" cy="204223"/>
           </a:xfrm>
           <a:prstGeom prst="rect">
             <a:avLst/>
@@ -13230,61 +10673,106 @@
               </a:lnSpc>
             </a:pPr>
             <a:r>
-              <a:rPr lang="ko-KR" altLang="en-US" sz="650" dirty="0" err="1">
+              <a:rPr lang="ko-KR" altLang="en-US" sz="600" err="1">
+                <a:solidFill>
+                  <a:schemeClr val="bg1">
+                    <a:lumMod val="50000"/>
+                  </a:schemeClr>
+                </a:solidFill>
                 <a:latin typeface="Noto Sans KR" panose="020B0200000000000000" pitchFamily="50" charset="-127"/>
                 <a:ea typeface="Noto Sans KR" panose="020B0200000000000000" pitchFamily="50" charset="-127"/>
               </a:rPr>
               <a:t>센트럴파크대현 ['16.05, 1106세대]</a:t>
             </a:r>
             <a:br>
-              <a:rPr lang="en-US" altLang="ko-KR" sz="650" b="0" dirty="0">
+              <a:rPr lang="en-US" altLang="ko-KR" sz="600" b="0">
+                <a:solidFill>
+                  <a:schemeClr val="bg1">
+                    <a:lumMod val="50000"/>
+                  </a:schemeClr>
+                </a:solidFill>
                 <a:latin typeface="Noto Sans KR" panose="020B0200000000000000" pitchFamily="50" charset="-127"/>
                 <a:ea typeface="Noto Sans KR" panose="020B0200000000000000" pitchFamily="50" charset="-127"/>
               </a:rPr>
             </a:br>
             <a:r>
-              <a:rPr lang="en-US" altLang="ko-KR" sz="650" b="0" dirty="0">
+              <a:rPr lang="en-US" altLang="ko-KR" sz="600" b="0">
+                <a:solidFill>
+                  <a:schemeClr val="bg1">
+                    <a:lumMod val="50000"/>
+                  </a:schemeClr>
+                </a:solidFill>
                 <a:latin typeface="Noto Sans KR" panose="020B0200000000000000" pitchFamily="50" charset="-127"/>
                 <a:ea typeface="Noto Sans KR" panose="020B0200000000000000" pitchFamily="50" charset="-127"/>
               </a:rPr>
               <a:t/>
             </a:r>
             <a:r>
-              <a:rPr lang="en-US" altLang="ko-KR" sz="650" dirty="0">
+              <a:rPr lang="en-US" altLang="ko-KR" sz="600">
+                <a:solidFill>
+                  <a:schemeClr val="bg1">
+                    <a:lumMod val="50000"/>
+                  </a:schemeClr>
+                </a:solidFill>
                 <a:latin typeface="Noto Sans KR" panose="020B0200000000000000" pitchFamily="50" charset="-127"/>
                 <a:ea typeface="Noto Sans KR" panose="020B0200000000000000" pitchFamily="50" charset="-127"/>
               </a:rPr>
               <a:t/>
             </a:r>
             <a:r>
-              <a:rPr lang="ko-KR" altLang="en-US" sz="650" dirty="0">
+              <a:rPr lang="ko-KR" altLang="en-US" sz="600">
+                <a:solidFill>
+                  <a:schemeClr val="bg1">
+                    <a:lumMod val="50000"/>
+                  </a:schemeClr>
+                </a:solidFill>
                 <a:latin typeface="Noto Sans KR" panose="020B0200000000000000" pitchFamily="50" charset="-127"/>
                 <a:ea typeface="Noto Sans KR" panose="020B0200000000000000" pitchFamily="50" charset="-127"/>
               </a:rPr>
               <a:t/>
             </a:r>
             <a:r>
-              <a:rPr lang="en-US" altLang="ko-KR" sz="650" dirty="0">
+              <a:rPr lang="en-US" altLang="ko-KR" sz="600">
+                <a:solidFill>
+                  <a:schemeClr val="bg1">
+                    <a:lumMod val="50000"/>
+                  </a:schemeClr>
+                </a:solidFill>
                 <a:latin typeface="Noto Sans KR" panose="020B0200000000000000" pitchFamily="50" charset="-127"/>
                 <a:ea typeface="Noto Sans KR" panose="020B0200000000000000" pitchFamily="50" charset="-127"/>
               </a:rPr>
               <a:t/>
             </a:r>
             <a:r>
-              <a:rPr lang="ko-KR" altLang="en-US" sz="650" dirty="0">
+              <a:rPr lang="ko-KR" altLang="en-US" sz="600">
+                <a:solidFill>
+                  <a:schemeClr val="bg1">
+                    <a:lumMod val="50000"/>
+                  </a:schemeClr>
+                </a:solidFill>
                 <a:latin typeface="Noto Sans KR" panose="020B0200000000000000" pitchFamily="50" charset="-127"/>
                 <a:ea typeface="Noto Sans KR" panose="020B0200000000000000" pitchFamily="50" charset="-127"/>
               </a:rPr>
               <a:t/>
             </a:r>
             <a:r>
-              <a:rPr lang="en-US" altLang="ko-KR" sz="650" dirty="0">
+              <a:rPr lang="en-US" altLang="ko-KR" sz="600">
+                <a:solidFill>
+                  <a:schemeClr val="bg1">
+                    <a:lumMod val="50000"/>
+                  </a:schemeClr>
+                </a:solidFill>
                 <a:latin typeface="Noto Sans KR" panose="020B0200000000000000" pitchFamily="50" charset="-127"/>
                 <a:ea typeface="Noto Sans KR" panose="020B0200000000000000" pitchFamily="50" charset="-127"/>
               </a:rPr>
               <a:t/>
             </a:r>
-            <a:endParaRPr sz="650" b="0" dirty="0">
+            <a:endParaRPr sz="600" b="0">
+              <a:solidFill>
+                <a:schemeClr val="bg1">
+                  <a:lumMod val="50000"/>
+                </a:schemeClr>
+              </a:solidFill>
               <a:latin typeface="Noto Sans KR" panose="020B0200000000000000" pitchFamily="50" charset="-127"/>
               <a:ea typeface="Noto Sans KR" panose="020B0200000000000000" pitchFamily="50" charset="-127"/>
             </a:endParaRPr>
@@ -13305,8 +10793,8 @@
         </p:nvSpPr>
         <p:spPr>
           <a:xfrm>
-            <a:off x="4392902" y="4857208"/>
-            <a:ext cx="895203" cy="221214"/>
+            <a:off x="4592461" y="4857208"/>
+            <a:ext cx="971275" cy="204223"/>
           </a:xfrm>
           <a:prstGeom prst="rect">
             <a:avLst/>
@@ -13325,75 +10813,118 @@
               </a:lnSpc>
             </a:pPr>
             <a:r>
-              <a:rPr lang="ko-KR" altLang="en-US" sz="650" b="0" dirty="0" err="1">
+              <a:rPr lang="en-US" altLang="ko-KR" sz="600" dirty="0">
+                <a:solidFill>
+                  <a:schemeClr val="bg1">
+                    <a:lumMod val="50000"/>
+                  </a:schemeClr>
+                </a:solidFill>
                 <a:latin typeface="Noto Sans KR" panose="020B0200000000000000" pitchFamily="50" charset="-127"/>
                 <a:ea typeface="Noto Sans KR" panose="020B0200000000000000" pitchFamily="50" charset="-127"/>
               </a:rPr>
               <a:t/>
             </a:r>
             <a:r>
-              <a:rPr lang="en-US" altLang="ko-KR" sz="650" b="0" dirty="0">
+              <a:rPr lang="ko-KR" altLang="en-US" sz="600" b="0" dirty="0" err="1">
+                <a:solidFill>
+                  <a:schemeClr val="bg1">
+                    <a:lumMod val="50000"/>
+                  </a:schemeClr>
+                </a:solidFill>
                 <a:latin typeface="Noto Sans KR" panose="020B0200000000000000" pitchFamily="50" charset="-127"/>
                 <a:ea typeface="Noto Sans KR" panose="020B0200000000000000" pitchFamily="50" charset="-127"/>
               </a:rPr>
               <a:t/>
             </a:r>
-            <a:r>
-              <a:rPr lang="ko-KR" altLang="en-US" sz="650" b="0" dirty="0">
+            <a:br>
+              <a:rPr lang="en-US" altLang="ko-KR" sz="600" b="0" dirty="0">
+                <a:solidFill>
+                  <a:schemeClr val="bg1">
+                    <a:lumMod val="50000"/>
+                  </a:schemeClr>
+                </a:solidFill>
+                <a:latin typeface="Noto Sans KR" panose="020B0200000000000000" pitchFamily="50" charset="-127"/>
+                <a:ea typeface="Noto Sans KR" panose="020B0200000000000000" pitchFamily="50" charset="-127"/>
+              </a:rPr>
+            </a:br>
+            <a:r>
+              <a:rPr lang="en-US" altLang="ko-KR" sz="600" b="0" dirty="0">
+                <a:solidFill>
+                  <a:schemeClr val="bg1">
+                    <a:lumMod val="50000"/>
+                  </a:schemeClr>
+                </a:solidFill>
                 <a:latin typeface="Noto Sans KR" panose="020B0200000000000000" pitchFamily="50" charset="-127"/>
                 <a:ea typeface="Noto Sans KR" panose="020B0200000000000000" pitchFamily="50" charset="-127"/>
               </a:rPr>
               <a:t/>
             </a:r>
-            <a:br>
-              <a:rPr lang="en-US" altLang="ko-KR" sz="650" b="0" dirty="0">
-                <a:latin typeface="Noto Sans KR" panose="020B0200000000000000" pitchFamily="50" charset="-127"/>
-                <a:ea typeface="Noto Sans KR" panose="020B0200000000000000" pitchFamily="50" charset="-127"/>
-              </a:rPr>
-            </a:br>
-            <a:r>
-              <a:rPr lang="en-US" altLang="ko-KR" sz="650" b="0" dirty="0">
+            <a:r>
+              <a:rPr lang="en-US" altLang="ko-KR" sz="600" dirty="0">
+                <a:solidFill>
+                  <a:schemeClr val="bg1">
+                    <a:lumMod val="50000"/>
+                  </a:schemeClr>
+                </a:solidFill>
                 <a:latin typeface="Noto Sans KR" panose="020B0200000000000000" pitchFamily="50" charset="-127"/>
                 <a:ea typeface="Noto Sans KR" panose="020B0200000000000000" pitchFamily="50" charset="-127"/>
               </a:rPr>
               <a:t/>
             </a:r>
             <a:r>
-              <a:rPr lang="en-US" altLang="ko-KR" sz="650" dirty="0">
+              <a:rPr lang="ko-KR" altLang="en-US" sz="600" dirty="0">
+                <a:solidFill>
+                  <a:schemeClr val="bg1">
+                    <a:lumMod val="50000"/>
+                  </a:schemeClr>
+                </a:solidFill>
                 <a:latin typeface="Noto Sans KR" panose="020B0200000000000000" pitchFamily="50" charset="-127"/>
                 <a:ea typeface="Noto Sans KR" panose="020B0200000000000000" pitchFamily="50" charset="-127"/>
               </a:rPr>
               <a:t/>
             </a:r>
             <a:r>
-              <a:rPr lang="ko-KR" altLang="en-US" sz="650" dirty="0">
+              <a:rPr lang="en-US" altLang="ko-KR" sz="600" dirty="0">
+                <a:solidFill>
+                  <a:schemeClr val="bg1">
+                    <a:lumMod val="50000"/>
+                  </a:schemeClr>
+                </a:solidFill>
                 <a:latin typeface="Noto Sans KR" panose="020B0200000000000000" pitchFamily="50" charset="-127"/>
                 <a:ea typeface="Noto Sans KR" panose="020B0200000000000000" pitchFamily="50" charset="-127"/>
               </a:rPr>
               <a:t/>
             </a:r>
             <a:r>
-              <a:rPr lang="en-US" altLang="ko-KR" sz="650" dirty="0">
+              <a:rPr lang="ko-KR" altLang="en-US" sz="600" dirty="0">
+                <a:solidFill>
+                  <a:schemeClr val="bg1">
+                    <a:lumMod val="50000"/>
+                  </a:schemeClr>
+                </a:solidFill>
                 <a:latin typeface="Noto Sans KR" panose="020B0200000000000000" pitchFamily="50" charset="-127"/>
                 <a:ea typeface="Noto Sans KR" panose="020B0200000000000000" pitchFamily="50" charset="-127"/>
               </a:rPr>
               <a:t/>
             </a:r>
             <a:r>
-              <a:rPr lang="ko-KR" altLang="en-US" sz="650" dirty="0">
+              <a:rPr lang="en-US" altLang="ko-KR" sz="600" dirty="0">
+                <a:solidFill>
+                  <a:schemeClr val="bg1">
+                    <a:lumMod val="50000"/>
+                  </a:schemeClr>
+                </a:solidFill>
                 <a:latin typeface="Noto Sans KR" panose="020B0200000000000000" pitchFamily="50" charset="-127"/>
                 <a:ea typeface="Noto Sans KR" panose="020B0200000000000000" pitchFamily="50" charset="-127"/>
               </a:rPr>
               <a:t/>
             </a:r>
-            <a:r>
-              <a:rPr lang="en-US" altLang="ko-KR" sz="650" dirty="0">
-                <a:latin typeface="Noto Sans KR" panose="020B0200000000000000" pitchFamily="50" charset="-127"/>
-                <a:ea typeface="Noto Sans KR" panose="020B0200000000000000" pitchFamily="50" charset="-127"/>
-              </a:rPr>
-              <a:t/>
-            </a:r>
-            <a:endParaRPr sz="650" b="0" dirty="0">
+            <a:endParaRPr sz="600" b="0" dirty="0">
+              <a:solidFill>
+                <a:schemeClr val="bg1">
+                  <a:lumMod val="50000"/>
+                </a:schemeClr>
+              </a:solidFill>
               <a:latin typeface="Noto Sans KR" panose="020B0200000000000000" pitchFamily="50" charset="-127"/>
               <a:ea typeface="Noto Sans KR" panose="020B0200000000000000" pitchFamily="50" charset="-127"/>
             </a:endParaRPr>
@@ -13402,10 +10933,10 @@
       </p:sp>
       <p:sp>
         <p:nvSpPr>
-          <p:cNvPr id="8" name="타원 7">
+          <p:cNvPr id="7" name="타원 6">
             <a:extLst>
               <a:ext uri="{FF2B5EF4-FFF2-40B4-BE49-F238E27FC236}">
-                <a16:creationId xmlns:a16="http://schemas.microsoft.com/office/drawing/2014/main" id="{C3576BEE-1212-CF88-4151-9377221C792D}"/>
+                <a16:creationId xmlns:a16="http://schemas.microsoft.com/office/drawing/2014/main" id="{097E0338-9EBF-02F4-0EC9-E811539DF7E1}"/>
               </a:ext>
             </a:extLst>
           </p:cNvPr>
@@ -13414,7 +10945,277 @@
         </p:nvSpPr>
         <p:spPr>
           <a:xfrm>
-            <a:off x="4333340" y="2237281"/>
+            <a:off x="5466468" y="3271829"/>
+            <a:ext cx="134444" cy="134444"/>
+          </a:xfrm>
+          <a:prstGeom prst="ellipse">
+            <a:avLst/>
+          </a:prstGeom>
+          <a:solidFill>
+            <a:schemeClr val="bg1">
+              <a:lumMod val="85000"/>
+            </a:schemeClr>
+          </a:solidFill>
+          <a:ln>
+            <a:noFill/>
+          </a:ln>
+        </p:spPr>
+        <p:style>
+          <a:lnRef idx="2">
+            <a:schemeClr val="accent1">
+              <a:shade val="15000"/>
+            </a:schemeClr>
+          </a:lnRef>
+          <a:fillRef idx="1">
+            <a:schemeClr val="accent1"/>
+          </a:fillRef>
+          <a:effectRef idx="0">
+            <a:schemeClr val="accent1"/>
+          </a:effectRef>
+          <a:fontRef idx="minor">
+            <a:schemeClr val="lt1"/>
+          </a:fontRef>
+        </p:style>
+        <p:txBody>
+          <a:bodyPr rtlCol="0" anchor="ctr"/>
+          <a:lstStyle/>
+          <a:p>
+            <a:pPr algn="ctr"/>
+            <a:endParaRPr lang="ko-KR" altLang="en-US"/>
+          </a:p>
+        </p:txBody>
+      </p:sp>
+      <p:sp>
+        <p:nvSpPr>
+          <p:cNvPr id="29" name="타원 28">
+            <a:extLst>
+              <a:ext uri="{FF2B5EF4-FFF2-40B4-BE49-F238E27FC236}">
+                <a16:creationId xmlns:a16="http://schemas.microsoft.com/office/drawing/2014/main" id="{A46FEFCE-1BC5-FD61-1F25-FC05F36AD6DE}"/>
+              </a:ext>
+            </a:extLst>
+          </p:cNvPr>
+          <p:cNvSpPr/>
+          <p:nvPr/>
+        </p:nvSpPr>
+        <p:spPr>
+          <a:xfrm>
+            <a:off x="2444645" y="3271829"/>
+            <a:ext cx="134444" cy="134444"/>
+          </a:xfrm>
+          <a:prstGeom prst="ellipse">
+            <a:avLst/>
+          </a:prstGeom>
+          <a:solidFill>
+            <a:schemeClr val="bg1">
+              <a:lumMod val="85000"/>
+            </a:schemeClr>
+          </a:solidFill>
+          <a:ln>
+            <a:noFill/>
+          </a:ln>
+        </p:spPr>
+        <p:style>
+          <a:lnRef idx="2">
+            <a:schemeClr val="accent1">
+              <a:shade val="15000"/>
+            </a:schemeClr>
+          </a:lnRef>
+          <a:fillRef idx="1">
+            <a:schemeClr val="accent1"/>
+          </a:fillRef>
+          <a:effectRef idx="0">
+            <a:schemeClr val="accent1"/>
+          </a:effectRef>
+          <a:fontRef idx="minor">
+            <a:schemeClr val="lt1"/>
+          </a:fontRef>
+        </p:style>
+        <p:txBody>
+          <a:bodyPr rtlCol="0" anchor="ctr"/>
+          <a:lstStyle/>
+          <a:p>
+            <a:pPr algn="ctr"/>
+            <a:endParaRPr lang="ko-KR" altLang="en-US"/>
+          </a:p>
+        </p:txBody>
+      </p:sp>
+      <p:sp>
+        <p:nvSpPr>
+          <p:cNvPr id="30" name="타원 29">
+            <a:extLst>
+              <a:ext uri="{FF2B5EF4-FFF2-40B4-BE49-F238E27FC236}">
+                <a16:creationId xmlns:a16="http://schemas.microsoft.com/office/drawing/2014/main" id="{FD066A60-5CEB-4B7E-E9F0-9BEDE183EAC9}"/>
+              </a:ext>
+            </a:extLst>
+          </p:cNvPr>
+          <p:cNvSpPr/>
+          <p:nvPr/>
+        </p:nvSpPr>
+        <p:spPr>
+          <a:xfrm>
+            <a:off x="3165141" y="3271829"/>
+            <a:ext cx="134444" cy="134444"/>
+          </a:xfrm>
+          <a:prstGeom prst="ellipse">
+            <a:avLst/>
+          </a:prstGeom>
+          <a:solidFill>
+            <a:schemeClr val="bg1">
+              <a:lumMod val="85000"/>
+            </a:schemeClr>
+          </a:solidFill>
+          <a:ln>
+            <a:noFill/>
+          </a:ln>
+        </p:spPr>
+        <p:style>
+          <a:lnRef idx="2">
+            <a:schemeClr val="accent1">
+              <a:shade val="15000"/>
+            </a:schemeClr>
+          </a:lnRef>
+          <a:fillRef idx="1">
+            <a:schemeClr val="accent1"/>
+          </a:fillRef>
+          <a:effectRef idx="0">
+            <a:schemeClr val="accent1"/>
+          </a:effectRef>
+          <a:fontRef idx="minor">
+            <a:schemeClr val="lt1"/>
+          </a:fontRef>
+        </p:style>
+        <p:txBody>
+          <a:bodyPr rtlCol="0" anchor="ctr"/>
+          <a:lstStyle/>
+          <a:p>
+            <a:pPr algn="ctr"/>
+            <a:endParaRPr lang="ko-KR" altLang="en-US"/>
+          </a:p>
+        </p:txBody>
+      </p:sp>
+      <p:sp>
+        <p:nvSpPr>
+          <p:cNvPr id="31" name="타원 30">
+            <a:extLst>
+              <a:ext uri="{FF2B5EF4-FFF2-40B4-BE49-F238E27FC236}">
+                <a16:creationId xmlns:a16="http://schemas.microsoft.com/office/drawing/2014/main" id="{8A02D392-A1D2-389A-B28B-BBE70569E0E6}"/>
+              </a:ext>
+            </a:extLst>
+          </p:cNvPr>
+          <p:cNvSpPr/>
+          <p:nvPr/>
+        </p:nvSpPr>
+        <p:spPr>
+          <a:xfrm>
+            <a:off x="3891612" y="3271829"/>
+            <a:ext cx="134444" cy="134444"/>
+          </a:xfrm>
+          <a:prstGeom prst="ellipse">
+            <a:avLst/>
+          </a:prstGeom>
+          <a:solidFill>
+            <a:schemeClr val="bg1">
+              <a:lumMod val="85000"/>
+            </a:schemeClr>
+          </a:solidFill>
+          <a:ln>
+            <a:noFill/>
+          </a:ln>
+        </p:spPr>
+        <p:style>
+          <a:lnRef idx="2">
+            <a:schemeClr val="accent1">
+              <a:shade val="15000"/>
+            </a:schemeClr>
+          </a:lnRef>
+          <a:fillRef idx="1">
+            <a:schemeClr val="accent1"/>
+          </a:fillRef>
+          <a:effectRef idx="0">
+            <a:schemeClr val="accent1"/>
+          </a:effectRef>
+          <a:fontRef idx="minor">
+            <a:schemeClr val="lt1"/>
+          </a:fontRef>
+        </p:style>
+        <p:txBody>
+          <a:bodyPr rtlCol="0" anchor="ctr"/>
+          <a:lstStyle/>
+          <a:p>
+            <a:pPr algn="ctr"/>
+            <a:endParaRPr lang="ko-KR" altLang="en-US"/>
+          </a:p>
+        </p:txBody>
+      </p:sp>
+      <p:sp>
+        <p:nvSpPr>
+          <p:cNvPr id="34" name="타원 33">
+            <a:extLst>
+              <a:ext uri="{FF2B5EF4-FFF2-40B4-BE49-F238E27FC236}">
+                <a16:creationId xmlns:a16="http://schemas.microsoft.com/office/drawing/2014/main" id="{3E3EE131-F6DE-8BAF-4BE0-FF95FDD5CA8C}"/>
+              </a:ext>
+            </a:extLst>
+          </p:cNvPr>
+          <p:cNvSpPr/>
+          <p:nvPr/>
+        </p:nvSpPr>
+        <p:spPr>
+          <a:xfrm>
+            <a:off x="4640943" y="3271829"/>
+            <a:ext cx="134444" cy="134444"/>
+          </a:xfrm>
+          <a:prstGeom prst="ellipse">
+            <a:avLst/>
+          </a:prstGeom>
+          <a:solidFill>
+            <a:schemeClr val="bg1">
+              <a:lumMod val="85000"/>
+            </a:schemeClr>
+          </a:solidFill>
+          <a:ln>
+            <a:noFill/>
+          </a:ln>
+        </p:spPr>
+        <p:style>
+          <a:lnRef idx="2">
+            <a:schemeClr val="accent1">
+              <a:shade val="15000"/>
+            </a:schemeClr>
+          </a:lnRef>
+          <a:fillRef idx="1">
+            <a:schemeClr val="accent1"/>
+          </a:fillRef>
+          <a:effectRef idx="0">
+            <a:schemeClr val="accent1"/>
+          </a:effectRef>
+          <a:fontRef idx="minor">
+            <a:schemeClr val="lt1"/>
+          </a:fontRef>
+        </p:style>
+        <p:txBody>
+          <a:bodyPr rtlCol="0" anchor="ctr"/>
+          <a:lstStyle/>
+          <a:p>
+            <a:pPr algn="ctr"/>
+            <a:endParaRPr lang="ko-KR" altLang="en-US"/>
+          </a:p>
+        </p:txBody>
+      </p:sp>
+      <p:sp>
+        <p:nvSpPr>
+          <p:cNvPr id="40" name="타원 39">
+            <a:extLst>
+              <a:ext uri="{FF2B5EF4-FFF2-40B4-BE49-F238E27FC236}">
+                <a16:creationId xmlns:a16="http://schemas.microsoft.com/office/drawing/2014/main" id="{72D20883-C31B-BA53-C5DC-772E5A62DC63}"/>
+              </a:ext>
+            </a:extLst>
+          </p:cNvPr>
+          <p:cNvSpPr/>
+          <p:nvPr/>
+        </p:nvSpPr>
+        <p:spPr>
+          <a:xfrm>
+            <a:off x="5628740" y="2237281"/>
             <a:ext cx="134444" cy="134444"/>
           </a:xfrm>
           <a:prstGeom prst="ellipse">
@@ -13457,10 +11258,10 @@
       </p:sp>
       <p:sp>
         <p:nvSpPr>
-          <p:cNvPr id="24" name="타원 23">
+          <p:cNvPr id="44" name="타원 43">
             <a:extLst>
               <a:ext uri="{FF2B5EF4-FFF2-40B4-BE49-F238E27FC236}">
-                <a16:creationId xmlns:a16="http://schemas.microsoft.com/office/drawing/2014/main" id="{E5BC4A06-2CE4-BCA9-4E15-00C93CCC4228}"/>
+                <a16:creationId xmlns:a16="http://schemas.microsoft.com/office/drawing/2014/main" id="{8BACAE18-D3A1-DD61-C782-EEDE0D9A9FEE}"/>
               </a:ext>
             </a:extLst>
           </p:cNvPr>
@@ -13469,7 +11270,7 @@
         </p:nvSpPr>
         <p:spPr>
           <a:xfrm>
-            <a:off x="4818880" y="2490673"/>
+            <a:off x="1337687" y="4040281"/>
             <a:ext cx="134444" cy="134444"/>
           </a:xfrm>
           <a:prstGeom prst="ellipse">
@@ -13509,271 +11310,721 @@
           </a:p>
         </p:txBody>
       </p:sp>
-      <p:grpSp>
-        <p:nvGrpSpPr>
-          <p:cNvPr id="26" name="그룹 25">
+      <p:sp>
+        <p:nvSpPr>
+          <p:cNvPr id="66" name="타원 65">
             <a:extLst>
               <a:ext uri="{FF2B5EF4-FFF2-40B4-BE49-F238E27FC236}">
-                <a16:creationId xmlns:a16="http://schemas.microsoft.com/office/drawing/2014/main" id="{7640006D-2DF7-13CC-1BA2-99565E199ED1}"/>
+                <a16:creationId xmlns:a16="http://schemas.microsoft.com/office/drawing/2014/main" id="{9DE70C10-980C-7F21-709D-FCD476454A1D}"/>
               </a:ext>
             </a:extLst>
           </p:cNvPr>
-          <p:cNvGrpSpPr/>
+          <p:cNvSpPr/>
           <p:nvPr/>
-        </p:nvGrpSpPr>
-        <p:grpSpPr>
+        </p:nvSpPr>
+        <p:spPr>
           <a:xfrm>
-            <a:off x="2772832" y="-1122606"/>
-            <a:ext cx="2138382" cy="3477782"/>
-            <a:chOff x="-2578100" y="1303902"/>
-            <a:chExt cx="2138382" cy="3477782"/>
+            <a:off x="7705250" y="2264331"/>
+            <a:ext cx="134444" cy="134444"/>
           </a:xfrm>
-        </p:grpSpPr>
-        <p:sp>
-          <p:nvSpPr>
-            <p:cNvPr id="27" name="직사각형 26">
-              <a:extLst>
-                <a:ext uri="{FF2B5EF4-FFF2-40B4-BE49-F238E27FC236}">
-                  <a16:creationId xmlns:a16="http://schemas.microsoft.com/office/drawing/2014/main" id="{FD16CC78-5F6B-DEAA-FE2B-53246F92CD9F}"/>
-                </a:ext>
-              </a:extLst>
-            </p:cNvPr>
-            <p:cNvSpPr/>
-            <p:nvPr/>
-          </p:nvSpPr>
-          <p:spPr>
-            <a:xfrm>
-              <a:off x="-2578100" y="1303902"/>
-              <a:ext cx="2138382" cy="537164"/>
-            </a:xfrm>
-            <a:prstGeom prst="rect">
-              <a:avLst/>
-            </a:prstGeom>
+          <a:prstGeom prst="ellipse">
+            <a:avLst/>
+          </a:prstGeom>
+          <a:solidFill>
+            <a:schemeClr val="bg1">
+              <a:lumMod val="85000"/>
+            </a:schemeClr>
+          </a:solidFill>
+          <a:ln>
+            <a:noFill/>
+          </a:ln>
+        </p:spPr>
+        <p:style>
+          <a:lnRef idx="2">
+            <a:schemeClr val="accent1">
+              <a:shade val="15000"/>
+            </a:schemeClr>
+          </a:lnRef>
+          <a:fillRef idx="1">
+            <a:schemeClr val="accent1"/>
+          </a:fillRef>
+          <a:effectRef idx="0">
+            <a:schemeClr val="accent1"/>
+          </a:effectRef>
+          <a:fontRef idx="minor">
+            <a:schemeClr val="lt1"/>
+          </a:fontRef>
+        </p:style>
+        <p:txBody>
+          <a:bodyPr rtlCol="0" anchor="ctr"/>
+          <a:lstStyle/>
+          <a:p>
+            <a:pPr algn="ctr"/>
+            <a:endParaRPr lang="ko-KR" altLang="en-US"/>
+          </a:p>
+        </p:txBody>
+      </p:sp>
+      <p:sp>
+        <p:nvSpPr>
+          <p:cNvPr id="85" name="타원 84">
+            <a:extLst>
+              <a:ext uri="{FF2B5EF4-FFF2-40B4-BE49-F238E27FC236}">
+                <a16:creationId xmlns:a16="http://schemas.microsoft.com/office/drawing/2014/main" id="{D1512371-DF3E-C1E0-AC43-03765E457C55}"/>
+              </a:ext>
+            </a:extLst>
+          </p:cNvPr>
+          <p:cNvSpPr/>
+          <p:nvPr/>
+        </p:nvSpPr>
+        <p:spPr>
+          <a:xfrm>
+            <a:off x="8415691" y="4862545"/>
+            <a:ext cx="134444" cy="134444"/>
+          </a:xfrm>
+          <a:prstGeom prst="ellipse">
+            <a:avLst/>
+          </a:prstGeom>
+          <a:solidFill>
+            <a:schemeClr val="bg1">
+              <a:lumMod val="85000"/>
+            </a:schemeClr>
+          </a:solidFill>
+          <a:ln>
+            <a:noFill/>
+          </a:ln>
+        </p:spPr>
+        <p:style>
+          <a:lnRef idx="2">
+            <a:schemeClr val="accent1">
+              <a:shade val="15000"/>
+            </a:schemeClr>
+          </a:lnRef>
+          <a:fillRef idx="1">
+            <a:schemeClr val="accent1"/>
+          </a:fillRef>
+          <a:effectRef idx="0">
+            <a:schemeClr val="accent1"/>
+          </a:effectRef>
+          <a:fontRef idx="minor">
+            <a:schemeClr val="lt1"/>
+          </a:fontRef>
+        </p:style>
+        <p:txBody>
+          <a:bodyPr rtlCol="0" anchor="ctr"/>
+          <a:lstStyle/>
+          <a:p>
+            <a:pPr algn="ctr"/>
+            <a:endParaRPr lang="ko-KR" altLang="en-US"/>
+          </a:p>
+        </p:txBody>
+      </p:sp>
+      <p:sp>
+        <p:nvSpPr>
+          <p:cNvPr id="42" name="Rectangle 20">
+            <a:extLst>
+              <a:ext uri="{FF2B5EF4-FFF2-40B4-BE49-F238E27FC236}">
+                <a16:creationId xmlns:a16="http://schemas.microsoft.com/office/drawing/2014/main" id="{51C93928-7845-949C-F390-F348E95657BB}"/>
+              </a:ext>
+            </a:extLst>
+          </p:cNvPr>
+          <p:cNvSpPr/>
+          <p:nvPr/>
+        </p:nvSpPr>
+        <p:spPr>
+          <a:xfrm>
+            <a:off x="6141544" y="4443006"/>
+            <a:ext cx="45719" cy="177068"/>
+          </a:xfrm>
+          <a:prstGeom prst="rect">
+            <a:avLst/>
+          </a:prstGeom>
+          <a:solidFill>
+            <a:srgbClr val="0070C0"/>
+          </a:solidFill>
+          <a:ln>
+            <a:noFill/>
+          </a:ln>
+          <a:effectLst/>
+        </p:spPr>
+        <p:style>
+          <a:lnRef idx="1">
+            <a:schemeClr val="accent1"/>
+          </a:lnRef>
+          <a:fillRef idx="3">
+            <a:schemeClr val="accent1"/>
+          </a:fillRef>
+          <a:effectRef idx="2">
+            <a:schemeClr val="accent1"/>
+          </a:effectRef>
+          <a:fontRef idx="minor">
+            <a:schemeClr val="lt1"/>
+          </a:fontRef>
+        </p:style>
+        <p:txBody>
+          <a:bodyPr rtlCol="0" anchor="ctr"/>
+          <a:lstStyle/>
+          <a:p>
+            <a:pPr algn="ctr"/>
+            <a:endParaRPr>
+              <a:latin typeface="Noto Sans KR" panose="020B0200000000000000" pitchFamily="50" charset="-127"/>
+              <a:ea typeface="Noto Sans KR" panose="020B0200000000000000" pitchFamily="50" charset="-127"/>
+            </a:endParaRPr>
+          </a:p>
+        </p:txBody>
+      </p:sp>
+      <p:sp>
+        <p:nvSpPr>
+          <p:cNvPr id="43" name="TextBox 42">
+            <a:extLst>
+              <a:ext uri="{FF2B5EF4-FFF2-40B4-BE49-F238E27FC236}">
+                <a16:creationId xmlns:a16="http://schemas.microsoft.com/office/drawing/2014/main" id="{2E6FDC66-5D19-8226-C15A-8A490EB16E3C}"/>
+              </a:ext>
+            </a:extLst>
+          </p:cNvPr>
+          <p:cNvSpPr txBox="1"/>
+          <p:nvPr/>
+        </p:nvSpPr>
+        <p:spPr>
+          <a:xfrm>
+            <a:off x="6248224" y="4424058"/>
+            <a:ext cx="1139993" cy="196016"/>
+          </a:xfrm>
+          <a:prstGeom prst="rect">
+            <a:avLst/>
+          </a:prstGeom>
+          <a:noFill/>
+        </p:spPr>
+        <p:txBody>
+          <a:bodyPr wrap="square" lIns="0" tIns="0" rIns="0" bIns="0" anchor="ctr">
+            <a:spAutoFit/>
+          </a:bodyPr>
+          <a:lstStyle/>
+          <a:p>
+            <a:pPr algn="l">
+              <a:lnSpc>
+                <a:spcPct val="115000"/>
+              </a:lnSpc>
+            </a:pPr>
+            <a:r>
+              <a:rPr lang="ko-KR" altLang="en-US" sz="1200" b="1" dirty="0">
+                <a:solidFill>
+                  <a:srgbClr val="0070C0"/>
+                </a:solidFill>
+                <a:latin typeface="Noto Sans KR" panose="020B0200000000000000" pitchFamily="50" charset="-127"/>
+                <a:ea typeface="Noto Sans KR" panose="020B0200000000000000" pitchFamily="50" charset="-127"/>
+              </a:rPr>
+              <a:t>검토</a:t>
+            </a:r>
+            <a:r>
+              <a:rPr lang="en-US" sz="1200" b="1" dirty="0">
+                <a:solidFill>
+                  <a:srgbClr val="0070C0"/>
+                </a:solidFill>
+                <a:latin typeface="Noto Sans KR" panose="020B0200000000000000" pitchFamily="50" charset="-127"/>
+                <a:ea typeface="Noto Sans KR" panose="020B0200000000000000" pitchFamily="50" charset="-127"/>
+              </a:rPr>
+              <a:t> </a:t>
+            </a:r>
+            <a:r>
+              <a:rPr lang="ko-KR" altLang="en-US" sz="1200" b="1" dirty="0">
+                <a:solidFill>
+                  <a:srgbClr val="0070C0"/>
+                </a:solidFill>
+                <a:latin typeface="Noto Sans KR" panose="020B0200000000000000" pitchFamily="50" charset="-127"/>
+                <a:ea typeface="Noto Sans KR" panose="020B0200000000000000" pitchFamily="50" charset="-127"/>
+              </a:rPr>
+              <a:t>의견</a:t>
+            </a:r>
+            <a:endParaRPr sz="1200" b="1" dirty="0">
+              <a:solidFill>
+                <a:srgbClr val="0070C0"/>
+              </a:solidFill>
+              <a:latin typeface="Noto Sans KR" panose="020B0200000000000000" pitchFamily="50" charset="-127"/>
+              <a:ea typeface="Noto Sans KR" panose="020B0200000000000000" pitchFamily="50" charset="-127"/>
+            </a:endParaRPr>
+          </a:p>
+        </p:txBody>
+      </p:sp>
+      <p:sp>
+        <p:nvSpPr>
+          <p:cNvPr id="45" name="Rectangle 20">
+            <a:extLst>
+              <a:ext uri="{FF2B5EF4-FFF2-40B4-BE49-F238E27FC236}">
+                <a16:creationId xmlns:a16="http://schemas.microsoft.com/office/drawing/2014/main" id="{78FBB3CD-233B-7918-52CC-F4841A8B4B61}"/>
+              </a:ext>
+            </a:extLst>
+          </p:cNvPr>
+          <p:cNvSpPr/>
+          <p:nvPr/>
+        </p:nvSpPr>
+        <p:spPr>
+          <a:xfrm>
+            <a:off x="6134738" y="1876420"/>
+            <a:ext cx="45719" cy="177068"/>
+          </a:xfrm>
+          <a:prstGeom prst="rect">
+            <a:avLst/>
+          </a:prstGeom>
+          <a:solidFill>
+            <a:srgbClr val="0070C0"/>
+          </a:solidFill>
+          <a:ln>
+            <a:noFill/>
+          </a:ln>
+          <a:effectLst/>
+        </p:spPr>
+        <p:style>
+          <a:lnRef idx="1">
+            <a:schemeClr val="accent1"/>
+          </a:lnRef>
+          <a:fillRef idx="3">
+            <a:schemeClr val="accent1"/>
+          </a:fillRef>
+          <a:effectRef idx="2">
+            <a:schemeClr val="accent1"/>
+          </a:effectRef>
+          <a:fontRef idx="minor">
+            <a:schemeClr val="lt1"/>
+          </a:fontRef>
+        </p:style>
+        <p:txBody>
+          <a:bodyPr rtlCol="0" anchor="ctr"/>
+          <a:lstStyle/>
+          <a:p>
+            <a:pPr algn="ctr"/>
+            <a:endParaRPr>
+              <a:latin typeface="Noto Sans KR" panose="020B0200000000000000" pitchFamily="50" charset="-127"/>
+              <a:ea typeface="Noto Sans KR" panose="020B0200000000000000" pitchFamily="50" charset="-127"/>
+            </a:endParaRPr>
+          </a:p>
+        </p:txBody>
+      </p:sp>
+      <p:sp>
+        <p:nvSpPr>
+          <p:cNvPr id="47" name="TextBox 46">
+            <a:extLst>
+              <a:ext uri="{FF2B5EF4-FFF2-40B4-BE49-F238E27FC236}">
+                <a16:creationId xmlns:a16="http://schemas.microsoft.com/office/drawing/2014/main" id="{38ED813A-66C9-68A8-4ADB-71E42D9E100F}"/>
+              </a:ext>
+            </a:extLst>
+          </p:cNvPr>
+          <p:cNvSpPr txBox="1"/>
+          <p:nvPr/>
+        </p:nvSpPr>
+        <p:spPr>
+          <a:xfrm>
+            <a:off x="6241418" y="1857472"/>
+            <a:ext cx="4419600" cy="196016"/>
+          </a:xfrm>
+          <a:prstGeom prst="rect">
+            <a:avLst/>
+          </a:prstGeom>
+          <a:noFill/>
+        </p:spPr>
+        <p:txBody>
+          <a:bodyPr wrap="square" lIns="0" tIns="0" rIns="0" bIns="0" anchor="ctr">
+            <a:spAutoFit/>
+          </a:bodyPr>
+          <a:lstStyle/>
+          <a:p>
+            <a:pPr algn="l">
+              <a:lnSpc>
+                <a:spcPct val="115000"/>
+              </a:lnSpc>
+            </a:pPr>
+            <a:r>
+              <a:rPr lang="ko-KR" altLang="en-US" sz="1200" b="1" dirty="0">
+                <a:solidFill>
+                  <a:srgbClr val="0070C0"/>
+                </a:solidFill>
+                <a:latin typeface="Noto Sans KR" panose="020B0200000000000000" pitchFamily="50" charset="-127"/>
+                <a:ea typeface="Noto Sans KR" panose="020B0200000000000000" pitchFamily="50" charset="-127"/>
+              </a:rPr>
+              <a:t>적정 분양가</a:t>
+            </a:r>
+            <a:endParaRPr sz="1200" b="1" dirty="0">
+              <a:solidFill>
+                <a:srgbClr val="0070C0"/>
+              </a:solidFill>
+              <a:latin typeface="Noto Sans KR" panose="020B0200000000000000" pitchFamily="50" charset="-127"/>
+              <a:ea typeface="Noto Sans KR" panose="020B0200000000000000" pitchFamily="50" charset="-127"/>
+            </a:endParaRPr>
+          </a:p>
+        </p:txBody>
+      </p:sp>
+      <p:sp>
+        <p:nvSpPr>
+          <p:cNvPr id="87" name="타원 86">
+            <a:extLst>
+              <a:ext uri="{FF2B5EF4-FFF2-40B4-BE49-F238E27FC236}">
+                <a16:creationId xmlns:a16="http://schemas.microsoft.com/office/drawing/2014/main" id="{AA7E2106-DE1E-A075-91B5-42244469FE48}"/>
+              </a:ext>
+            </a:extLst>
+          </p:cNvPr>
+          <p:cNvSpPr/>
+          <p:nvPr/>
+        </p:nvSpPr>
+        <p:spPr>
+          <a:xfrm>
+            <a:off x="2350247" y="3490117"/>
+            <a:ext cx="188796" cy="188796"/>
+          </a:xfrm>
+          <a:prstGeom prst="ellipse">
+            <a:avLst/>
+          </a:prstGeom>
+          <a:solidFill>
+            <a:schemeClr val="accent5">
+              <a:lumMod val="20000"/>
+              <a:lumOff val="80000"/>
+            </a:schemeClr>
+          </a:solidFill>
+          <a:ln w="6350">
             <a:solidFill>
-              <a:schemeClr val="bg1"/>
+              <a:schemeClr val="bg1">
+                <a:lumMod val="50000"/>
+              </a:schemeClr>
             </a:solidFill>
-            <a:ln w="9525">
+          </a:ln>
+        </p:spPr>
+        <p:style>
+          <a:lnRef idx="2">
+            <a:schemeClr val="accent1">
+              <a:shade val="15000"/>
+            </a:schemeClr>
+          </a:lnRef>
+          <a:fillRef idx="1">
+            <a:schemeClr val="accent1"/>
+          </a:fillRef>
+          <a:effectRef idx="0">
+            <a:schemeClr val="accent1"/>
+          </a:effectRef>
+          <a:fontRef idx="minor">
+            <a:schemeClr val="lt1"/>
+          </a:fontRef>
+        </p:style>
+        <p:txBody>
+          <a:bodyPr rtlCol="0" anchor="ctr"/>
+          <a:lstStyle/>
+          <a:p>
+            <a:pPr algn="ctr" defTabSz="914400" latinLnBrk="1"/>
+            <a:r>
+              <a:rPr lang="en-US" altLang="ko-KR" sz="1000" b="1" dirty="0">
+                <a:solidFill>
+                  <a:schemeClr val="tx1"/>
+                </a:solidFill>
+                <a:latin typeface="Noto Sans KR" panose="020B0200000000000000" pitchFamily="50" charset="-127"/>
+                <a:ea typeface="Noto Sans KR" panose="020B0200000000000000" pitchFamily="50" charset="-127"/>
+              </a:rPr>
+              <a:t>C</a:t>
+            </a:r>
+            <a:endParaRPr lang="ko-KR" altLang="en-US" sz="1000" b="1" dirty="0">
               <a:solidFill>
-                <a:srgbClr val="C00000"/>
+                <a:schemeClr val="tx1"/>
               </a:solidFill>
-            </a:ln>
-          </p:spPr>
-          <p:style>
-            <a:lnRef idx="2">
-              <a:schemeClr val="accent1">
-                <a:shade val="15000"/>
+              <a:latin typeface="Noto Sans KR" panose="020B0200000000000000" pitchFamily="50" charset="-127"/>
+              <a:ea typeface="Noto Sans KR" panose="020B0200000000000000" pitchFamily="50" charset="-127"/>
+            </a:endParaRPr>
+          </a:p>
+        </p:txBody>
+      </p:sp>
+      <p:sp>
+        <p:nvSpPr>
+          <p:cNvPr id="88" name="타원 87">
+            <a:extLst>
+              <a:ext uri="{FF2B5EF4-FFF2-40B4-BE49-F238E27FC236}">
+                <a16:creationId xmlns:a16="http://schemas.microsoft.com/office/drawing/2014/main" id="{10C624D5-2B51-0372-49AD-D2EEAD771E8E}"/>
+              </a:ext>
+            </a:extLst>
+          </p:cNvPr>
+          <p:cNvSpPr/>
+          <p:nvPr/>
+        </p:nvSpPr>
+        <p:spPr>
+          <a:xfrm>
+            <a:off x="3070743" y="3490117"/>
+            <a:ext cx="188796" cy="188796"/>
+          </a:xfrm>
+          <a:prstGeom prst="ellipse">
+            <a:avLst/>
+          </a:prstGeom>
+          <a:solidFill>
+            <a:srgbClr val="0070C0"/>
+          </a:solidFill>
+          <a:ln w="6350">
+            <a:solidFill>
+              <a:schemeClr val="bg1">
+                <a:lumMod val="50000"/>
               </a:schemeClr>
-            </a:lnRef>
-            <a:fillRef idx="1">
-              <a:schemeClr val="accent1"/>
-            </a:fillRef>
-            <a:effectRef idx="0">
-              <a:schemeClr val="accent1"/>
-            </a:effectRef>
-            <a:fontRef idx="minor">
-              <a:schemeClr val="lt1"/>
-            </a:fontRef>
-          </p:style>
-          <p:txBody>
-            <a:bodyPr lIns="36000" tIns="36000" rIns="36000" bIns="36000" rtlCol="0" anchor="ctr" anchorCtr="0"/>
-            <a:lstStyle/>
-            <a:p>
-              <a:r>
-                <a:rPr lang="ko-KR" altLang="en-US" sz="1000" dirty="0">
-                  <a:solidFill>
-                    <a:srgbClr val="C00000"/>
-                  </a:solidFill>
-                  <a:latin typeface="Noto Sans KR" panose="020B0200000000000000" pitchFamily="50" charset="-127"/>
-                  <a:ea typeface="Noto Sans KR" panose="020B0200000000000000" pitchFamily="50" charset="-127"/>
-                </a:rPr>
-                <a:t>첨부 연결 </a:t>
-              </a:r>
-              <a:br>
-                <a:rPr lang="en-US" altLang="ko-KR" sz="1000" dirty="0">
-                  <a:solidFill>
-                    <a:srgbClr val="C00000"/>
-                  </a:solidFill>
-                  <a:latin typeface="Noto Sans KR" panose="020B0200000000000000" pitchFamily="50" charset="-127"/>
-                  <a:ea typeface="Noto Sans KR" panose="020B0200000000000000" pitchFamily="50" charset="-127"/>
-                </a:rPr>
-              </a:br>
-              <a:r>
-                <a:rPr lang="en-US" altLang="ko-KR" sz="1000" dirty="0">
-                  <a:solidFill>
-                    <a:srgbClr val="C00000"/>
-                  </a:solidFill>
-                  <a:latin typeface="Noto Sans KR" panose="020B0200000000000000" pitchFamily="50" charset="-127"/>
-                  <a:ea typeface="Noto Sans KR" panose="020B0200000000000000" pitchFamily="50" charset="-127"/>
-                </a:rPr>
-                <a:t> - </a:t>
-              </a:r>
-              <a:r>
-                <a:rPr lang="ko-KR" altLang="en-US" sz="1000" dirty="0">
-                  <a:solidFill>
-                    <a:srgbClr val="C00000"/>
-                  </a:solidFill>
-                  <a:latin typeface="Noto Sans KR" panose="020B0200000000000000" pitchFamily="50" charset="-127"/>
-                  <a:ea typeface="Noto Sans KR" panose="020B0200000000000000" pitchFamily="50" charset="-127"/>
-                </a:rPr>
-                <a:t>설명 필요 </a:t>
-              </a:r>
-              <a:r>
-                <a:rPr lang="en-US" altLang="ko-KR" sz="1000" dirty="0">
-                  <a:solidFill>
-                    <a:srgbClr val="C00000"/>
-                  </a:solidFill>
-                  <a:latin typeface="Noto Sans KR" panose="020B0200000000000000" pitchFamily="50" charset="-127"/>
-                  <a:ea typeface="Noto Sans KR" panose="020B0200000000000000" pitchFamily="50" charset="-127"/>
-                </a:rPr>
-                <a:t>(</a:t>
-              </a:r>
-              <a:r>
-                <a:rPr lang="ko-KR" altLang="en-US" sz="1000" dirty="0" err="1">
-                  <a:solidFill>
-                    <a:srgbClr val="C00000"/>
-                  </a:solidFill>
-                  <a:latin typeface="Noto Sans KR" panose="020B0200000000000000" pitchFamily="50" charset="-127"/>
-                  <a:ea typeface="Noto Sans KR" panose="020B0200000000000000" pitchFamily="50" charset="-127"/>
-                </a:rPr>
-                <a:t>진한색</a:t>
-              </a:r>
-              <a:r>
-                <a:rPr lang="en-US" altLang="ko-KR" sz="1000" dirty="0">
-                  <a:solidFill>
-                    <a:srgbClr val="C00000"/>
-                  </a:solidFill>
-                  <a:latin typeface="Noto Sans KR" panose="020B0200000000000000" pitchFamily="50" charset="-127"/>
-                  <a:ea typeface="Noto Sans KR" panose="020B0200000000000000" pitchFamily="50" charset="-127"/>
-                </a:rPr>
-                <a:t>)</a:t>
-              </a:r>
-              <a:br>
-                <a:rPr lang="en-US" altLang="ko-KR" sz="1000" dirty="0">
-                  <a:solidFill>
-                    <a:srgbClr val="C00000"/>
-                  </a:solidFill>
-                  <a:latin typeface="Noto Sans KR" panose="020B0200000000000000" pitchFamily="50" charset="-127"/>
-                  <a:ea typeface="Noto Sans KR" panose="020B0200000000000000" pitchFamily="50" charset="-127"/>
-                </a:rPr>
-              </a:br>
-              <a:r>
-                <a:rPr lang="en-US" altLang="ko-KR" sz="1000" dirty="0">
-                  <a:solidFill>
-                    <a:srgbClr val="C00000"/>
-                  </a:solidFill>
-                  <a:latin typeface="Noto Sans KR" panose="020B0200000000000000" pitchFamily="50" charset="-127"/>
-                  <a:ea typeface="Noto Sans KR" panose="020B0200000000000000" pitchFamily="50" charset="-127"/>
-                </a:rPr>
-                <a:t> - </a:t>
-              </a:r>
-              <a:r>
-                <a:rPr lang="ko-KR" altLang="en-US" sz="1000" dirty="0">
-                  <a:solidFill>
-                    <a:srgbClr val="C00000"/>
-                  </a:solidFill>
-                  <a:latin typeface="Noto Sans KR" panose="020B0200000000000000" pitchFamily="50" charset="-127"/>
-                  <a:ea typeface="Noto Sans KR" panose="020B0200000000000000" pitchFamily="50" charset="-127"/>
-                </a:rPr>
-                <a:t>단순 참고 </a:t>
-              </a:r>
-              <a:r>
-                <a:rPr lang="en-US" altLang="ko-KR" sz="1000" dirty="0">
-                  <a:solidFill>
-                    <a:srgbClr val="C00000"/>
-                  </a:solidFill>
-                  <a:latin typeface="Noto Sans KR" panose="020B0200000000000000" pitchFamily="50" charset="-127"/>
-                  <a:ea typeface="Noto Sans KR" panose="020B0200000000000000" pitchFamily="50" charset="-127"/>
-                </a:rPr>
-                <a:t>(</a:t>
-              </a:r>
-              <a:r>
-                <a:rPr lang="ko-KR" altLang="en-US" sz="1000" dirty="0" err="1">
-                  <a:solidFill>
-                    <a:srgbClr val="C00000"/>
-                  </a:solidFill>
-                  <a:latin typeface="Noto Sans KR" panose="020B0200000000000000" pitchFamily="50" charset="-127"/>
-                  <a:ea typeface="Noto Sans KR" panose="020B0200000000000000" pitchFamily="50" charset="-127"/>
-                </a:rPr>
-                <a:t>연한색</a:t>
-              </a:r>
-              <a:r>
-                <a:rPr lang="en-US" altLang="ko-KR" sz="1000" dirty="0">
-                  <a:solidFill>
-                    <a:srgbClr val="C00000"/>
-                  </a:solidFill>
-                  <a:latin typeface="Noto Sans KR" panose="020B0200000000000000" pitchFamily="50" charset="-127"/>
-                  <a:ea typeface="Noto Sans KR" panose="020B0200000000000000" pitchFamily="50" charset="-127"/>
-                </a:rPr>
-                <a:t>)</a:t>
-              </a:r>
-              <a:endParaRPr lang="ko-KR" altLang="en-US" sz="1000" dirty="0">
-                <a:solidFill>
-                  <a:srgbClr val="C00000"/>
-                </a:solidFill>
-                <a:latin typeface="Noto Sans KR" panose="020B0200000000000000" pitchFamily="50" charset="-127"/>
-                <a:ea typeface="Noto Sans KR" panose="020B0200000000000000" pitchFamily="50" charset="-127"/>
-              </a:endParaRPr>
-            </a:p>
-          </p:txBody>
-        </p:sp>
-        <p:cxnSp>
-          <p:nvCxnSpPr>
-            <p:cNvPr id="28" name="연결선: 꺾임 27">
-              <a:extLst>
-                <a:ext uri="{FF2B5EF4-FFF2-40B4-BE49-F238E27FC236}">
-                  <a16:creationId xmlns:a16="http://schemas.microsoft.com/office/drawing/2014/main" id="{E90EC539-9326-6100-D246-77006238BCEE}"/>
-                </a:ext>
-              </a:extLst>
-            </p:cNvPr>
-            <p:cNvCxnSpPr>
-              <a:cxnSpLocks/>
-              <a:stCxn id="27" idx="3"/>
-            </p:cNvCxnSpPr>
-            <p:nvPr/>
-          </p:nvCxnSpPr>
-          <p:spPr>
-            <a:xfrm flipH="1">
-              <a:off x="-576952" y="1572484"/>
-              <a:ext cx="137234" cy="3209200"/>
-            </a:xfrm>
-            <a:prstGeom prst="bentConnector4">
-              <a:avLst>
-                <a:gd name="adj1" fmla="val -60814"/>
-                <a:gd name="adj2" fmla="val 99582"/>
-              </a:avLst>
-            </a:prstGeom>
+            </a:solidFill>
+          </a:ln>
+        </p:spPr>
+        <p:style>
+          <a:lnRef idx="2">
+            <a:schemeClr val="accent1">
+              <a:shade val="15000"/>
+            </a:schemeClr>
+          </a:lnRef>
+          <a:fillRef idx="1">
+            <a:schemeClr val="accent1"/>
+          </a:fillRef>
+          <a:effectRef idx="0">
+            <a:schemeClr val="accent1"/>
+          </a:effectRef>
+          <a:fontRef idx="minor">
+            <a:schemeClr val="lt1"/>
+          </a:fontRef>
+        </p:style>
+        <p:txBody>
+          <a:bodyPr rtlCol="0" anchor="ctr"/>
+          <a:lstStyle/>
+          <a:p>
+            <a:pPr algn="ctr" defTabSz="914400" latinLnBrk="1"/>
+            <a:r>
+              <a:rPr lang="en-US" altLang="ko-KR" sz="1000" b="1" dirty="0">
+                <a:solidFill>
+                  <a:schemeClr val="bg1"/>
+                </a:solidFill>
+                <a:latin typeface="Noto Sans KR" panose="020B0200000000000000" pitchFamily="50" charset="-127"/>
+                <a:ea typeface="Noto Sans KR" panose="020B0200000000000000" pitchFamily="50" charset="-127"/>
+              </a:rPr>
+              <a:t>A</a:t>
+            </a:r>
+            <a:endParaRPr lang="ko-KR" altLang="en-US" sz="1000" b="1" dirty="0">
+              <a:solidFill>
+                <a:schemeClr val="bg1"/>
+              </a:solidFill>
+              <a:latin typeface="Noto Sans KR" panose="020B0200000000000000" pitchFamily="50" charset="-127"/>
+              <a:ea typeface="Noto Sans KR" panose="020B0200000000000000" pitchFamily="50" charset="-127"/>
+            </a:endParaRPr>
+          </a:p>
+        </p:txBody>
+      </p:sp>
+      <p:sp>
+        <p:nvSpPr>
+          <p:cNvPr id="89" name="타원 88">
+            <a:extLst>
+              <a:ext uri="{FF2B5EF4-FFF2-40B4-BE49-F238E27FC236}">
+                <a16:creationId xmlns:a16="http://schemas.microsoft.com/office/drawing/2014/main" id="{1C0CF2FD-BD99-D532-AF27-E14F7AE1F8F1}"/>
+              </a:ext>
+            </a:extLst>
+          </p:cNvPr>
+          <p:cNvSpPr/>
+          <p:nvPr/>
+        </p:nvSpPr>
+        <p:spPr>
+          <a:xfrm>
+            <a:off x="3814987" y="3487854"/>
+            <a:ext cx="188796" cy="188796"/>
+          </a:xfrm>
+          <a:prstGeom prst="ellipse">
+            <a:avLst/>
+          </a:prstGeom>
+          <a:solidFill>
+            <a:schemeClr val="accent5">
+              <a:lumMod val="20000"/>
+              <a:lumOff val="80000"/>
+            </a:schemeClr>
+          </a:solidFill>
+          <a:ln w="6350">
             <a:solidFill>
-              <a:schemeClr val="bg1"/>
+              <a:schemeClr val="bg1">
+                <a:lumMod val="50000"/>
+              </a:schemeClr>
             </a:solidFill>
-            <a:ln w="9525">
+          </a:ln>
+        </p:spPr>
+        <p:style>
+          <a:lnRef idx="2">
+            <a:schemeClr val="accent1">
+              <a:shade val="15000"/>
+            </a:schemeClr>
+          </a:lnRef>
+          <a:fillRef idx="1">
+            <a:schemeClr val="accent1"/>
+          </a:fillRef>
+          <a:effectRef idx="0">
+            <a:schemeClr val="accent1"/>
+          </a:effectRef>
+          <a:fontRef idx="minor">
+            <a:schemeClr val="lt1"/>
+          </a:fontRef>
+        </p:style>
+        <p:txBody>
+          <a:bodyPr rtlCol="0" anchor="ctr"/>
+          <a:lstStyle/>
+          <a:p>
+            <a:pPr algn="ctr" defTabSz="914400" latinLnBrk="1"/>
+            <a:r>
+              <a:rPr lang="en-US" altLang="ko-KR" sz="1000" b="1" dirty="0">
+                <a:solidFill>
+                  <a:schemeClr val="tx1"/>
+                </a:solidFill>
+                <a:latin typeface="Noto Sans KR" panose="020B0200000000000000" pitchFamily="50" charset="-127"/>
+                <a:ea typeface="Noto Sans KR" panose="020B0200000000000000" pitchFamily="50" charset="-127"/>
+              </a:rPr>
+              <a:t>B</a:t>
+            </a:r>
+            <a:endParaRPr lang="ko-KR" altLang="en-US" sz="1000" b="1" dirty="0">
               <a:solidFill>
-                <a:srgbClr val="C00000"/>
+                <a:schemeClr val="tx1"/>
               </a:solidFill>
-              <a:tailEnd type="oval"/>
-            </a:ln>
-          </p:spPr>
-          <p:style>
-            <a:lnRef idx="2">
-              <a:schemeClr val="accent1">
-                <a:shade val="15000"/>
+              <a:latin typeface="Noto Sans KR" panose="020B0200000000000000" pitchFamily="50" charset="-127"/>
+              <a:ea typeface="Noto Sans KR" panose="020B0200000000000000" pitchFamily="50" charset="-127"/>
+            </a:endParaRPr>
+          </a:p>
+        </p:txBody>
+      </p:sp>
+      <p:sp>
+        <p:nvSpPr>
+          <p:cNvPr id="91" name="타원 90">
+            <a:extLst>
+              <a:ext uri="{FF2B5EF4-FFF2-40B4-BE49-F238E27FC236}">
+                <a16:creationId xmlns:a16="http://schemas.microsoft.com/office/drawing/2014/main" id="{994D67D1-1B89-D2CC-FF31-DB526170D663}"/>
+              </a:ext>
+            </a:extLst>
+          </p:cNvPr>
+          <p:cNvSpPr/>
+          <p:nvPr/>
+        </p:nvSpPr>
+        <p:spPr>
+          <a:xfrm>
+            <a:off x="4514919" y="3487854"/>
+            <a:ext cx="188796" cy="188796"/>
+          </a:xfrm>
+          <a:prstGeom prst="ellipse">
+            <a:avLst/>
+          </a:prstGeom>
+          <a:solidFill>
+            <a:schemeClr val="accent5">
+              <a:lumMod val="20000"/>
+              <a:lumOff val="80000"/>
+            </a:schemeClr>
+          </a:solidFill>
+          <a:ln w="6350">
+            <a:solidFill>
+              <a:schemeClr val="bg1">
+                <a:lumMod val="50000"/>
               </a:schemeClr>
-            </a:lnRef>
-            <a:fillRef idx="1">
-              <a:schemeClr val="accent1"/>
-            </a:fillRef>
-            <a:effectRef idx="0">
-              <a:schemeClr val="accent1"/>
-            </a:effectRef>
-            <a:fontRef idx="minor">
-              <a:schemeClr val="lt1"/>
-            </a:fontRef>
-          </p:style>
-        </p:cxnSp>
-      </p:grpSp>
+            </a:solidFill>
+          </a:ln>
+        </p:spPr>
+        <p:style>
+          <a:lnRef idx="2">
+            <a:schemeClr val="accent1">
+              <a:shade val="15000"/>
+            </a:schemeClr>
+          </a:lnRef>
+          <a:fillRef idx="1">
+            <a:schemeClr val="accent1"/>
+          </a:fillRef>
+          <a:effectRef idx="0">
+            <a:schemeClr val="accent1"/>
+          </a:effectRef>
+          <a:fontRef idx="minor">
+            <a:schemeClr val="lt1"/>
+          </a:fontRef>
+        </p:style>
+        <p:txBody>
+          <a:bodyPr rtlCol="0" anchor="ctr"/>
+          <a:lstStyle/>
+          <a:p>
+            <a:pPr algn="ctr" defTabSz="914400" latinLnBrk="1"/>
+            <a:r>
+              <a:rPr lang="en-US" altLang="ko-KR" sz="1000" b="1" dirty="0">
+                <a:solidFill>
+                  <a:schemeClr val="tx1"/>
+                </a:solidFill>
+                <a:latin typeface="Noto Sans KR" panose="020B0200000000000000" pitchFamily="50" charset="-127"/>
+                <a:ea typeface="Noto Sans KR" panose="020B0200000000000000" pitchFamily="50" charset="-127"/>
+              </a:rPr>
+              <a:t>B</a:t>
+            </a:r>
+            <a:endParaRPr lang="ko-KR" altLang="en-US" sz="1000" b="1" dirty="0">
+              <a:solidFill>
+                <a:schemeClr val="bg1"/>
+              </a:solidFill>
+              <a:latin typeface="Noto Sans KR" panose="020B0200000000000000" pitchFamily="50" charset="-127"/>
+              <a:ea typeface="Noto Sans KR" panose="020B0200000000000000" pitchFamily="50" charset="-127"/>
+            </a:endParaRPr>
+          </a:p>
+        </p:txBody>
+      </p:sp>
+      <p:sp>
+        <p:nvSpPr>
+          <p:cNvPr id="93" name="타원 92">
+            <a:extLst>
+              <a:ext uri="{FF2B5EF4-FFF2-40B4-BE49-F238E27FC236}">
+                <a16:creationId xmlns:a16="http://schemas.microsoft.com/office/drawing/2014/main" id="{689ECE44-EB26-8CFB-27D4-CF13044A5A91}"/>
+              </a:ext>
+            </a:extLst>
+          </p:cNvPr>
+          <p:cNvSpPr/>
+          <p:nvPr/>
+        </p:nvSpPr>
+        <p:spPr>
+          <a:xfrm>
+            <a:off x="5256947" y="3487854"/>
+            <a:ext cx="188796" cy="188796"/>
+          </a:xfrm>
+          <a:prstGeom prst="ellipse">
+            <a:avLst/>
+          </a:prstGeom>
+          <a:solidFill>
+            <a:srgbClr val="0070C0"/>
+          </a:solidFill>
+          <a:ln w="6350">
+            <a:solidFill>
+              <a:schemeClr val="bg1">
+                <a:lumMod val="50000"/>
+              </a:schemeClr>
+            </a:solidFill>
+          </a:ln>
+        </p:spPr>
+        <p:style>
+          <a:lnRef idx="2">
+            <a:schemeClr val="accent1">
+              <a:shade val="15000"/>
+            </a:schemeClr>
+          </a:lnRef>
+          <a:fillRef idx="1">
+            <a:schemeClr val="accent1"/>
+          </a:fillRef>
+          <a:effectRef idx="0">
+            <a:schemeClr val="accent1"/>
+          </a:effectRef>
+          <a:fontRef idx="minor">
+            <a:schemeClr val="lt1"/>
+          </a:fontRef>
+        </p:style>
+        <p:txBody>
+          <a:bodyPr rtlCol="0" anchor="ctr"/>
+          <a:lstStyle/>
+          <a:p>
+            <a:pPr algn="ctr" defTabSz="914400" latinLnBrk="1"/>
+            <a:r>
+              <a:rPr lang="en-US" altLang="ko-KR" sz="1000" b="1" dirty="0">
+                <a:solidFill>
+                  <a:schemeClr val="bg1"/>
+                </a:solidFill>
+                <a:latin typeface="Noto Sans KR" panose="020B0200000000000000" pitchFamily="50" charset="-127"/>
+                <a:ea typeface="Noto Sans KR" panose="020B0200000000000000" pitchFamily="50" charset="-127"/>
+              </a:rPr>
+              <a:t>A</a:t>
+            </a:r>
+            <a:endParaRPr lang="ko-KR" altLang="en-US" sz="1000" b="1" dirty="0">
+              <a:solidFill>
+                <a:schemeClr val="bg1"/>
+              </a:solidFill>
+              <a:latin typeface="Noto Sans KR" panose="020B0200000000000000" pitchFamily="50" charset="-127"/>
+              <a:ea typeface="Noto Sans KR" panose="020B0200000000000000" pitchFamily="50" charset="-127"/>
+            </a:endParaRPr>
+          </a:p>
+        </p:txBody>
+      </p:sp>
     </p:spTree>
     <p:extLst>
       <p:ext uri="{BB962C8B-B14F-4D97-AF65-F5344CB8AC3E}">
-        <p14:creationId xmlns:p14="http://schemas.microsoft.com/office/powerpoint/2010/main" val="3177191812"/>
+        <p14:creationId xmlns:p14="http://schemas.microsoft.com/office/powerpoint/2010/main" val="1622595898"/>
       </p:ext>
     </p:extLst>
   </p:cSld>
@@ -14676,6 +12927,6 @@
 
 <file path=docMetadata/LabelInfo.xml><?xml version="1.0" encoding="utf-8"?>
 <clbl:labelList xmlns:clbl="http://schemas.microsoft.com/office/2020/mipLabelMetadata">
-  <clbl:label id="{ed2bdc0e-5398-45bc-aa28-8d468ea7222c}" enabled="1" method="Privileged" siteId="{b9f2ea37-332a-432b-b744-ecfc9763abfd}" removed="0"/>
+  <clbl:label id="{ed2bdc0e-5398-45bc-aa28-8d468ea7222c}" enabled="1" method="Privileged" siteId="{b9f2ea37-332a-432b-b744-ecfc9763abfd}" contentBits="0" removed="0"/>
 </clbl:labelList>
 </file>